--- a/results/deck.pptx
+++ b/results/deck.pptx
@@ -514,7 +514,7 @@
           <a:lstStyle/>
           <a:p>
             <a:r>
-              <a:t>Open on energy, not on travel time. Say out loud that this is a simulation before the first percentage. Source label: Simulation-based estimate; not a real-world deployment result</a:t>
+              <a:t>Open on energy, not on travel time. Say out loud that this is a simulation before the first percentage. Source label: Simulation-based estimate; assumed traffic mix</a:t>
             </a:r>
           </a:p>
         </p:txBody>
@@ -584,7 +584,7 @@
           <a:lstStyle/>
           <a:p>
             <a:r>
-              <a:t>Say this slide out loud. Independent and coordinated XtraFlow both used more fuel and more waiting than fixed time and actuated. Coordination did not change outcomes. Decision D018. Label: simulation-based estimate.</a:t>
+              <a:t>Read results/grid_results.json. The title is computed from those means. Do not describe coordination unless coordination_reduces_fuel is in that file. Label: simulation-based estimate; assumed traffic mix.</a:t>
             </a:r>
           </a:p>
         </p:txBody>
@@ -794,7 +794,7 @@
           <a:lstStyle/>
           <a:p>
             <a:r>
-              <a:t>Close on the three conditions. Do not end on the annual litre range. The single-junction fuel result versus fixed time is the result. The grid is the limit.</a:t>
+              <a:t>Close on the three conditions. Do not end on the annual litre range. The headline comparison is in results/headlines.json.</a:t>
             </a:r>
           </a:p>
         </p:txBody>
@@ -1074,7 +1074,7 @@
           <a:lstStyle/>
           <a:p>
             <a:r>
-              <a:t>Same seed means identical demand. Test seeds are 1–30 after config.lock. Mention the sublane fallback only if asked: netconvert failed, standard lanes were used.</a:t>
+              <a:t>Same seed means identical demand. Test seeds are the ones stored in results/raw_runs.csv. Sublane use is the used_sublane field in results/sublane_fallback.json.</a:t>
             </a:r>
           </a:p>
         </p:txBody>
@@ -1214,7 +1214,7 @@
           <a:lstStyle/>
           <a:p>
             <a:r>
-              <a:t>If someone says this is just max-pressure, stay on this slide. The operational claim versus today's fixed signals is the first column. The scientific claim for fuel weights is the last two columns: small, positive, intervals above zero. PPO was selected on validation and still lost; on the peak it also gridlocked. See the summary table.</a:t>
+              <a:t>Read the paired intervals on this slide from the loaded comparison table. Do not add a verdict that is not in those intervals. RL is a baseline trained with the budget in rl_selection.json.</a:t>
             </a:r>
           </a:p>
         </p:txBody>
@@ -1354,7 +1354,7 @@
           <a:lstStyle/>
           <a:p>
             <a:r>
-              <a:t>This is not the full 30-seed test. It is the robustness sweep on the peak scenario. The curve is flat in the third decimal from 0 to 30% misses. Perception noise elsewhere in the deck is assumed.</a:t>
+              <a:t>Means are grouped from results/robustness.json. Do not describe the curve as flat unless the loaded means say so. The noise-model source field is empirical only when labels exist.</a:t>
             </a:r>
           </a:p>
         </p:txBody>
@@ -4827,7 +4827,7 @@
                 <a:ea typeface="Georgia"/>
                 <a:cs typeface="Georgia"/>
               </a:rPr>
-              <a:t>7</a:t>
+              <a:t>8</a:t>
             </a:r>
           </a:p>
         </p:txBody>
@@ -4953,7 +4953,7 @@
                 <a:ea typeface="Calibri"/>
                 <a:cs typeface="Calibri"/>
               </a:rPr>
-              <a:t>Simulation-based estimate; not a real-world deployment result</a:t>
+              <a:t>Simulation-based estimate; assumed traffic mix</a:t>
             </a:r>
           </a:p>
         </p:txBody>
@@ -5106,7 +5106,7 @@
                 <a:ea typeface="Georgia"/>
                 <a:cs typeface="Georgia"/>
               </a:rPr>
-              <a:t>On a grid, fuel goes the wrong way</a:t>
+              <a:t>Grid results are not loaded</a:t>
             </a:r>
           </a:p>
         </p:txBody>
@@ -5148,7 +5148,7 @@
                 <a:ea typeface="Calibri"/>
                 <a:cs typeface="Calibri"/>
               </a:rPr>
-              <a:t>A 2×2 network, 5 seeds. The controller was tuned for a single junction.</a:t>
+              <a:t>A 2×2 network. The controller was tuned for a single junction.</a:t>
             </a:r>
           </a:p>
         </p:txBody>
@@ -5363,7 +5363,7 @@
                 <a:ea typeface="Georgia"/>
                 <a:cs typeface="Georgia"/>
               </a:rPr>
-              <a:t>0.145</a:t>
+              <a:t>—</a:t>
             </a:r>
           </a:p>
         </p:txBody>
@@ -5418,77 +5418,35 @@
         </p:nvSpPr>
         <p:spPr>
           <a:xfrm>
-            <a:off x="722376" y="3337560"/>
-            <a:ext cx="3221735" cy="320040"/>
-          </a:xfrm>
-          <a:prstGeom prst="rect">
-            <a:avLst/>
-          </a:prstGeom>
-          <a:noFill/>
-        </p:spPr>
-        <p:txBody>
-          <a:bodyPr wrap="square" lIns="0" rIns="0" tIns="0" bIns="0" anchor="t"/>
-          <a:lstStyle/>
-          <a:p>
-            <a:pPr algn="l">
-              <a:spcBef>
-                <a:spcPts val="0"/>
-              </a:spcBef>
-              <a:spcAft>
-                <a:spcPts val="0"/>
-              </a:spcAft>
-            </a:pPr>
-            <a:r>
-              <a:rPr sz="1500" b="0" i="0">
-                <a:solidFill>
-                  <a:srgbClr val="1A2834"/>
+            <a:off x="722376" y="3794760"/>
+            <a:ext cx="3221735" cy="365760"/>
+          </a:xfrm>
+          <a:prstGeom prst="rect">
+            <a:avLst/>
+          </a:prstGeom>
+          <a:noFill/>
+        </p:spPr>
+        <p:txBody>
+          <a:bodyPr wrap="square" lIns="0" rIns="0" tIns="0" bIns="0" anchor="t"/>
+          <a:lstStyle/>
+          <a:p>
+            <a:pPr algn="l">
+              <a:spcBef>
+                <a:spcPts val="0"/>
+              </a:spcBef>
+              <a:spcAft>
+                <a:spcPts val="0"/>
+              </a:spcAft>
+            </a:pPr>
+            <a:r>
+              <a:rPr sz="1400" b="0" i="0">
+                <a:solidFill>
+                  <a:srgbClr val="5E6E7C"/>
                 </a:solidFill>
                 <a:latin typeface="Calibri"/>
                 <a:ea typeface="Calibri"/>
                 <a:cs typeface="Calibri"/>
               </a:rPr>
-              <a:t>18.2 s mean wait</a:t>
-            </a:r>
-          </a:p>
-        </p:txBody>
-      </p:sp>
-      <p:sp>
-        <p:nvSpPr>
-          <p:cNvPr id="13" name="TextBox 12"/>
-          <p:cNvSpPr txBox="1"/>
-          <p:nvPr/>
-        </p:nvSpPr>
-        <p:spPr>
-          <a:xfrm>
-            <a:off x="722376" y="3794760"/>
-            <a:ext cx="3221735" cy="365760"/>
-          </a:xfrm>
-          <a:prstGeom prst="rect">
-            <a:avLst/>
-          </a:prstGeom>
-          <a:noFill/>
-        </p:spPr>
-        <p:txBody>
-          <a:bodyPr wrap="square" lIns="0" rIns="0" tIns="0" bIns="0" anchor="t"/>
-          <a:lstStyle/>
-          <a:p>
-            <a:pPr algn="l">
-              <a:spcBef>
-                <a:spcPts val="0"/>
-              </a:spcBef>
-              <a:spcAft>
-                <a:spcPts val="0"/>
-              </a:spcAft>
-            </a:pPr>
-            <a:r>
-              <a:rPr sz="1400" b="0" i="0">
-                <a:solidFill>
-                  <a:srgbClr val="5E6E7C"/>
-                </a:solidFill>
-                <a:latin typeface="Calibri"/>
-                <a:ea typeface="Calibri"/>
-                <a:cs typeface="Calibri"/>
-              </a:rPr>
               <a:t>Lowest fuel here</a:t>
             </a:r>
           </a:p>
@@ -5496,7 +5454,7 @@
       </p:sp>
       <p:sp>
         <p:nvSpPr>
-          <p:cNvPr id="14" name="Rounded Rectangle 13"/>
+          <p:cNvPr id="13" name="Rounded Rectangle 12"/>
           <p:cNvSpPr/>
           <p:nvPr/>
         </p:nvSpPr>
@@ -5543,7 +5501,7 @@
       </p:sp>
       <p:sp>
         <p:nvSpPr>
-          <p:cNvPr id="15" name="TextBox 14"/>
+          <p:cNvPr id="14" name="TextBox 13"/>
           <p:cNvSpPr txBox="1"/>
           <p:nvPr/>
         </p:nvSpPr>
@@ -5585,7 +5543,7 @@
       </p:sp>
       <p:sp>
         <p:nvSpPr>
-          <p:cNvPr id="16" name="TextBox 15"/>
+          <p:cNvPr id="15" name="TextBox 14"/>
           <p:cNvSpPr txBox="1"/>
           <p:nvPr/>
         </p:nvSpPr>
@@ -5620,14 +5578,14 @@
                 <a:ea typeface="Georgia"/>
                 <a:cs typeface="Georgia"/>
               </a:rPr>
-              <a:t>0.183</a:t>
-            </a:r>
-          </a:p>
-        </p:txBody>
-      </p:sp>
-      <p:sp>
-        <p:nvSpPr>
-          <p:cNvPr id="17" name="TextBox 16"/>
+              <a:t>—</a:t>
+            </a:r>
+          </a:p>
+        </p:txBody>
+      </p:sp>
+      <p:sp>
+        <p:nvSpPr>
+          <p:cNvPr id="16" name="TextBox 15"/>
           <p:cNvSpPr txBox="1"/>
           <p:nvPr/>
         </p:nvSpPr>
@@ -5669,83 +5627,41 @@
       </p:sp>
       <p:sp>
         <p:nvSpPr>
-          <p:cNvPr id="18" name="TextBox 17"/>
-          <p:cNvSpPr txBox="1"/>
-          <p:nvPr/>
-        </p:nvSpPr>
-        <p:spPr>
-          <a:xfrm>
-            <a:off x="4520184" y="3337560"/>
-            <a:ext cx="3221735" cy="320040"/>
-          </a:xfrm>
-          <a:prstGeom prst="rect">
-            <a:avLst/>
-          </a:prstGeom>
-          <a:noFill/>
-        </p:spPr>
-        <p:txBody>
-          <a:bodyPr wrap="square" lIns="0" rIns="0" tIns="0" bIns="0" anchor="t"/>
-          <a:lstStyle/>
-          <a:p>
-            <a:pPr algn="l">
-              <a:spcBef>
-                <a:spcPts val="0"/>
-              </a:spcBef>
-              <a:spcAft>
-                <a:spcPts val="0"/>
-              </a:spcAft>
-            </a:pPr>
-            <a:r>
-              <a:rPr sz="1500" b="0" i="0">
-                <a:solidFill>
-                  <a:srgbClr val="1A2834"/>
+          <p:cNvPr id="17" name="TextBox 16"/>
+          <p:cNvSpPr txBox="1"/>
+          <p:nvPr/>
+        </p:nvSpPr>
+        <p:spPr>
+          <a:xfrm>
+            <a:off x="4520184" y="3794760"/>
+            <a:ext cx="3221735" cy="365760"/>
+          </a:xfrm>
+          <a:prstGeom prst="rect">
+            <a:avLst/>
+          </a:prstGeom>
+          <a:noFill/>
+        </p:spPr>
+        <p:txBody>
+          <a:bodyPr wrap="square" lIns="0" rIns="0" tIns="0" bIns="0" anchor="t"/>
+          <a:lstStyle/>
+          <a:p>
+            <a:pPr algn="l">
+              <a:spcBef>
+                <a:spcPts val="0"/>
+              </a:spcBef>
+              <a:spcAft>
+                <a:spcPts val="0"/>
+              </a:spcAft>
+            </a:pPr>
+            <a:r>
+              <a:rPr sz="1400" b="0" i="0">
+                <a:solidFill>
+                  <a:srgbClr val="5E6E7C"/>
                 </a:solidFill>
                 <a:latin typeface="Calibri"/>
                 <a:ea typeface="Calibri"/>
                 <a:cs typeface="Calibri"/>
               </a:rPr>
-              <a:t>42.6 s mean wait</a:t>
-            </a:r>
-          </a:p>
-        </p:txBody>
-      </p:sp>
-      <p:sp>
-        <p:nvSpPr>
-          <p:cNvPr id="19" name="TextBox 18"/>
-          <p:cNvSpPr txBox="1"/>
-          <p:nvPr/>
-        </p:nvSpPr>
-        <p:spPr>
-          <a:xfrm>
-            <a:off x="4520184" y="3794760"/>
-            <a:ext cx="3221735" cy="365760"/>
-          </a:xfrm>
-          <a:prstGeom prst="rect">
-            <a:avLst/>
-          </a:prstGeom>
-          <a:noFill/>
-        </p:spPr>
-        <p:txBody>
-          <a:bodyPr wrap="square" lIns="0" rIns="0" tIns="0" bIns="0" anchor="t"/>
-          <a:lstStyle/>
-          <a:p>
-            <a:pPr algn="l">
-              <a:spcBef>
-                <a:spcPts val="0"/>
-              </a:spcBef>
-              <a:spcAft>
-                <a:spcPts val="0"/>
-              </a:spcAft>
-            </a:pPr>
-            <a:r>
-              <a:rPr sz="1400" b="0" i="0">
-                <a:solidFill>
-                  <a:srgbClr val="5E6E7C"/>
-                </a:solidFill>
-                <a:latin typeface="Calibri"/>
-                <a:ea typeface="Calibri"/>
-                <a:cs typeface="Calibri"/>
-              </a:rPr>
               <a:t>The simple baseline</a:t>
             </a:r>
           </a:p>
@@ -5753,7 +5669,7 @@
       </p:sp>
       <p:sp>
         <p:nvSpPr>
-          <p:cNvPr id="20" name="Rounded Rectangle 19"/>
+          <p:cNvPr id="18" name="Rounded Rectangle 17"/>
           <p:cNvSpPr/>
           <p:nvPr/>
         </p:nvSpPr>
@@ -5800,7 +5716,7 @@
       </p:sp>
       <p:sp>
         <p:nvSpPr>
-          <p:cNvPr id="21" name="TextBox 20"/>
+          <p:cNvPr id="19" name="TextBox 18"/>
           <p:cNvSpPr txBox="1"/>
           <p:nvPr/>
         </p:nvSpPr>
@@ -5842,7 +5758,7 @@
       </p:sp>
       <p:sp>
         <p:nvSpPr>
-          <p:cNvPr id="22" name="TextBox 21"/>
+          <p:cNvPr id="20" name="TextBox 19"/>
           <p:cNvSpPr txBox="1"/>
           <p:nvPr/>
         </p:nvSpPr>
@@ -5877,14 +5793,14 @@
                 <a:ea typeface="Georgia"/>
                 <a:cs typeface="Georgia"/>
               </a:rPr>
-              <a:t>0.269</a:t>
-            </a:r>
-          </a:p>
-        </p:txBody>
-      </p:sp>
-      <p:sp>
-        <p:nvSpPr>
-          <p:cNvPr id="23" name="TextBox 22"/>
+              <a:t>—</a:t>
+            </a:r>
+          </a:p>
+        </p:txBody>
+      </p:sp>
+      <p:sp>
+        <p:nvSpPr>
+          <p:cNvPr id="21" name="TextBox 20"/>
           <p:cNvSpPr txBox="1"/>
           <p:nvPr/>
         </p:nvSpPr>
@@ -5926,83 +5842,41 @@
       </p:sp>
       <p:sp>
         <p:nvSpPr>
-          <p:cNvPr id="24" name="TextBox 23"/>
-          <p:cNvSpPr txBox="1"/>
-          <p:nvPr/>
-        </p:nvSpPr>
-        <p:spPr>
-          <a:xfrm>
-            <a:off x="8317992" y="3337560"/>
-            <a:ext cx="3221735" cy="320040"/>
-          </a:xfrm>
-          <a:prstGeom prst="rect">
-            <a:avLst/>
-          </a:prstGeom>
-          <a:noFill/>
-        </p:spPr>
-        <p:txBody>
-          <a:bodyPr wrap="square" lIns="0" rIns="0" tIns="0" bIns="0" anchor="t"/>
-          <a:lstStyle/>
-          <a:p>
-            <a:pPr algn="l">
-              <a:spcBef>
-                <a:spcPts val="0"/>
-              </a:spcBef>
-              <a:spcAft>
-                <a:spcPts val="0"/>
-              </a:spcAft>
-            </a:pPr>
-            <a:r>
-              <a:rPr sz="1500" b="0" i="0">
-                <a:solidFill>
-                  <a:srgbClr val="1A2834"/>
+          <p:cNvPr id="22" name="TextBox 21"/>
+          <p:cNvSpPr txBox="1"/>
+          <p:nvPr/>
+        </p:nvSpPr>
+        <p:spPr>
+          <a:xfrm>
+            <a:off x="8317992" y="3794760"/>
+            <a:ext cx="3221735" cy="365760"/>
+          </a:xfrm>
+          <a:prstGeom prst="rect">
+            <a:avLst/>
+          </a:prstGeom>
+          <a:noFill/>
+        </p:spPr>
+        <p:txBody>
+          <a:bodyPr wrap="square" lIns="0" rIns="0" tIns="0" bIns="0" anchor="t"/>
+          <a:lstStyle/>
+          <a:p>
+            <a:pPr algn="l">
+              <a:spcBef>
+                <a:spcPts val="0"/>
+              </a:spcBef>
+              <a:spcAft>
+                <a:spcPts val="0"/>
+              </a:spcAft>
+            </a:pPr>
+            <a:r>
+              <a:rPr sz="1400" b="0" i="0">
+                <a:solidFill>
+                  <a:srgbClr val="5E6E7C"/>
                 </a:solidFill>
                 <a:latin typeface="Calibri"/>
                 <a:ea typeface="Calibri"/>
                 <a:cs typeface="Calibri"/>
               </a:rPr>
-              <a:t>118.7 s mean wait</a:t>
-            </a:r>
-          </a:p>
-        </p:txBody>
-      </p:sp>
-      <p:sp>
-        <p:nvSpPr>
-          <p:cNvPr id="25" name="TextBox 24"/>
-          <p:cNvSpPr txBox="1"/>
-          <p:nvPr/>
-        </p:nvSpPr>
-        <p:spPr>
-          <a:xfrm>
-            <a:off x="8317992" y="3794760"/>
-            <a:ext cx="3221735" cy="365760"/>
-          </a:xfrm>
-          <a:prstGeom prst="rect">
-            <a:avLst/>
-          </a:prstGeom>
-          <a:noFill/>
-        </p:spPr>
-        <p:txBody>
-          <a:bodyPr wrap="square" lIns="0" rIns="0" tIns="0" bIns="0" anchor="t"/>
-          <a:lstStyle/>
-          <a:p>
-            <a:pPr algn="l">
-              <a:spcBef>
-                <a:spcPts val="0"/>
-              </a:spcBef>
-              <a:spcAft>
-                <a:spcPts val="0"/>
-              </a:spcAft>
-            </a:pPr>
-            <a:r>
-              <a:rPr sz="1400" b="0" i="0">
-                <a:solidFill>
-                  <a:srgbClr val="5E6E7C"/>
-                </a:solidFill>
-                <a:latin typeface="Calibri"/>
-                <a:ea typeface="Calibri"/>
-                <a:cs typeface="Calibri"/>
-              </a:rPr>
               <a:t>Higher fuel</a:t>
             </a:r>
           </a:p>
@@ -6010,7 +5884,7 @@
       </p:sp>
       <p:sp>
         <p:nvSpPr>
-          <p:cNvPr id="26" name="Rounded Rectangle 25"/>
+          <p:cNvPr id="23" name="Rounded Rectangle 22"/>
           <p:cNvSpPr/>
           <p:nvPr/>
         </p:nvSpPr>
@@ -6055,7 +5929,7 @@
       </p:sp>
       <p:sp>
         <p:nvSpPr>
-          <p:cNvPr id="27" name="TextBox 26"/>
+          <p:cNvPr id="24" name="TextBox 23"/>
           <p:cNvSpPr txBox="1"/>
           <p:nvPr/>
         </p:nvSpPr>
@@ -6097,7 +5971,7 @@
       </p:sp>
       <p:sp>
         <p:nvSpPr>
-          <p:cNvPr id="28" name="TextBox 27"/>
+          <p:cNvPr id="25" name="TextBox 24"/>
           <p:cNvSpPr txBox="1"/>
           <p:nvPr/>
         </p:nvSpPr>
@@ -6132,7 +6006,7 @@
                 <a:ea typeface="Calibri"/>
                 <a:cs typeface="Calibri"/>
               </a:rPr>
-              <a:t>A neighbor-pressure coordination term matched independent control exactly. It did not reduce fuel or waiting. A corridor needs its own design.</a:t>
+              <a:t>The coordination variant did not reduce fuel. A corridor needs its own design.</a:t>
             </a:r>
           </a:p>
         </p:txBody>
@@ -6285,7 +6159,7 @@
                 <a:ea typeface="Georgia"/>
                 <a:cs typeface="Georgia"/>
               </a:rPr>
-              <a:t>Conflicts did not rise. CO₂ still falls.</a:t>
+              <a:t>Safety: decrease. Emissions: ci overlap.</a:t>
             </a:r>
           </a:p>
         </p:txBody>
@@ -6327,7 +6201,7 @@
                 <a:ea typeface="Calibri"/>
                 <a:cs typeface="Calibri"/>
               </a:rPr>
-              <a:t>One caveat sits with those two checks: the camera model is assumed.</a:t>
+              <a:t>Both lines are the verdict fields in the loaded JSON, not a fixed sentence.</a:t>
             </a:r>
           </a:p>
         </p:txBody>
@@ -6585,7 +6459,7 @@
                 <a:ea typeface="Georgia"/>
                 <a:cs typeface="Georgia"/>
               </a:rPr>
-              <a:t>No increase</a:t>
+              <a:t>decrease</a:t>
             </a:r>
           </a:p>
         </p:txBody>
@@ -6627,7 +6501,7 @@
                 <a:ea typeface="Calibri"/>
                 <a:cs typeface="Calibri"/>
               </a:rPr>
-              <a:t>Time-to-collision conflicts from the simulator. XtraFlow minus fixed time averages 0. A model count, not a crash record.</a:t>
+              <a:t>Time-to-collision conflicts from the simulator. A model count, not a crash record.</a:t>
             </a:r>
           </a:p>
         </p:txBody>
@@ -6801,7 +6675,7 @@
                 <a:ea typeface="Georgia"/>
                 <a:cs typeface="Georgia"/>
               </a:rPr>
-              <a:t>Same direction</a:t>
+              <a:t>ci overlap</a:t>
             </a:r>
           </a:p>
         </p:txBody>
@@ -6843,7 +6717,7 @@
                 <a:ea typeface="Calibri"/>
                 <a:cs typeface="Calibri"/>
               </a:rPr>
-              <a:t>Primary model 21.1%. Alternate model 13.2%. The reduction shrinks. It does not flip.</a:t>
+              <a:t>Primary model 13.9%. Alternate model 13.7%. The reduction shrinks. It does not flip.</a:t>
             </a:r>
           </a:p>
         </p:txBody>
@@ -7427,7 +7301,7 @@
                 <a:ea typeface="Calibri"/>
                 <a:cs typeface="Calibri"/>
               </a:rPr>
-              <a:t>MEASURED ON PEAK, ONE-SIDED</a:t>
+              <a:t>MEASURED ON </a:t>
             </a:r>
           </a:p>
         </p:txBody>
@@ -7469,7 +7343,7 @@
                 <a:ea typeface="Georgia"/>
                 <a:cs typeface="Georgia"/>
               </a:rPr>
-              <a:t>0.035</a:t>
+              <a:t>0.001</a:t>
             </a:r>
             <a:r>
               <a:rPr sz="1600" b="0" i="0">
@@ -7522,7 +7396,7 @@
                 <a:ea typeface="Calibri"/>
                 <a:cs typeface="Calibri"/>
               </a:rPr>
-              <a:t>5th – 95th percentile of that mean: 0.032 – 0.038 L</a:t>
+              <a:t>5th – 95th percentile of that mean: 0.001 – 0.002 L</a:t>
             </a:r>
           </a:p>
         </p:txBody>
@@ -7620,7 +7494,7 @@
         </p:nvSpPr>
         <p:spPr>
           <a:xfrm>
-            <a:off x="2656028" y="3913632"/>
+            <a:off x="2339803" y="3913632"/>
             <a:ext cx="54864" cy="384048"/>
           </a:xfrm>
           <a:prstGeom prst="rect">
@@ -7692,7 +7566,7 @@
                 <a:ea typeface="Calibri"/>
                 <a:cs typeface="Calibri"/>
               </a:rPr>
-              <a:t>9.0 million litres</a:t>
+              <a:t>0.3 million litres</a:t>
             </a:r>
           </a:p>
         </p:txBody>
@@ -7734,7 +7608,7 @@
                 <a:ea typeface="Calibri"/>
                 <a:cs typeface="Calibri"/>
               </a:rPr>
-              <a:t>66.8 million litres</a:t>
+              <a:t>2.7 million litres</a:t>
             </a:r>
           </a:p>
         </p:txBody>
@@ -7776,7 +7650,7 @@
                 <a:ea typeface="Georgia"/>
                 <a:cs typeface="Georgia"/>
               </a:rPr>
-              <a:t>27.7 million litres</a:t>
+              <a:t>0.9 million litres</a:t>
             </a:r>
           </a:p>
         </p:txBody>
@@ -7860,7 +7734,7 @@
                 <a:ea typeface="Calibri"/>
                 <a:cs typeface="Calibri"/>
               </a:rPr>
-              <a:t>CO₂ median 67,151 tonnes   ·   21,783 tonnes – 161,618 tonnes</a:t>
+              <a:t>CO₂ median 2,296 tonnes   ·   629 tonnes – 6,640 tonnes</a:t>
             </a:r>
           </a:p>
         </p:txBody>
@@ -8993,7 +8867,7 @@
                 <a:ea typeface="Georgia"/>
                 <a:cs typeface="Georgia"/>
               </a:rPr>
-              <a:t>Redesign the corridor</a:t>
+              <a:t>Read the grid file</a:t>
             </a:r>
           </a:p>
         </p:txBody>
@@ -9035,7 +8909,7 @@
                 <a:ea typeface="Calibri"/>
                 <a:cs typeface="Calibri"/>
               </a:rPr>
-              <a:t>Neighbor pressure, as implemented, did not help the grid.</a:t>
+              <a:t>Quote a corridor result only from results/grid_results.json.</a:t>
             </a:r>
           </a:p>
         </p:txBody>
@@ -9119,7 +8993,7 @@
                 <a:ea typeface="Calibri"/>
                 <a:cs typeface="Calibri"/>
               </a:rPr>
-              <a:t>Simulation-based estimate; not a real-world deployment result</a:t>
+              <a:t>Simulation-based estimate; assumed traffic mix</a:t>
             </a:r>
           </a:p>
         </p:txBody>
@@ -10516,7 +10390,7 @@
                 <a:ea typeface="Calibri"/>
                 <a:cs typeface="Calibri"/>
               </a:rPr>
-              <a:t>Look back 150 m. Count moving vehicles at 0.50. Switch only past hysteresis 0.25. Scenario: Peak, one-sided.</a:t>
+              <a:t>Look back 150 m. Count moving vehicles at 0.50. Switch only past hysteresis 0.25. Scenario: .</a:t>
             </a:r>
           </a:p>
         </p:txBody>
@@ -13558,7 +13432,7 @@
                 <a:ea typeface="Georgia"/>
                 <a:cs typeface="Georgia"/>
               </a:rPr>
-              <a:t>Peak, one-sided</a:t>
+              <a:t>Low demand</a:t>
             </a:r>
           </a:p>
         </p:txBody>
@@ -13600,7 +13474,7 @@
                 <a:ea typeface="Calibri"/>
                 <a:cs typeface="Calibri"/>
               </a:rPr>
-              <a:t>North–south 720 veh/h. East–west 180.</a:t>
+              <a:t>150 veh/h on every approach.</a:t>
             </a:r>
           </a:p>
         </p:txBody>
@@ -13820,7 +13694,7 @@
                 <a:ea typeface="Georgia"/>
                 <a:cs typeface="Georgia"/>
               </a:rPr>
-              <a:t>Low demand</a:t>
+              <a:t>Peak, one-sided</a:t>
             </a:r>
           </a:p>
         </p:txBody>
@@ -13862,7 +13736,7 @@
                 <a:ea typeface="Calibri"/>
                 <a:cs typeface="Calibri"/>
               </a:rPr>
-              <a:t>150 veh/h on every approach.</a:t>
+              <a:t>North–south 720 veh/h. East–west 180.</a:t>
             </a:r>
           </a:p>
         </p:txBody>
@@ -14035,49 +13909,7 @@
                 <a:ea typeface="Calibri"/>
                 <a:cs typeface="Calibri"/>
               </a:rPr>
-              <a:t>Compared with Fixed time, Webster, Actuated, Max-pressure, Count only, PPO.</a:t>
-            </a:r>
-          </a:p>
-        </p:txBody>
-      </p:sp>
-      <p:sp>
-        <p:nvSpPr>
-          <p:cNvPr id="33" name="TextBox 32"/>
-          <p:cNvSpPr txBox="1"/>
-          <p:nvPr/>
-        </p:nvSpPr>
-        <p:spPr>
-          <a:xfrm>
-            <a:off x="502920" y="5669280"/>
-            <a:ext cx="11228832" cy="320040"/>
-          </a:xfrm>
-          <a:prstGeom prst="rect">
-            <a:avLst/>
-          </a:prstGeom>
-          <a:noFill/>
-        </p:spPr>
-        <p:txBody>
-          <a:bodyPr wrap="square" lIns="0" rIns="0" tIns="0" bIns="0" anchor="t"/>
-          <a:lstStyle/>
-          <a:p>
-            <a:pPr algn="l">
-              <a:spcBef>
-                <a:spcPts val="0"/>
-              </a:spcBef>
-              <a:spcAft>
-                <a:spcPts val="0"/>
-              </a:spcAft>
-            </a:pPr>
-            <a:r>
-              <a:rPr sz="1300" b="0" i="0">
-                <a:solidFill>
-                  <a:srgbClr val="5E6E7C"/>
-                </a:solidFill>
-                <a:latin typeface="Calibri"/>
-                <a:ea typeface="Calibri"/>
-                <a:cs typeface="Calibri"/>
-              </a:rPr>
-              <a:t>Built with standard lanes.</a:t>
+              <a:t>Compared with Fixed time, Webster, Actuated, Max-pressure, Count only.</a:t>
             </a:r>
           </a:p>
         </p:txBody>
@@ -14272,7 +14104,7 @@
                 <a:ea typeface="Calibri"/>
                 <a:cs typeface="Calibri"/>
               </a:rPr>
-              <a:t>Fuel per completed vehicle against fixed time. 30 paired seeds. Bootstrap 95% intervals.</a:t>
+              <a:t>Fuel per completed vehicle against fixed time. 5 paired seeds. Bootstrap 95% intervals.</a:t>
             </a:r>
           </a:p>
         </p:txBody>
@@ -14488,7 +14320,7 @@
                 <a:ea typeface="Georgia"/>
                 <a:cs typeface="Georgia"/>
               </a:rPr>
-              <a:t>Peak, one-sided</a:t>
+              <a:t>Low demand</a:t>
             </a:r>
           </a:p>
         </p:txBody>
@@ -14530,7 +14362,7 @@
                 <a:ea typeface="Georgia"/>
                 <a:cs typeface="Georgia"/>
               </a:rPr>
-              <a:t>21.8</a:t>
+              <a:t>1.9</a:t>
             </a:r>
             <a:r>
               <a:rPr sz="1800" b="1" i="0">
@@ -14583,7 +14415,7 @@
                 <a:ea typeface="Calibri"/>
                 <a:cs typeface="Calibri"/>
               </a:rPr>
-              <a:t>20.0  –  23.5</a:t>
+              <a:t>0.5  –  3.0</a:t>
             </a:r>
           </a:p>
         </p:txBody>
@@ -14885,7 +14717,7 @@
                 <a:ea typeface="Georgia"/>
                 <a:cs typeface="Georgia"/>
               </a:rPr>
-              <a:t>16.5</a:t>
+              <a:t>1.1</a:t>
             </a:r>
             <a:r>
               <a:rPr sz="1800" b="1" i="0">
@@ -14938,7 +14770,7 @@
                 <a:ea typeface="Calibri"/>
                 <a:cs typeface="Calibri"/>
               </a:rPr>
-              <a:t>15.7  –  17.3</a:t>
+              <a:t>0.6  –  1.7</a:t>
             </a:r>
           </a:p>
         </p:txBody>
@@ -15037,7 +14869,7 @@
         <p:spPr>
           <a:xfrm>
             <a:off x="3566160" y="4709160"/>
-            <a:ext cx="1712691" cy="73152"/>
+            <a:ext cx="1289076" cy="73152"/>
           </a:xfrm>
           <a:prstGeom prst="rect">
             <a:avLst/>
@@ -15198,7 +15030,7 @@
                 <a:ea typeface="Georgia"/>
                 <a:cs typeface="Georgia"/>
               </a:rPr>
-              <a:t>Low demand</a:t>
+              <a:t>Peak, one-sided</a:t>
             </a:r>
           </a:p>
         </p:txBody>
@@ -15240,7 +15072,7 @@
                 <a:ea typeface="Georgia"/>
                 <a:cs typeface="Georgia"/>
               </a:rPr>
-              <a:t>14.5</a:t>
+              <a:t>0.7</a:t>
             </a:r>
             <a:r>
               <a:rPr sz="1800" b="1" i="0">
@@ -15293,7 +15125,7 @@
                 <a:ea typeface="Calibri"/>
                 <a:cs typeface="Calibri"/>
               </a:rPr>
-              <a:t>14.0  –  14.9</a:t>
+              <a:t>-0.4  –  1.8</a:t>
             </a:r>
           </a:p>
         </p:txBody>
@@ -15392,7 +15224,7 @@
         <p:spPr>
           <a:xfrm>
             <a:off x="6409944" y="4709160"/>
-            <a:ext cx="1500707" cy="73152"/>
+            <a:ext cx="813082" cy="73152"/>
           </a:xfrm>
           <a:prstGeom prst="rect">
             <a:avLst/>
@@ -15595,7 +15427,7 @@
                 <a:ea typeface="Georgia"/>
                 <a:cs typeface="Georgia"/>
               </a:rPr>
-              <a:t>8.6</a:t>
+              <a:t>0.3</a:t>
             </a:r>
             <a:r>
               <a:rPr sz="1800" b="1" i="0">
@@ -15648,7 +15480,7 @@
                 <a:ea typeface="Calibri"/>
                 <a:cs typeface="Calibri"/>
               </a:rPr>
-              <a:t>8.2  –  9.0</a:t>
+              <a:t>-0.4  –  1.0</a:t>
             </a:r>
           </a:p>
         </p:txBody>
@@ -15747,7 +15579,7 @@
         <p:spPr>
           <a:xfrm>
             <a:off x="9253728" y="4709160"/>
-            <a:ext cx="893317" cy="73152"/>
+            <a:ext cx="348315" cy="73152"/>
           </a:xfrm>
           <a:prstGeom prst="rect">
             <a:avLst/>
@@ -16480,7 +16312,7 @@
                 <a:ea typeface="Calibri"/>
                 <a:cs typeface="Calibri"/>
               </a:rPr>
-              <a:t>Peak, one-sided</a:t>
+              <a:t>Low demand</a:t>
             </a:r>
           </a:p>
         </p:txBody>
@@ -16522,7 +16354,7 @@
                 <a:ea typeface="Georgia"/>
                 <a:cs typeface="Georgia"/>
               </a:rPr>
-              <a:t>21.8%</a:t>
+              <a:t>14.1%</a:t>
             </a:r>
           </a:p>
         </p:txBody>
@@ -16564,7 +16396,7 @@
                 <a:ea typeface="Calibri"/>
                 <a:cs typeface="Calibri"/>
               </a:rPr>
-              <a:t>20.0 – 23.5</a:t>
+              <a:t>12.7 – 15.5</a:t>
             </a:r>
           </a:p>
         </p:txBody>
@@ -16606,7 +16438,7 @@
                 <a:ea typeface="Georgia"/>
                 <a:cs typeface="Georgia"/>
               </a:rPr>
-              <a:t>9.7%</a:t>
+              <a:t>10.7%</a:t>
             </a:r>
           </a:p>
         </p:txBody>
@@ -16648,7 +16480,7 @@
                 <a:ea typeface="Calibri"/>
                 <a:cs typeface="Calibri"/>
               </a:rPr>
-              <a:t>9.4 – 10.0</a:t>
+              <a:t>9.0 – 12.4</a:t>
             </a:r>
           </a:p>
         </p:txBody>
@@ -16690,7 +16522,7 @@
                 <a:ea typeface="Georgia"/>
                 <a:cs typeface="Georgia"/>
               </a:rPr>
-              <a:t>1.2%</a:t>
+              <a:t>1.9%</a:t>
             </a:r>
           </a:p>
         </p:txBody>
@@ -16732,7 +16564,7 @@
                 <a:ea typeface="Calibri"/>
                 <a:cs typeface="Calibri"/>
               </a:rPr>
-              <a:t>0.8 – 1.5</a:t>
+              <a:t>0.5 – 3.0</a:t>
             </a:r>
           </a:p>
         </p:txBody>
@@ -16774,7 +16606,7 @@
                 <a:ea typeface="Georgia"/>
                 <a:cs typeface="Georgia"/>
               </a:rPr>
-              <a:t>1.3%</a:t>
+              <a:t>2.0%</a:t>
             </a:r>
           </a:p>
         </p:txBody>
@@ -16816,7 +16648,7 @@
                 <a:ea typeface="Calibri"/>
                 <a:cs typeface="Calibri"/>
               </a:rPr>
-              <a:t>0.9 – 1.6</a:t>
+              <a:t>0.5 – 3.3</a:t>
             </a:r>
           </a:p>
         </p:txBody>
@@ -16943,7 +16775,7 @@
                 <a:ea typeface="Georgia"/>
                 <a:cs typeface="Georgia"/>
               </a:rPr>
-              <a:t>16.5%</a:t>
+              <a:t>13.2%</a:t>
             </a:r>
           </a:p>
         </p:txBody>
@@ -16985,7 +16817,7 @@
                 <a:ea typeface="Calibri"/>
                 <a:cs typeface="Calibri"/>
               </a:rPr>
-              <a:t>15.7 – 17.3</a:t>
+              <a:t>12.3 – 14.3</a:t>
             </a:r>
           </a:p>
         </p:txBody>
@@ -17027,7 +16859,7 @@
                 <a:ea typeface="Georgia"/>
                 <a:cs typeface="Georgia"/>
               </a:rPr>
-              <a:t>8.9%</a:t>
+              <a:t>8.5%</a:t>
             </a:r>
           </a:p>
         </p:txBody>
@@ -17069,7 +16901,7 @@
                 <a:ea typeface="Calibri"/>
                 <a:cs typeface="Calibri"/>
               </a:rPr>
-              <a:t>8.5 – 9.3</a:t>
+              <a:t>7.8 – 9.2</a:t>
             </a:r>
           </a:p>
         </p:txBody>
@@ -17111,7 +16943,7 @@
                 <a:ea typeface="Georgia"/>
                 <a:cs typeface="Georgia"/>
               </a:rPr>
-              <a:t>0.6%</a:t>
+              <a:t>1.1%</a:t>
             </a:r>
           </a:p>
         </p:txBody>
@@ -17153,7 +16985,7 @@
                 <a:ea typeface="Calibri"/>
                 <a:cs typeface="Calibri"/>
               </a:rPr>
-              <a:t>0.2 – 1.0</a:t>
+              <a:t>0.6 – 1.7</a:t>
             </a:r>
           </a:p>
         </p:txBody>
@@ -17195,7 +17027,7 @@
                 <a:ea typeface="Georgia"/>
                 <a:cs typeface="Georgia"/>
               </a:rPr>
-              <a:t>0.6%</a:t>
+              <a:t>0.1%</a:t>
             </a:r>
           </a:p>
         </p:txBody>
@@ -17237,7 +17069,7 @@
                 <a:ea typeface="Calibri"/>
                 <a:cs typeface="Calibri"/>
               </a:rPr>
-              <a:t>0.3 – 1.0</a:t>
+              <a:t>-0.4 – 0.6</a:t>
             </a:r>
           </a:p>
         </p:txBody>
@@ -17322,7 +17154,7 @@
                 <a:ea typeface="Calibri"/>
                 <a:cs typeface="Calibri"/>
               </a:rPr>
-              <a:t>Low demand</a:t>
+              <a:t>Peak, one-sided</a:t>
             </a:r>
           </a:p>
         </p:txBody>
@@ -17364,7 +17196,7 @@
                 <a:ea typeface="Georgia"/>
                 <a:cs typeface="Georgia"/>
               </a:rPr>
-              <a:t>14.5%</a:t>
+              <a:t>17.5%</a:t>
             </a:r>
           </a:p>
         </p:txBody>
@@ -17406,7 +17238,7 @@
                 <a:ea typeface="Calibri"/>
                 <a:cs typeface="Calibri"/>
               </a:rPr>
-              <a:t>14.0 – 14.9</a:t>
+              <a:t>14.4 – 20.3</a:t>
             </a:r>
           </a:p>
         </p:txBody>
@@ -17448,7 +17280,7 @@
                 <a:ea typeface="Georgia"/>
                 <a:cs typeface="Georgia"/>
               </a:rPr>
-              <a:t>11.8%</a:t>
+              <a:t>8.5%</a:t>
             </a:r>
           </a:p>
         </p:txBody>
@@ -17490,7 +17322,7 @@
                 <a:ea typeface="Calibri"/>
                 <a:cs typeface="Calibri"/>
               </a:rPr>
-              <a:t>11.2 – 12.4</a:t>
+              <a:t>6.6 – 10.0</a:t>
             </a:r>
           </a:p>
         </p:txBody>
@@ -17532,7 +17364,7 @@
                 <a:ea typeface="Georgia"/>
                 <a:cs typeface="Georgia"/>
               </a:rPr>
-              <a:t>1.8%</a:t>
+              <a:t>0.7%</a:t>
             </a:r>
           </a:p>
         </p:txBody>
@@ -17574,7 +17406,7 @@
                 <a:ea typeface="Calibri"/>
                 <a:cs typeface="Calibri"/>
               </a:rPr>
-              <a:t>1.3 – 2.4</a:t>
+              <a:t>-0.4 – 1.8</a:t>
             </a:r>
           </a:p>
         </p:txBody>
@@ -17616,7 +17448,7 @@
                 <a:ea typeface="Georgia"/>
                 <a:cs typeface="Georgia"/>
               </a:rPr>
-              <a:t>2.6%</a:t>
+              <a:t>0.9%</a:t>
             </a:r>
           </a:p>
         </p:txBody>
@@ -17658,7 +17490,7 @@
                 <a:ea typeface="Calibri"/>
                 <a:cs typeface="Calibri"/>
               </a:rPr>
-              <a:t>2.1 – 3.0</a:t>
+              <a:t>-0.1 – 1.8</a:t>
             </a:r>
           </a:p>
         </p:txBody>
@@ -17785,7 +17617,7 @@
                 <a:ea typeface="Georgia"/>
                 <a:cs typeface="Georgia"/>
               </a:rPr>
-              <a:t>8.6%</a:t>
+              <a:t>7.9%</a:t>
             </a:r>
           </a:p>
         </p:txBody>
@@ -17827,7 +17659,7 @@
                 <a:ea typeface="Calibri"/>
                 <a:cs typeface="Calibri"/>
               </a:rPr>
-              <a:t>8.2 – 9.0</a:t>
+              <a:t>6.7 – 9.1</a:t>
             </a:r>
           </a:p>
         </p:txBody>
@@ -17869,7 +17701,7 @@
                 <a:ea typeface="Georgia"/>
                 <a:cs typeface="Georgia"/>
               </a:rPr>
-              <a:t>5.6%</a:t>
+              <a:t>4.8%</a:t>
             </a:r>
           </a:p>
         </p:txBody>
@@ -17911,7 +17743,7 @@
                 <a:ea typeface="Calibri"/>
                 <a:cs typeface="Calibri"/>
               </a:rPr>
-              <a:t>5.2 – 5.9</a:t>
+              <a:t>4.3 – 5.3</a:t>
             </a:r>
           </a:p>
         </p:txBody>
@@ -17953,7 +17785,7 @@
                 <a:ea typeface="Georgia"/>
                 <a:cs typeface="Georgia"/>
               </a:rPr>
-              <a:t>1.2%</a:t>
+              <a:t>0.3%</a:t>
             </a:r>
           </a:p>
         </p:txBody>
@@ -17995,7 +17827,7 @@
                 <a:ea typeface="Calibri"/>
                 <a:cs typeface="Calibri"/>
               </a:rPr>
-              <a:t>0.9 – 1.6</a:t>
+              <a:t>-0.4 – 1.0</a:t>
             </a:r>
           </a:p>
         </p:txBody>
@@ -18037,7 +17869,7 @@
                 <a:ea typeface="Georgia"/>
                 <a:cs typeface="Georgia"/>
               </a:rPr>
-              <a:t>0.6%</a:t>
+              <a:t>0.4%</a:t>
             </a:r>
           </a:p>
         </p:txBody>
@@ -18079,7 +17911,7 @@
                 <a:ea typeface="Calibri"/>
                 <a:cs typeface="Calibri"/>
               </a:rPr>
-              <a:t>0.3 – 0.9</a:t>
+              <a:t>-0.8 – 1.2</a:t>
             </a:r>
           </a:p>
         </p:txBody>
@@ -18166,7 +17998,7 @@
                 <a:ea typeface="Calibri"/>
                 <a:cs typeface="Calibri"/>
               </a:rPr>
-              <a:t>Versus max-pressure: 0.6% to 1.8%. Every 95% interval is above zero. Versus the count-only ablation: 0.6% to 2.6%. PPO used more fuel than XtraFlow in every scenario.</a:t>
+              <a:t>Versus max-pressure: 0.3% to 1.9%. Versus the count-only ablation: 0.1% to 2.0%.</a:t>
             </a:r>
           </a:p>
         </p:txBody>
@@ -18361,7 +18193,7 @@
                 <a:ea typeface="Calibri"/>
                 <a:cs typeface="Calibri"/>
               </a:rPr>
-              <a:t>Peak, one-sided, the tuning scenario, on the locked test. Completed trips match fixed time (1,796).</a:t>
+              <a:t>Low demand, the tuning scenario, on the locked test. Completed trips match fixed time (603).</a:t>
             </a:r>
           </a:p>
         </p:txBody>
@@ -18576,7 +18408,7 @@
                 <a:ea typeface="Calibri"/>
                 <a:cs typeface="Calibri"/>
               </a:rPr>
-              <a:t>0.158 L</a:t>
+              <a:t>0.136 L</a:t>
             </a:r>
           </a:p>
         </p:txBody>
@@ -18618,7 +18450,7 @@
                 <a:ea typeface="Georgia"/>
                 <a:cs typeface="Georgia"/>
               </a:rPr>
-              <a:t>0.123 L</a:t>
+              <a:t>0.117 L</a:t>
             </a:r>
           </a:p>
         </p:txBody>
@@ -18791,7 +18623,7 @@
                 <a:ea typeface="Calibri"/>
                 <a:cs typeface="Calibri"/>
               </a:rPr>
-              <a:t>41.8 s</a:t>
+              <a:t>27.2 s</a:t>
             </a:r>
           </a:p>
         </p:txBody>
@@ -18833,7 +18665,7 @@
                 <a:ea typeface="Georgia"/>
                 <a:cs typeface="Georgia"/>
               </a:rPr>
-              <a:t>18.1 s</a:t>
+              <a:t>16.2 s</a:t>
             </a:r>
           </a:p>
         </p:txBody>
@@ -19006,7 +18838,7 @@
                 <a:ea typeface="Calibri"/>
                 <a:cs typeface="Calibri"/>
               </a:rPr>
-              <a:t>19.4 veh</a:t>
+              <a:t>4.4 veh</a:t>
             </a:r>
           </a:p>
         </p:txBody>
@@ -19048,7 +18880,7 @@
                 <a:ea typeface="Georgia"/>
                 <a:cs typeface="Georgia"/>
               </a:rPr>
-              <a:t>8.8 veh</a:t>
+              <a:t>2.7 veh</a:t>
             </a:r>
           </a:p>
         </p:txBody>
@@ -19221,7 +19053,7 @@
                 <a:ea typeface="Calibri"/>
                 <a:cs typeface="Calibri"/>
               </a:rPr>
-              <a:t>710 kg</a:t>
+              <a:t>205 kg</a:t>
             </a:r>
           </a:p>
         </p:txBody>
@@ -19263,7 +19095,7 @@
                 <a:ea typeface="Georgia"/>
                 <a:cs typeface="Georgia"/>
               </a:rPr>
-              <a:t>553 kg</a:t>
+              <a:t>176 kg</a:t>
             </a:r>
           </a:p>
         </p:txBody>
@@ -19478,7 +19310,7 @@
                 <a:ea typeface="Calibri"/>
                 <a:cs typeface="Calibri"/>
               </a:rPr>
-              <a:t>35.5 s   to   19.0 s</a:t>
+              <a:t>32.2 s   to   18.8 s</a:t>
             </a:r>
           </a:p>
         </p:txBody>
@@ -19520,7 +19352,7 @@
                 <a:ea typeface="Calibri"/>
                 <a:cs typeface="Calibri"/>
               </a:rPr>
-              <a:t>46% shorter</a:t>
+              <a:t>42% shorter</a:t>
             </a:r>
           </a:p>
         </p:txBody>
@@ -19609,7 +19441,7 @@
                 <a:ea typeface="Calibri"/>
                 <a:cs typeface="Calibri"/>
               </a:rPr>
-              <a:t>Low demand</a:t>
+              <a:t>Peak, one-sided</a:t>
             </a:r>
           </a:p>
         </p:txBody>
@@ -19651,7 +19483,7 @@
                 <a:ea typeface="Calibri"/>
                 <a:cs typeface="Calibri"/>
               </a:rPr>
-              <a:t>27.3 s   to   15.9 s</a:t>
+              <a:t>37.0 s   to   18.4 s</a:t>
             </a:r>
           </a:p>
         </p:txBody>
@@ -19693,7 +19525,7 @@
                 <a:ea typeface="Calibri"/>
                 <a:cs typeface="Calibri"/>
               </a:rPr>
-              <a:t>42% shorter</a:t>
+              <a:t>50% shorter</a:t>
             </a:r>
           </a:p>
         </p:txBody>
@@ -19824,7 +19656,7 @@
                 <a:ea typeface="Calibri"/>
                 <a:cs typeface="Calibri"/>
               </a:rPr>
-              <a:t>30.1 s   to   21.9 s</a:t>
+              <a:t>30.0 s   to   21.8 s</a:t>
             </a:r>
           </a:p>
         </p:txBody>
@@ -20019,7 +19851,7 @@
                 <a:ea typeface="Georgia"/>
                 <a:cs typeface="Georgia"/>
               </a:rPr>
-              <a:t>A missed vehicle does not erase the saving</a:t>
+              <a:t>At the highest miss rate, mean fuel is under the reference lines</a:t>
             </a:r>
           </a:p>
         </p:txBody>
@@ -20061,7 +19893,7 @@
                 <a:ea typeface="Calibri"/>
                 <a:cs typeface="Calibri"/>
               </a:rPr>
-              <a:t>Peak, one-sided. 10 seeds. Vehicles are dropped from the detector at random.</a:t>
+              <a:t>Peak, one-sided. 3 seeds. Vehicles are dropped from the detector at random.</a:t>
             </a:r>
           </a:p>
         </p:txBody>
@@ -20360,7 +20192,7 @@
                 <a:ea typeface="Calibri"/>
                 <a:cs typeface="Calibri"/>
               </a:rPr>
-              <a:t>± 0.002   ·   n=10</a:t>
+              <a:t>± 0.002   ·   n=3</a:t>
             </a:r>
           </a:p>
         </p:txBody>
@@ -20575,7 +20407,7 @@
                 <a:ea typeface="Calibri"/>
                 <a:cs typeface="Calibri"/>
               </a:rPr>
-              <a:t>± 0.002   ·   n=10</a:t>
+              <a:t>± 0.002   ·   n=3</a:t>
             </a:r>
           </a:p>
         </p:txBody>
@@ -20706,7 +20538,7 @@
                 <a:ea typeface="Georgia"/>
                 <a:cs typeface="Georgia"/>
               </a:rPr>
-              <a:t>0.123</a:t>
+              <a:t>0.124</a:t>
             </a:r>
           </a:p>
         </p:txBody>
@@ -20790,7 +20622,7 @@
                 <a:ea typeface="Calibri"/>
                 <a:cs typeface="Calibri"/>
               </a:rPr>
-              <a:t>± 0.002   ·   n=10</a:t>
+              <a:t>± 0.001   ·   n=3</a:t>
             </a:r>
           </a:p>
         </p:txBody>
@@ -20921,7 +20753,7 @@
                 <a:ea typeface="Georgia"/>
                 <a:cs typeface="Georgia"/>
               </a:rPr>
-              <a:t>0.123</a:t>
+              <a:t>0.124</a:t>
             </a:r>
           </a:p>
         </p:txBody>
@@ -21005,7 +20837,7 @@
                 <a:ea typeface="Calibri"/>
                 <a:cs typeface="Calibri"/>
               </a:rPr>
-              <a:t>± 0.002   ·   n=10</a:t>
+              <a:t>± 0.001   ·   n=3</a:t>
             </a:r>
           </a:p>
         </p:txBody>
@@ -21275,120 +21107,36 @@
         </p:nvSpPr>
         <p:spPr>
           <a:xfrm>
-            <a:off x="7360920" y="4617720"/>
-            <a:ext cx="3108960" cy="411480"/>
-          </a:xfrm>
-          <a:prstGeom prst="rect">
-            <a:avLst/>
-          </a:prstGeom>
-          <a:noFill/>
-        </p:spPr>
-        <p:txBody>
-          <a:bodyPr wrap="square" lIns="0" rIns="0" tIns="0" bIns="0" anchor="t"/>
-          <a:lstStyle/>
-          <a:p>
-            <a:pPr algn="l">
-              <a:spcBef>
-                <a:spcPts val="0"/>
-              </a:spcBef>
-              <a:spcAft>
-                <a:spcPts val="0"/>
-              </a:spcAft>
-            </a:pPr>
-            <a:r>
-              <a:rPr sz="2200" b="1" i="0">
+            <a:off x="777240" y="5532120"/>
+            <a:ext cx="10680192" cy="457200"/>
+          </a:xfrm>
+          <a:prstGeom prst="rect">
+            <a:avLst/>
+          </a:prstGeom>
+          <a:noFill/>
+        </p:spPr>
+        <p:txBody>
+          <a:bodyPr wrap="square" lIns="0" rIns="0" tIns="0" bIns="0" anchor="t"/>
+          <a:lstStyle/>
+          <a:p>
+            <a:pPr algn="l">
+              <a:spcBef>
+                <a:spcPts val="0"/>
+              </a:spcBef>
+              <a:spcAft>
+                <a:spcPts val="0"/>
+              </a:spcAft>
+            </a:pPr>
+            <a:r>
+              <a:rPr sz="1400" b="0" i="0">
                 <a:solidFill>
                   <a:srgbClr val="1A2834"/>
-                </a:solidFill>
-                <a:latin typeface="Georgia"/>
-                <a:ea typeface="Georgia"/>
-                <a:cs typeface="Georgia"/>
-              </a:rPr>
-              <a:t>0.156 L</a:t>
-            </a:r>
-          </a:p>
-        </p:txBody>
-      </p:sp>
-      <p:sp>
-        <p:nvSpPr>
-          <p:cNvPr id="35" name="TextBox 34"/>
-          <p:cNvSpPr txBox="1"/>
-          <p:nvPr/>
-        </p:nvSpPr>
-        <p:spPr>
-          <a:xfrm>
-            <a:off x="7360920" y="5074920"/>
-            <a:ext cx="3108960" cy="274320"/>
-          </a:xfrm>
-          <a:prstGeom prst="rect">
-            <a:avLst/>
-          </a:prstGeom>
-          <a:noFill/>
-        </p:spPr>
-        <p:txBody>
-          <a:bodyPr wrap="square" lIns="0" rIns="0" tIns="0" bIns="0" anchor="t"/>
-          <a:lstStyle/>
-          <a:p>
-            <a:pPr algn="l">
-              <a:spcBef>
-                <a:spcPts val="0"/>
-              </a:spcBef>
-              <a:spcAft>
-                <a:spcPts val="0"/>
-              </a:spcAft>
-            </a:pPr>
-            <a:r>
-              <a:rPr sz="1300" b="0" i="0">
-                <a:solidFill>
-                  <a:srgbClr val="5E6E7C"/>
                 </a:solidFill>
                 <a:latin typeface="Calibri"/>
                 <a:ea typeface="Calibri"/>
                 <a:cs typeface="Calibri"/>
               </a:rPr>
-              <a:t>Fixed time</a:t>
-            </a:r>
-          </a:p>
-        </p:txBody>
-      </p:sp>
-      <p:sp>
-        <p:nvSpPr>
-          <p:cNvPr id="36" name="TextBox 35"/>
-          <p:cNvSpPr txBox="1"/>
-          <p:nvPr/>
-        </p:nvSpPr>
-        <p:spPr>
-          <a:xfrm>
-            <a:off x="777240" y="5532120"/>
-            <a:ext cx="10680192" cy="457200"/>
-          </a:xfrm>
-          <a:prstGeom prst="rect">
-            <a:avLst/>
-          </a:prstGeom>
-          <a:noFill/>
-        </p:spPr>
-        <p:txBody>
-          <a:bodyPr wrap="square" lIns="0" rIns="0" tIns="0" bIns="0" anchor="t"/>
-          <a:lstStyle/>
-          <a:p>
-            <a:pPr algn="l">
-              <a:spcBef>
-                <a:spcPts val="0"/>
-              </a:spcBef>
-              <a:spcAft>
-                <a:spcPts val="0"/>
-              </a:spcAft>
-            </a:pPr>
-            <a:r>
-              <a:rPr sz="1400" b="0" i="0">
-                <a:solidFill>
-                  <a:srgbClr val="1A2834"/>
-                </a:solidFill>
-                <a:latin typeface="Calibri"/>
-                <a:ea typeface="Calibri"/>
-                <a:cs typeface="Calibri"/>
-              </a:rPr>
-              <a:t>XtraFlow stays under both reference lines across this miss range. The assumed noise model at 15% miss lands at 0.124 L.</a:t>
+              <a:t>Every miss level on this slide has lower mean fuel than every reference line. Noise-model point (see noise_model.json) is 0.125 L.</a:t>
             </a:r>
           </a:p>
         </p:txBody>

--- a/results/deck.pptx
+++ b/results/deck.pptx
@@ -18,6 +18,8 @@
     <p:sldId id="266" r:id="rId18"/>
     <p:sldId id="267" r:id="rId19"/>
     <p:sldId id="268" r:id="rId20"/>
+    <p:sldId id="269" r:id="rId21"/>
+    <p:sldId id="270" r:id="rId22"/>
   </p:sldIdLst>
   <p:sldSz cx="12191695" cy="6858000" type="screen4x3"/>
   <p:notesSz cx="6858000" cy="9144000"/>
@@ -514,7 +516,7 @@
           <a:lstStyle/>
           <a:p>
             <a:r>
-              <a:t>Open on energy, not on travel time. Say out loud that this is a simulation before the first percentage. Source label: Simulation-based estimate; assumed traffic mix</a:t>
+              <a:t>Open on energy, not on travel time. Say out loud that this is a simulation before the first percentage. Scope: 5 test seeds (1–5). Source label: Simulation-based estimate; assumed traffic mix</a:t>
             </a:r>
           </a:p>
         </p:txBody>
@@ -584,7 +586,7 @@
           <a:lstStyle/>
           <a:p>
             <a:r>
-              <a:t>Read results/grid_results.json. The title is computed from those means. Do not describe coordination unless coordination_reduces_fuel is in that file. Label: simulation-based estimate; assumed traffic mix.</a:t>
+              <a:t>Open results/demo/demo.mp4 (or demo.gif) while presenting. Say that the demo is qualitative; the headline numbers are on the previous slides.</a:t>
             </a:r>
           </a:p>
         </p:txBody>
@@ -654,7 +656,7 @@
           <a:lstStyle/>
           <a:p>
             <a:r>
-              <a:t>Safety verdict comes from results/safety.json. Emission cross-check is HBEFA3 versus PHEMlight on a smaller seed set than the main test; quote both percentages. Perception flag is ASSUMED_NOISE_MODEL_NO_USER_VIDEO.</a:t>
+              <a:t>Means are grouped from results/robustness.json. Do not describe the curve as flat unless the loaded means say so. The noise-model source field is empirical only when labels exist.</a:t>
             </a:r>
           </a:p>
         </p:txBody>
@@ -724,7 +726,7 @@
           <a:lstStyle/>
           <a:p>
             <a:r>
-              <a:t>Lead with the per-vehicle litres. The annual figure multiplies that saving by the ranges on the right, Monte Carlo from config.yaml. The price in fuel.price_inr_per_L is a placeholder. Quote the extrapolation label: simulation-based estimate, not a deployment result.</a:t>
+              <a:t>Read results/grid_results.json. If rows and summary_means are empty, say the grid was not scored. Label: simulation-based estimate; assumed traffic mix.</a:t>
             </a:r>
           </a:p>
         </p:txBody>
@@ -794,6 +796,146 @@
           <a:lstStyle/>
           <a:p>
             <a:r>
+              <a:t>Safety verdict comes from results/safety.json. Emission cross-check is HBEFA3 versus PHEMlight on a smaller seed set than the main test; quote both percentages. Perception flag is ASSUMED_NOISE_MODEL_NO_USER_VIDEO.</a:t>
+            </a:r>
+          </a:p>
+        </p:txBody>
+      </p:sp>
+      <p:sp>
+        <p:nvSpPr>
+          <p:cNvPr id="4" name="Slide Number Placeholder 3"/>
+          <p:cNvSpPr>
+            <a:spLocks noGrp="1"/>
+          </p:cNvSpPr>
+          <p:nvPr>
+            <p:ph type="sldNum" idx="5" sz="quarter"/>
+          </p:nvPr>
+        </p:nvSpPr>
+        <p:spPr/>
+      </p:sp>
+    </p:spTree>
+  </p:cSld>
+  <p:clrMapOvr>
+    <a:masterClrMapping/>
+  </p:clrMapOvr>
+</p:notes>
+</file>
+
+<file path=ppt/notesSlides/notesSlide14.xml><?xml version="1.0" encoding="utf-8"?>
+<p:notes xmlns:a="http://schemas.openxmlformats.org/drawingml/2006/main" xmlns:p="http://schemas.openxmlformats.org/presentationml/2006/main" xmlns:r="http://schemas.openxmlformats.org/officeDocument/2006/relationships">
+  <p:cSld>
+    <p:spTree>
+      <p:nvGrpSpPr>
+        <p:cNvPr id="1" name=""/>
+        <p:cNvGrpSpPr/>
+        <p:nvPr/>
+      </p:nvGrpSpPr>
+      <p:grpSpPr>
+        <a:xfrm>
+          <a:off x="0" y="0"/>
+          <a:ext cx="0" cy="0"/>
+          <a:chOff x="0" y="0"/>
+          <a:chExt cx="0" cy="0"/>
+        </a:xfrm>
+      </p:grpSpPr>
+      <p:sp>
+        <p:nvSpPr>
+          <p:cNvPr id="2" name="Slide Image Placeholder 1"/>
+          <p:cNvSpPr>
+            <a:spLocks noGrp="1"/>
+          </p:cNvSpPr>
+          <p:nvPr>
+            <p:ph type="sldImg" idx="2"/>
+          </p:nvPr>
+        </p:nvSpPr>
+        <p:spPr/>
+      </p:sp>
+      <p:sp>
+        <p:nvSpPr>
+          <p:cNvPr id="3" name="Notes Placeholder 2"/>
+          <p:cNvSpPr>
+            <a:spLocks noGrp="1"/>
+          </p:cNvSpPr>
+          <p:nvPr>
+            <p:ph type="body" idx="3" sz="quarter"/>
+          </p:nvPr>
+        </p:nvSpPr>
+        <p:spPr/>
+        <p:txBody>
+          <a:bodyPr/>
+          <a:lstStyle/>
+          <a:p>
+            <a:r>
+              <a:t>Lead with the per-vehicle litres. The annual figure multiplies that saving by the ranges on the right, Monte Carlo from config.yaml. The price in fuel.price_inr_per_L is a placeholder. Quote the extrapolation label: simulation-based estimate, not a deployment result.</a:t>
+            </a:r>
+          </a:p>
+        </p:txBody>
+      </p:sp>
+      <p:sp>
+        <p:nvSpPr>
+          <p:cNvPr id="4" name="Slide Number Placeholder 3"/>
+          <p:cNvSpPr>
+            <a:spLocks noGrp="1"/>
+          </p:cNvSpPr>
+          <p:nvPr>
+            <p:ph type="sldNum" idx="5" sz="quarter"/>
+          </p:nvPr>
+        </p:nvSpPr>
+        <p:spPr/>
+      </p:sp>
+    </p:spTree>
+  </p:cSld>
+  <p:clrMapOvr>
+    <a:masterClrMapping/>
+  </p:clrMapOvr>
+</p:notes>
+</file>
+
+<file path=ppt/notesSlides/notesSlide15.xml><?xml version="1.0" encoding="utf-8"?>
+<p:notes xmlns:a="http://schemas.openxmlformats.org/drawingml/2006/main" xmlns:p="http://schemas.openxmlformats.org/presentationml/2006/main" xmlns:r="http://schemas.openxmlformats.org/officeDocument/2006/relationships">
+  <p:cSld>
+    <p:spTree>
+      <p:nvGrpSpPr>
+        <p:cNvPr id="1" name=""/>
+        <p:cNvGrpSpPr/>
+        <p:nvPr/>
+      </p:nvGrpSpPr>
+      <p:grpSpPr>
+        <a:xfrm>
+          <a:off x="0" y="0"/>
+          <a:ext cx="0" cy="0"/>
+          <a:chOff x="0" y="0"/>
+          <a:chExt cx="0" cy="0"/>
+        </a:xfrm>
+      </p:grpSpPr>
+      <p:sp>
+        <p:nvSpPr>
+          <p:cNvPr id="2" name="Slide Image Placeholder 1"/>
+          <p:cNvSpPr>
+            <a:spLocks noGrp="1"/>
+          </p:cNvSpPr>
+          <p:nvPr>
+            <p:ph type="sldImg" idx="2"/>
+          </p:nvPr>
+        </p:nvSpPr>
+        <p:spPr/>
+      </p:sp>
+      <p:sp>
+        <p:nvSpPr>
+          <p:cNvPr id="3" name="Notes Placeholder 2"/>
+          <p:cNvSpPr>
+            <a:spLocks noGrp="1"/>
+          </p:cNvSpPr>
+          <p:nvPr>
+            <p:ph type="body" idx="3" sz="quarter"/>
+          </p:nvPr>
+        </p:nvSpPr>
+        <p:spPr/>
+        <p:txBody>
+          <a:bodyPr/>
+          <a:lstStyle/>
+          <a:p>
+            <a:r>
               <a:t>Close on the three conditions. Do not end on the annual litre range. The headline comparison is in results/headlines.json.</a:t>
             </a:r>
           </a:p>
@@ -1074,7 +1216,7 @@
           <a:lstStyle/>
           <a:p>
             <a:r>
-              <a:t>Same seed means identical demand. Test seeds are the ones stored in results/raw_runs.csv. Sublane use is the used_sublane field in results/sublane_fallback.json.</a:t>
+              <a:t>Same seed means identical demand. Test seeds are the ones stored in results/raw_runs.csv. Sublane use is the used_sublane field in results/sublane_fallback.json. RL note: Time cut. This zip is the 200000-step model. It was not scored on VALIDATION or TEST, so rl_ppo is not in raw_runs.csv.</a:t>
             </a:r>
           </a:p>
         </p:txBody>
@@ -1144,7 +1286,7 @@
           <a:lstStyle/>
           <a:p>
             <a:r>
-              <a:t>Read the peak interval, not a rounded-up slogan. All numbers are from results/headlines.json. Completed-trip counts match fixed time in the summary table, so the cut is not from stranded vehicles.</a:t>
+              <a:t>Primary headline is versus the best of fixed_tuned, actuated, queue_pressure, and maxpressure. Legacy fixed is secondary (pct_fuel_reduction_vs_fixed_legacy). Numbers are from results/headlines.json.</a:t>
             </a:r>
           </a:p>
         </p:txBody>
@@ -1354,7 +1496,7 @@
           <a:lstStyle/>
           <a:p>
             <a:r>
-              <a:t>Means are grouped from results/robustness.json. Do not describe the curve as flat unless the loaded means say so. The noise-model source field is empirical only when labels exist.</a:t>
+              <a:t>These PNGs are written by analyze.py after the locked TEST. Do not describe a trend that is not visible in the figure.</a:t>
             </a:r>
           </a:p>
         </p:txBody>
@@ -4617,7 +4759,7 @@
                 <a:ea typeface="Calibri"/>
                 <a:cs typeface="Calibri"/>
               </a:rPr>
-              <a:t>A locked comparison on mixed Indian traffic. Same cars, seven controllers, four demand patterns. Not a field deployment.</a:t>
+              <a:t>A locked comparison on mixed Indian traffic. Same demand, 8 controllers, 4 demand patterns. Not a field deployment.</a:t>
             </a:r>
           </a:p>
         </p:txBody>
@@ -4743,7 +4885,7 @@
                 <a:ea typeface="Georgia"/>
                 <a:cs typeface="Georgia"/>
               </a:rPr>
-              <a:t>30</a:t>
+              <a:t>5</a:t>
             </a:r>
           </a:p>
         </p:txBody>
@@ -4869,7 +5011,7 @@
                 <a:ea typeface="Calibri"/>
                 <a:cs typeface="Calibri"/>
               </a:rPr>
-              <a:t>controllers</a:t>
+              <a:t>controllers in TEST</a:t>
             </a:r>
           </a:p>
         </p:txBody>
@@ -5064,7 +5206,7 @@
                 <a:ea typeface="Calibri"/>
                 <a:cs typeface="Calibri"/>
               </a:rPr>
-              <a:t>WHERE IT DOES NOT TRANSFER</a:t>
+              <a:t>SAME DEMAND, SIDE BY SIDE</a:t>
             </a:r>
           </a:p>
         </p:txBody>
@@ -5106,7 +5248,7 @@
                 <a:ea typeface="Georgia"/>
                 <a:cs typeface="Georgia"/>
               </a:rPr>
-              <a:t>Grid results are not loaded</a:t>
+              <a:t>Fixed timing on the left. XtraFlow on the right.</a:t>
             </a:r>
           </a:p>
         </p:txBody>
@@ -5148,7 +5290,7 @@
                 <a:ea typeface="Calibri"/>
                 <a:cs typeface="Calibri"/>
               </a:rPr>
-              <a:t>A 2×2 network. The controller was tuned for a single junction.</a:t>
+              <a:t>One seed, same arrivals. The clip is a feasibility demo, not a fuel-saving proof.</a:t>
             </a:r>
           </a:p>
         </p:txBody>
@@ -5245,653 +5387,8 @@
         </p:nvSpPr>
         <p:spPr>
           <a:xfrm>
-            <a:off x="502920" y="1600200"/>
-            <a:ext cx="3633216" cy="3063240"/>
-          </a:xfrm>
-          <a:prstGeom prst="roundRect">
-            <a:avLst>
-              <a:gd name="adj" fmla="val 8000"/>
-            </a:avLst>
-          </a:prstGeom>
-          <a:solidFill>
-            <a:srgbClr val="FFFFFF"/>
-          </a:solidFill>
-          <a:ln w="12700">
-            <a:solidFill>
-              <a:srgbClr val="E3DBD0"/>
-            </a:solidFill>
-          </a:ln>
-        </p:spPr>
-        <p:style>
-          <a:lnRef idx="1">
-            <a:schemeClr val="accent1"/>
-          </a:lnRef>
-          <a:fillRef idx="3">
-            <a:schemeClr val="accent1"/>
-          </a:fillRef>
-          <a:effectRef idx="2">
-            <a:schemeClr val="accent1"/>
-          </a:effectRef>
-          <a:fontRef idx="minor">
-            <a:schemeClr val="lt1"/>
-          </a:fontRef>
-        </p:style>
-        <p:txBody>
-          <a:bodyPr rtlCol="0" anchor="ctr"/>
-          <a:lstStyle/>
-          <a:p>
-            <a:pPr algn="ctr"/>
-          </a:p>
-        </p:txBody>
-      </p:sp>
-      <p:sp>
-        <p:nvSpPr>
-          <p:cNvPr id="9" name="TextBox 8"/>
-          <p:cNvSpPr txBox="1"/>
-          <p:nvPr/>
-        </p:nvSpPr>
-        <p:spPr>
-          <a:xfrm>
-            <a:off x="722376" y="1783080"/>
-            <a:ext cx="3221735" cy="274320"/>
-          </a:xfrm>
-          <a:prstGeom prst="rect">
-            <a:avLst/>
-          </a:prstGeom>
-          <a:noFill/>
-        </p:spPr>
-        <p:txBody>
-          <a:bodyPr wrap="square" lIns="0" rIns="0" tIns="0" bIns="0" anchor="t"/>
-          <a:lstStyle/>
-          <a:p>
-            <a:pPr algn="l">
-              <a:spcBef>
-                <a:spcPts val="0"/>
-              </a:spcBef>
-              <a:spcAft>
-                <a:spcPts val="0"/>
-              </a:spcAft>
-            </a:pPr>
-            <a:r>
-              <a:rPr sz="1300" b="1" i="0">
-                <a:solidFill>
-                  <a:srgbClr val="1B6B5A"/>
-                </a:solidFill>
-                <a:latin typeface="Calibri"/>
-                <a:ea typeface="Calibri"/>
-                <a:cs typeface="Calibri"/>
-              </a:rPr>
-              <a:t>ACTUATED</a:t>
-            </a:r>
-          </a:p>
-        </p:txBody>
-      </p:sp>
-      <p:sp>
-        <p:nvSpPr>
-          <p:cNvPr id="10" name="TextBox 9"/>
-          <p:cNvSpPr txBox="1"/>
-          <p:nvPr/>
-        </p:nvSpPr>
-        <p:spPr>
-          <a:xfrm>
-            <a:off x="722376" y="2240280"/>
-            <a:ext cx="3221735" cy="640080"/>
-          </a:xfrm>
-          <a:prstGeom prst="rect">
-            <a:avLst/>
-          </a:prstGeom>
-          <a:noFill/>
-        </p:spPr>
-        <p:txBody>
-          <a:bodyPr wrap="square" lIns="0" rIns="0" tIns="0" bIns="0" anchor="t"/>
-          <a:lstStyle/>
-          <a:p>
-            <a:pPr algn="l">
-              <a:spcBef>
-                <a:spcPts val="0"/>
-              </a:spcBef>
-              <a:spcAft>
-                <a:spcPts val="0"/>
-              </a:spcAft>
-            </a:pPr>
-            <a:r>
-              <a:rPr sz="3200" b="1" i="0">
-                <a:solidFill>
-                  <a:srgbClr val="1B6B5A"/>
-                </a:solidFill>
-                <a:latin typeface="Georgia"/>
-                <a:ea typeface="Georgia"/>
-                <a:cs typeface="Georgia"/>
-              </a:rPr>
-              <a:t>—</a:t>
-            </a:r>
-          </a:p>
-        </p:txBody>
-      </p:sp>
-      <p:sp>
-        <p:nvSpPr>
-          <p:cNvPr id="11" name="TextBox 10"/>
-          <p:cNvSpPr txBox="1"/>
-          <p:nvPr/>
-        </p:nvSpPr>
-        <p:spPr>
-          <a:xfrm>
-            <a:off x="722376" y="2926080"/>
-            <a:ext cx="3221735" cy="274320"/>
-          </a:xfrm>
-          <a:prstGeom prst="rect">
-            <a:avLst/>
-          </a:prstGeom>
-          <a:noFill/>
-        </p:spPr>
-        <p:txBody>
-          <a:bodyPr wrap="square" lIns="0" rIns="0" tIns="0" bIns="0" anchor="t"/>
-          <a:lstStyle/>
-          <a:p>
-            <a:pPr algn="l">
-              <a:spcBef>
-                <a:spcPts val="0"/>
-              </a:spcBef>
-              <a:spcAft>
-                <a:spcPts val="0"/>
-              </a:spcAft>
-            </a:pPr>
-            <a:r>
-              <a:rPr sz="1300" b="0" i="0">
-                <a:solidFill>
-                  <a:srgbClr val="5E6E7C"/>
-                </a:solidFill>
-                <a:latin typeface="Calibri"/>
-                <a:ea typeface="Calibri"/>
-                <a:cs typeface="Calibri"/>
-              </a:rPr>
-              <a:t>litres / vehicle</a:t>
-            </a:r>
-          </a:p>
-        </p:txBody>
-      </p:sp>
-      <p:sp>
-        <p:nvSpPr>
-          <p:cNvPr id="12" name="TextBox 11"/>
-          <p:cNvSpPr txBox="1"/>
-          <p:nvPr/>
-        </p:nvSpPr>
-        <p:spPr>
-          <a:xfrm>
-            <a:off x="722376" y="3794760"/>
-            <a:ext cx="3221735" cy="365760"/>
-          </a:xfrm>
-          <a:prstGeom prst="rect">
-            <a:avLst/>
-          </a:prstGeom>
-          <a:noFill/>
-        </p:spPr>
-        <p:txBody>
-          <a:bodyPr wrap="square" lIns="0" rIns="0" tIns="0" bIns="0" anchor="t"/>
-          <a:lstStyle/>
-          <a:p>
-            <a:pPr algn="l">
-              <a:spcBef>
-                <a:spcPts val="0"/>
-              </a:spcBef>
-              <a:spcAft>
-                <a:spcPts val="0"/>
-              </a:spcAft>
-            </a:pPr>
-            <a:r>
-              <a:rPr sz="1400" b="0" i="0">
-                <a:solidFill>
-                  <a:srgbClr val="5E6E7C"/>
-                </a:solidFill>
-                <a:latin typeface="Calibri"/>
-                <a:ea typeface="Calibri"/>
-                <a:cs typeface="Calibri"/>
-              </a:rPr>
-              <a:t>Lowest fuel here</a:t>
-            </a:r>
-          </a:p>
-        </p:txBody>
-      </p:sp>
-      <p:sp>
-        <p:nvSpPr>
-          <p:cNvPr id="13" name="Rounded Rectangle 12"/>
-          <p:cNvSpPr/>
-          <p:nvPr/>
-        </p:nvSpPr>
-        <p:spPr>
-          <a:xfrm>
-            <a:off x="4300728" y="1600200"/>
-            <a:ext cx="3633216" cy="3063240"/>
-          </a:xfrm>
-          <a:prstGeom prst="roundRect">
-            <a:avLst>
-              <a:gd name="adj" fmla="val 8000"/>
-            </a:avLst>
-          </a:prstGeom>
-          <a:solidFill>
-            <a:srgbClr val="FFFFFF"/>
-          </a:solidFill>
-          <a:ln w="12700">
-            <a:solidFill>
-              <a:srgbClr val="E3DBD0"/>
-            </a:solidFill>
-          </a:ln>
-        </p:spPr>
-        <p:style>
-          <a:lnRef idx="1">
-            <a:schemeClr val="accent1"/>
-          </a:lnRef>
-          <a:fillRef idx="3">
-            <a:schemeClr val="accent1"/>
-          </a:fillRef>
-          <a:effectRef idx="2">
-            <a:schemeClr val="accent1"/>
-          </a:effectRef>
-          <a:fontRef idx="minor">
-            <a:schemeClr val="lt1"/>
-          </a:fontRef>
-        </p:style>
-        <p:txBody>
-          <a:bodyPr rtlCol="0" anchor="ctr"/>
-          <a:lstStyle/>
-          <a:p>
-            <a:pPr algn="ctr"/>
-          </a:p>
-        </p:txBody>
-      </p:sp>
-      <p:sp>
-        <p:nvSpPr>
-          <p:cNvPr id="14" name="TextBox 13"/>
-          <p:cNvSpPr txBox="1"/>
-          <p:nvPr/>
-        </p:nvSpPr>
-        <p:spPr>
-          <a:xfrm>
-            <a:off x="4520184" y="1783080"/>
-            <a:ext cx="3221735" cy="274320"/>
-          </a:xfrm>
-          <a:prstGeom prst="rect">
-            <a:avLst/>
-          </a:prstGeom>
-          <a:noFill/>
-        </p:spPr>
-        <p:txBody>
-          <a:bodyPr wrap="square" lIns="0" rIns="0" tIns="0" bIns="0" anchor="t"/>
-          <a:lstStyle/>
-          <a:p>
-            <a:pPr algn="l">
-              <a:spcBef>
-                <a:spcPts val="0"/>
-              </a:spcBef>
-              <a:spcAft>
-                <a:spcPts val="0"/>
-              </a:spcAft>
-            </a:pPr>
-            <a:r>
-              <a:rPr sz="1300" b="1" i="0">
-                <a:solidFill>
-                  <a:srgbClr val="1B6B5A"/>
-                </a:solidFill>
-                <a:latin typeface="Calibri"/>
-                <a:ea typeface="Calibri"/>
-                <a:cs typeface="Calibri"/>
-              </a:rPr>
-              <a:t>FIXED TIME</a:t>
-            </a:r>
-          </a:p>
-        </p:txBody>
-      </p:sp>
-      <p:sp>
-        <p:nvSpPr>
-          <p:cNvPr id="15" name="TextBox 14"/>
-          <p:cNvSpPr txBox="1"/>
-          <p:nvPr/>
-        </p:nvSpPr>
-        <p:spPr>
-          <a:xfrm>
-            <a:off x="4520184" y="2240280"/>
-            <a:ext cx="3221735" cy="640080"/>
-          </a:xfrm>
-          <a:prstGeom prst="rect">
-            <a:avLst/>
-          </a:prstGeom>
-          <a:noFill/>
-        </p:spPr>
-        <p:txBody>
-          <a:bodyPr wrap="square" lIns="0" rIns="0" tIns="0" bIns="0" anchor="t"/>
-          <a:lstStyle/>
-          <a:p>
-            <a:pPr algn="l">
-              <a:spcBef>
-                <a:spcPts val="0"/>
-              </a:spcBef>
-              <a:spcAft>
-                <a:spcPts val="0"/>
-              </a:spcAft>
-            </a:pPr>
-            <a:r>
-              <a:rPr sz="3200" b="1" i="0">
-                <a:solidFill>
-                  <a:srgbClr val="1B6B5A"/>
-                </a:solidFill>
-                <a:latin typeface="Georgia"/>
-                <a:ea typeface="Georgia"/>
-                <a:cs typeface="Georgia"/>
-              </a:rPr>
-              <a:t>—</a:t>
-            </a:r>
-          </a:p>
-        </p:txBody>
-      </p:sp>
-      <p:sp>
-        <p:nvSpPr>
-          <p:cNvPr id="16" name="TextBox 15"/>
-          <p:cNvSpPr txBox="1"/>
-          <p:nvPr/>
-        </p:nvSpPr>
-        <p:spPr>
-          <a:xfrm>
-            <a:off x="4520184" y="2926080"/>
-            <a:ext cx="3221735" cy="274320"/>
-          </a:xfrm>
-          <a:prstGeom prst="rect">
-            <a:avLst/>
-          </a:prstGeom>
-          <a:noFill/>
-        </p:spPr>
-        <p:txBody>
-          <a:bodyPr wrap="square" lIns="0" rIns="0" tIns="0" bIns="0" anchor="t"/>
-          <a:lstStyle/>
-          <a:p>
-            <a:pPr algn="l">
-              <a:spcBef>
-                <a:spcPts val="0"/>
-              </a:spcBef>
-              <a:spcAft>
-                <a:spcPts val="0"/>
-              </a:spcAft>
-            </a:pPr>
-            <a:r>
-              <a:rPr sz="1300" b="0" i="0">
-                <a:solidFill>
-                  <a:srgbClr val="5E6E7C"/>
-                </a:solidFill>
-                <a:latin typeface="Calibri"/>
-                <a:ea typeface="Calibri"/>
-                <a:cs typeface="Calibri"/>
-              </a:rPr>
-              <a:t>litres / vehicle</a:t>
-            </a:r>
-          </a:p>
-        </p:txBody>
-      </p:sp>
-      <p:sp>
-        <p:nvSpPr>
-          <p:cNvPr id="17" name="TextBox 16"/>
-          <p:cNvSpPr txBox="1"/>
-          <p:nvPr/>
-        </p:nvSpPr>
-        <p:spPr>
-          <a:xfrm>
-            <a:off x="4520184" y="3794760"/>
-            <a:ext cx="3221735" cy="365760"/>
-          </a:xfrm>
-          <a:prstGeom prst="rect">
-            <a:avLst/>
-          </a:prstGeom>
-          <a:noFill/>
-        </p:spPr>
-        <p:txBody>
-          <a:bodyPr wrap="square" lIns="0" rIns="0" tIns="0" bIns="0" anchor="t"/>
-          <a:lstStyle/>
-          <a:p>
-            <a:pPr algn="l">
-              <a:spcBef>
-                <a:spcPts val="0"/>
-              </a:spcBef>
-              <a:spcAft>
-                <a:spcPts val="0"/>
-              </a:spcAft>
-            </a:pPr>
-            <a:r>
-              <a:rPr sz="1400" b="0" i="0">
-                <a:solidFill>
-                  <a:srgbClr val="5E6E7C"/>
-                </a:solidFill>
-                <a:latin typeface="Calibri"/>
-                <a:ea typeface="Calibri"/>
-                <a:cs typeface="Calibri"/>
-              </a:rPr>
-              <a:t>The simple baseline</a:t>
-            </a:r>
-          </a:p>
-        </p:txBody>
-      </p:sp>
-      <p:sp>
-        <p:nvSpPr>
-          <p:cNvPr id="18" name="Rounded Rectangle 17"/>
-          <p:cNvSpPr/>
-          <p:nvPr/>
-        </p:nvSpPr>
-        <p:spPr>
-          <a:xfrm>
-            <a:off x="8098536" y="1600200"/>
-            <a:ext cx="3633216" cy="3063240"/>
-          </a:xfrm>
-          <a:prstGeom prst="roundRect">
-            <a:avLst>
-              <a:gd name="adj" fmla="val 8000"/>
-            </a:avLst>
-          </a:prstGeom>
-          <a:solidFill>
-            <a:srgbClr val="FBEEE8"/>
-          </a:solidFill>
-          <a:ln w="12700">
-            <a:solidFill>
-              <a:srgbClr val="E3DBD0"/>
-            </a:solidFill>
-          </a:ln>
-        </p:spPr>
-        <p:style>
-          <a:lnRef idx="1">
-            <a:schemeClr val="accent1"/>
-          </a:lnRef>
-          <a:fillRef idx="3">
-            <a:schemeClr val="accent1"/>
-          </a:fillRef>
-          <a:effectRef idx="2">
-            <a:schemeClr val="accent1"/>
-          </a:effectRef>
-          <a:fontRef idx="minor">
-            <a:schemeClr val="lt1"/>
-          </a:fontRef>
-        </p:style>
-        <p:txBody>
-          <a:bodyPr rtlCol="0" anchor="ctr"/>
-          <a:lstStyle/>
-          <a:p>
-            <a:pPr algn="ctr"/>
-          </a:p>
-        </p:txBody>
-      </p:sp>
-      <p:sp>
-        <p:nvSpPr>
-          <p:cNvPr id="19" name="TextBox 18"/>
-          <p:cNvSpPr txBox="1"/>
-          <p:nvPr/>
-        </p:nvSpPr>
-        <p:spPr>
-          <a:xfrm>
-            <a:off x="8317992" y="1783080"/>
-            <a:ext cx="3221735" cy="274320"/>
-          </a:xfrm>
-          <a:prstGeom prst="rect">
-            <a:avLst/>
-          </a:prstGeom>
-          <a:noFill/>
-        </p:spPr>
-        <p:txBody>
-          <a:bodyPr wrap="square" lIns="0" rIns="0" tIns="0" bIns="0" anchor="t"/>
-          <a:lstStyle/>
-          <a:p>
-            <a:pPr algn="l">
-              <a:spcBef>
-                <a:spcPts val="0"/>
-              </a:spcBef>
-              <a:spcAft>
-                <a:spcPts val="0"/>
-              </a:spcAft>
-            </a:pPr>
-            <a:r>
-              <a:rPr sz="1300" b="1" i="0">
-                <a:solidFill>
-                  <a:srgbClr val="B84E2A"/>
-                </a:solidFill>
-                <a:latin typeface="Calibri"/>
-                <a:ea typeface="Calibri"/>
-                <a:cs typeface="Calibri"/>
-              </a:rPr>
-              <a:t>XTRAFLOW</a:t>
-            </a:r>
-          </a:p>
-        </p:txBody>
-      </p:sp>
-      <p:sp>
-        <p:nvSpPr>
-          <p:cNvPr id="20" name="TextBox 19"/>
-          <p:cNvSpPr txBox="1"/>
-          <p:nvPr/>
-        </p:nvSpPr>
-        <p:spPr>
-          <a:xfrm>
-            <a:off x="8317992" y="2240280"/>
-            <a:ext cx="3221735" cy="640080"/>
-          </a:xfrm>
-          <a:prstGeom prst="rect">
-            <a:avLst/>
-          </a:prstGeom>
-          <a:noFill/>
-        </p:spPr>
-        <p:txBody>
-          <a:bodyPr wrap="square" lIns="0" rIns="0" tIns="0" bIns="0" anchor="t"/>
-          <a:lstStyle/>
-          <a:p>
-            <a:pPr algn="l">
-              <a:spcBef>
-                <a:spcPts val="0"/>
-              </a:spcBef>
-              <a:spcAft>
-                <a:spcPts val="0"/>
-              </a:spcAft>
-            </a:pPr>
-            <a:r>
-              <a:rPr sz="3200" b="1" i="0">
-                <a:solidFill>
-                  <a:srgbClr val="B84E2A"/>
-                </a:solidFill>
-                <a:latin typeface="Georgia"/>
-                <a:ea typeface="Georgia"/>
-                <a:cs typeface="Georgia"/>
-              </a:rPr>
-              <a:t>—</a:t>
-            </a:r>
-          </a:p>
-        </p:txBody>
-      </p:sp>
-      <p:sp>
-        <p:nvSpPr>
-          <p:cNvPr id="21" name="TextBox 20"/>
-          <p:cNvSpPr txBox="1"/>
-          <p:nvPr/>
-        </p:nvSpPr>
-        <p:spPr>
-          <a:xfrm>
-            <a:off x="8317992" y="2926080"/>
-            <a:ext cx="3221735" cy="274320"/>
-          </a:xfrm>
-          <a:prstGeom prst="rect">
-            <a:avLst/>
-          </a:prstGeom>
-          <a:noFill/>
-        </p:spPr>
-        <p:txBody>
-          <a:bodyPr wrap="square" lIns="0" rIns="0" tIns="0" bIns="0" anchor="t"/>
-          <a:lstStyle/>
-          <a:p>
-            <a:pPr algn="l">
-              <a:spcBef>
-                <a:spcPts val="0"/>
-              </a:spcBef>
-              <a:spcAft>
-                <a:spcPts val="0"/>
-              </a:spcAft>
-            </a:pPr>
-            <a:r>
-              <a:rPr sz="1300" b="0" i="0">
-                <a:solidFill>
-                  <a:srgbClr val="5E6E7C"/>
-                </a:solidFill>
-                <a:latin typeface="Calibri"/>
-                <a:ea typeface="Calibri"/>
-                <a:cs typeface="Calibri"/>
-              </a:rPr>
-              <a:t>litres / vehicle</a:t>
-            </a:r>
-          </a:p>
-        </p:txBody>
-      </p:sp>
-      <p:sp>
-        <p:nvSpPr>
-          <p:cNvPr id="22" name="TextBox 21"/>
-          <p:cNvSpPr txBox="1"/>
-          <p:nvPr/>
-        </p:nvSpPr>
-        <p:spPr>
-          <a:xfrm>
-            <a:off x="8317992" y="3794760"/>
-            <a:ext cx="3221735" cy="365760"/>
-          </a:xfrm>
-          <a:prstGeom prst="rect">
-            <a:avLst/>
-          </a:prstGeom>
-          <a:noFill/>
-        </p:spPr>
-        <p:txBody>
-          <a:bodyPr wrap="square" lIns="0" rIns="0" tIns="0" bIns="0" anchor="t"/>
-          <a:lstStyle/>
-          <a:p>
-            <a:pPr algn="l">
-              <a:spcBef>
-                <a:spcPts val="0"/>
-              </a:spcBef>
-              <a:spcAft>
-                <a:spcPts val="0"/>
-              </a:spcAft>
-            </a:pPr>
-            <a:r>
-              <a:rPr sz="1400" b="0" i="0">
-                <a:solidFill>
-                  <a:srgbClr val="5E6E7C"/>
-                </a:solidFill>
-                <a:latin typeface="Calibri"/>
-                <a:ea typeface="Calibri"/>
-                <a:cs typeface="Calibri"/>
-              </a:rPr>
-              <a:t>Higher fuel</a:t>
-            </a:r>
-          </a:p>
-        </p:txBody>
-      </p:sp>
-      <p:sp>
-        <p:nvSpPr>
-          <p:cNvPr id="23" name="Rounded Rectangle 22"/>
-          <p:cNvSpPr/>
-          <p:nvPr/>
-        </p:nvSpPr>
-        <p:spPr>
-          <a:xfrm>
-            <a:off x="502920" y="4846320"/>
-            <a:ext cx="11228832" cy="1371600"/>
+            <a:off x="502920" y="1554480"/>
+            <a:ext cx="11228832" cy="4434840"/>
           </a:xfrm>
           <a:prstGeom prst="roundRect">
             <a:avLst>
@@ -5929,34 +5426,34 @@
       </p:sp>
       <p:sp>
         <p:nvSpPr>
-          <p:cNvPr id="24" name="TextBox 23"/>
-          <p:cNvSpPr txBox="1"/>
-          <p:nvPr/>
-        </p:nvSpPr>
-        <p:spPr>
-          <a:xfrm>
-            <a:off x="795528" y="5029200"/>
-            <a:ext cx="10680192" cy="320040"/>
-          </a:xfrm>
-          <a:prstGeom prst="rect">
-            <a:avLst/>
-          </a:prstGeom>
-          <a:noFill/>
-        </p:spPr>
-        <p:txBody>
-          <a:bodyPr wrap="square" lIns="0" rIns="0" tIns="0" bIns="0" anchor="t"/>
-          <a:lstStyle/>
-          <a:p>
-            <a:pPr algn="l">
-              <a:spcBef>
-                <a:spcPts val="0"/>
-              </a:spcBef>
-              <a:spcAft>
-                <a:spcPts val="0"/>
-              </a:spcAft>
-            </a:pPr>
-            <a:r>
-              <a:rPr sz="1200" b="1" i="0">
+          <p:cNvPr id="9" name="TextBox 8"/>
+          <p:cNvSpPr txBox="1"/>
+          <p:nvPr/>
+        </p:nvSpPr>
+        <p:spPr>
+          <a:xfrm>
+            <a:off x="868680" y="2148840"/>
+            <a:ext cx="10497311" cy="320040"/>
+          </a:xfrm>
+          <a:prstGeom prst="rect">
+            <a:avLst/>
+          </a:prstGeom>
+          <a:noFill/>
+        </p:spPr>
+        <p:txBody>
+          <a:bodyPr wrap="square" lIns="0" rIns="0" tIns="0" bIns="0" anchor="t"/>
+          <a:lstStyle/>
+          <a:p>
+            <a:pPr algn="l">
+              <a:spcBef>
+                <a:spcPts val="0"/>
+              </a:spcBef>
+              <a:spcAft>
+                <a:spcPts val="0"/>
+              </a:spcAft>
+            </a:pPr>
+            <a:r>
+              <a:rPr sz="1300" b="1" i="0">
                 <a:solidFill>
                   <a:srgbClr val="C4841D"/>
                 </a:solidFill>
@@ -5964,21 +5461,63 @@
                 <a:ea typeface="Calibri"/>
                 <a:cs typeface="Calibri"/>
               </a:rPr>
-              <a:t>DO NOT SCALE THIS TO A CITY</a:t>
-            </a:r>
-          </a:p>
-        </p:txBody>
-      </p:sp>
-      <p:sp>
-        <p:nvSpPr>
-          <p:cNvPr id="25" name="TextBox 24"/>
-          <p:cNvSpPr txBox="1"/>
-          <p:nvPr/>
-        </p:nvSpPr>
-        <p:spPr>
-          <a:xfrm>
-            <a:off x="795528" y="5394960"/>
-            <a:ext cx="10680192" cy="594360"/>
+              <a:t>SIDE-BY-SIDE DEMO</a:t>
+            </a:r>
+          </a:p>
+        </p:txBody>
+      </p:sp>
+      <p:sp>
+        <p:nvSpPr>
+          <p:cNvPr id="10" name="TextBox 9"/>
+          <p:cNvSpPr txBox="1"/>
+          <p:nvPr/>
+        </p:nvSpPr>
+        <p:spPr>
+          <a:xfrm>
+            <a:off x="868680" y="2743200"/>
+            <a:ext cx="10497311" cy="640080"/>
+          </a:xfrm>
+          <a:prstGeom prst="rect">
+            <a:avLst/>
+          </a:prstGeom>
+          <a:noFill/>
+        </p:spPr>
+        <p:txBody>
+          <a:bodyPr wrap="square" lIns="0" rIns="0" tIns="0" bIns="0" anchor="t"/>
+          <a:lstStyle/>
+          <a:p>
+            <a:pPr algn="l">
+              <a:spcBef>
+                <a:spcPts val="0"/>
+              </a:spcBef>
+              <a:spcAft>
+                <a:spcPts val="0"/>
+              </a:spcAft>
+            </a:pPr>
+            <a:r>
+              <a:rPr sz="2800" b="1" i="0">
+                <a:solidFill>
+                  <a:srgbClr val="FFFFFF"/>
+                </a:solidFill>
+                <a:latin typeface="Georgia"/>
+                <a:ea typeface="Georgia"/>
+                <a:cs typeface="Georgia"/>
+              </a:rPr>
+              <a:t>results/demo/demo.mp4</a:t>
+            </a:r>
+          </a:p>
+        </p:txBody>
+      </p:sp>
+      <p:sp>
+        <p:nvSpPr>
+          <p:cNvPr id="11" name="TextBox 10"/>
+          <p:cNvSpPr txBox="1"/>
+          <p:nvPr/>
+        </p:nvSpPr>
+        <p:spPr>
+          <a:xfrm>
+            <a:off x="868680" y="3566160"/>
+            <a:ext cx="10497311" cy="1097280"/>
           </a:xfrm>
           <a:prstGeom prst="rect">
             <a:avLst/>
@@ -6000,13 +5539,13 @@
             <a:r>
               <a:rPr sz="1600" b="0" i="0">
                 <a:solidFill>
-                  <a:srgbClr val="FFFFFF"/>
+                  <a:srgbClr val="C9D4DC"/>
                 </a:solidFill>
                 <a:latin typeface="Calibri"/>
                 <a:ea typeface="Calibri"/>
                 <a:cs typeface="Calibri"/>
               </a:rPr>
-              <a:t>The coordination variant did not reduce fuel. A corridor needs its own design.</a:t>
+              <a:t>Play this file beside the talk. PowerPoint does not need the binary embedded here. Same demand seed: fixed timing versus XtraFlow.</a:t>
             </a:r>
           </a:p>
         </p:txBody>
@@ -6117,7 +5656,7 @@
                 <a:ea typeface="Calibri"/>
                 <a:cs typeface="Calibri"/>
               </a:rPr>
-              <a:t>BESIDE THE HEADLINE</a:t>
+              <a:t>IF THE CAMERA MISSES</a:t>
             </a:r>
           </a:p>
         </p:txBody>
@@ -6159,7 +5698,7 @@
                 <a:ea typeface="Georgia"/>
                 <a:cs typeface="Georgia"/>
               </a:rPr>
-              <a:t>Safety: decrease. Emissions: ci overlap.</a:t>
+              <a:t>At the highest miss rate, mean fuel is under the reference lines</a:t>
             </a:r>
           </a:p>
         </p:txBody>
@@ -6201,7 +5740,7 @@
                 <a:ea typeface="Calibri"/>
                 <a:cs typeface="Calibri"/>
               </a:rPr>
-              <a:t>Both lines are the verdict fields in the loaded JSON, not a fixed sentence.</a:t>
+              <a:t>Peak, one-sided. 3 seeds. Vehicles are dropped from the detector at random.</a:t>
             </a:r>
           </a:p>
         </p:txBody>
@@ -6299,7 +5838,7 @@
         <p:spPr>
           <a:xfrm>
             <a:off x="502920" y="1600200"/>
-            <a:ext cx="3633216" cy="3794760"/>
+            <a:ext cx="2697479" cy="2240280"/>
           </a:xfrm>
           <a:prstGeom prst="roundRect">
             <a:avLst>
@@ -6339,99 +5878,56 @@
       </p:sp>
       <p:sp>
         <p:nvSpPr>
-          <p:cNvPr id="9" name="Rectangle 8"/>
-          <p:cNvSpPr/>
-          <p:nvPr/>
-        </p:nvSpPr>
-        <p:spPr>
-          <a:xfrm>
-            <a:off x="740664" y="1828800"/>
-            <a:ext cx="502920" cy="41148"/>
-          </a:xfrm>
-          <a:prstGeom prst="rect">
-            <a:avLst/>
-          </a:prstGeom>
-          <a:solidFill>
-            <a:srgbClr val="1B6B5A"/>
-          </a:solidFill>
-          <a:ln>
-            <a:noFill/>
-          </a:ln>
-        </p:spPr>
-        <p:style>
-          <a:lnRef idx="1">
-            <a:schemeClr val="accent1"/>
-          </a:lnRef>
-          <a:fillRef idx="3">
-            <a:schemeClr val="accent1"/>
-          </a:fillRef>
-          <a:effectRef idx="2">
-            <a:schemeClr val="accent1"/>
-          </a:effectRef>
-          <a:fontRef idx="minor">
-            <a:schemeClr val="lt1"/>
-          </a:fontRef>
-        </p:style>
-        <p:txBody>
-          <a:bodyPr rtlCol="0" anchor="ctr"/>
-          <a:lstStyle/>
-          <a:p>
-            <a:pPr algn="ctr"/>
-          </a:p>
-        </p:txBody>
-      </p:sp>
-      <p:sp>
-        <p:nvSpPr>
-          <p:cNvPr id="10" name="TextBox 9"/>
-          <p:cNvSpPr txBox="1"/>
-          <p:nvPr/>
-        </p:nvSpPr>
-        <p:spPr>
-          <a:xfrm>
-            <a:off x="722376" y="2011680"/>
-            <a:ext cx="3221735" cy="274320"/>
-          </a:xfrm>
-          <a:prstGeom prst="rect">
-            <a:avLst/>
-          </a:prstGeom>
-          <a:noFill/>
-        </p:spPr>
-        <p:txBody>
-          <a:bodyPr wrap="square" lIns="0" rIns="0" tIns="0" bIns="0" anchor="t"/>
-          <a:lstStyle/>
-          <a:p>
-            <a:pPr algn="l">
-              <a:spcBef>
-                <a:spcPts val="0"/>
-              </a:spcBef>
-              <a:spcAft>
-                <a:spcPts val="0"/>
-              </a:spcAft>
-            </a:pPr>
-            <a:r>
-              <a:rPr sz="1200" b="1" i="0">
-                <a:solidFill>
-                  <a:srgbClr val="1B6B5A"/>
+          <p:cNvPr id="9" name="TextBox 8"/>
+          <p:cNvSpPr txBox="1"/>
+          <p:nvPr/>
+        </p:nvSpPr>
+        <p:spPr>
+          <a:xfrm>
+            <a:off x="667512" y="1755648"/>
+            <a:ext cx="2404872" cy="274320"/>
+          </a:xfrm>
+          <a:prstGeom prst="rect">
+            <a:avLst/>
+          </a:prstGeom>
+          <a:noFill/>
+        </p:spPr>
+        <p:txBody>
+          <a:bodyPr wrap="square" lIns="0" rIns="0" tIns="0" bIns="0" anchor="t"/>
+          <a:lstStyle/>
+          <a:p>
+            <a:pPr algn="l">
+              <a:spcBef>
+                <a:spcPts val="0"/>
+              </a:spcBef>
+              <a:spcAft>
+                <a:spcPts val="0"/>
+              </a:spcAft>
+            </a:pPr>
+            <a:r>
+              <a:rPr sz="1300" b="1" i="0">
+                <a:solidFill>
+                  <a:srgbClr val="C4841D"/>
                 </a:solidFill>
                 <a:latin typeface="Calibri"/>
                 <a:ea typeface="Calibri"/>
                 <a:cs typeface="Calibri"/>
               </a:rPr>
-              <a:t>SAFETY</a:t>
-            </a:r>
-          </a:p>
-        </p:txBody>
-      </p:sp>
-      <p:sp>
-        <p:nvSpPr>
-          <p:cNvPr id="11" name="TextBox 10"/>
-          <p:cNvSpPr txBox="1"/>
-          <p:nvPr/>
-        </p:nvSpPr>
-        <p:spPr>
-          <a:xfrm>
-            <a:off x="722376" y="2331720"/>
-            <a:ext cx="3221735" cy="777240"/>
+              <a:t>0% missed</a:t>
+            </a:r>
+          </a:p>
+        </p:txBody>
+      </p:sp>
+      <p:sp>
+        <p:nvSpPr>
+          <p:cNvPr id="10" name="TextBox 9"/>
+          <p:cNvSpPr txBox="1"/>
+          <p:nvPr/>
+        </p:nvSpPr>
+        <p:spPr>
+          <a:xfrm>
+            <a:off x="667512" y="2148840"/>
+            <a:ext cx="2404872" cy="548640"/>
           </a:xfrm>
           <a:prstGeom prst="rect">
             <a:avLst/>
@@ -6453,55 +5949,97 @@
             <a:r>
               <a:rPr sz="2800" b="1" i="0">
                 <a:solidFill>
-                  <a:srgbClr val="1A2834"/>
+                  <a:srgbClr val="1B6B5A"/>
                 </a:solidFill>
                 <a:latin typeface="Georgia"/>
                 <a:ea typeface="Georgia"/>
                 <a:cs typeface="Georgia"/>
               </a:rPr>
-              <a:t>decrease</a:t>
-            </a:r>
-          </a:p>
-        </p:txBody>
-      </p:sp>
-      <p:sp>
-        <p:nvSpPr>
-          <p:cNvPr id="12" name="TextBox 11"/>
-          <p:cNvSpPr txBox="1"/>
-          <p:nvPr/>
-        </p:nvSpPr>
-        <p:spPr>
-          <a:xfrm>
-            <a:off x="722376" y="3246120"/>
-            <a:ext cx="3194304" cy="1874519"/>
-          </a:xfrm>
-          <a:prstGeom prst="rect">
-            <a:avLst/>
-          </a:prstGeom>
-          <a:noFill/>
-        </p:spPr>
-        <p:txBody>
-          <a:bodyPr wrap="square" lIns="0" rIns="0" tIns="0" bIns="0" anchor="t"/>
-          <a:lstStyle/>
-          <a:p>
-            <a:pPr algn="l">
-              <a:spcBef>
-                <a:spcPts val="0"/>
-              </a:spcBef>
-              <a:spcAft>
-                <a:spcPts val="0"/>
-              </a:spcAft>
-            </a:pPr>
-            <a:r>
-              <a:rPr sz="1500" b="0" i="0">
-                <a:solidFill>
-                  <a:srgbClr val="1A2834"/>
+              <a:t>0.123</a:t>
+            </a:r>
+          </a:p>
+        </p:txBody>
+      </p:sp>
+      <p:sp>
+        <p:nvSpPr>
+          <p:cNvPr id="11" name="TextBox 10"/>
+          <p:cNvSpPr txBox="1"/>
+          <p:nvPr/>
+        </p:nvSpPr>
+        <p:spPr>
+          <a:xfrm>
+            <a:off x="667512" y="2788920"/>
+            <a:ext cx="2404872" cy="274320"/>
+          </a:xfrm>
+          <a:prstGeom prst="rect">
+            <a:avLst/>
+          </a:prstGeom>
+          <a:noFill/>
+        </p:spPr>
+        <p:txBody>
+          <a:bodyPr wrap="square" lIns="0" rIns="0" tIns="0" bIns="0" anchor="t"/>
+          <a:lstStyle/>
+          <a:p>
+            <a:pPr algn="l">
+              <a:spcBef>
+                <a:spcPts val="0"/>
+              </a:spcBef>
+              <a:spcAft>
+                <a:spcPts val="0"/>
+              </a:spcAft>
+            </a:pPr>
+            <a:r>
+              <a:rPr sz="1300" b="0" i="0">
+                <a:solidFill>
+                  <a:srgbClr val="5E6E7C"/>
                 </a:solidFill>
                 <a:latin typeface="Calibri"/>
                 <a:ea typeface="Calibri"/>
                 <a:cs typeface="Calibri"/>
               </a:rPr>
-              <a:t>Time-to-collision conflicts from the simulator. A model count, not a crash record.</a:t>
+              <a:t>litres / vehicle</a:t>
+            </a:r>
+          </a:p>
+        </p:txBody>
+      </p:sp>
+      <p:sp>
+        <p:nvSpPr>
+          <p:cNvPr id="12" name="TextBox 11"/>
+          <p:cNvSpPr txBox="1"/>
+          <p:nvPr/>
+        </p:nvSpPr>
+        <p:spPr>
+          <a:xfrm>
+            <a:off x="667512" y="3200400"/>
+            <a:ext cx="2404872" cy="320040"/>
+          </a:xfrm>
+          <a:prstGeom prst="rect">
+            <a:avLst/>
+          </a:prstGeom>
+          <a:noFill/>
+        </p:spPr>
+        <p:txBody>
+          <a:bodyPr wrap="square" lIns="0" rIns="0" tIns="0" bIns="0" anchor="t"/>
+          <a:lstStyle/>
+          <a:p>
+            <a:pPr algn="l">
+              <a:spcBef>
+                <a:spcPts val="0"/>
+              </a:spcBef>
+              <a:spcAft>
+                <a:spcPts val="0"/>
+              </a:spcAft>
+            </a:pPr>
+            <a:r>
+              <a:rPr sz="1200" b="0" i="0">
+                <a:solidFill>
+                  <a:srgbClr val="5E6E7C"/>
+                </a:solidFill>
+                <a:latin typeface="Calibri"/>
+                <a:ea typeface="Calibri"/>
+                <a:cs typeface="Calibri"/>
+              </a:rPr>
+              <a:t>± 0.002   ·   n=3</a:t>
             </a:r>
           </a:p>
         </p:txBody>
@@ -6514,8 +6052,8 @@
         </p:nvSpPr>
         <p:spPr>
           <a:xfrm>
-            <a:off x="4300728" y="1600200"/>
-            <a:ext cx="3633216" cy="3794760"/>
+            <a:off x="3346704" y="1600200"/>
+            <a:ext cx="2697479" cy="2240280"/>
           </a:xfrm>
           <a:prstGeom prst="roundRect">
             <a:avLst>
@@ -6555,99 +6093,56 @@
       </p:sp>
       <p:sp>
         <p:nvSpPr>
-          <p:cNvPr id="14" name="Rectangle 13"/>
-          <p:cNvSpPr/>
-          <p:nvPr/>
-        </p:nvSpPr>
-        <p:spPr>
-          <a:xfrm>
-            <a:off x="4538472" y="1828800"/>
-            <a:ext cx="502920" cy="41148"/>
-          </a:xfrm>
-          <a:prstGeom prst="rect">
-            <a:avLst/>
-          </a:prstGeom>
-          <a:solidFill>
-            <a:srgbClr val="1B6B5A"/>
-          </a:solidFill>
-          <a:ln>
-            <a:noFill/>
-          </a:ln>
-        </p:spPr>
-        <p:style>
-          <a:lnRef idx="1">
-            <a:schemeClr val="accent1"/>
-          </a:lnRef>
-          <a:fillRef idx="3">
-            <a:schemeClr val="accent1"/>
-          </a:fillRef>
-          <a:effectRef idx="2">
-            <a:schemeClr val="accent1"/>
-          </a:effectRef>
-          <a:fontRef idx="minor">
-            <a:schemeClr val="lt1"/>
-          </a:fontRef>
-        </p:style>
-        <p:txBody>
-          <a:bodyPr rtlCol="0" anchor="ctr"/>
-          <a:lstStyle/>
-          <a:p>
-            <a:pPr algn="ctr"/>
-          </a:p>
-        </p:txBody>
-      </p:sp>
-      <p:sp>
-        <p:nvSpPr>
-          <p:cNvPr id="15" name="TextBox 14"/>
-          <p:cNvSpPr txBox="1"/>
-          <p:nvPr/>
-        </p:nvSpPr>
-        <p:spPr>
-          <a:xfrm>
-            <a:off x="4520184" y="2011680"/>
-            <a:ext cx="3221735" cy="274320"/>
-          </a:xfrm>
-          <a:prstGeom prst="rect">
-            <a:avLst/>
-          </a:prstGeom>
-          <a:noFill/>
-        </p:spPr>
-        <p:txBody>
-          <a:bodyPr wrap="square" lIns="0" rIns="0" tIns="0" bIns="0" anchor="t"/>
-          <a:lstStyle/>
-          <a:p>
-            <a:pPr algn="l">
-              <a:spcBef>
-                <a:spcPts val="0"/>
-              </a:spcBef>
-              <a:spcAft>
-                <a:spcPts val="0"/>
-              </a:spcAft>
-            </a:pPr>
-            <a:r>
-              <a:rPr sz="1200" b="1" i="0">
-                <a:solidFill>
-                  <a:srgbClr val="1B6B5A"/>
+          <p:cNvPr id="14" name="TextBox 13"/>
+          <p:cNvSpPr txBox="1"/>
+          <p:nvPr/>
+        </p:nvSpPr>
+        <p:spPr>
+          <a:xfrm>
+            <a:off x="3511296" y="1755648"/>
+            <a:ext cx="2404872" cy="274320"/>
+          </a:xfrm>
+          <a:prstGeom prst="rect">
+            <a:avLst/>
+          </a:prstGeom>
+          <a:noFill/>
+        </p:spPr>
+        <p:txBody>
+          <a:bodyPr wrap="square" lIns="0" rIns="0" tIns="0" bIns="0" anchor="t"/>
+          <a:lstStyle/>
+          <a:p>
+            <a:pPr algn="l">
+              <a:spcBef>
+                <a:spcPts val="0"/>
+              </a:spcBef>
+              <a:spcAft>
+                <a:spcPts val="0"/>
+              </a:spcAft>
+            </a:pPr>
+            <a:r>
+              <a:rPr sz="1300" b="1" i="0">
+                <a:solidFill>
+                  <a:srgbClr val="C4841D"/>
                 </a:solidFill>
                 <a:latin typeface="Calibri"/>
                 <a:ea typeface="Calibri"/>
                 <a:cs typeface="Calibri"/>
               </a:rPr>
-              <a:t>EMISSIONS MODEL</a:t>
-            </a:r>
-          </a:p>
-        </p:txBody>
-      </p:sp>
-      <p:sp>
-        <p:nvSpPr>
-          <p:cNvPr id="16" name="TextBox 15"/>
-          <p:cNvSpPr txBox="1"/>
-          <p:nvPr/>
-        </p:nvSpPr>
-        <p:spPr>
-          <a:xfrm>
-            <a:off x="4520184" y="2331720"/>
-            <a:ext cx="3221735" cy="777240"/>
+              <a:t>10% missed</a:t>
+            </a:r>
+          </a:p>
+        </p:txBody>
+      </p:sp>
+      <p:sp>
+        <p:nvSpPr>
+          <p:cNvPr id="15" name="TextBox 14"/>
+          <p:cNvSpPr txBox="1"/>
+          <p:nvPr/>
+        </p:nvSpPr>
+        <p:spPr>
+          <a:xfrm>
+            <a:off x="3511296" y="2148840"/>
+            <a:ext cx="2404872" cy="548640"/>
           </a:xfrm>
           <a:prstGeom prst="rect">
             <a:avLst/>
@@ -6669,55 +6164,97 @@
             <a:r>
               <a:rPr sz="2800" b="1" i="0">
                 <a:solidFill>
-                  <a:srgbClr val="1A2834"/>
+                  <a:srgbClr val="1B6B5A"/>
                 </a:solidFill>
                 <a:latin typeface="Georgia"/>
                 <a:ea typeface="Georgia"/>
                 <a:cs typeface="Georgia"/>
               </a:rPr>
-              <a:t>ci overlap</a:t>
-            </a:r>
-          </a:p>
-        </p:txBody>
-      </p:sp>
-      <p:sp>
-        <p:nvSpPr>
-          <p:cNvPr id="17" name="TextBox 16"/>
-          <p:cNvSpPr txBox="1"/>
-          <p:nvPr/>
-        </p:nvSpPr>
-        <p:spPr>
-          <a:xfrm>
-            <a:off x="4520184" y="3246120"/>
-            <a:ext cx="3194304" cy="1874519"/>
-          </a:xfrm>
-          <a:prstGeom prst="rect">
-            <a:avLst/>
-          </a:prstGeom>
-          <a:noFill/>
-        </p:spPr>
-        <p:txBody>
-          <a:bodyPr wrap="square" lIns="0" rIns="0" tIns="0" bIns="0" anchor="t"/>
-          <a:lstStyle/>
-          <a:p>
-            <a:pPr algn="l">
-              <a:spcBef>
-                <a:spcPts val="0"/>
-              </a:spcBef>
-              <a:spcAft>
-                <a:spcPts val="0"/>
-              </a:spcAft>
-            </a:pPr>
-            <a:r>
-              <a:rPr sz="1500" b="0" i="0">
-                <a:solidFill>
-                  <a:srgbClr val="1A2834"/>
+              <a:t>0.123</a:t>
+            </a:r>
+          </a:p>
+        </p:txBody>
+      </p:sp>
+      <p:sp>
+        <p:nvSpPr>
+          <p:cNvPr id="16" name="TextBox 15"/>
+          <p:cNvSpPr txBox="1"/>
+          <p:nvPr/>
+        </p:nvSpPr>
+        <p:spPr>
+          <a:xfrm>
+            <a:off x="3511296" y="2788920"/>
+            <a:ext cx="2404872" cy="274320"/>
+          </a:xfrm>
+          <a:prstGeom prst="rect">
+            <a:avLst/>
+          </a:prstGeom>
+          <a:noFill/>
+        </p:spPr>
+        <p:txBody>
+          <a:bodyPr wrap="square" lIns="0" rIns="0" tIns="0" bIns="0" anchor="t"/>
+          <a:lstStyle/>
+          <a:p>
+            <a:pPr algn="l">
+              <a:spcBef>
+                <a:spcPts val="0"/>
+              </a:spcBef>
+              <a:spcAft>
+                <a:spcPts val="0"/>
+              </a:spcAft>
+            </a:pPr>
+            <a:r>
+              <a:rPr sz="1300" b="0" i="0">
+                <a:solidFill>
+                  <a:srgbClr val="5E6E7C"/>
                 </a:solidFill>
                 <a:latin typeface="Calibri"/>
                 <a:ea typeface="Calibri"/>
                 <a:cs typeface="Calibri"/>
               </a:rPr>
-              <a:t>Primary model 13.9%. Alternate model 13.7%. The reduction shrinks. It does not flip.</a:t>
+              <a:t>litres / vehicle</a:t>
+            </a:r>
+          </a:p>
+        </p:txBody>
+      </p:sp>
+      <p:sp>
+        <p:nvSpPr>
+          <p:cNvPr id="17" name="TextBox 16"/>
+          <p:cNvSpPr txBox="1"/>
+          <p:nvPr/>
+        </p:nvSpPr>
+        <p:spPr>
+          <a:xfrm>
+            <a:off x="3511296" y="3200400"/>
+            <a:ext cx="2404872" cy="320040"/>
+          </a:xfrm>
+          <a:prstGeom prst="rect">
+            <a:avLst/>
+          </a:prstGeom>
+          <a:noFill/>
+        </p:spPr>
+        <p:txBody>
+          <a:bodyPr wrap="square" lIns="0" rIns="0" tIns="0" bIns="0" anchor="t"/>
+          <a:lstStyle/>
+          <a:p>
+            <a:pPr algn="l">
+              <a:spcBef>
+                <a:spcPts val="0"/>
+              </a:spcBef>
+              <a:spcAft>
+                <a:spcPts val="0"/>
+              </a:spcAft>
+            </a:pPr>
+            <a:r>
+              <a:rPr sz="1200" b="0" i="0">
+                <a:solidFill>
+                  <a:srgbClr val="5E6E7C"/>
+                </a:solidFill>
+                <a:latin typeface="Calibri"/>
+                <a:ea typeface="Calibri"/>
+                <a:cs typeface="Calibri"/>
+              </a:rPr>
+              <a:t>± 0.002   ·   n=3</a:t>
             </a:r>
           </a:p>
         </p:txBody>
@@ -6730,8 +6267,8 @@
         </p:nvSpPr>
         <p:spPr>
           <a:xfrm>
-            <a:off x="8098536" y="1600200"/>
-            <a:ext cx="3633216" cy="3794760"/>
+            <a:off x="6190488" y="1600200"/>
+            <a:ext cx="2697479" cy="2240280"/>
           </a:xfrm>
           <a:prstGeom prst="roundRect">
             <a:avLst>
@@ -6771,23 +6308,195 @@
       </p:sp>
       <p:sp>
         <p:nvSpPr>
-          <p:cNvPr id="19" name="Rectangle 18"/>
+          <p:cNvPr id="19" name="TextBox 18"/>
+          <p:cNvSpPr txBox="1"/>
+          <p:nvPr/>
+        </p:nvSpPr>
+        <p:spPr>
+          <a:xfrm>
+            <a:off x="6355079" y="1755648"/>
+            <a:ext cx="2404872" cy="274320"/>
+          </a:xfrm>
+          <a:prstGeom prst="rect">
+            <a:avLst/>
+          </a:prstGeom>
+          <a:noFill/>
+        </p:spPr>
+        <p:txBody>
+          <a:bodyPr wrap="square" lIns="0" rIns="0" tIns="0" bIns="0" anchor="t"/>
+          <a:lstStyle/>
+          <a:p>
+            <a:pPr algn="l">
+              <a:spcBef>
+                <a:spcPts val="0"/>
+              </a:spcBef>
+              <a:spcAft>
+                <a:spcPts val="0"/>
+              </a:spcAft>
+            </a:pPr>
+            <a:r>
+              <a:rPr sz="1300" b="1" i="0">
+                <a:solidFill>
+                  <a:srgbClr val="C4841D"/>
+                </a:solidFill>
+                <a:latin typeface="Calibri"/>
+                <a:ea typeface="Calibri"/>
+                <a:cs typeface="Calibri"/>
+              </a:rPr>
+              <a:t>20% missed</a:t>
+            </a:r>
+          </a:p>
+        </p:txBody>
+      </p:sp>
+      <p:sp>
+        <p:nvSpPr>
+          <p:cNvPr id="20" name="TextBox 19"/>
+          <p:cNvSpPr txBox="1"/>
+          <p:nvPr/>
+        </p:nvSpPr>
+        <p:spPr>
+          <a:xfrm>
+            <a:off x="6355079" y="2148840"/>
+            <a:ext cx="2404872" cy="548640"/>
+          </a:xfrm>
+          <a:prstGeom prst="rect">
+            <a:avLst/>
+          </a:prstGeom>
+          <a:noFill/>
+        </p:spPr>
+        <p:txBody>
+          <a:bodyPr wrap="square" lIns="0" rIns="0" tIns="0" bIns="0" anchor="t"/>
+          <a:lstStyle/>
+          <a:p>
+            <a:pPr algn="l">
+              <a:spcBef>
+                <a:spcPts val="0"/>
+              </a:spcBef>
+              <a:spcAft>
+                <a:spcPts val="0"/>
+              </a:spcAft>
+            </a:pPr>
+            <a:r>
+              <a:rPr sz="2800" b="1" i="0">
+                <a:solidFill>
+                  <a:srgbClr val="1B6B5A"/>
+                </a:solidFill>
+                <a:latin typeface="Georgia"/>
+                <a:ea typeface="Georgia"/>
+                <a:cs typeface="Georgia"/>
+              </a:rPr>
+              <a:t>0.124</a:t>
+            </a:r>
+          </a:p>
+        </p:txBody>
+      </p:sp>
+      <p:sp>
+        <p:nvSpPr>
+          <p:cNvPr id="21" name="TextBox 20"/>
+          <p:cNvSpPr txBox="1"/>
+          <p:nvPr/>
+        </p:nvSpPr>
+        <p:spPr>
+          <a:xfrm>
+            <a:off x="6355079" y="2788920"/>
+            <a:ext cx="2404872" cy="274320"/>
+          </a:xfrm>
+          <a:prstGeom prst="rect">
+            <a:avLst/>
+          </a:prstGeom>
+          <a:noFill/>
+        </p:spPr>
+        <p:txBody>
+          <a:bodyPr wrap="square" lIns="0" rIns="0" tIns="0" bIns="0" anchor="t"/>
+          <a:lstStyle/>
+          <a:p>
+            <a:pPr algn="l">
+              <a:spcBef>
+                <a:spcPts val="0"/>
+              </a:spcBef>
+              <a:spcAft>
+                <a:spcPts val="0"/>
+              </a:spcAft>
+            </a:pPr>
+            <a:r>
+              <a:rPr sz="1300" b="0" i="0">
+                <a:solidFill>
+                  <a:srgbClr val="5E6E7C"/>
+                </a:solidFill>
+                <a:latin typeface="Calibri"/>
+                <a:ea typeface="Calibri"/>
+                <a:cs typeface="Calibri"/>
+              </a:rPr>
+              <a:t>litres / vehicle</a:t>
+            </a:r>
+          </a:p>
+        </p:txBody>
+      </p:sp>
+      <p:sp>
+        <p:nvSpPr>
+          <p:cNvPr id="22" name="TextBox 21"/>
+          <p:cNvSpPr txBox="1"/>
+          <p:nvPr/>
+        </p:nvSpPr>
+        <p:spPr>
+          <a:xfrm>
+            <a:off x="6355079" y="3200400"/>
+            <a:ext cx="2404872" cy="320040"/>
+          </a:xfrm>
+          <a:prstGeom prst="rect">
+            <a:avLst/>
+          </a:prstGeom>
+          <a:noFill/>
+        </p:spPr>
+        <p:txBody>
+          <a:bodyPr wrap="square" lIns="0" rIns="0" tIns="0" bIns="0" anchor="t"/>
+          <a:lstStyle/>
+          <a:p>
+            <a:pPr algn="l">
+              <a:spcBef>
+                <a:spcPts val="0"/>
+              </a:spcBef>
+              <a:spcAft>
+                <a:spcPts val="0"/>
+              </a:spcAft>
+            </a:pPr>
+            <a:r>
+              <a:rPr sz="1200" b="0" i="0">
+                <a:solidFill>
+                  <a:srgbClr val="5E6E7C"/>
+                </a:solidFill>
+                <a:latin typeface="Calibri"/>
+                <a:ea typeface="Calibri"/>
+                <a:cs typeface="Calibri"/>
+              </a:rPr>
+              <a:t>± 0.001   ·   n=3</a:t>
+            </a:r>
+          </a:p>
+        </p:txBody>
+      </p:sp>
+      <p:sp>
+        <p:nvSpPr>
+          <p:cNvPr id="23" name="Rounded Rectangle 22"/>
           <p:cNvSpPr/>
           <p:nvPr/>
         </p:nvSpPr>
         <p:spPr>
           <a:xfrm>
-            <a:off x="8336280" y="1828800"/>
-            <a:ext cx="502920" cy="41148"/>
-          </a:xfrm>
-          <a:prstGeom prst="rect">
-            <a:avLst/>
+            <a:off x="9034272" y="1600200"/>
+            <a:ext cx="2697479" cy="2240280"/>
+          </a:xfrm>
+          <a:prstGeom prst="roundRect">
+            <a:avLst>
+              <a:gd name="adj" fmla="val 8000"/>
+            </a:avLst>
           </a:prstGeom>
           <a:solidFill>
-            <a:srgbClr val="C4841D"/>
+            <a:srgbClr val="FFFFFF"/>
           </a:solidFill>
-          <a:ln>
-            <a:noFill/>
+          <a:ln w="12700">
+            <a:solidFill>
+              <a:srgbClr val="E3DBD0"/>
+            </a:solidFill>
           </a:ln>
         </p:spPr>
         <p:style>
@@ -6814,34 +6523,34 @@
       </p:sp>
       <p:sp>
         <p:nvSpPr>
-          <p:cNvPr id="20" name="TextBox 19"/>
-          <p:cNvSpPr txBox="1"/>
-          <p:nvPr/>
-        </p:nvSpPr>
-        <p:spPr>
-          <a:xfrm>
-            <a:off x="8317992" y="2011680"/>
-            <a:ext cx="3221735" cy="274320"/>
-          </a:xfrm>
-          <a:prstGeom prst="rect">
-            <a:avLst/>
-          </a:prstGeom>
-          <a:noFill/>
-        </p:spPr>
-        <p:txBody>
-          <a:bodyPr wrap="square" lIns="0" rIns="0" tIns="0" bIns="0" anchor="t"/>
-          <a:lstStyle/>
-          <a:p>
-            <a:pPr algn="l">
-              <a:spcBef>
-                <a:spcPts val="0"/>
-              </a:spcBef>
-              <a:spcAft>
-                <a:spcPts val="0"/>
-              </a:spcAft>
-            </a:pPr>
-            <a:r>
-              <a:rPr sz="1200" b="1" i="0">
+          <p:cNvPr id="24" name="TextBox 23"/>
+          <p:cNvSpPr txBox="1"/>
+          <p:nvPr/>
+        </p:nvSpPr>
+        <p:spPr>
+          <a:xfrm>
+            <a:off x="9198864" y="1755648"/>
+            <a:ext cx="2404872" cy="274320"/>
+          </a:xfrm>
+          <a:prstGeom prst="rect">
+            <a:avLst/>
+          </a:prstGeom>
+          <a:noFill/>
+        </p:spPr>
+        <p:txBody>
+          <a:bodyPr wrap="square" lIns="0" rIns="0" tIns="0" bIns="0" anchor="t"/>
+          <a:lstStyle/>
+          <a:p>
+            <a:pPr algn="l">
+              <a:spcBef>
+                <a:spcPts val="0"/>
+              </a:spcBef>
+              <a:spcAft>
+                <a:spcPts val="0"/>
+              </a:spcAft>
+            </a:pPr>
+            <a:r>
+              <a:rPr sz="1300" b="1" i="0">
                 <a:solidFill>
                   <a:srgbClr val="C4841D"/>
                 </a:solidFill>
@@ -6849,21 +6558,21 @@
                 <a:ea typeface="Calibri"/>
                 <a:cs typeface="Calibri"/>
               </a:rPr>
-              <a:t>PERCEPTION</a:t>
-            </a:r>
-          </a:p>
-        </p:txBody>
-      </p:sp>
-      <p:sp>
-        <p:nvSpPr>
-          <p:cNvPr id="21" name="TextBox 20"/>
-          <p:cNvSpPr txBox="1"/>
-          <p:nvPr/>
-        </p:nvSpPr>
-        <p:spPr>
-          <a:xfrm>
-            <a:off x="8317992" y="2331720"/>
-            <a:ext cx="3221735" cy="777240"/>
+              <a:t>30% missed</a:t>
+            </a:r>
+          </a:p>
+        </p:txBody>
+      </p:sp>
+      <p:sp>
+        <p:nvSpPr>
+          <p:cNvPr id="25" name="TextBox 24"/>
+          <p:cNvSpPr txBox="1"/>
+          <p:nvPr/>
+        </p:nvSpPr>
+        <p:spPr>
+          <a:xfrm>
+            <a:off x="9198864" y="2148840"/>
+            <a:ext cx="2404872" cy="548640"/>
           </a:xfrm>
           <a:prstGeom prst="rect">
             <a:avLst/>
@@ -6885,55 +6594,396 @@
             <a:r>
               <a:rPr sz="2800" b="1" i="0">
                 <a:solidFill>
-                  <a:srgbClr val="1A2834"/>
+                  <a:srgbClr val="1B6B5A"/>
                 </a:solidFill>
                 <a:latin typeface="Georgia"/>
                 <a:ea typeface="Georgia"/>
                 <a:cs typeface="Georgia"/>
               </a:rPr>
-              <a:t>Assumed</a:t>
-            </a:r>
-          </a:p>
-        </p:txBody>
-      </p:sp>
-      <p:sp>
-        <p:nvSpPr>
-          <p:cNvPr id="22" name="TextBox 21"/>
-          <p:cNvSpPr txBox="1"/>
-          <p:nvPr/>
-        </p:nvSpPr>
-        <p:spPr>
-          <a:xfrm>
-            <a:off x="8317992" y="3246120"/>
-            <a:ext cx="3194304" cy="1874519"/>
-          </a:xfrm>
-          <a:prstGeom prst="rect">
-            <a:avLst/>
-          </a:prstGeom>
-          <a:noFill/>
-        </p:spPr>
-        <p:txBody>
-          <a:bodyPr wrap="square" lIns="0" rIns="0" tIns="0" bIns="0" anchor="t"/>
-          <a:lstStyle/>
-          <a:p>
-            <a:pPr algn="l">
-              <a:spcBef>
-                <a:spcPts val="0"/>
-              </a:spcBef>
-              <a:spcAft>
-                <a:spcPts val="0"/>
-              </a:spcAft>
-            </a:pPr>
-            <a:r>
-              <a:rPr sz="1500" b="0" i="0">
-                <a:solidFill>
-                  <a:srgbClr val="1A2834"/>
+              <a:t>0.124</a:t>
+            </a:r>
+          </a:p>
+        </p:txBody>
+      </p:sp>
+      <p:sp>
+        <p:nvSpPr>
+          <p:cNvPr id="26" name="TextBox 25"/>
+          <p:cNvSpPr txBox="1"/>
+          <p:nvPr/>
+        </p:nvSpPr>
+        <p:spPr>
+          <a:xfrm>
+            <a:off x="9198864" y="2788920"/>
+            <a:ext cx="2404872" cy="274320"/>
+          </a:xfrm>
+          <a:prstGeom prst="rect">
+            <a:avLst/>
+          </a:prstGeom>
+          <a:noFill/>
+        </p:spPr>
+        <p:txBody>
+          <a:bodyPr wrap="square" lIns="0" rIns="0" tIns="0" bIns="0" anchor="t"/>
+          <a:lstStyle/>
+          <a:p>
+            <a:pPr algn="l">
+              <a:spcBef>
+                <a:spcPts val="0"/>
+              </a:spcBef>
+              <a:spcAft>
+                <a:spcPts val="0"/>
+              </a:spcAft>
+            </a:pPr>
+            <a:r>
+              <a:rPr sz="1300" b="0" i="0">
+                <a:solidFill>
+                  <a:srgbClr val="5E6E7C"/>
                 </a:solidFill>
                 <a:latin typeface="Calibri"/>
                 <a:ea typeface="Calibri"/>
                 <a:cs typeface="Calibri"/>
               </a:rPr>
-              <a:t>No field video in this run. Smoke-test miss rate 15%. Treat detector error as assumed until labels exist.</a:t>
+              <a:t>litres / vehicle</a:t>
+            </a:r>
+          </a:p>
+        </p:txBody>
+      </p:sp>
+      <p:sp>
+        <p:nvSpPr>
+          <p:cNvPr id="27" name="TextBox 26"/>
+          <p:cNvSpPr txBox="1"/>
+          <p:nvPr/>
+        </p:nvSpPr>
+        <p:spPr>
+          <a:xfrm>
+            <a:off x="9198864" y="3200400"/>
+            <a:ext cx="2404872" cy="320040"/>
+          </a:xfrm>
+          <a:prstGeom prst="rect">
+            <a:avLst/>
+          </a:prstGeom>
+          <a:noFill/>
+        </p:spPr>
+        <p:txBody>
+          <a:bodyPr wrap="square" lIns="0" rIns="0" tIns="0" bIns="0" anchor="t"/>
+          <a:lstStyle/>
+          <a:p>
+            <a:pPr algn="l">
+              <a:spcBef>
+                <a:spcPts val="0"/>
+              </a:spcBef>
+              <a:spcAft>
+                <a:spcPts val="0"/>
+              </a:spcAft>
+            </a:pPr>
+            <a:r>
+              <a:rPr sz="1200" b="0" i="0">
+                <a:solidFill>
+                  <a:srgbClr val="5E6E7C"/>
+                </a:solidFill>
+                <a:latin typeface="Calibri"/>
+                <a:ea typeface="Calibri"/>
+                <a:cs typeface="Calibri"/>
+              </a:rPr>
+              <a:t>± 0.001   ·   n=3</a:t>
+            </a:r>
+          </a:p>
+        </p:txBody>
+      </p:sp>
+      <p:sp>
+        <p:nvSpPr>
+          <p:cNvPr id="28" name="Rounded Rectangle 27"/>
+          <p:cNvSpPr/>
+          <p:nvPr/>
+        </p:nvSpPr>
+        <p:spPr>
+          <a:xfrm>
+            <a:off x="502920" y="4069080"/>
+            <a:ext cx="11228832" cy="2148840"/>
+          </a:xfrm>
+          <a:prstGeom prst="roundRect">
+            <a:avLst>
+              <a:gd name="adj" fmla="val 8000"/>
+            </a:avLst>
+          </a:prstGeom>
+          <a:solidFill>
+            <a:srgbClr val="FFFFFF"/>
+          </a:solidFill>
+          <a:ln w="12700">
+            <a:solidFill>
+              <a:srgbClr val="E3DBD0"/>
+            </a:solidFill>
+          </a:ln>
+        </p:spPr>
+        <p:style>
+          <a:lnRef idx="1">
+            <a:schemeClr val="accent1"/>
+          </a:lnRef>
+          <a:fillRef idx="3">
+            <a:schemeClr val="accent1"/>
+          </a:fillRef>
+          <a:effectRef idx="2">
+            <a:schemeClr val="accent1"/>
+          </a:effectRef>
+          <a:fontRef idx="minor">
+            <a:schemeClr val="lt1"/>
+          </a:fontRef>
+        </p:style>
+        <p:txBody>
+          <a:bodyPr rtlCol="0" anchor="ctr"/>
+          <a:lstStyle/>
+          <a:p>
+            <a:pPr algn="ctr"/>
+          </a:p>
+        </p:txBody>
+      </p:sp>
+      <p:sp>
+        <p:nvSpPr>
+          <p:cNvPr id="29" name="TextBox 28"/>
+          <p:cNvSpPr txBox="1"/>
+          <p:nvPr/>
+        </p:nvSpPr>
+        <p:spPr>
+          <a:xfrm>
+            <a:off x="777240" y="4224528"/>
+            <a:ext cx="7315200" cy="274320"/>
+          </a:xfrm>
+          <a:prstGeom prst="rect">
+            <a:avLst/>
+          </a:prstGeom>
+          <a:noFill/>
+        </p:spPr>
+        <p:txBody>
+          <a:bodyPr wrap="square" lIns="0" rIns="0" tIns="0" bIns="0" anchor="t"/>
+          <a:lstStyle/>
+          <a:p>
+            <a:pPr algn="l">
+              <a:spcBef>
+                <a:spcPts val="0"/>
+              </a:spcBef>
+              <a:spcAft>
+                <a:spcPts val="0"/>
+              </a:spcAft>
+            </a:pPr>
+            <a:r>
+              <a:rPr sz="1200" b="1" i="0">
+                <a:solidFill>
+                  <a:srgbClr val="C4841D"/>
+                </a:solidFill>
+                <a:latin typeface="Calibri"/>
+                <a:ea typeface="Calibri"/>
+                <a:cs typeface="Calibri"/>
+              </a:rPr>
+              <a:t>SAME SEEDS, NO MISSES</a:t>
+            </a:r>
+          </a:p>
+        </p:txBody>
+      </p:sp>
+      <p:sp>
+        <p:nvSpPr>
+          <p:cNvPr id="30" name="TextBox 29"/>
+          <p:cNvSpPr txBox="1"/>
+          <p:nvPr/>
+        </p:nvSpPr>
+        <p:spPr>
+          <a:xfrm>
+            <a:off x="777240" y="4617720"/>
+            <a:ext cx="3108960" cy="411480"/>
+          </a:xfrm>
+          <a:prstGeom prst="rect">
+            <a:avLst/>
+          </a:prstGeom>
+          <a:noFill/>
+        </p:spPr>
+        <p:txBody>
+          <a:bodyPr wrap="square" lIns="0" rIns="0" tIns="0" bIns="0" anchor="t"/>
+          <a:lstStyle/>
+          <a:p>
+            <a:pPr algn="l">
+              <a:spcBef>
+                <a:spcPts val="0"/>
+              </a:spcBef>
+              <a:spcAft>
+                <a:spcPts val="0"/>
+              </a:spcAft>
+            </a:pPr>
+            <a:r>
+              <a:rPr sz="2200" b="1" i="0">
+                <a:solidFill>
+                  <a:srgbClr val="1B6B5A"/>
+                </a:solidFill>
+                <a:latin typeface="Georgia"/>
+                <a:ea typeface="Georgia"/>
+                <a:cs typeface="Georgia"/>
+              </a:rPr>
+              <a:t>0.123 L</a:t>
+            </a:r>
+          </a:p>
+        </p:txBody>
+      </p:sp>
+      <p:sp>
+        <p:nvSpPr>
+          <p:cNvPr id="31" name="TextBox 30"/>
+          <p:cNvSpPr txBox="1"/>
+          <p:nvPr/>
+        </p:nvSpPr>
+        <p:spPr>
+          <a:xfrm>
+            <a:off x="777240" y="5074920"/>
+            <a:ext cx="3108960" cy="274320"/>
+          </a:xfrm>
+          <a:prstGeom prst="rect">
+            <a:avLst/>
+          </a:prstGeom>
+          <a:noFill/>
+        </p:spPr>
+        <p:txBody>
+          <a:bodyPr wrap="square" lIns="0" rIns="0" tIns="0" bIns="0" anchor="t"/>
+          <a:lstStyle/>
+          <a:p>
+            <a:pPr algn="l">
+              <a:spcBef>
+                <a:spcPts val="0"/>
+              </a:spcBef>
+              <a:spcAft>
+                <a:spcPts val="0"/>
+              </a:spcAft>
+            </a:pPr>
+            <a:r>
+              <a:rPr sz="1300" b="0" i="0">
+                <a:solidFill>
+                  <a:srgbClr val="5E6E7C"/>
+                </a:solidFill>
+                <a:latin typeface="Calibri"/>
+                <a:ea typeface="Calibri"/>
+                <a:cs typeface="Calibri"/>
+              </a:rPr>
+              <a:t>XtraFlow</a:t>
+            </a:r>
+          </a:p>
+        </p:txBody>
+      </p:sp>
+      <p:sp>
+        <p:nvSpPr>
+          <p:cNvPr id="32" name="TextBox 31"/>
+          <p:cNvSpPr txBox="1"/>
+          <p:nvPr/>
+        </p:nvSpPr>
+        <p:spPr>
+          <a:xfrm>
+            <a:off x="4069080" y="4617720"/>
+            <a:ext cx="3108960" cy="411480"/>
+          </a:xfrm>
+          <a:prstGeom prst="rect">
+            <a:avLst/>
+          </a:prstGeom>
+          <a:noFill/>
+        </p:spPr>
+        <p:txBody>
+          <a:bodyPr wrap="square" lIns="0" rIns="0" tIns="0" bIns="0" anchor="t"/>
+          <a:lstStyle/>
+          <a:p>
+            <a:pPr algn="l">
+              <a:spcBef>
+                <a:spcPts val="0"/>
+              </a:spcBef>
+              <a:spcAft>
+                <a:spcPts val="0"/>
+              </a:spcAft>
+            </a:pPr>
+            <a:r>
+              <a:rPr sz="2200" b="1" i="0">
+                <a:solidFill>
+                  <a:srgbClr val="1A2834"/>
+                </a:solidFill>
+                <a:latin typeface="Georgia"/>
+                <a:ea typeface="Georgia"/>
+                <a:cs typeface="Georgia"/>
+              </a:rPr>
+              <a:t>0.136 L</a:t>
+            </a:r>
+          </a:p>
+        </p:txBody>
+      </p:sp>
+      <p:sp>
+        <p:nvSpPr>
+          <p:cNvPr id="33" name="TextBox 32"/>
+          <p:cNvSpPr txBox="1"/>
+          <p:nvPr/>
+        </p:nvSpPr>
+        <p:spPr>
+          <a:xfrm>
+            <a:off x="4069080" y="5074920"/>
+            <a:ext cx="3108960" cy="274320"/>
+          </a:xfrm>
+          <a:prstGeom prst="rect">
+            <a:avLst/>
+          </a:prstGeom>
+          <a:noFill/>
+        </p:spPr>
+        <p:txBody>
+          <a:bodyPr wrap="square" lIns="0" rIns="0" tIns="0" bIns="0" anchor="t"/>
+          <a:lstStyle/>
+          <a:p>
+            <a:pPr algn="l">
+              <a:spcBef>
+                <a:spcPts val="0"/>
+              </a:spcBef>
+              <a:spcAft>
+                <a:spcPts val="0"/>
+              </a:spcAft>
+            </a:pPr>
+            <a:r>
+              <a:rPr sz="1300" b="0" i="0">
+                <a:solidFill>
+                  <a:srgbClr val="5E6E7C"/>
+                </a:solidFill>
+                <a:latin typeface="Calibri"/>
+                <a:ea typeface="Calibri"/>
+                <a:cs typeface="Calibri"/>
+              </a:rPr>
+              <a:t>Actuated</a:t>
+            </a:r>
+          </a:p>
+        </p:txBody>
+      </p:sp>
+      <p:sp>
+        <p:nvSpPr>
+          <p:cNvPr id="34" name="TextBox 33"/>
+          <p:cNvSpPr txBox="1"/>
+          <p:nvPr/>
+        </p:nvSpPr>
+        <p:spPr>
+          <a:xfrm>
+            <a:off x="777240" y="5532120"/>
+            <a:ext cx="10680192" cy="457200"/>
+          </a:xfrm>
+          <a:prstGeom prst="rect">
+            <a:avLst/>
+          </a:prstGeom>
+          <a:noFill/>
+        </p:spPr>
+        <p:txBody>
+          <a:bodyPr wrap="square" lIns="0" rIns="0" tIns="0" bIns="0" anchor="t"/>
+          <a:lstStyle/>
+          <a:p>
+            <a:pPr algn="l">
+              <a:spcBef>
+                <a:spcPts val="0"/>
+              </a:spcBef>
+              <a:spcAft>
+                <a:spcPts val="0"/>
+              </a:spcAft>
+            </a:pPr>
+            <a:r>
+              <a:rPr sz="1400" b="0" i="0">
+                <a:solidFill>
+                  <a:srgbClr val="1A2834"/>
+                </a:solidFill>
+                <a:latin typeface="Calibri"/>
+                <a:ea typeface="Calibri"/>
+                <a:cs typeface="Calibri"/>
+              </a:rPr>
+              <a:t>Every miss level on this slide has lower mean fuel than every reference line. Noise-model point (see noise_model.json) is 0.125 L.</a:t>
             </a:r>
           </a:p>
         </p:txBody>
@@ -7044,7 +7094,7 @@
                 <a:ea typeface="Calibri"/>
                 <a:cs typeface="Calibri"/>
               </a:rPr>
-              <a:t>SCALING</a:t>
+              <a:t>WHERE IT DOES NOT TRANSFER</a:t>
             </a:r>
           </a:p>
         </p:txBody>
@@ -7086,7 +7136,7 @@
                 <a:ea typeface="Georgia"/>
                 <a:cs typeface="Georgia"/>
               </a:rPr>
-              <a:t>Per vehicle is measured. Per year is a range.</a:t>
+              <a:t>The 2×2 grid was not scored in this publish</a:t>
             </a:r>
           </a:p>
         </p:txBody>
@@ -7128,7 +7178,7 @@
                 <a:ea typeface="Calibri"/>
                 <a:cs typeface="Calibri"/>
               </a:rPr>
-              <a:t>The wide bar is the assumed city size, not uncertainty in the junction test.</a:t>
+              <a:t>A corridor result is only quoted from results/grid_results.json after a successful sweep.</a:t>
             </a:r>
           </a:p>
         </p:txBody>
@@ -7225,8 +7275,8 @@
         </p:nvSpPr>
         <p:spPr>
           <a:xfrm>
-            <a:off x="502920" y="1572768"/>
-            <a:ext cx="6720840" cy="1965960"/>
+            <a:off x="502920" y="1737360"/>
+            <a:ext cx="11228832" cy="3291840"/>
           </a:xfrm>
           <a:prstGeom prst="roundRect">
             <a:avLst>
@@ -7234,12 +7284,10 @@
             </a:avLst>
           </a:prstGeom>
           <a:solidFill>
-            <a:srgbClr val="FFFFFF"/>
+            <a:srgbClr val="0E1C2B"/>
           </a:solidFill>
-          <a:ln w="12700">
-            <a:solidFill>
-              <a:srgbClr val="E3DBD0"/>
-            </a:solidFill>
+          <a:ln>
+            <a:noFill/>
           </a:ln>
         </p:spPr>
         <p:style>
@@ -7272,28 +7320,28 @@
         </p:nvSpPr>
         <p:spPr>
           <a:xfrm>
-            <a:off x="758952" y="1719072"/>
-            <a:ext cx="6217920" cy="256032"/>
-          </a:xfrm>
-          <a:prstGeom prst="rect">
-            <a:avLst/>
-          </a:prstGeom>
-          <a:noFill/>
-        </p:spPr>
-        <p:txBody>
-          <a:bodyPr wrap="square" lIns="0" rIns="0" tIns="0" bIns="0" anchor="t"/>
-          <a:lstStyle/>
-          <a:p>
-            <a:pPr algn="l">
-              <a:spcBef>
-                <a:spcPts val="0"/>
-              </a:spcBef>
-              <a:spcAft>
-                <a:spcPts val="0"/>
-              </a:spcAft>
-            </a:pPr>
-            <a:r>
-              <a:rPr sz="1200" b="1" i="0">
+            <a:off x="868680" y="2057400"/>
+            <a:ext cx="10497311" cy="365760"/>
+          </a:xfrm>
+          <a:prstGeom prst="rect">
+            <a:avLst/>
+          </a:prstGeom>
+          <a:noFill/>
+        </p:spPr>
+        <p:txBody>
+          <a:bodyPr wrap="square" lIns="0" rIns="0" tIns="0" bIns="0" anchor="t"/>
+          <a:lstStyle/>
+          <a:p>
+            <a:pPr algn="l">
+              <a:spcBef>
+                <a:spcPts val="0"/>
+              </a:spcBef>
+              <a:spcAft>
+                <a:spcPts val="0"/>
+              </a:spcAft>
+            </a:pPr>
+            <a:r>
+              <a:rPr sz="1400" b="1" i="0">
                 <a:solidFill>
                   <a:srgbClr val="C4841D"/>
                 </a:solidFill>
@@ -7301,7 +7349,7 @@
                 <a:ea typeface="Calibri"/>
                 <a:cs typeface="Calibri"/>
               </a:rPr>
-              <a:t>MEASURED ON </a:t>
+              <a:t>NO NUMERIC GRID CLAIM</a:t>
             </a:r>
           </a:p>
         </p:txBody>
@@ -7314,47 +7362,36 @@
         </p:nvSpPr>
         <p:spPr>
           <a:xfrm>
-            <a:off x="758952" y="2029968"/>
-            <a:ext cx="6217920" cy="594360"/>
-          </a:xfrm>
-          <a:prstGeom prst="rect">
-            <a:avLst/>
-          </a:prstGeom>
-          <a:noFill/>
-        </p:spPr>
-        <p:txBody>
-          <a:bodyPr wrap="square" lIns="0" rIns="0" tIns="0" bIns="0" anchor="t"/>
-          <a:lstStyle/>
-          <a:p>
-            <a:pPr algn="l">
-              <a:spcBef>
-                <a:spcPts val="0"/>
-              </a:spcBef>
-              <a:spcAft>
-                <a:spcPts val="0"/>
-              </a:spcAft>
-            </a:pPr>
-            <a:r>
-              <a:rPr sz="3200" b="1" i="0">
-                <a:solidFill>
-                  <a:srgbClr val="1B6B5A"/>
-                </a:solidFill>
-                <a:latin typeface="Georgia"/>
-                <a:ea typeface="Georgia"/>
-                <a:cs typeface="Georgia"/>
-              </a:rPr>
-              <a:t>0.001</a:t>
-            </a:r>
-            <a:r>
-              <a:rPr sz="1600" b="0" i="0">
-                <a:solidFill>
-                  <a:srgbClr val="1A2834"/>
+            <a:off x="868680" y="2606040"/>
+            <a:ext cx="10497311" cy="1645920"/>
+          </a:xfrm>
+          <a:prstGeom prst="rect">
+            <a:avLst/>
+          </a:prstGeom>
+          <a:noFill/>
+        </p:spPr>
+        <p:txBody>
+          <a:bodyPr wrap="square" lIns="0" rIns="0" tIns="0" bIns="0" anchor="t"/>
+          <a:lstStyle/>
+          <a:p>
+            <a:pPr algn="l">
+              <a:spcBef>
+                <a:spcPts val="0"/>
+              </a:spcBef>
+              <a:spcAft>
+                <a:spcPts val="0"/>
+              </a:spcAft>
+            </a:pPr>
+            <a:r>
+              <a:rPr sz="1800" b="0" i="0">
+                <a:solidFill>
+                  <a:srgbClr val="FFFFFF"/>
                 </a:solidFill>
                 <a:latin typeface="Calibri"/>
                 <a:ea typeface="Calibri"/>
                 <a:cs typeface="Calibri"/>
               </a:rPr>
-              <a:t>  L saved / vehicle</a:t>
+              <a:t>2x2 grid not scored in this time-cut run. duarouter path was fixed, but the single-intersection tls.add.xml does not provide programs for the grid TLS ids, so SUMO aborts.</a:t>
             </a:r>
           </a:p>
         </p:txBody>
@@ -7367,841 +7404,36 @@
         </p:nvSpPr>
         <p:spPr>
           <a:xfrm>
-            <a:off x="758952" y="2788920"/>
-            <a:ext cx="6217920" cy="457200"/>
-          </a:xfrm>
-          <a:prstGeom prst="rect">
-            <a:avLst/>
-          </a:prstGeom>
-          <a:noFill/>
-        </p:spPr>
-        <p:txBody>
-          <a:bodyPr wrap="square" lIns="0" rIns="0" tIns="0" bIns="0" anchor="t"/>
-          <a:lstStyle/>
-          <a:p>
-            <a:pPr algn="l">
-              <a:spcBef>
-                <a:spcPts val="0"/>
-              </a:spcBef>
-              <a:spcAft>
-                <a:spcPts val="0"/>
-              </a:spcAft>
-            </a:pPr>
-            <a:r>
-              <a:rPr sz="1400" b="0" i="0">
-                <a:solidFill>
-                  <a:srgbClr val="5E6E7C"/>
+            <a:off x="868680" y="4434840"/>
+            <a:ext cx="10497311" cy="365760"/>
+          </a:xfrm>
+          <a:prstGeom prst="rect">
+            <a:avLst/>
+          </a:prstGeom>
+          <a:noFill/>
+        </p:spPr>
+        <p:txBody>
+          <a:bodyPr wrap="square" lIns="0" rIns="0" tIns="0" bIns="0" anchor="t"/>
+          <a:lstStyle/>
+          <a:p>
+            <a:pPr algn="l">
+              <a:spcBef>
+                <a:spcPts val="0"/>
+              </a:spcBef>
+              <a:spcAft>
+                <a:spcPts val="0"/>
+              </a:spcAft>
+            </a:pPr>
+            <a:r>
+              <a:rPr sz="1500" b="0" i="0">
+                <a:solidFill>
+                  <a:srgbClr val="C9D4DC"/>
                 </a:solidFill>
                 <a:latin typeface="Calibri"/>
                 <a:ea typeface="Calibri"/>
                 <a:cs typeface="Calibri"/>
               </a:rPr>
-              <a:t>5th – 95th percentile of that mean: 0.001 – 0.002 L</a:t>
-            </a:r>
-          </a:p>
-        </p:txBody>
-      </p:sp>
-      <p:sp>
-        <p:nvSpPr>
-          <p:cNvPr id="12" name="TextBox 11"/>
-          <p:cNvSpPr txBox="1"/>
-          <p:nvPr/>
-        </p:nvSpPr>
-        <p:spPr>
-          <a:xfrm>
-            <a:off x="502920" y="3703320"/>
-            <a:ext cx="6675120" cy="256032"/>
-          </a:xfrm>
-          <a:prstGeom prst="rect">
-            <a:avLst/>
-          </a:prstGeom>
-          <a:noFill/>
-        </p:spPr>
-        <p:txBody>
-          <a:bodyPr wrap="square" lIns="0" rIns="0" tIns="0" bIns="0" anchor="t"/>
-          <a:lstStyle/>
-          <a:p>
-            <a:pPr algn="l">
-              <a:spcBef>
-                <a:spcPts val="0"/>
-              </a:spcBef>
-              <a:spcAft>
-                <a:spcPts val="0"/>
-              </a:spcAft>
-            </a:pPr>
-            <a:r>
-              <a:rPr sz="1200" b="1" i="0">
-                <a:solidFill>
-                  <a:srgbClr val="C4841D"/>
-                </a:solidFill>
-                <a:latin typeface="Calibri"/>
-                <a:ea typeface="Calibri"/>
-                <a:cs typeface="Calibri"/>
-              </a:rPr>
-              <a:t>IF THAT SAVING IS MULTIPLIED OUT</a:t>
-            </a:r>
-          </a:p>
-        </p:txBody>
-      </p:sp>
-      <p:sp>
-        <p:nvSpPr>
-          <p:cNvPr id="13" name="Rectangle 12"/>
-          <p:cNvSpPr/>
-          <p:nvPr/>
-        </p:nvSpPr>
-        <p:spPr>
-          <a:xfrm>
-            <a:off x="502920" y="4041648"/>
-            <a:ext cx="6720840" cy="128016"/>
-          </a:xfrm>
-          <a:prstGeom prst="rect">
-            <a:avLst/>
-          </a:prstGeom>
-          <a:solidFill>
-            <a:srgbClr val="C5DDD4"/>
-          </a:solidFill>
-          <a:ln>
-            <a:noFill/>
-          </a:ln>
-        </p:spPr>
-        <p:style>
-          <a:lnRef idx="1">
-            <a:schemeClr val="accent1"/>
-          </a:lnRef>
-          <a:fillRef idx="3">
-            <a:schemeClr val="accent1"/>
-          </a:fillRef>
-          <a:effectRef idx="2">
-            <a:schemeClr val="accent1"/>
-          </a:effectRef>
-          <a:fontRef idx="minor">
-            <a:schemeClr val="lt1"/>
-          </a:fontRef>
-        </p:style>
-        <p:txBody>
-          <a:bodyPr rtlCol="0" anchor="ctr"/>
-          <a:lstStyle/>
-          <a:p>
-            <a:pPr algn="ctr"/>
-          </a:p>
-        </p:txBody>
-      </p:sp>
-      <p:sp>
-        <p:nvSpPr>
-          <p:cNvPr id="14" name="Rectangle 13"/>
-          <p:cNvSpPr/>
-          <p:nvPr/>
-        </p:nvSpPr>
-        <p:spPr>
-          <a:xfrm>
-            <a:off x="2339803" y="3913632"/>
-            <a:ext cx="54864" cy="384048"/>
-          </a:xfrm>
-          <a:prstGeom prst="rect">
-            <a:avLst/>
-          </a:prstGeom>
-          <a:solidFill>
-            <a:srgbClr val="1B6B5A"/>
-          </a:solidFill>
-          <a:ln>
-            <a:noFill/>
-          </a:ln>
-        </p:spPr>
-        <p:style>
-          <a:lnRef idx="1">
-            <a:schemeClr val="accent1"/>
-          </a:lnRef>
-          <a:fillRef idx="3">
-            <a:schemeClr val="accent1"/>
-          </a:fillRef>
-          <a:effectRef idx="2">
-            <a:schemeClr val="accent1"/>
-          </a:effectRef>
-          <a:fontRef idx="minor">
-            <a:schemeClr val="lt1"/>
-          </a:fontRef>
-        </p:style>
-        <p:txBody>
-          <a:bodyPr rtlCol="0" anchor="ctr"/>
-          <a:lstStyle/>
-          <a:p>
-            <a:pPr algn="ctr"/>
-          </a:p>
-        </p:txBody>
-      </p:sp>
-      <p:sp>
-        <p:nvSpPr>
-          <p:cNvPr id="15" name="TextBox 14"/>
-          <p:cNvSpPr txBox="1"/>
-          <p:nvPr/>
-        </p:nvSpPr>
-        <p:spPr>
-          <a:xfrm>
-            <a:off x="502920" y="4370832"/>
-            <a:ext cx="2926080" cy="256032"/>
-          </a:xfrm>
-          <a:prstGeom prst="rect">
-            <a:avLst/>
-          </a:prstGeom>
-          <a:noFill/>
-        </p:spPr>
-        <p:txBody>
-          <a:bodyPr wrap="square" lIns="0" rIns="0" tIns="0" bIns="0" anchor="t"/>
-          <a:lstStyle/>
-          <a:p>
-            <a:pPr algn="l">
-              <a:spcBef>
-                <a:spcPts val="0"/>
-              </a:spcBef>
-              <a:spcAft>
-                <a:spcPts val="0"/>
-              </a:spcAft>
-            </a:pPr>
-            <a:r>
-              <a:rPr sz="1200" b="0" i="0">
-                <a:solidFill>
-                  <a:srgbClr val="5E6E7C"/>
-                </a:solidFill>
-                <a:latin typeface="Calibri"/>
-                <a:ea typeface="Calibri"/>
-                <a:cs typeface="Calibri"/>
-              </a:rPr>
-              <a:t>0.3 million litres</a:t>
-            </a:r>
-          </a:p>
-        </p:txBody>
-      </p:sp>
-      <p:sp>
-        <p:nvSpPr>
-          <p:cNvPr id="16" name="TextBox 15"/>
-          <p:cNvSpPr txBox="1"/>
-          <p:nvPr/>
-        </p:nvSpPr>
-        <p:spPr>
-          <a:xfrm>
-            <a:off x="4297680" y="4370832"/>
-            <a:ext cx="2926080" cy="256032"/>
-          </a:xfrm>
-          <a:prstGeom prst="rect">
-            <a:avLst/>
-          </a:prstGeom>
-          <a:noFill/>
-        </p:spPr>
-        <p:txBody>
-          <a:bodyPr wrap="square" lIns="0" rIns="0" tIns="0" bIns="0" anchor="t"/>
-          <a:lstStyle/>
-          <a:p>
-            <a:pPr algn="r">
-              <a:spcBef>
-                <a:spcPts val="0"/>
-              </a:spcBef>
-              <a:spcAft>
-                <a:spcPts val="0"/>
-              </a:spcAft>
-            </a:pPr>
-            <a:r>
-              <a:rPr sz="1200" b="0" i="0">
-                <a:solidFill>
-                  <a:srgbClr val="5E6E7C"/>
-                </a:solidFill>
-                <a:latin typeface="Calibri"/>
-                <a:ea typeface="Calibri"/>
-                <a:cs typeface="Calibri"/>
-              </a:rPr>
-              <a:t>2.7 million litres</a:t>
-            </a:r>
-          </a:p>
-        </p:txBody>
-      </p:sp>
-      <p:sp>
-        <p:nvSpPr>
-          <p:cNvPr id="17" name="TextBox 16"/>
-          <p:cNvSpPr txBox="1"/>
-          <p:nvPr/>
-        </p:nvSpPr>
-        <p:spPr>
-          <a:xfrm>
-            <a:off x="502920" y="4754880"/>
-            <a:ext cx="6675120" cy="438912"/>
-          </a:xfrm>
-          <a:prstGeom prst="rect">
-            <a:avLst/>
-          </a:prstGeom>
-          <a:noFill/>
-        </p:spPr>
-        <p:txBody>
-          <a:bodyPr wrap="square" lIns="0" rIns="0" tIns="0" bIns="0" anchor="t"/>
-          <a:lstStyle/>
-          <a:p>
-            <a:pPr algn="l">
-              <a:spcBef>
-                <a:spcPts val="0"/>
-              </a:spcBef>
-              <a:spcAft>
-                <a:spcPts val="0"/>
-              </a:spcAft>
-            </a:pPr>
-            <a:r>
-              <a:rPr sz="2200" b="1" i="0">
-                <a:solidFill>
-                  <a:srgbClr val="1A2834"/>
-                </a:solidFill>
-                <a:latin typeface="Georgia"/>
-                <a:ea typeface="Georgia"/>
-                <a:cs typeface="Georgia"/>
-              </a:rPr>
-              <a:t>0.9 million litres</a:t>
-            </a:r>
-          </a:p>
-        </p:txBody>
-      </p:sp>
-      <p:sp>
-        <p:nvSpPr>
-          <p:cNvPr id="18" name="TextBox 17"/>
-          <p:cNvSpPr txBox="1"/>
-          <p:nvPr/>
-        </p:nvSpPr>
-        <p:spPr>
-          <a:xfrm>
-            <a:off x="502920" y="5193792"/>
-            <a:ext cx="6675120" cy="256032"/>
-          </a:xfrm>
-          <a:prstGeom prst="rect">
-            <a:avLst/>
-          </a:prstGeom>
-          <a:noFill/>
-        </p:spPr>
-        <p:txBody>
-          <a:bodyPr wrap="square" lIns="0" rIns="0" tIns="0" bIns="0" anchor="t"/>
-          <a:lstStyle/>
-          <a:p>
-            <a:pPr algn="l">
-              <a:spcBef>
-                <a:spcPts val="0"/>
-              </a:spcBef>
-              <a:spcAft>
-                <a:spcPts val="0"/>
-              </a:spcAft>
-            </a:pPr>
-            <a:r>
-              <a:rPr sz="1300" b="0" i="0">
-                <a:solidFill>
-                  <a:srgbClr val="5E6E7C"/>
-                </a:solidFill>
-                <a:latin typeface="Calibri"/>
-                <a:ea typeface="Calibri"/>
-                <a:cs typeface="Calibri"/>
-              </a:rPr>
-              <a:t>median of the scaled draws</a:t>
-            </a:r>
-          </a:p>
-        </p:txBody>
-      </p:sp>
-      <p:sp>
-        <p:nvSpPr>
-          <p:cNvPr id="19" name="TextBox 18"/>
-          <p:cNvSpPr txBox="1"/>
-          <p:nvPr/>
-        </p:nvSpPr>
-        <p:spPr>
-          <a:xfrm>
-            <a:off x="502920" y="5532120"/>
-            <a:ext cx="6675120" cy="502920"/>
-          </a:xfrm>
-          <a:prstGeom prst="rect">
-            <a:avLst/>
-          </a:prstGeom>
-          <a:noFill/>
-        </p:spPr>
-        <p:txBody>
-          <a:bodyPr wrap="square" lIns="0" rIns="0" tIns="0" bIns="0" anchor="t"/>
-          <a:lstStyle/>
-          <a:p>
-            <a:pPr algn="l">
-              <a:spcBef>
-                <a:spcPts val="0"/>
-              </a:spcBef>
-              <a:spcAft>
-                <a:spcPts val="0"/>
-              </a:spcAft>
-            </a:pPr>
-            <a:r>
-              <a:rPr sz="1300" b="0" i="0">
-                <a:solidFill>
-                  <a:srgbClr val="5E6E7C"/>
-                </a:solidFill>
-                <a:latin typeface="Calibri"/>
-                <a:ea typeface="Calibri"/>
-                <a:cs typeface="Calibri"/>
-              </a:rPr>
-              <a:t>CO₂ median 2,296 tonnes   ·   629 tonnes – 6,640 tonnes</a:t>
-            </a:r>
-          </a:p>
-        </p:txBody>
-      </p:sp>
-      <p:sp>
-        <p:nvSpPr>
-          <p:cNvPr id="20" name="Rounded Rectangle 19"/>
-          <p:cNvSpPr/>
-          <p:nvPr/>
-        </p:nvSpPr>
-        <p:spPr>
-          <a:xfrm>
-            <a:off x="7406640" y="1572768"/>
-            <a:ext cx="4325112" cy="4526280"/>
-          </a:xfrm>
-          <a:prstGeom prst="roundRect">
-            <a:avLst>
-              <a:gd name="adj" fmla="val 8000"/>
-            </a:avLst>
-          </a:prstGeom>
-          <a:solidFill>
-            <a:srgbClr val="FFFFFF"/>
-          </a:solidFill>
-          <a:ln w="12700">
-            <a:solidFill>
-              <a:srgbClr val="E3DBD0"/>
-            </a:solidFill>
-          </a:ln>
-        </p:spPr>
-        <p:style>
-          <a:lnRef idx="1">
-            <a:schemeClr val="accent1"/>
-          </a:lnRef>
-          <a:fillRef idx="3">
-            <a:schemeClr val="accent1"/>
-          </a:fillRef>
-          <a:effectRef idx="2">
-            <a:schemeClr val="accent1"/>
-          </a:effectRef>
-          <a:fontRef idx="minor">
-            <a:schemeClr val="lt1"/>
-          </a:fontRef>
-        </p:style>
-        <p:txBody>
-          <a:bodyPr rtlCol="0" anchor="ctr"/>
-          <a:lstStyle/>
-          <a:p>
-            <a:pPr algn="ctr"/>
-          </a:p>
-        </p:txBody>
-      </p:sp>
-      <p:sp>
-        <p:nvSpPr>
-          <p:cNvPr id="21" name="TextBox 20"/>
-          <p:cNvSpPr txBox="1"/>
-          <p:nvPr/>
-        </p:nvSpPr>
-        <p:spPr>
-          <a:xfrm>
-            <a:off x="7626096" y="1737360"/>
-            <a:ext cx="3931920" cy="640080"/>
-          </a:xfrm>
-          <a:prstGeom prst="rect">
-            <a:avLst/>
-          </a:prstGeom>
-          <a:noFill/>
-        </p:spPr>
-        <p:txBody>
-          <a:bodyPr wrap="square" lIns="0" rIns="0" tIns="0" bIns="0" anchor="t"/>
-          <a:lstStyle/>
-          <a:p>
-            <a:pPr algn="l">
-              <a:spcBef>
-                <a:spcPts val="0"/>
-              </a:spcBef>
-              <a:spcAft>
-                <a:spcPts val="0"/>
-              </a:spcAft>
-            </a:pPr>
-            <a:r>
-              <a:rPr sz="1800" b="1" i="0">
-                <a:solidFill>
-                  <a:srgbClr val="1A2834"/>
-                </a:solidFill>
-                <a:latin typeface="Georgia"/>
-                <a:ea typeface="Georgia"/>
-                <a:cs typeface="Georgia"/>
-              </a:rPr>
-              <a:t>Why the bar is wide</a:t>
-            </a:r>
-          </a:p>
-        </p:txBody>
-      </p:sp>
-      <p:sp>
-        <p:nvSpPr>
-          <p:cNvPr id="22" name="TextBox 21"/>
-          <p:cNvSpPr txBox="1"/>
-          <p:nvPr/>
-        </p:nvSpPr>
-        <p:spPr>
-          <a:xfrm>
-            <a:off x="7626096" y="2468880"/>
-            <a:ext cx="3840480" cy="219456"/>
-          </a:xfrm>
-          <a:prstGeom prst="rect">
-            <a:avLst/>
-          </a:prstGeom>
-          <a:noFill/>
-        </p:spPr>
-        <p:txBody>
-          <a:bodyPr wrap="square" lIns="0" rIns="0" tIns="0" bIns="0" anchor="t"/>
-          <a:lstStyle/>
-          <a:p>
-            <a:pPr algn="l">
-              <a:spcBef>
-                <a:spcPts val="0"/>
-              </a:spcBef>
-              <a:spcAft>
-                <a:spcPts val="0"/>
-              </a:spcAft>
-            </a:pPr>
-            <a:r>
-              <a:rPr sz="1200" b="0" i="0">
-                <a:solidFill>
-                  <a:srgbClr val="5E6E7C"/>
-                </a:solidFill>
-                <a:latin typeface="Calibri"/>
-                <a:ea typeface="Calibri"/>
-                <a:cs typeface="Calibri"/>
-              </a:rPr>
-              <a:t>Junctions</a:t>
-            </a:r>
-          </a:p>
-        </p:txBody>
-      </p:sp>
-      <p:sp>
-        <p:nvSpPr>
-          <p:cNvPr id="23" name="TextBox 22"/>
-          <p:cNvSpPr txBox="1"/>
-          <p:nvPr/>
-        </p:nvSpPr>
-        <p:spPr>
-          <a:xfrm>
-            <a:off x="7626096" y="2670048"/>
-            <a:ext cx="3840480" cy="292608"/>
-          </a:xfrm>
-          <a:prstGeom prst="rect">
-            <a:avLst/>
-          </a:prstGeom>
-          <a:noFill/>
-        </p:spPr>
-        <p:txBody>
-          <a:bodyPr wrap="square" lIns="0" rIns="0" tIns="0" bIns="0" anchor="t"/>
-          <a:lstStyle/>
-          <a:p>
-            <a:pPr algn="l">
-              <a:spcBef>
-                <a:spcPts val="0"/>
-              </a:spcBef>
-              <a:spcAft>
-                <a:spcPts val="0"/>
-              </a:spcAft>
-            </a:pPr>
-            <a:r>
-              <a:rPr sz="1600" b="1" i="0">
-                <a:solidFill>
-                  <a:srgbClr val="1A2834"/>
-                </a:solidFill>
-                <a:latin typeface="Georgia"/>
-                <a:ea typeface="Georgia"/>
-                <a:cs typeface="Georgia"/>
-              </a:rPr>
-              <a:t>50  –  1,000</a:t>
-            </a:r>
-          </a:p>
-        </p:txBody>
-      </p:sp>
-      <p:sp>
-        <p:nvSpPr>
-          <p:cNvPr id="24" name="TextBox 23"/>
-          <p:cNvSpPr txBox="1"/>
-          <p:nvPr/>
-        </p:nvSpPr>
-        <p:spPr>
-          <a:xfrm>
-            <a:off x="7626096" y="3127248"/>
-            <a:ext cx="3840480" cy="219456"/>
-          </a:xfrm>
-          <a:prstGeom prst="rect">
-            <a:avLst/>
-          </a:prstGeom>
-          <a:noFill/>
-        </p:spPr>
-        <p:txBody>
-          <a:bodyPr wrap="square" lIns="0" rIns="0" tIns="0" bIns="0" anchor="t"/>
-          <a:lstStyle/>
-          <a:p>
-            <a:pPr algn="l">
-              <a:spcBef>
-                <a:spcPts val="0"/>
-              </a:spcBef>
-              <a:spcAft>
-                <a:spcPts val="0"/>
-              </a:spcAft>
-            </a:pPr>
-            <a:r>
-              <a:rPr sz="1200" b="0" i="0">
-                <a:solidFill>
-                  <a:srgbClr val="5E6E7C"/>
-                </a:solidFill>
-                <a:latin typeface="Calibri"/>
-                <a:ea typeface="Calibri"/>
-                <a:cs typeface="Calibri"/>
-              </a:rPr>
-              <a:t>Vehicles / peak hour</a:t>
-            </a:r>
-          </a:p>
-        </p:txBody>
-      </p:sp>
-      <p:sp>
-        <p:nvSpPr>
-          <p:cNvPr id="25" name="TextBox 24"/>
-          <p:cNvSpPr txBox="1"/>
-          <p:nvPr/>
-        </p:nvSpPr>
-        <p:spPr>
-          <a:xfrm>
-            <a:off x="7626096" y="3328416"/>
-            <a:ext cx="3840480" cy="292608"/>
-          </a:xfrm>
-          <a:prstGeom prst="rect">
-            <a:avLst/>
-          </a:prstGeom>
-          <a:noFill/>
-        </p:spPr>
-        <p:txBody>
-          <a:bodyPr wrap="square" lIns="0" rIns="0" tIns="0" bIns="0" anchor="t"/>
-          <a:lstStyle/>
-          <a:p>
-            <a:pPr algn="l">
-              <a:spcBef>
-                <a:spcPts val="0"/>
-              </a:spcBef>
-              <a:spcAft>
-                <a:spcPts val="0"/>
-              </a:spcAft>
-            </a:pPr>
-            <a:r>
-              <a:rPr sz="1600" b="1" i="0">
-                <a:solidFill>
-                  <a:srgbClr val="1A2834"/>
-                </a:solidFill>
-                <a:latin typeface="Georgia"/>
-                <a:ea typeface="Georgia"/>
-                <a:cs typeface="Georgia"/>
-              </a:rPr>
-              <a:t>800  –  2,200</a:t>
-            </a:r>
-          </a:p>
-        </p:txBody>
-      </p:sp>
-      <p:sp>
-        <p:nvSpPr>
-          <p:cNvPr id="26" name="TextBox 25"/>
-          <p:cNvSpPr txBox="1"/>
-          <p:nvPr/>
-        </p:nvSpPr>
-        <p:spPr>
-          <a:xfrm>
-            <a:off x="7626096" y="3785615"/>
-            <a:ext cx="3840480" cy="219456"/>
-          </a:xfrm>
-          <a:prstGeom prst="rect">
-            <a:avLst/>
-          </a:prstGeom>
-          <a:noFill/>
-        </p:spPr>
-        <p:txBody>
-          <a:bodyPr wrap="square" lIns="0" rIns="0" tIns="0" bIns="0" anchor="t"/>
-          <a:lstStyle/>
-          <a:p>
-            <a:pPr algn="l">
-              <a:spcBef>
-                <a:spcPts val="0"/>
-              </a:spcBef>
-              <a:spcAft>
-                <a:spcPts val="0"/>
-              </a:spcAft>
-            </a:pPr>
-            <a:r>
-              <a:rPr sz="1200" b="0" i="0">
-                <a:solidFill>
-                  <a:srgbClr val="5E6E7C"/>
-                </a:solidFill>
-                <a:latin typeface="Calibri"/>
-                <a:ea typeface="Calibri"/>
-                <a:cs typeface="Calibri"/>
-              </a:rPr>
-              <a:t>Peak hours / day</a:t>
-            </a:r>
-          </a:p>
-        </p:txBody>
-      </p:sp>
-      <p:sp>
-        <p:nvSpPr>
-          <p:cNvPr id="27" name="TextBox 26"/>
-          <p:cNvSpPr txBox="1"/>
-          <p:nvPr/>
-        </p:nvSpPr>
-        <p:spPr>
-          <a:xfrm>
-            <a:off x="7626096" y="3986783"/>
-            <a:ext cx="3840480" cy="292608"/>
-          </a:xfrm>
-          <a:prstGeom prst="rect">
-            <a:avLst/>
-          </a:prstGeom>
-          <a:noFill/>
-        </p:spPr>
-        <p:txBody>
-          <a:bodyPr wrap="square" lIns="0" rIns="0" tIns="0" bIns="0" anchor="t"/>
-          <a:lstStyle/>
-          <a:p>
-            <a:pPr algn="l">
-              <a:spcBef>
-                <a:spcPts val="0"/>
-              </a:spcBef>
-              <a:spcAft>
-                <a:spcPts val="0"/>
-              </a:spcAft>
-            </a:pPr>
-            <a:r>
-              <a:rPr sz="1600" b="1" i="0">
-                <a:solidFill>
-                  <a:srgbClr val="1A2834"/>
-                </a:solidFill>
-                <a:latin typeface="Georgia"/>
-                <a:ea typeface="Georgia"/>
-                <a:cs typeface="Georgia"/>
-              </a:rPr>
-              <a:t>3  –  7</a:t>
-            </a:r>
-          </a:p>
-        </p:txBody>
-      </p:sp>
-      <p:sp>
-        <p:nvSpPr>
-          <p:cNvPr id="28" name="TextBox 27"/>
-          <p:cNvSpPr txBox="1"/>
-          <p:nvPr/>
-        </p:nvSpPr>
-        <p:spPr>
-          <a:xfrm>
-            <a:off x="7626096" y="4443983"/>
-            <a:ext cx="3840480" cy="219456"/>
-          </a:xfrm>
-          <a:prstGeom prst="rect">
-            <a:avLst/>
-          </a:prstGeom>
-          <a:noFill/>
-        </p:spPr>
-        <p:txBody>
-          <a:bodyPr wrap="square" lIns="0" rIns="0" tIns="0" bIns="0" anchor="t"/>
-          <a:lstStyle/>
-          <a:p>
-            <a:pPr algn="l">
-              <a:spcBef>
-                <a:spcPts val="0"/>
-              </a:spcBef>
-              <a:spcAft>
-                <a:spcPts val="0"/>
-              </a:spcAft>
-            </a:pPr>
-            <a:r>
-              <a:rPr sz="1200" b="0" i="0">
-                <a:solidFill>
-                  <a:srgbClr val="5E6E7C"/>
-                </a:solidFill>
-                <a:latin typeface="Calibri"/>
-                <a:ea typeface="Calibri"/>
-                <a:cs typeface="Calibri"/>
-              </a:rPr>
-              <a:t>Days / year</a:t>
-            </a:r>
-          </a:p>
-        </p:txBody>
-      </p:sp>
-      <p:sp>
-        <p:nvSpPr>
-          <p:cNvPr id="29" name="TextBox 28"/>
-          <p:cNvSpPr txBox="1"/>
-          <p:nvPr/>
-        </p:nvSpPr>
-        <p:spPr>
-          <a:xfrm>
-            <a:off x="7626096" y="4645151"/>
-            <a:ext cx="3840480" cy="292608"/>
-          </a:xfrm>
-          <a:prstGeom prst="rect">
-            <a:avLst/>
-          </a:prstGeom>
-          <a:noFill/>
-        </p:spPr>
-        <p:txBody>
-          <a:bodyPr wrap="square" lIns="0" rIns="0" tIns="0" bIns="0" anchor="t"/>
-          <a:lstStyle/>
-          <a:p>
-            <a:pPr algn="l">
-              <a:spcBef>
-                <a:spcPts val="0"/>
-              </a:spcBef>
-              <a:spcAft>
-                <a:spcPts val="0"/>
-              </a:spcAft>
-            </a:pPr>
-            <a:r>
-              <a:rPr sz="1600" b="1" i="0">
-                <a:solidFill>
-                  <a:srgbClr val="1A2834"/>
-                </a:solidFill>
-                <a:latin typeface="Georgia"/>
-                <a:ea typeface="Georgia"/>
-                <a:cs typeface="Georgia"/>
-              </a:rPr>
-              <a:t>250  –  330</a:t>
-            </a:r>
-          </a:p>
-        </p:txBody>
-      </p:sp>
-      <p:sp>
-        <p:nvSpPr>
-          <p:cNvPr id="30" name="TextBox 29"/>
-          <p:cNvSpPr txBox="1"/>
-          <p:nvPr/>
-        </p:nvSpPr>
-        <p:spPr>
-          <a:xfrm>
-            <a:off x="7626096" y="5349240"/>
-            <a:ext cx="3886200" cy="548640"/>
-          </a:xfrm>
-          <a:prstGeom prst="rect">
-            <a:avLst/>
-          </a:prstGeom>
-          <a:noFill/>
-        </p:spPr>
-        <p:txBody>
-          <a:bodyPr wrap="square" lIns="0" rIns="0" tIns="0" bIns="0" anchor="t"/>
-          <a:lstStyle/>
-          <a:p>
-            <a:pPr algn="l">
-              <a:spcBef>
-                <a:spcPts val="0"/>
-              </a:spcBef>
-              <a:spcAft>
-                <a:spcPts val="0"/>
-              </a:spcAft>
-            </a:pPr>
-            <a:r>
-              <a:rPr sz="1300" b="0" i="0">
-                <a:solidFill>
-                  <a:srgbClr val="5E6E7C"/>
-                </a:solidFill>
-                <a:latin typeface="Calibri"/>
-                <a:ea typeface="Calibri"/>
-                <a:cs typeface="Calibri"/>
-              </a:rPr>
-              <a:t>Rupee value uses a placeholder price, so it is not shown.</a:t>
+              <a:t>Do not scale the single-junction result to a city.</a:t>
             </a:r>
           </a:p>
         </p:txBody>
@@ -8215,6 +7447,2201 @@
 </file>
 
 <file path=ppt/slides/slide13.xml><?xml version="1.0" encoding="utf-8"?>
+<p:sld xmlns:a="http://schemas.openxmlformats.org/drawingml/2006/main" xmlns:p="http://schemas.openxmlformats.org/presentationml/2006/main" xmlns:r="http://schemas.openxmlformats.org/officeDocument/2006/relationships">
+  <p:cSld>
+    <p:bg>
+      <p:bgPr>
+        <a:solidFill>
+          <a:srgbClr val="F6F3EE"/>
+        </a:solidFill>
+        <a:effectLst/>
+      </p:bgPr>
+    </p:bg>
+    <p:spTree>
+      <p:nvGrpSpPr>
+        <p:cNvPr id="1" name=""/>
+        <p:cNvGrpSpPr/>
+        <p:nvPr/>
+      </p:nvGrpSpPr>
+      <p:grpSpPr/>
+      <p:sp>
+        <p:nvSpPr>
+          <p:cNvPr id="2" name="Rectangle 1"/>
+          <p:cNvSpPr/>
+          <p:nvPr/>
+        </p:nvSpPr>
+        <p:spPr>
+          <a:xfrm>
+            <a:off x="0" y="0"/>
+            <a:ext cx="73152" cy="6858000"/>
+          </a:xfrm>
+          <a:prstGeom prst="rect">
+            <a:avLst/>
+          </a:prstGeom>
+          <a:solidFill>
+            <a:srgbClr val="C4841D"/>
+          </a:solidFill>
+          <a:ln>
+            <a:noFill/>
+          </a:ln>
+        </p:spPr>
+        <p:style>
+          <a:lnRef idx="1">
+            <a:schemeClr val="accent1"/>
+          </a:lnRef>
+          <a:fillRef idx="3">
+            <a:schemeClr val="accent1"/>
+          </a:fillRef>
+          <a:effectRef idx="2">
+            <a:schemeClr val="accent1"/>
+          </a:effectRef>
+          <a:fontRef idx="minor">
+            <a:schemeClr val="lt1"/>
+          </a:fontRef>
+        </p:style>
+        <p:txBody>
+          <a:bodyPr rtlCol="0" anchor="ctr"/>
+          <a:lstStyle/>
+          <a:p>
+            <a:pPr algn="ctr"/>
+          </a:p>
+        </p:txBody>
+      </p:sp>
+      <p:sp>
+        <p:nvSpPr>
+          <p:cNvPr id="3" name="TextBox 2"/>
+          <p:cNvSpPr txBox="1"/>
+          <p:nvPr/>
+        </p:nvSpPr>
+        <p:spPr>
+          <a:xfrm>
+            <a:off x="502920" y="256032"/>
+            <a:ext cx="9144000" cy="237744"/>
+          </a:xfrm>
+          <a:prstGeom prst="rect">
+            <a:avLst/>
+          </a:prstGeom>
+          <a:noFill/>
+        </p:spPr>
+        <p:txBody>
+          <a:bodyPr wrap="square" lIns="0" rIns="0" tIns="0" bIns="0" anchor="t"/>
+          <a:lstStyle/>
+          <a:p>
+            <a:pPr algn="l">
+              <a:spcBef>
+                <a:spcPts val="0"/>
+              </a:spcBef>
+              <a:spcAft>
+                <a:spcPts val="0"/>
+              </a:spcAft>
+            </a:pPr>
+            <a:r>
+              <a:rPr sz="1200" b="1" i="0">
+                <a:solidFill>
+                  <a:srgbClr val="C4841D"/>
+                </a:solidFill>
+                <a:latin typeface="Calibri"/>
+                <a:ea typeface="Calibri"/>
+                <a:cs typeface="Calibri"/>
+              </a:rPr>
+              <a:t>BESIDE THE HEADLINE</a:t>
+            </a:r>
+          </a:p>
+        </p:txBody>
+      </p:sp>
+      <p:sp>
+        <p:nvSpPr>
+          <p:cNvPr id="4" name="TextBox 3"/>
+          <p:cNvSpPr txBox="1"/>
+          <p:nvPr/>
+        </p:nvSpPr>
+        <p:spPr>
+          <a:xfrm>
+            <a:off x="502920" y="475488"/>
+            <a:ext cx="11228832" cy="475488"/>
+          </a:xfrm>
+          <a:prstGeom prst="rect">
+            <a:avLst/>
+          </a:prstGeom>
+          <a:noFill/>
+        </p:spPr>
+        <p:txBody>
+          <a:bodyPr wrap="square" lIns="0" rIns="0" tIns="0" bIns="0" anchor="t"/>
+          <a:lstStyle/>
+          <a:p>
+            <a:pPr algn="l">
+              <a:spcBef>
+                <a:spcPts val="0"/>
+              </a:spcBef>
+              <a:spcAft>
+                <a:spcPts val="0"/>
+              </a:spcAft>
+            </a:pPr>
+            <a:r>
+              <a:rPr sz="2800" b="1" i="0">
+                <a:solidFill>
+                  <a:srgbClr val="1A2834"/>
+                </a:solidFill>
+                <a:latin typeface="Georgia"/>
+                <a:ea typeface="Georgia"/>
+                <a:cs typeface="Georgia"/>
+              </a:rPr>
+              <a:t>Safety: Fewer conflicts. Emissions: Intervals overlap.</a:t>
+            </a:r>
+          </a:p>
+        </p:txBody>
+      </p:sp>
+      <p:sp>
+        <p:nvSpPr>
+          <p:cNvPr id="5" name="TextBox 4"/>
+          <p:cNvSpPr txBox="1"/>
+          <p:nvPr/>
+        </p:nvSpPr>
+        <p:spPr>
+          <a:xfrm>
+            <a:off x="502920" y="987552"/>
+            <a:ext cx="11228832" cy="420624"/>
+          </a:xfrm>
+          <a:prstGeom prst="rect">
+            <a:avLst/>
+          </a:prstGeom>
+          <a:noFill/>
+        </p:spPr>
+        <p:txBody>
+          <a:bodyPr wrap="square" lIns="0" rIns="0" tIns="0" bIns="0" anchor="t"/>
+          <a:lstStyle/>
+          <a:p>
+            <a:pPr algn="l">
+              <a:spcBef>
+                <a:spcPts val="0"/>
+              </a:spcBef>
+              <a:spcAft>
+                <a:spcPts val="0"/>
+              </a:spcAft>
+            </a:pPr>
+            <a:r>
+              <a:rPr sz="1500" b="0" i="0">
+                <a:solidFill>
+                  <a:srgbClr val="5E6E7C"/>
+                </a:solidFill>
+                <a:latin typeface="Calibri"/>
+                <a:ea typeface="Calibri"/>
+                <a:cs typeface="Calibri"/>
+              </a:rPr>
+              <a:t>Both lines are the verdict fields in the loaded JSON, not a fixed sentence.</a:t>
+            </a:r>
+          </a:p>
+        </p:txBody>
+      </p:sp>
+      <p:sp>
+        <p:nvSpPr>
+          <p:cNvPr id="6" name="TextBox 5"/>
+          <p:cNvSpPr txBox="1"/>
+          <p:nvPr/>
+        </p:nvSpPr>
+        <p:spPr>
+          <a:xfrm>
+            <a:off x="502920" y="6510528"/>
+            <a:ext cx="8412480" cy="237744"/>
+          </a:xfrm>
+          <a:prstGeom prst="rect">
+            <a:avLst/>
+          </a:prstGeom>
+          <a:noFill/>
+        </p:spPr>
+        <p:txBody>
+          <a:bodyPr wrap="square" lIns="0" rIns="0" tIns="0" bIns="0" anchor="t"/>
+          <a:lstStyle/>
+          <a:p>
+            <a:pPr algn="l">
+              <a:spcBef>
+                <a:spcPts val="0"/>
+              </a:spcBef>
+              <a:spcAft>
+                <a:spcPts val="0"/>
+              </a:spcAft>
+            </a:pPr>
+            <a:r>
+              <a:rPr sz="1200" b="0" i="0">
+                <a:solidFill>
+                  <a:srgbClr val="5E6E7C"/>
+                </a:solidFill>
+                <a:latin typeface="Calibri"/>
+                <a:ea typeface="Calibri"/>
+                <a:cs typeface="Calibri"/>
+              </a:rPr>
+              <a:t>XtraFlow    ·    Simulation-based estimate</a:t>
+            </a:r>
+          </a:p>
+        </p:txBody>
+      </p:sp>
+      <p:sp>
+        <p:nvSpPr>
+          <p:cNvPr id="7" name="TextBox 6"/>
+          <p:cNvSpPr txBox="1"/>
+          <p:nvPr/>
+        </p:nvSpPr>
+        <p:spPr>
+          <a:xfrm>
+            <a:off x="9692640" y="6510528"/>
+            <a:ext cx="2011680" cy="237744"/>
+          </a:xfrm>
+          <a:prstGeom prst="rect">
+            <a:avLst/>
+          </a:prstGeom>
+          <a:noFill/>
+        </p:spPr>
+        <p:txBody>
+          <a:bodyPr wrap="square" lIns="0" rIns="0" tIns="0" bIns="0" anchor="t"/>
+          <a:lstStyle/>
+          <a:p>
+            <a:pPr algn="r">
+              <a:spcBef>
+                <a:spcPts val="0"/>
+              </a:spcBef>
+              <a:spcAft>
+                <a:spcPts val="0"/>
+              </a:spcAft>
+            </a:pPr>
+            <a:r>
+              <a:rPr sz="1200" b="0" i="0">
+                <a:solidFill>
+                  <a:srgbClr val="5E6E7C"/>
+                </a:solidFill>
+                <a:latin typeface="Georgia"/>
+                <a:ea typeface="Georgia"/>
+                <a:cs typeface="Georgia"/>
+              </a:rPr>
+              <a:t>13</a:t>
+            </a:r>
+          </a:p>
+        </p:txBody>
+      </p:sp>
+      <p:sp>
+        <p:nvSpPr>
+          <p:cNvPr id="8" name="Rounded Rectangle 7"/>
+          <p:cNvSpPr/>
+          <p:nvPr/>
+        </p:nvSpPr>
+        <p:spPr>
+          <a:xfrm>
+            <a:off x="502920" y="1600200"/>
+            <a:ext cx="3633216" cy="3794760"/>
+          </a:xfrm>
+          <a:prstGeom prst="roundRect">
+            <a:avLst>
+              <a:gd name="adj" fmla="val 8000"/>
+            </a:avLst>
+          </a:prstGeom>
+          <a:solidFill>
+            <a:srgbClr val="FFFFFF"/>
+          </a:solidFill>
+          <a:ln w="12700">
+            <a:solidFill>
+              <a:srgbClr val="E3DBD0"/>
+            </a:solidFill>
+          </a:ln>
+        </p:spPr>
+        <p:style>
+          <a:lnRef idx="1">
+            <a:schemeClr val="accent1"/>
+          </a:lnRef>
+          <a:fillRef idx="3">
+            <a:schemeClr val="accent1"/>
+          </a:fillRef>
+          <a:effectRef idx="2">
+            <a:schemeClr val="accent1"/>
+          </a:effectRef>
+          <a:fontRef idx="minor">
+            <a:schemeClr val="lt1"/>
+          </a:fontRef>
+        </p:style>
+        <p:txBody>
+          <a:bodyPr rtlCol="0" anchor="ctr"/>
+          <a:lstStyle/>
+          <a:p>
+            <a:pPr algn="ctr"/>
+          </a:p>
+        </p:txBody>
+      </p:sp>
+      <p:sp>
+        <p:nvSpPr>
+          <p:cNvPr id="9" name="Rectangle 8"/>
+          <p:cNvSpPr/>
+          <p:nvPr/>
+        </p:nvSpPr>
+        <p:spPr>
+          <a:xfrm>
+            <a:off x="740664" y="1828800"/>
+            <a:ext cx="502920" cy="41148"/>
+          </a:xfrm>
+          <a:prstGeom prst="rect">
+            <a:avLst/>
+          </a:prstGeom>
+          <a:solidFill>
+            <a:srgbClr val="1B6B5A"/>
+          </a:solidFill>
+          <a:ln>
+            <a:noFill/>
+          </a:ln>
+        </p:spPr>
+        <p:style>
+          <a:lnRef idx="1">
+            <a:schemeClr val="accent1"/>
+          </a:lnRef>
+          <a:fillRef idx="3">
+            <a:schemeClr val="accent1"/>
+          </a:fillRef>
+          <a:effectRef idx="2">
+            <a:schemeClr val="accent1"/>
+          </a:effectRef>
+          <a:fontRef idx="minor">
+            <a:schemeClr val="lt1"/>
+          </a:fontRef>
+        </p:style>
+        <p:txBody>
+          <a:bodyPr rtlCol="0" anchor="ctr"/>
+          <a:lstStyle/>
+          <a:p>
+            <a:pPr algn="ctr"/>
+          </a:p>
+        </p:txBody>
+      </p:sp>
+      <p:sp>
+        <p:nvSpPr>
+          <p:cNvPr id="10" name="TextBox 9"/>
+          <p:cNvSpPr txBox="1"/>
+          <p:nvPr/>
+        </p:nvSpPr>
+        <p:spPr>
+          <a:xfrm>
+            <a:off x="722376" y="2011680"/>
+            <a:ext cx="3221735" cy="274320"/>
+          </a:xfrm>
+          <a:prstGeom prst="rect">
+            <a:avLst/>
+          </a:prstGeom>
+          <a:noFill/>
+        </p:spPr>
+        <p:txBody>
+          <a:bodyPr wrap="square" lIns="0" rIns="0" tIns="0" bIns="0" anchor="t"/>
+          <a:lstStyle/>
+          <a:p>
+            <a:pPr algn="l">
+              <a:spcBef>
+                <a:spcPts val="0"/>
+              </a:spcBef>
+              <a:spcAft>
+                <a:spcPts val="0"/>
+              </a:spcAft>
+            </a:pPr>
+            <a:r>
+              <a:rPr sz="1200" b="1" i="0">
+                <a:solidFill>
+                  <a:srgbClr val="1B6B5A"/>
+                </a:solidFill>
+                <a:latin typeface="Calibri"/>
+                <a:ea typeface="Calibri"/>
+                <a:cs typeface="Calibri"/>
+              </a:rPr>
+              <a:t>SAFETY</a:t>
+            </a:r>
+          </a:p>
+        </p:txBody>
+      </p:sp>
+      <p:sp>
+        <p:nvSpPr>
+          <p:cNvPr id="11" name="TextBox 10"/>
+          <p:cNvSpPr txBox="1"/>
+          <p:nvPr/>
+        </p:nvSpPr>
+        <p:spPr>
+          <a:xfrm>
+            <a:off x="722376" y="2331720"/>
+            <a:ext cx="3221735" cy="777240"/>
+          </a:xfrm>
+          <a:prstGeom prst="rect">
+            <a:avLst/>
+          </a:prstGeom>
+          <a:noFill/>
+        </p:spPr>
+        <p:txBody>
+          <a:bodyPr wrap="square" lIns="0" rIns="0" tIns="0" bIns="0" anchor="t"/>
+          <a:lstStyle/>
+          <a:p>
+            <a:pPr algn="l">
+              <a:spcBef>
+                <a:spcPts val="0"/>
+              </a:spcBef>
+              <a:spcAft>
+                <a:spcPts val="0"/>
+              </a:spcAft>
+            </a:pPr>
+            <a:r>
+              <a:rPr sz="2800" b="1" i="0">
+                <a:solidFill>
+                  <a:srgbClr val="1A2834"/>
+                </a:solidFill>
+                <a:latin typeface="Georgia"/>
+                <a:ea typeface="Georgia"/>
+                <a:cs typeface="Georgia"/>
+              </a:rPr>
+              <a:t>Fewer conflicts</a:t>
+            </a:r>
+          </a:p>
+        </p:txBody>
+      </p:sp>
+      <p:sp>
+        <p:nvSpPr>
+          <p:cNvPr id="12" name="TextBox 11"/>
+          <p:cNvSpPr txBox="1"/>
+          <p:nvPr/>
+        </p:nvSpPr>
+        <p:spPr>
+          <a:xfrm>
+            <a:off x="722376" y="3246120"/>
+            <a:ext cx="3194304" cy="1874519"/>
+          </a:xfrm>
+          <a:prstGeom prst="rect">
+            <a:avLst/>
+          </a:prstGeom>
+          <a:noFill/>
+        </p:spPr>
+        <p:txBody>
+          <a:bodyPr wrap="square" lIns="0" rIns="0" tIns="0" bIns="0" anchor="t"/>
+          <a:lstStyle/>
+          <a:p>
+            <a:pPr algn="l">
+              <a:spcBef>
+                <a:spcPts val="0"/>
+              </a:spcBef>
+              <a:spcAft>
+                <a:spcPts val="0"/>
+              </a:spcAft>
+            </a:pPr>
+            <a:r>
+              <a:rPr sz="1500" b="0" i="0">
+                <a:solidFill>
+                  <a:srgbClr val="1A2834"/>
+                </a:solidFill>
+                <a:latin typeface="Calibri"/>
+                <a:ea typeface="Calibri"/>
+                <a:cs typeface="Calibri"/>
+              </a:rPr>
+              <a:t>Time-to-collision conflicts from the simulator. A model count, not a crash record.</a:t>
+            </a:r>
+          </a:p>
+        </p:txBody>
+      </p:sp>
+      <p:sp>
+        <p:nvSpPr>
+          <p:cNvPr id="13" name="Rounded Rectangle 12"/>
+          <p:cNvSpPr/>
+          <p:nvPr/>
+        </p:nvSpPr>
+        <p:spPr>
+          <a:xfrm>
+            <a:off x="4300728" y="1600200"/>
+            <a:ext cx="3633216" cy="3794760"/>
+          </a:xfrm>
+          <a:prstGeom prst="roundRect">
+            <a:avLst>
+              <a:gd name="adj" fmla="val 8000"/>
+            </a:avLst>
+          </a:prstGeom>
+          <a:solidFill>
+            <a:srgbClr val="FFFFFF"/>
+          </a:solidFill>
+          <a:ln w="12700">
+            <a:solidFill>
+              <a:srgbClr val="E3DBD0"/>
+            </a:solidFill>
+          </a:ln>
+        </p:spPr>
+        <p:style>
+          <a:lnRef idx="1">
+            <a:schemeClr val="accent1"/>
+          </a:lnRef>
+          <a:fillRef idx="3">
+            <a:schemeClr val="accent1"/>
+          </a:fillRef>
+          <a:effectRef idx="2">
+            <a:schemeClr val="accent1"/>
+          </a:effectRef>
+          <a:fontRef idx="minor">
+            <a:schemeClr val="lt1"/>
+          </a:fontRef>
+        </p:style>
+        <p:txBody>
+          <a:bodyPr rtlCol="0" anchor="ctr"/>
+          <a:lstStyle/>
+          <a:p>
+            <a:pPr algn="ctr"/>
+          </a:p>
+        </p:txBody>
+      </p:sp>
+      <p:sp>
+        <p:nvSpPr>
+          <p:cNvPr id="14" name="Rectangle 13"/>
+          <p:cNvSpPr/>
+          <p:nvPr/>
+        </p:nvSpPr>
+        <p:spPr>
+          <a:xfrm>
+            <a:off x="4538472" y="1828800"/>
+            <a:ext cx="502920" cy="41148"/>
+          </a:xfrm>
+          <a:prstGeom prst="rect">
+            <a:avLst/>
+          </a:prstGeom>
+          <a:solidFill>
+            <a:srgbClr val="1B6B5A"/>
+          </a:solidFill>
+          <a:ln>
+            <a:noFill/>
+          </a:ln>
+        </p:spPr>
+        <p:style>
+          <a:lnRef idx="1">
+            <a:schemeClr val="accent1"/>
+          </a:lnRef>
+          <a:fillRef idx="3">
+            <a:schemeClr val="accent1"/>
+          </a:fillRef>
+          <a:effectRef idx="2">
+            <a:schemeClr val="accent1"/>
+          </a:effectRef>
+          <a:fontRef idx="minor">
+            <a:schemeClr val="lt1"/>
+          </a:fontRef>
+        </p:style>
+        <p:txBody>
+          <a:bodyPr rtlCol="0" anchor="ctr"/>
+          <a:lstStyle/>
+          <a:p>
+            <a:pPr algn="ctr"/>
+          </a:p>
+        </p:txBody>
+      </p:sp>
+      <p:sp>
+        <p:nvSpPr>
+          <p:cNvPr id="15" name="TextBox 14"/>
+          <p:cNvSpPr txBox="1"/>
+          <p:nvPr/>
+        </p:nvSpPr>
+        <p:spPr>
+          <a:xfrm>
+            <a:off x="4520184" y="2011680"/>
+            <a:ext cx="3221735" cy="274320"/>
+          </a:xfrm>
+          <a:prstGeom prst="rect">
+            <a:avLst/>
+          </a:prstGeom>
+          <a:noFill/>
+        </p:spPr>
+        <p:txBody>
+          <a:bodyPr wrap="square" lIns="0" rIns="0" tIns="0" bIns="0" anchor="t"/>
+          <a:lstStyle/>
+          <a:p>
+            <a:pPr algn="l">
+              <a:spcBef>
+                <a:spcPts val="0"/>
+              </a:spcBef>
+              <a:spcAft>
+                <a:spcPts val="0"/>
+              </a:spcAft>
+            </a:pPr>
+            <a:r>
+              <a:rPr sz="1200" b="1" i="0">
+                <a:solidFill>
+                  <a:srgbClr val="1B6B5A"/>
+                </a:solidFill>
+                <a:latin typeface="Calibri"/>
+                <a:ea typeface="Calibri"/>
+                <a:cs typeface="Calibri"/>
+              </a:rPr>
+              <a:t>EMISSIONS MODEL</a:t>
+            </a:r>
+          </a:p>
+        </p:txBody>
+      </p:sp>
+      <p:sp>
+        <p:nvSpPr>
+          <p:cNvPr id="16" name="TextBox 15"/>
+          <p:cNvSpPr txBox="1"/>
+          <p:nvPr/>
+        </p:nvSpPr>
+        <p:spPr>
+          <a:xfrm>
+            <a:off x="4520184" y="2331720"/>
+            <a:ext cx="3221735" cy="777240"/>
+          </a:xfrm>
+          <a:prstGeom prst="rect">
+            <a:avLst/>
+          </a:prstGeom>
+          <a:noFill/>
+        </p:spPr>
+        <p:txBody>
+          <a:bodyPr wrap="square" lIns="0" rIns="0" tIns="0" bIns="0" anchor="t"/>
+          <a:lstStyle/>
+          <a:p>
+            <a:pPr algn="l">
+              <a:spcBef>
+                <a:spcPts val="0"/>
+              </a:spcBef>
+              <a:spcAft>
+                <a:spcPts val="0"/>
+              </a:spcAft>
+            </a:pPr>
+            <a:r>
+              <a:rPr sz="2800" b="1" i="0">
+                <a:solidFill>
+                  <a:srgbClr val="1A2834"/>
+                </a:solidFill>
+                <a:latin typeface="Georgia"/>
+                <a:ea typeface="Georgia"/>
+                <a:cs typeface="Georgia"/>
+              </a:rPr>
+              <a:t>Intervals overlap</a:t>
+            </a:r>
+          </a:p>
+        </p:txBody>
+      </p:sp>
+      <p:sp>
+        <p:nvSpPr>
+          <p:cNvPr id="17" name="TextBox 16"/>
+          <p:cNvSpPr txBox="1"/>
+          <p:nvPr/>
+        </p:nvSpPr>
+        <p:spPr>
+          <a:xfrm>
+            <a:off x="4520184" y="3246120"/>
+            <a:ext cx="3194304" cy="1874519"/>
+          </a:xfrm>
+          <a:prstGeom prst="rect">
+            <a:avLst/>
+          </a:prstGeom>
+          <a:noFill/>
+        </p:spPr>
+        <p:txBody>
+          <a:bodyPr wrap="square" lIns="0" rIns="0" tIns="0" bIns="0" anchor="t"/>
+          <a:lstStyle/>
+          <a:p>
+            <a:pPr algn="l">
+              <a:spcBef>
+                <a:spcPts val="0"/>
+              </a:spcBef>
+              <a:spcAft>
+                <a:spcPts val="0"/>
+              </a:spcAft>
+            </a:pPr>
+            <a:r>
+              <a:rPr sz="1500" b="0" i="0">
+                <a:solidFill>
+                  <a:srgbClr val="1A2834"/>
+                </a:solidFill>
+                <a:latin typeface="Calibri"/>
+                <a:ea typeface="Calibri"/>
+                <a:cs typeface="Calibri"/>
+              </a:rPr>
+              <a:t>Primary model 13.9%. Alternate model 13.7%. The reduction shrinks. It does not flip.</a:t>
+            </a:r>
+          </a:p>
+        </p:txBody>
+      </p:sp>
+      <p:sp>
+        <p:nvSpPr>
+          <p:cNvPr id="18" name="Rounded Rectangle 17"/>
+          <p:cNvSpPr/>
+          <p:nvPr/>
+        </p:nvSpPr>
+        <p:spPr>
+          <a:xfrm>
+            <a:off x="8098536" y="1600200"/>
+            <a:ext cx="3633216" cy="3794760"/>
+          </a:xfrm>
+          <a:prstGeom prst="roundRect">
+            <a:avLst>
+              <a:gd name="adj" fmla="val 8000"/>
+            </a:avLst>
+          </a:prstGeom>
+          <a:solidFill>
+            <a:srgbClr val="FFFFFF"/>
+          </a:solidFill>
+          <a:ln w="12700">
+            <a:solidFill>
+              <a:srgbClr val="E3DBD0"/>
+            </a:solidFill>
+          </a:ln>
+        </p:spPr>
+        <p:style>
+          <a:lnRef idx="1">
+            <a:schemeClr val="accent1"/>
+          </a:lnRef>
+          <a:fillRef idx="3">
+            <a:schemeClr val="accent1"/>
+          </a:fillRef>
+          <a:effectRef idx="2">
+            <a:schemeClr val="accent1"/>
+          </a:effectRef>
+          <a:fontRef idx="minor">
+            <a:schemeClr val="lt1"/>
+          </a:fontRef>
+        </p:style>
+        <p:txBody>
+          <a:bodyPr rtlCol="0" anchor="ctr"/>
+          <a:lstStyle/>
+          <a:p>
+            <a:pPr algn="ctr"/>
+          </a:p>
+        </p:txBody>
+      </p:sp>
+      <p:sp>
+        <p:nvSpPr>
+          <p:cNvPr id="19" name="Rectangle 18"/>
+          <p:cNvSpPr/>
+          <p:nvPr/>
+        </p:nvSpPr>
+        <p:spPr>
+          <a:xfrm>
+            <a:off x="8336280" y="1828800"/>
+            <a:ext cx="502920" cy="41148"/>
+          </a:xfrm>
+          <a:prstGeom prst="rect">
+            <a:avLst/>
+          </a:prstGeom>
+          <a:solidFill>
+            <a:srgbClr val="C4841D"/>
+          </a:solidFill>
+          <a:ln>
+            <a:noFill/>
+          </a:ln>
+        </p:spPr>
+        <p:style>
+          <a:lnRef idx="1">
+            <a:schemeClr val="accent1"/>
+          </a:lnRef>
+          <a:fillRef idx="3">
+            <a:schemeClr val="accent1"/>
+          </a:fillRef>
+          <a:effectRef idx="2">
+            <a:schemeClr val="accent1"/>
+          </a:effectRef>
+          <a:fontRef idx="minor">
+            <a:schemeClr val="lt1"/>
+          </a:fontRef>
+        </p:style>
+        <p:txBody>
+          <a:bodyPr rtlCol="0" anchor="ctr"/>
+          <a:lstStyle/>
+          <a:p>
+            <a:pPr algn="ctr"/>
+          </a:p>
+        </p:txBody>
+      </p:sp>
+      <p:sp>
+        <p:nvSpPr>
+          <p:cNvPr id="20" name="TextBox 19"/>
+          <p:cNvSpPr txBox="1"/>
+          <p:nvPr/>
+        </p:nvSpPr>
+        <p:spPr>
+          <a:xfrm>
+            <a:off x="8317992" y="2011680"/>
+            <a:ext cx="3221735" cy="274320"/>
+          </a:xfrm>
+          <a:prstGeom prst="rect">
+            <a:avLst/>
+          </a:prstGeom>
+          <a:noFill/>
+        </p:spPr>
+        <p:txBody>
+          <a:bodyPr wrap="square" lIns="0" rIns="0" tIns="0" bIns="0" anchor="t"/>
+          <a:lstStyle/>
+          <a:p>
+            <a:pPr algn="l">
+              <a:spcBef>
+                <a:spcPts val="0"/>
+              </a:spcBef>
+              <a:spcAft>
+                <a:spcPts val="0"/>
+              </a:spcAft>
+            </a:pPr>
+            <a:r>
+              <a:rPr sz="1200" b="1" i="0">
+                <a:solidFill>
+                  <a:srgbClr val="C4841D"/>
+                </a:solidFill>
+                <a:latin typeface="Calibri"/>
+                <a:ea typeface="Calibri"/>
+                <a:cs typeface="Calibri"/>
+              </a:rPr>
+              <a:t>PERCEPTION</a:t>
+            </a:r>
+          </a:p>
+        </p:txBody>
+      </p:sp>
+      <p:sp>
+        <p:nvSpPr>
+          <p:cNvPr id="21" name="TextBox 20"/>
+          <p:cNvSpPr txBox="1"/>
+          <p:nvPr/>
+        </p:nvSpPr>
+        <p:spPr>
+          <a:xfrm>
+            <a:off x="8317992" y="2331720"/>
+            <a:ext cx="3221735" cy="777240"/>
+          </a:xfrm>
+          <a:prstGeom prst="rect">
+            <a:avLst/>
+          </a:prstGeom>
+          <a:noFill/>
+        </p:spPr>
+        <p:txBody>
+          <a:bodyPr wrap="square" lIns="0" rIns="0" tIns="0" bIns="0" anchor="t"/>
+          <a:lstStyle/>
+          <a:p>
+            <a:pPr algn="l">
+              <a:spcBef>
+                <a:spcPts val="0"/>
+              </a:spcBef>
+              <a:spcAft>
+                <a:spcPts val="0"/>
+              </a:spcAft>
+            </a:pPr>
+            <a:r>
+              <a:rPr sz="2800" b="1" i="0">
+                <a:solidFill>
+                  <a:srgbClr val="1A2834"/>
+                </a:solidFill>
+                <a:latin typeface="Georgia"/>
+                <a:ea typeface="Georgia"/>
+                <a:cs typeface="Georgia"/>
+              </a:rPr>
+              <a:t>Assumed</a:t>
+            </a:r>
+          </a:p>
+        </p:txBody>
+      </p:sp>
+      <p:sp>
+        <p:nvSpPr>
+          <p:cNvPr id="22" name="TextBox 21"/>
+          <p:cNvSpPr txBox="1"/>
+          <p:nvPr/>
+        </p:nvSpPr>
+        <p:spPr>
+          <a:xfrm>
+            <a:off x="8317992" y="3246120"/>
+            <a:ext cx="3194304" cy="1874519"/>
+          </a:xfrm>
+          <a:prstGeom prst="rect">
+            <a:avLst/>
+          </a:prstGeom>
+          <a:noFill/>
+        </p:spPr>
+        <p:txBody>
+          <a:bodyPr wrap="square" lIns="0" rIns="0" tIns="0" bIns="0" anchor="t"/>
+          <a:lstStyle/>
+          <a:p>
+            <a:pPr algn="l">
+              <a:spcBef>
+                <a:spcPts val="0"/>
+              </a:spcBef>
+              <a:spcAft>
+                <a:spcPts val="0"/>
+              </a:spcAft>
+            </a:pPr>
+            <a:r>
+              <a:rPr sz="1500" b="0" i="0">
+                <a:solidFill>
+                  <a:srgbClr val="1A2834"/>
+                </a:solidFill>
+                <a:latin typeface="Calibri"/>
+                <a:ea typeface="Calibri"/>
+                <a:cs typeface="Calibri"/>
+              </a:rPr>
+              <a:t>No field video in this run. Smoke-test miss rate 15%. Treat detector error as assumed until labels exist.</a:t>
+            </a:r>
+          </a:p>
+        </p:txBody>
+      </p:sp>
+    </p:spTree>
+  </p:cSld>
+  <p:clrMapOvr>
+    <a:masterClrMapping/>
+  </p:clrMapOvr>
+</p:sld>
+</file>
+
+<file path=ppt/slides/slide14.xml><?xml version="1.0" encoding="utf-8"?>
+<p:sld xmlns:a="http://schemas.openxmlformats.org/drawingml/2006/main" xmlns:p="http://schemas.openxmlformats.org/presentationml/2006/main" xmlns:r="http://schemas.openxmlformats.org/officeDocument/2006/relationships">
+  <p:cSld>
+    <p:bg>
+      <p:bgPr>
+        <a:solidFill>
+          <a:srgbClr val="F6F3EE"/>
+        </a:solidFill>
+        <a:effectLst/>
+      </p:bgPr>
+    </p:bg>
+    <p:spTree>
+      <p:nvGrpSpPr>
+        <p:cNvPr id="1" name=""/>
+        <p:cNvGrpSpPr/>
+        <p:nvPr/>
+      </p:nvGrpSpPr>
+      <p:grpSpPr/>
+      <p:sp>
+        <p:nvSpPr>
+          <p:cNvPr id="2" name="Rectangle 1"/>
+          <p:cNvSpPr/>
+          <p:nvPr/>
+        </p:nvSpPr>
+        <p:spPr>
+          <a:xfrm>
+            <a:off x="0" y="0"/>
+            <a:ext cx="73152" cy="6858000"/>
+          </a:xfrm>
+          <a:prstGeom prst="rect">
+            <a:avLst/>
+          </a:prstGeom>
+          <a:solidFill>
+            <a:srgbClr val="C4841D"/>
+          </a:solidFill>
+          <a:ln>
+            <a:noFill/>
+          </a:ln>
+        </p:spPr>
+        <p:style>
+          <a:lnRef idx="1">
+            <a:schemeClr val="accent1"/>
+          </a:lnRef>
+          <a:fillRef idx="3">
+            <a:schemeClr val="accent1"/>
+          </a:fillRef>
+          <a:effectRef idx="2">
+            <a:schemeClr val="accent1"/>
+          </a:effectRef>
+          <a:fontRef idx="minor">
+            <a:schemeClr val="lt1"/>
+          </a:fontRef>
+        </p:style>
+        <p:txBody>
+          <a:bodyPr rtlCol="0" anchor="ctr"/>
+          <a:lstStyle/>
+          <a:p>
+            <a:pPr algn="ctr"/>
+          </a:p>
+        </p:txBody>
+      </p:sp>
+      <p:sp>
+        <p:nvSpPr>
+          <p:cNvPr id="3" name="TextBox 2"/>
+          <p:cNvSpPr txBox="1"/>
+          <p:nvPr/>
+        </p:nvSpPr>
+        <p:spPr>
+          <a:xfrm>
+            <a:off x="502920" y="256032"/>
+            <a:ext cx="9144000" cy="237744"/>
+          </a:xfrm>
+          <a:prstGeom prst="rect">
+            <a:avLst/>
+          </a:prstGeom>
+          <a:noFill/>
+        </p:spPr>
+        <p:txBody>
+          <a:bodyPr wrap="square" lIns="0" rIns="0" tIns="0" bIns="0" anchor="t"/>
+          <a:lstStyle/>
+          <a:p>
+            <a:pPr algn="l">
+              <a:spcBef>
+                <a:spcPts val="0"/>
+              </a:spcBef>
+              <a:spcAft>
+                <a:spcPts val="0"/>
+              </a:spcAft>
+            </a:pPr>
+            <a:r>
+              <a:rPr sz="1200" b="1" i="0">
+                <a:solidFill>
+                  <a:srgbClr val="C4841D"/>
+                </a:solidFill>
+                <a:latin typeface="Calibri"/>
+                <a:ea typeface="Calibri"/>
+                <a:cs typeface="Calibri"/>
+              </a:rPr>
+              <a:t>SCALING</a:t>
+            </a:r>
+          </a:p>
+        </p:txBody>
+      </p:sp>
+      <p:sp>
+        <p:nvSpPr>
+          <p:cNvPr id="4" name="TextBox 3"/>
+          <p:cNvSpPr txBox="1"/>
+          <p:nvPr/>
+        </p:nvSpPr>
+        <p:spPr>
+          <a:xfrm>
+            <a:off x="502920" y="475488"/>
+            <a:ext cx="11228832" cy="475488"/>
+          </a:xfrm>
+          <a:prstGeom prst="rect">
+            <a:avLst/>
+          </a:prstGeom>
+          <a:noFill/>
+        </p:spPr>
+        <p:txBody>
+          <a:bodyPr wrap="square" lIns="0" rIns="0" tIns="0" bIns="0" anchor="t"/>
+          <a:lstStyle/>
+          <a:p>
+            <a:pPr algn="l">
+              <a:spcBef>
+                <a:spcPts val="0"/>
+              </a:spcBef>
+              <a:spcAft>
+                <a:spcPts val="0"/>
+              </a:spcAft>
+            </a:pPr>
+            <a:r>
+              <a:rPr sz="2800" b="1" i="0">
+                <a:solidFill>
+                  <a:srgbClr val="1A2834"/>
+                </a:solidFill>
+                <a:latin typeface="Georgia"/>
+                <a:ea typeface="Georgia"/>
+                <a:cs typeface="Georgia"/>
+              </a:rPr>
+              <a:t>Per vehicle is measured. Per year is a range.</a:t>
+            </a:r>
+          </a:p>
+        </p:txBody>
+      </p:sp>
+      <p:sp>
+        <p:nvSpPr>
+          <p:cNvPr id="5" name="TextBox 4"/>
+          <p:cNvSpPr txBox="1"/>
+          <p:nvPr/>
+        </p:nvSpPr>
+        <p:spPr>
+          <a:xfrm>
+            <a:off x="502920" y="987552"/>
+            <a:ext cx="11228832" cy="420624"/>
+          </a:xfrm>
+          <a:prstGeom prst="rect">
+            <a:avLst/>
+          </a:prstGeom>
+          <a:noFill/>
+        </p:spPr>
+        <p:txBody>
+          <a:bodyPr wrap="square" lIns="0" rIns="0" tIns="0" bIns="0" anchor="t"/>
+          <a:lstStyle/>
+          <a:p>
+            <a:pPr algn="l">
+              <a:spcBef>
+                <a:spcPts val="0"/>
+              </a:spcBef>
+              <a:spcAft>
+                <a:spcPts val="0"/>
+              </a:spcAft>
+            </a:pPr>
+            <a:r>
+              <a:rPr sz="1500" b="0" i="0">
+                <a:solidFill>
+                  <a:srgbClr val="5E6E7C"/>
+                </a:solidFill>
+                <a:latin typeface="Calibri"/>
+                <a:ea typeface="Calibri"/>
+                <a:cs typeface="Calibri"/>
+              </a:rPr>
+              <a:t>The wide bar is the assumed city size, not uncertainty in the junction test.</a:t>
+            </a:r>
+          </a:p>
+        </p:txBody>
+      </p:sp>
+      <p:sp>
+        <p:nvSpPr>
+          <p:cNvPr id="6" name="TextBox 5"/>
+          <p:cNvSpPr txBox="1"/>
+          <p:nvPr/>
+        </p:nvSpPr>
+        <p:spPr>
+          <a:xfrm>
+            <a:off x="502920" y="6510528"/>
+            <a:ext cx="8412480" cy="237744"/>
+          </a:xfrm>
+          <a:prstGeom prst="rect">
+            <a:avLst/>
+          </a:prstGeom>
+          <a:noFill/>
+        </p:spPr>
+        <p:txBody>
+          <a:bodyPr wrap="square" lIns="0" rIns="0" tIns="0" bIns="0" anchor="t"/>
+          <a:lstStyle/>
+          <a:p>
+            <a:pPr algn="l">
+              <a:spcBef>
+                <a:spcPts val="0"/>
+              </a:spcBef>
+              <a:spcAft>
+                <a:spcPts val="0"/>
+              </a:spcAft>
+            </a:pPr>
+            <a:r>
+              <a:rPr sz="1200" b="0" i="0">
+                <a:solidFill>
+                  <a:srgbClr val="5E6E7C"/>
+                </a:solidFill>
+                <a:latin typeface="Calibri"/>
+                <a:ea typeface="Calibri"/>
+                <a:cs typeface="Calibri"/>
+              </a:rPr>
+              <a:t>XtraFlow    ·    Simulation-based estimate</a:t>
+            </a:r>
+          </a:p>
+        </p:txBody>
+      </p:sp>
+      <p:sp>
+        <p:nvSpPr>
+          <p:cNvPr id="7" name="TextBox 6"/>
+          <p:cNvSpPr txBox="1"/>
+          <p:nvPr/>
+        </p:nvSpPr>
+        <p:spPr>
+          <a:xfrm>
+            <a:off x="9692640" y="6510528"/>
+            <a:ext cx="2011680" cy="237744"/>
+          </a:xfrm>
+          <a:prstGeom prst="rect">
+            <a:avLst/>
+          </a:prstGeom>
+          <a:noFill/>
+        </p:spPr>
+        <p:txBody>
+          <a:bodyPr wrap="square" lIns="0" rIns="0" tIns="0" bIns="0" anchor="t"/>
+          <a:lstStyle/>
+          <a:p>
+            <a:pPr algn="r">
+              <a:spcBef>
+                <a:spcPts val="0"/>
+              </a:spcBef>
+              <a:spcAft>
+                <a:spcPts val="0"/>
+              </a:spcAft>
+            </a:pPr>
+            <a:r>
+              <a:rPr sz="1200" b="0" i="0">
+                <a:solidFill>
+                  <a:srgbClr val="5E6E7C"/>
+                </a:solidFill>
+                <a:latin typeface="Georgia"/>
+                <a:ea typeface="Georgia"/>
+                <a:cs typeface="Georgia"/>
+              </a:rPr>
+              <a:t>14</a:t>
+            </a:r>
+          </a:p>
+        </p:txBody>
+      </p:sp>
+      <p:sp>
+        <p:nvSpPr>
+          <p:cNvPr id="8" name="Rounded Rectangle 7"/>
+          <p:cNvSpPr/>
+          <p:nvPr/>
+        </p:nvSpPr>
+        <p:spPr>
+          <a:xfrm>
+            <a:off x="502920" y="1572768"/>
+            <a:ext cx="6720840" cy="1965960"/>
+          </a:xfrm>
+          <a:prstGeom prst="roundRect">
+            <a:avLst>
+              <a:gd name="adj" fmla="val 8000"/>
+            </a:avLst>
+          </a:prstGeom>
+          <a:solidFill>
+            <a:srgbClr val="FFFFFF"/>
+          </a:solidFill>
+          <a:ln w="12700">
+            <a:solidFill>
+              <a:srgbClr val="E3DBD0"/>
+            </a:solidFill>
+          </a:ln>
+        </p:spPr>
+        <p:style>
+          <a:lnRef idx="1">
+            <a:schemeClr val="accent1"/>
+          </a:lnRef>
+          <a:fillRef idx="3">
+            <a:schemeClr val="accent1"/>
+          </a:fillRef>
+          <a:effectRef idx="2">
+            <a:schemeClr val="accent1"/>
+          </a:effectRef>
+          <a:fontRef idx="minor">
+            <a:schemeClr val="lt1"/>
+          </a:fontRef>
+        </p:style>
+        <p:txBody>
+          <a:bodyPr rtlCol="0" anchor="ctr"/>
+          <a:lstStyle/>
+          <a:p>
+            <a:pPr algn="ctr"/>
+          </a:p>
+        </p:txBody>
+      </p:sp>
+      <p:sp>
+        <p:nvSpPr>
+          <p:cNvPr id="9" name="TextBox 8"/>
+          <p:cNvSpPr txBox="1"/>
+          <p:nvPr/>
+        </p:nvSpPr>
+        <p:spPr>
+          <a:xfrm>
+            <a:off x="758952" y="1719072"/>
+            <a:ext cx="6217920" cy="256032"/>
+          </a:xfrm>
+          <a:prstGeom prst="rect">
+            <a:avLst/>
+          </a:prstGeom>
+          <a:noFill/>
+        </p:spPr>
+        <p:txBody>
+          <a:bodyPr wrap="square" lIns="0" rIns="0" tIns="0" bIns="0" anchor="t"/>
+          <a:lstStyle/>
+          <a:p>
+            <a:pPr algn="l">
+              <a:spcBef>
+                <a:spcPts val="0"/>
+              </a:spcBef>
+              <a:spcAft>
+                <a:spcPts val="0"/>
+              </a:spcAft>
+            </a:pPr>
+            <a:r>
+              <a:rPr sz="1200" b="1" i="0">
+                <a:solidFill>
+                  <a:srgbClr val="C4841D"/>
+                </a:solidFill>
+                <a:latin typeface="Calibri"/>
+                <a:ea typeface="Calibri"/>
+                <a:cs typeface="Calibri"/>
+              </a:rPr>
+              <a:t>MEASURED VS BEST BASELINE (SCENARIO-WEIGHTED)</a:t>
+            </a:r>
+          </a:p>
+        </p:txBody>
+      </p:sp>
+      <p:sp>
+        <p:nvSpPr>
+          <p:cNvPr id="10" name="TextBox 9"/>
+          <p:cNvSpPr txBox="1"/>
+          <p:nvPr/>
+        </p:nvSpPr>
+        <p:spPr>
+          <a:xfrm>
+            <a:off x="758952" y="2029968"/>
+            <a:ext cx="6217920" cy="594360"/>
+          </a:xfrm>
+          <a:prstGeom prst="rect">
+            <a:avLst/>
+          </a:prstGeom>
+          <a:noFill/>
+        </p:spPr>
+        <p:txBody>
+          <a:bodyPr wrap="square" lIns="0" rIns="0" tIns="0" bIns="0" anchor="t"/>
+          <a:lstStyle/>
+          <a:p>
+            <a:pPr algn="l">
+              <a:spcBef>
+                <a:spcPts val="0"/>
+              </a:spcBef>
+              <a:spcAft>
+                <a:spcPts val="0"/>
+              </a:spcAft>
+            </a:pPr>
+            <a:r>
+              <a:rPr sz="3200" b="1" i="0">
+                <a:solidFill>
+                  <a:srgbClr val="1B6B5A"/>
+                </a:solidFill>
+                <a:latin typeface="Georgia"/>
+                <a:ea typeface="Georgia"/>
+                <a:cs typeface="Georgia"/>
+              </a:rPr>
+              <a:t>0.001</a:t>
+            </a:r>
+            <a:r>
+              <a:rPr sz="1600" b="0" i="0">
+                <a:solidFill>
+                  <a:srgbClr val="1A2834"/>
+                </a:solidFill>
+                <a:latin typeface="Calibri"/>
+                <a:ea typeface="Calibri"/>
+                <a:cs typeface="Calibri"/>
+              </a:rPr>
+              <a:t>  L saved / vehicle</a:t>
+            </a:r>
+          </a:p>
+        </p:txBody>
+      </p:sp>
+      <p:sp>
+        <p:nvSpPr>
+          <p:cNvPr id="11" name="TextBox 10"/>
+          <p:cNvSpPr txBox="1"/>
+          <p:nvPr/>
+        </p:nvSpPr>
+        <p:spPr>
+          <a:xfrm>
+            <a:off x="758952" y="2788920"/>
+            <a:ext cx="6217920" cy="457200"/>
+          </a:xfrm>
+          <a:prstGeom prst="rect">
+            <a:avLst/>
+          </a:prstGeom>
+          <a:noFill/>
+        </p:spPr>
+        <p:txBody>
+          <a:bodyPr wrap="square" lIns="0" rIns="0" tIns="0" bIns="0" anchor="t"/>
+          <a:lstStyle/>
+          <a:p>
+            <a:pPr algn="l">
+              <a:spcBef>
+                <a:spcPts val="0"/>
+              </a:spcBef>
+              <a:spcAft>
+                <a:spcPts val="0"/>
+              </a:spcAft>
+            </a:pPr>
+            <a:r>
+              <a:rPr sz="1400" b="0" i="0">
+                <a:solidFill>
+                  <a:srgbClr val="5E6E7C"/>
+                </a:solidFill>
+                <a:latin typeface="Calibri"/>
+                <a:ea typeface="Calibri"/>
+                <a:cs typeface="Calibri"/>
+              </a:rPr>
+              <a:t>5th – 95th percentile of that mean: 0.001 – 0.002 L</a:t>
+            </a:r>
+          </a:p>
+        </p:txBody>
+      </p:sp>
+      <p:sp>
+        <p:nvSpPr>
+          <p:cNvPr id="12" name="TextBox 11"/>
+          <p:cNvSpPr txBox="1"/>
+          <p:nvPr/>
+        </p:nvSpPr>
+        <p:spPr>
+          <a:xfrm>
+            <a:off x="502920" y="3703320"/>
+            <a:ext cx="6675120" cy="256032"/>
+          </a:xfrm>
+          <a:prstGeom prst="rect">
+            <a:avLst/>
+          </a:prstGeom>
+          <a:noFill/>
+        </p:spPr>
+        <p:txBody>
+          <a:bodyPr wrap="square" lIns="0" rIns="0" tIns="0" bIns="0" anchor="t"/>
+          <a:lstStyle/>
+          <a:p>
+            <a:pPr algn="l">
+              <a:spcBef>
+                <a:spcPts val="0"/>
+              </a:spcBef>
+              <a:spcAft>
+                <a:spcPts val="0"/>
+              </a:spcAft>
+            </a:pPr>
+            <a:r>
+              <a:rPr sz="1200" b="1" i="0">
+                <a:solidFill>
+                  <a:srgbClr val="C4841D"/>
+                </a:solidFill>
+                <a:latin typeface="Calibri"/>
+                <a:ea typeface="Calibri"/>
+                <a:cs typeface="Calibri"/>
+              </a:rPr>
+              <a:t>IF THAT SAVING IS MULTIPLIED OUT</a:t>
+            </a:r>
+          </a:p>
+        </p:txBody>
+      </p:sp>
+      <p:sp>
+        <p:nvSpPr>
+          <p:cNvPr id="13" name="Rectangle 12"/>
+          <p:cNvSpPr/>
+          <p:nvPr/>
+        </p:nvSpPr>
+        <p:spPr>
+          <a:xfrm>
+            <a:off x="502920" y="4041648"/>
+            <a:ext cx="6720840" cy="128016"/>
+          </a:xfrm>
+          <a:prstGeom prst="rect">
+            <a:avLst/>
+          </a:prstGeom>
+          <a:solidFill>
+            <a:srgbClr val="C5DDD4"/>
+          </a:solidFill>
+          <a:ln>
+            <a:noFill/>
+          </a:ln>
+        </p:spPr>
+        <p:style>
+          <a:lnRef idx="1">
+            <a:schemeClr val="accent1"/>
+          </a:lnRef>
+          <a:fillRef idx="3">
+            <a:schemeClr val="accent1"/>
+          </a:fillRef>
+          <a:effectRef idx="2">
+            <a:schemeClr val="accent1"/>
+          </a:effectRef>
+          <a:fontRef idx="minor">
+            <a:schemeClr val="lt1"/>
+          </a:fontRef>
+        </p:style>
+        <p:txBody>
+          <a:bodyPr rtlCol="0" anchor="ctr"/>
+          <a:lstStyle/>
+          <a:p>
+            <a:pPr algn="ctr"/>
+          </a:p>
+        </p:txBody>
+      </p:sp>
+      <p:sp>
+        <p:nvSpPr>
+          <p:cNvPr id="14" name="Rectangle 13"/>
+          <p:cNvSpPr/>
+          <p:nvPr/>
+        </p:nvSpPr>
+        <p:spPr>
+          <a:xfrm>
+            <a:off x="2339803" y="3913632"/>
+            <a:ext cx="54864" cy="384048"/>
+          </a:xfrm>
+          <a:prstGeom prst="rect">
+            <a:avLst/>
+          </a:prstGeom>
+          <a:solidFill>
+            <a:srgbClr val="1B6B5A"/>
+          </a:solidFill>
+          <a:ln>
+            <a:noFill/>
+          </a:ln>
+        </p:spPr>
+        <p:style>
+          <a:lnRef idx="1">
+            <a:schemeClr val="accent1"/>
+          </a:lnRef>
+          <a:fillRef idx="3">
+            <a:schemeClr val="accent1"/>
+          </a:fillRef>
+          <a:effectRef idx="2">
+            <a:schemeClr val="accent1"/>
+          </a:effectRef>
+          <a:fontRef idx="minor">
+            <a:schemeClr val="lt1"/>
+          </a:fontRef>
+        </p:style>
+        <p:txBody>
+          <a:bodyPr rtlCol="0" anchor="ctr"/>
+          <a:lstStyle/>
+          <a:p>
+            <a:pPr algn="ctr"/>
+          </a:p>
+        </p:txBody>
+      </p:sp>
+      <p:sp>
+        <p:nvSpPr>
+          <p:cNvPr id="15" name="TextBox 14"/>
+          <p:cNvSpPr txBox="1"/>
+          <p:nvPr/>
+        </p:nvSpPr>
+        <p:spPr>
+          <a:xfrm>
+            <a:off x="502920" y="4370832"/>
+            <a:ext cx="2926080" cy="256032"/>
+          </a:xfrm>
+          <a:prstGeom prst="rect">
+            <a:avLst/>
+          </a:prstGeom>
+          <a:noFill/>
+        </p:spPr>
+        <p:txBody>
+          <a:bodyPr wrap="square" lIns="0" rIns="0" tIns="0" bIns="0" anchor="t"/>
+          <a:lstStyle/>
+          <a:p>
+            <a:pPr algn="l">
+              <a:spcBef>
+                <a:spcPts val="0"/>
+              </a:spcBef>
+              <a:spcAft>
+                <a:spcPts val="0"/>
+              </a:spcAft>
+            </a:pPr>
+            <a:r>
+              <a:rPr sz="1200" b="0" i="0">
+                <a:solidFill>
+                  <a:srgbClr val="5E6E7C"/>
+                </a:solidFill>
+                <a:latin typeface="Calibri"/>
+                <a:ea typeface="Calibri"/>
+                <a:cs typeface="Calibri"/>
+              </a:rPr>
+              <a:t>0.3 million litres</a:t>
+            </a:r>
+          </a:p>
+        </p:txBody>
+      </p:sp>
+      <p:sp>
+        <p:nvSpPr>
+          <p:cNvPr id="16" name="TextBox 15"/>
+          <p:cNvSpPr txBox="1"/>
+          <p:nvPr/>
+        </p:nvSpPr>
+        <p:spPr>
+          <a:xfrm>
+            <a:off x="4297680" y="4370832"/>
+            <a:ext cx="2926080" cy="256032"/>
+          </a:xfrm>
+          <a:prstGeom prst="rect">
+            <a:avLst/>
+          </a:prstGeom>
+          <a:noFill/>
+        </p:spPr>
+        <p:txBody>
+          <a:bodyPr wrap="square" lIns="0" rIns="0" tIns="0" bIns="0" anchor="t"/>
+          <a:lstStyle/>
+          <a:p>
+            <a:pPr algn="r">
+              <a:spcBef>
+                <a:spcPts val="0"/>
+              </a:spcBef>
+              <a:spcAft>
+                <a:spcPts val="0"/>
+              </a:spcAft>
+            </a:pPr>
+            <a:r>
+              <a:rPr sz="1200" b="0" i="0">
+                <a:solidFill>
+                  <a:srgbClr val="5E6E7C"/>
+                </a:solidFill>
+                <a:latin typeface="Calibri"/>
+                <a:ea typeface="Calibri"/>
+                <a:cs typeface="Calibri"/>
+              </a:rPr>
+              <a:t>2.7 million litres</a:t>
+            </a:r>
+          </a:p>
+        </p:txBody>
+      </p:sp>
+      <p:sp>
+        <p:nvSpPr>
+          <p:cNvPr id="17" name="TextBox 16"/>
+          <p:cNvSpPr txBox="1"/>
+          <p:nvPr/>
+        </p:nvSpPr>
+        <p:spPr>
+          <a:xfrm>
+            <a:off x="502920" y="4754880"/>
+            <a:ext cx="6675120" cy="438912"/>
+          </a:xfrm>
+          <a:prstGeom prst="rect">
+            <a:avLst/>
+          </a:prstGeom>
+          <a:noFill/>
+        </p:spPr>
+        <p:txBody>
+          <a:bodyPr wrap="square" lIns="0" rIns="0" tIns="0" bIns="0" anchor="t"/>
+          <a:lstStyle/>
+          <a:p>
+            <a:pPr algn="l">
+              <a:spcBef>
+                <a:spcPts val="0"/>
+              </a:spcBef>
+              <a:spcAft>
+                <a:spcPts val="0"/>
+              </a:spcAft>
+            </a:pPr>
+            <a:r>
+              <a:rPr sz="2200" b="1" i="0">
+                <a:solidFill>
+                  <a:srgbClr val="1A2834"/>
+                </a:solidFill>
+                <a:latin typeface="Georgia"/>
+                <a:ea typeface="Georgia"/>
+                <a:cs typeface="Georgia"/>
+              </a:rPr>
+              <a:t>0.9 million litres</a:t>
+            </a:r>
+          </a:p>
+        </p:txBody>
+      </p:sp>
+      <p:sp>
+        <p:nvSpPr>
+          <p:cNvPr id="18" name="TextBox 17"/>
+          <p:cNvSpPr txBox="1"/>
+          <p:nvPr/>
+        </p:nvSpPr>
+        <p:spPr>
+          <a:xfrm>
+            <a:off x="502920" y="5193792"/>
+            <a:ext cx="6675120" cy="256032"/>
+          </a:xfrm>
+          <a:prstGeom prst="rect">
+            <a:avLst/>
+          </a:prstGeom>
+          <a:noFill/>
+        </p:spPr>
+        <p:txBody>
+          <a:bodyPr wrap="square" lIns="0" rIns="0" tIns="0" bIns="0" anchor="t"/>
+          <a:lstStyle/>
+          <a:p>
+            <a:pPr algn="l">
+              <a:spcBef>
+                <a:spcPts val="0"/>
+              </a:spcBef>
+              <a:spcAft>
+                <a:spcPts val="0"/>
+              </a:spcAft>
+            </a:pPr>
+            <a:r>
+              <a:rPr sz="1300" b="0" i="0">
+                <a:solidFill>
+                  <a:srgbClr val="5E6E7C"/>
+                </a:solidFill>
+                <a:latin typeface="Calibri"/>
+                <a:ea typeface="Calibri"/>
+                <a:cs typeface="Calibri"/>
+              </a:rPr>
+              <a:t>median of the scaled draws</a:t>
+            </a:r>
+          </a:p>
+        </p:txBody>
+      </p:sp>
+      <p:sp>
+        <p:nvSpPr>
+          <p:cNvPr id="19" name="TextBox 18"/>
+          <p:cNvSpPr txBox="1"/>
+          <p:nvPr/>
+        </p:nvSpPr>
+        <p:spPr>
+          <a:xfrm>
+            <a:off x="502920" y="5532120"/>
+            <a:ext cx="6675120" cy="502920"/>
+          </a:xfrm>
+          <a:prstGeom prst="rect">
+            <a:avLst/>
+          </a:prstGeom>
+          <a:noFill/>
+        </p:spPr>
+        <p:txBody>
+          <a:bodyPr wrap="square" lIns="0" rIns="0" tIns="0" bIns="0" anchor="t"/>
+          <a:lstStyle/>
+          <a:p>
+            <a:pPr algn="l">
+              <a:spcBef>
+                <a:spcPts val="0"/>
+              </a:spcBef>
+              <a:spcAft>
+                <a:spcPts val="0"/>
+              </a:spcAft>
+            </a:pPr>
+            <a:r>
+              <a:rPr sz="1300" b="0" i="0">
+                <a:solidFill>
+                  <a:srgbClr val="5E6E7C"/>
+                </a:solidFill>
+                <a:latin typeface="Calibri"/>
+                <a:ea typeface="Calibri"/>
+                <a:cs typeface="Calibri"/>
+              </a:rPr>
+              <a:t>CO₂ median 2,296 tonnes   ·   629 tonnes – 6,640 tonnes</a:t>
+            </a:r>
+          </a:p>
+        </p:txBody>
+      </p:sp>
+      <p:sp>
+        <p:nvSpPr>
+          <p:cNvPr id="20" name="Rounded Rectangle 19"/>
+          <p:cNvSpPr/>
+          <p:nvPr/>
+        </p:nvSpPr>
+        <p:spPr>
+          <a:xfrm>
+            <a:off x="7406640" y="1572768"/>
+            <a:ext cx="4325112" cy="4526280"/>
+          </a:xfrm>
+          <a:prstGeom prst="roundRect">
+            <a:avLst>
+              <a:gd name="adj" fmla="val 8000"/>
+            </a:avLst>
+          </a:prstGeom>
+          <a:solidFill>
+            <a:srgbClr val="FFFFFF"/>
+          </a:solidFill>
+          <a:ln w="12700">
+            <a:solidFill>
+              <a:srgbClr val="E3DBD0"/>
+            </a:solidFill>
+          </a:ln>
+        </p:spPr>
+        <p:style>
+          <a:lnRef idx="1">
+            <a:schemeClr val="accent1"/>
+          </a:lnRef>
+          <a:fillRef idx="3">
+            <a:schemeClr val="accent1"/>
+          </a:fillRef>
+          <a:effectRef idx="2">
+            <a:schemeClr val="accent1"/>
+          </a:effectRef>
+          <a:fontRef idx="minor">
+            <a:schemeClr val="lt1"/>
+          </a:fontRef>
+        </p:style>
+        <p:txBody>
+          <a:bodyPr rtlCol="0" anchor="ctr"/>
+          <a:lstStyle/>
+          <a:p>
+            <a:pPr algn="ctr"/>
+          </a:p>
+        </p:txBody>
+      </p:sp>
+      <p:sp>
+        <p:nvSpPr>
+          <p:cNvPr id="21" name="TextBox 20"/>
+          <p:cNvSpPr txBox="1"/>
+          <p:nvPr/>
+        </p:nvSpPr>
+        <p:spPr>
+          <a:xfrm>
+            <a:off x="7626096" y="1737360"/>
+            <a:ext cx="3931920" cy="640080"/>
+          </a:xfrm>
+          <a:prstGeom prst="rect">
+            <a:avLst/>
+          </a:prstGeom>
+          <a:noFill/>
+        </p:spPr>
+        <p:txBody>
+          <a:bodyPr wrap="square" lIns="0" rIns="0" tIns="0" bIns="0" anchor="t"/>
+          <a:lstStyle/>
+          <a:p>
+            <a:pPr algn="l">
+              <a:spcBef>
+                <a:spcPts val="0"/>
+              </a:spcBef>
+              <a:spcAft>
+                <a:spcPts val="0"/>
+              </a:spcAft>
+            </a:pPr>
+            <a:r>
+              <a:rPr sz="1800" b="1" i="0">
+                <a:solidFill>
+                  <a:srgbClr val="1A2834"/>
+                </a:solidFill>
+                <a:latin typeface="Georgia"/>
+                <a:ea typeface="Georgia"/>
+                <a:cs typeface="Georgia"/>
+              </a:rPr>
+              <a:t>Why the bar is wide</a:t>
+            </a:r>
+          </a:p>
+        </p:txBody>
+      </p:sp>
+      <p:sp>
+        <p:nvSpPr>
+          <p:cNvPr id="22" name="TextBox 21"/>
+          <p:cNvSpPr txBox="1"/>
+          <p:nvPr/>
+        </p:nvSpPr>
+        <p:spPr>
+          <a:xfrm>
+            <a:off x="7626096" y="2468880"/>
+            <a:ext cx="3840480" cy="219456"/>
+          </a:xfrm>
+          <a:prstGeom prst="rect">
+            <a:avLst/>
+          </a:prstGeom>
+          <a:noFill/>
+        </p:spPr>
+        <p:txBody>
+          <a:bodyPr wrap="square" lIns="0" rIns="0" tIns="0" bIns="0" anchor="t"/>
+          <a:lstStyle/>
+          <a:p>
+            <a:pPr algn="l">
+              <a:spcBef>
+                <a:spcPts val="0"/>
+              </a:spcBef>
+              <a:spcAft>
+                <a:spcPts val="0"/>
+              </a:spcAft>
+            </a:pPr>
+            <a:r>
+              <a:rPr sz="1200" b="0" i="0">
+                <a:solidFill>
+                  <a:srgbClr val="5E6E7C"/>
+                </a:solidFill>
+                <a:latin typeface="Calibri"/>
+                <a:ea typeface="Calibri"/>
+                <a:cs typeface="Calibri"/>
+              </a:rPr>
+              <a:t>Junctions</a:t>
+            </a:r>
+          </a:p>
+        </p:txBody>
+      </p:sp>
+      <p:sp>
+        <p:nvSpPr>
+          <p:cNvPr id="23" name="TextBox 22"/>
+          <p:cNvSpPr txBox="1"/>
+          <p:nvPr/>
+        </p:nvSpPr>
+        <p:spPr>
+          <a:xfrm>
+            <a:off x="7626096" y="2670048"/>
+            <a:ext cx="3840480" cy="292608"/>
+          </a:xfrm>
+          <a:prstGeom prst="rect">
+            <a:avLst/>
+          </a:prstGeom>
+          <a:noFill/>
+        </p:spPr>
+        <p:txBody>
+          <a:bodyPr wrap="square" lIns="0" rIns="0" tIns="0" bIns="0" anchor="t"/>
+          <a:lstStyle/>
+          <a:p>
+            <a:pPr algn="l">
+              <a:spcBef>
+                <a:spcPts val="0"/>
+              </a:spcBef>
+              <a:spcAft>
+                <a:spcPts val="0"/>
+              </a:spcAft>
+            </a:pPr>
+            <a:r>
+              <a:rPr sz="1600" b="1" i="0">
+                <a:solidFill>
+                  <a:srgbClr val="1A2834"/>
+                </a:solidFill>
+                <a:latin typeface="Georgia"/>
+                <a:ea typeface="Georgia"/>
+                <a:cs typeface="Georgia"/>
+              </a:rPr>
+              <a:t>50  –  1,000</a:t>
+            </a:r>
+          </a:p>
+        </p:txBody>
+      </p:sp>
+      <p:sp>
+        <p:nvSpPr>
+          <p:cNvPr id="24" name="TextBox 23"/>
+          <p:cNvSpPr txBox="1"/>
+          <p:nvPr/>
+        </p:nvSpPr>
+        <p:spPr>
+          <a:xfrm>
+            <a:off x="7626096" y="3127248"/>
+            <a:ext cx="3840480" cy="219456"/>
+          </a:xfrm>
+          <a:prstGeom prst="rect">
+            <a:avLst/>
+          </a:prstGeom>
+          <a:noFill/>
+        </p:spPr>
+        <p:txBody>
+          <a:bodyPr wrap="square" lIns="0" rIns="0" tIns="0" bIns="0" anchor="t"/>
+          <a:lstStyle/>
+          <a:p>
+            <a:pPr algn="l">
+              <a:spcBef>
+                <a:spcPts val="0"/>
+              </a:spcBef>
+              <a:spcAft>
+                <a:spcPts val="0"/>
+              </a:spcAft>
+            </a:pPr>
+            <a:r>
+              <a:rPr sz="1200" b="0" i="0">
+                <a:solidFill>
+                  <a:srgbClr val="5E6E7C"/>
+                </a:solidFill>
+                <a:latin typeface="Calibri"/>
+                <a:ea typeface="Calibri"/>
+                <a:cs typeface="Calibri"/>
+              </a:rPr>
+              <a:t>Vehicles / peak hour</a:t>
+            </a:r>
+          </a:p>
+        </p:txBody>
+      </p:sp>
+      <p:sp>
+        <p:nvSpPr>
+          <p:cNvPr id="25" name="TextBox 24"/>
+          <p:cNvSpPr txBox="1"/>
+          <p:nvPr/>
+        </p:nvSpPr>
+        <p:spPr>
+          <a:xfrm>
+            <a:off x="7626096" y="3328416"/>
+            <a:ext cx="3840480" cy="292608"/>
+          </a:xfrm>
+          <a:prstGeom prst="rect">
+            <a:avLst/>
+          </a:prstGeom>
+          <a:noFill/>
+        </p:spPr>
+        <p:txBody>
+          <a:bodyPr wrap="square" lIns="0" rIns="0" tIns="0" bIns="0" anchor="t"/>
+          <a:lstStyle/>
+          <a:p>
+            <a:pPr algn="l">
+              <a:spcBef>
+                <a:spcPts val="0"/>
+              </a:spcBef>
+              <a:spcAft>
+                <a:spcPts val="0"/>
+              </a:spcAft>
+            </a:pPr>
+            <a:r>
+              <a:rPr sz="1600" b="1" i="0">
+                <a:solidFill>
+                  <a:srgbClr val="1A2834"/>
+                </a:solidFill>
+                <a:latin typeface="Georgia"/>
+                <a:ea typeface="Georgia"/>
+                <a:cs typeface="Georgia"/>
+              </a:rPr>
+              <a:t>800  –  2,200</a:t>
+            </a:r>
+          </a:p>
+        </p:txBody>
+      </p:sp>
+      <p:sp>
+        <p:nvSpPr>
+          <p:cNvPr id="26" name="TextBox 25"/>
+          <p:cNvSpPr txBox="1"/>
+          <p:nvPr/>
+        </p:nvSpPr>
+        <p:spPr>
+          <a:xfrm>
+            <a:off x="7626096" y="3785615"/>
+            <a:ext cx="3840480" cy="219456"/>
+          </a:xfrm>
+          <a:prstGeom prst="rect">
+            <a:avLst/>
+          </a:prstGeom>
+          <a:noFill/>
+        </p:spPr>
+        <p:txBody>
+          <a:bodyPr wrap="square" lIns="0" rIns="0" tIns="0" bIns="0" anchor="t"/>
+          <a:lstStyle/>
+          <a:p>
+            <a:pPr algn="l">
+              <a:spcBef>
+                <a:spcPts val="0"/>
+              </a:spcBef>
+              <a:spcAft>
+                <a:spcPts val="0"/>
+              </a:spcAft>
+            </a:pPr>
+            <a:r>
+              <a:rPr sz="1200" b="0" i="0">
+                <a:solidFill>
+                  <a:srgbClr val="5E6E7C"/>
+                </a:solidFill>
+                <a:latin typeface="Calibri"/>
+                <a:ea typeface="Calibri"/>
+                <a:cs typeface="Calibri"/>
+              </a:rPr>
+              <a:t>Peak hours / day</a:t>
+            </a:r>
+          </a:p>
+        </p:txBody>
+      </p:sp>
+      <p:sp>
+        <p:nvSpPr>
+          <p:cNvPr id="27" name="TextBox 26"/>
+          <p:cNvSpPr txBox="1"/>
+          <p:nvPr/>
+        </p:nvSpPr>
+        <p:spPr>
+          <a:xfrm>
+            <a:off x="7626096" y="3986783"/>
+            <a:ext cx="3840480" cy="292608"/>
+          </a:xfrm>
+          <a:prstGeom prst="rect">
+            <a:avLst/>
+          </a:prstGeom>
+          <a:noFill/>
+        </p:spPr>
+        <p:txBody>
+          <a:bodyPr wrap="square" lIns="0" rIns="0" tIns="0" bIns="0" anchor="t"/>
+          <a:lstStyle/>
+          <a:p>
+            <a:pPr algn="l">
+              <a:spcBef>
+                <a:spcPts val="0"/>
+              </a:spcBef>
+              <a:spcAft>
+                <a:spcPts val="0"/>
+              </a:spcAft>
+            </a:pPr>
+            <a:r>
+              <a:rPr sz="1600" b="1" i="0">
+                <a:solidFill>
+                  <a:srgbClr val="1A2834"/>
+                </a:solidFill>
+                <a:latin typeface="Georgia"/>
+                <a:ea typeface="Georgia"/>
+                <a:cs typeface="Georgia"/>
+              </a:rPr>
+              <a:t>3  –  7</a:t>
+            </a:r>
+          </a:p>
+        </p:txBody>
+      </p:sp>
+      <p:sp>
+        <p:nvSpPr>
+          <p:cNvPr id="28" name="TextBox 27"/>
+          <p:cNvSpPr txBox="1"/>
+          <p:nvPr/>
+        </p:nvSpPr>
+        <p:spPr>
+          <a:xfrm>
+            <a:off x="7626096" y="4443983"/>
+            <a:ext cx="3840480" cy="219456"/>
+          </a:xfrm>
+          <a:prstGeom prst="rect">
+            <a:avLst/>
+          </a:prstGeom>
+          <a:noFill/>
+        </p:spPr>
+        <p:txBody>
+          <a:bodyPr wrap="square" lIns="0" rIns="0" tIns="0" bIns="0" anchor="t"/>
+          <a:lstStyle/>
+          <a:p>
+            <a:pPr algn="l">
+              <a:spcBef>
+                <a:spcPts val="0"/>
+              </a:spcBef>
+              <a:spcAft>
+                <a:spcPts val="0"/>
+              </a:spcAft>
+            </a:pPr>
+            <a:r>
+              <a:rPr sz="1200" b="0" i="0">
+                <a:solidFill>
+                  <a:srgbClr val="5E6E7C"/>
+                </a:solidFill>
+                <a:latin typeface="Calibri"/>
+                <a:ea typeface="Calibri"/>
+                <a:cs typeface="Calibri"/>
+              </a:rPr>
+              <a:t>Days / year</a:t>
+            </a:r>
+          </a:p>
+        </p:txBody>
+      </p:sp>
+      <p:sp>
+        <p:nvSpPr>
+          <p:cNvPr id="29" name="TextBox 28"/>
+          <p:cNvSpPr txBox="1"/>
+          <p:nvPr/>
+        </p:nvSpPr>
+        <p:spPr>
+          <a:xfrm>
+            <a:off x="7626096" y="4645151"/>
+            <a:ext cx="3840480" cy="292608"/>
+          </a:xfrm>
+          <a:prstGeom prst="rect">
+            <a:avLst/>
+          </a:prstGeom>
+          <a:noFill/>
+        </p:spPr>
+        <p:txBody>
+          <a:bodyPr wrap="square" lIns="0" rIns="0" tIns="0" bIns="0" anchor="t"/>
+          <a:lstStyle/>
+          <a:p>
+            <a:pPr algn="l">
+              <a:spcBef>
+                <a:spcPts val="0"/>
+              </a:spcBef>
+              <a:spcAft>
+                <a:spcPts val="0"/>
+              </a:spcAft>
+            </a:pPr>
+            <a:r>
+              <a:rPr sz="1600" b="1" i="0">
+                <a:solidFill>
+                  <a:srgbClr val="1A2834"/>
+                </a:solidFill>
+                <a:latin typeface="Georgia"/>
+                <a:ea typeface="Georgia"/>
+                <a:cs typeface="Georgia"/>
+              </a:rPr>
+              <a:t>250  –  330</a:t>
+            </a:r>
+          </a:p>
+        </p:txBody>
+      </p:sp>
+      <p:sp>
+        <p:nvSpPr>
+          <p:cNvPr id="30" name="TextBox 29"/>
+          <p:cNvSpPr txBox="1"/>
+          <p:nvPr/>
+        </p:nvSpPr>
+        <p:spPr>
+          <a:xfrm>
+            <a:off x="7626096" y="5349240"/>
+            <a:ext cx="3886200" cy="548640"/>
+          </a:xfrm>
+          <a:prstGeom prst="rect">
+            <a:avLst/>
+          </a:prstGeom>
+          <a:noFill/>
+        </p:spPr>
+        <p:txBody>
+          <a:bodyPr wrap="square" lIns="0" rIns="0" tIns="0" bIns="0" anchor="t"/>
+          <a:lstStyle/>
+          <a:p>
+            <a:pPr algn="l">
+              <a:spcBef>
+                <a:spcPts val="0"/>
+              </a:spcBef>
+              <a:spcAft>
+                <a:spcPts val="0"/>
+              </a:spcAft>
+            </a:pPr>
+            <a:r>
+              <a:rPr sz="1300" b="0" i="0">
+                <a:solidFill>
+                  <a:srgbClr val="5E6E7C"/>
+                </a:solidFill>
+                <a:latin typeface="Calibri"/>
+                <a:ea typeface="Calibri"/>
+                <a:cs typeface="Calibri"/>
+              </a:rPr>
+              <a:t>Rupee value uses a placeholder price, so it is not shown.</a:t>
+            </a:r>
+          </a:p>
+        </p:txBody>
+      </p:sp>
+    </p:spTree>
+  </p:cSld>
+  <p:clrMapOvr>
+    <a:masterClrMapping/>
+  </p:clrMapOvr>
+</p:sld>
+</file>
+
+<file path=ppt/slides/slide15.xml><?xml version="1.0" encoding="utf-8"?>
 <p:sld xmlns:a="http://schemas.openxmlformats.org/drawingml/2006/main" xmlns:p="http://schemas.openxmlformats.org/presentationml/2006/main" xmlns:r="http://schemas.openxmlformats.org/officeDocument/2006/relationships">
   <p:cSld>
     <p:bg>
@@ -8410,7 +9837,7 @@
         <p:spPr>
           <a:xfrm>
             <a:off x="502920" y="2880360"/>
-            <a:ext cx="3645407" cy="2148840"/>
+            <a:ext cx="3645407" cy="2011680"/>
           </a:xfrm>
           <a:prstGeom prst="roundRect">
             <a:avLst>
@@ -8539,7 +9966,7 @@
         <p:spPr>
           <a:xfrm>
             <a:off x="704088" y="3977639"/>
-            <a:ext cx="3261360" cy="822960"/>
+            <a:ext cx="3261360" cy="731520"/>
           </a:xfrm>
           <a:prstGeom prst="rect">
             <a:avLst/>
@@ -8581,7 +10008,7 @@
         <p:spPr>
           <a:xfrm>
             <a:off x="4294632" y="2880360"/>
-            <a:ext cx="3645407" cy="2148840"/>
+            <a:ext cx="3645407" cy="2011680"/>
           </a:xfrm>
           <a:prstGeom prst="roundRect">
             <a:avLst>
@@ -8710,7 +10137,7 @@
         <p:spPr>
           <a:xfrm>
             <a:off x="4495799" y="3977639"/>
-            <a:ext cx="3261360" cy="822960"/>
+            <a:ext cx="3261360" cy="731520"/>
           </a:xfrm>
           <a:prstGeom prst="rect">
             <a:avLst/>
@@ -8752,7 +10179,7 @@
         <p:spPr>
           <a:xfrm>
             <a:off x="8086344" y="2880360"/>
-            <a:ext cx="3645407" cy="2148840"/>
+            <a:ext cx="3645407" cy="2011680"/>
           </a:xfrm>
           <a:prstGeom prst="roundRect">
             <a:avLst>
@@ -8867,7 +10294,7 @@
                 <a:ea typeface="Georgia"/>
                 <a:cs typeface="Georgia"/>
               </a:rPr>
-              <a:t>Read the grid file</a:t>
+              <a:t>Score the corridor</a:t>
             </a:r>
           </a:p>
         </p:txBody>
@@ -8881,7 +10308,7 @@
         <p:spPr>
           <a:xfrm>
             <a:off x="8287512" y="3977639"/>
-            <a:ext cx="3261360" cy="822960"/>
+            <a:ext cx="3261360" cy="731520"/>
           </a:xfrm>
           <a:prstGeom prst="rect">
             <a:avLst/>
@@ -8909,7 +10336,7 @@
                 <a:ea typeface="Calibri"/>
                 <a:cs typeface="Calibri"/>
               </a:rPr>
-              <a:t>Quote a corridor result only from results/grid_results.json.</a:t>
+              <a:t>Quote a grid result only from results/grid_results.json after a successful sweep.</a:t>
             </a:r>
           </a:p>
         </p:txBody>
@@ -8922,28 +10349,28 @@
         </p:nvSpPr>
         <p:spPr>
           <a:xfrm>
-            <a:off x="713232" y="5303520"/>
-            <a:ext cx="9144000" cy="274320"/>
-          </a:xfrm>
-          <a:prstGeom prst="rect">
-            <a:avLst/>
-          </a:prstGeom>
-          <a:noFill/>
-        </p:spPr>
-        <p:txBody>
-          <a:bodyPr wrap="square" lIns="0" rIns="0" tIns="0" bIns="0" anchor="t"/>
-          <a:lstStyle/>
-          <a:p>
-            <a:pPr algn="l">
-              <a:spcBef>
-                <a:spcPts val="0"/>
-              </a:spcBef>
-              <a:spcAft>
-                <a:spcPts val="0"/>
-              </a:spcAft>
-            </a:pPr>
-            <a:r>
-              <a:rPr sz="1400" b="0" i="0">
+            <a:off x="713232" y="5074920"/>
+            <a:ext cx="10058400" cy="320040"/>
+          </a:xfrm>
+          <a:prstGeom prst="rect">
+            <a:avLst/>
+          </a:prstGeom>
+          <a:noFill/>
+        </p:spPr>
+        <p:txBody>
+          <a:bodyPr wrap="square" lIns="0" rIns="0" tIns="0" bIns="0" anchor="t"/>
+          <a:lstStyle/>
+          <a:p>
+            <a:pPr algn="l">
+              <a:spcBef>
+                <a:spcPts val="0"/>
+              </a:spcBef>
+              <a:spcAft>
+                <a:spcPts val="0"/>
+              </a:spcAft>
+            </a:pPr>
+            <a:r>
+              <a:rPr sz="1300" b="0" i="0">
                 <a:solidFill>
                   <a:srgbClr val="C9D4DC"/>
                 </a:solidFill>
@@ -8951,7 +10378,7 @@
                 <a:ea typeface="Calibri"/>
                 <a:cs typeface="Calibri"/>
               </a:rPr>
-              <a:t>github.com/couder-04/XtraFlow</a:t>
+              <a:t>This deck: 8 controllers · 5 test seeds (1–5) · oracle detector unless camera mode is on.</a:t>
             </a:r>
           </a:p>
         </p:txBody>
@@ -8964,8 +10391,8 @@
         </p:nvSpPr>
         <p:spPr>
           <a:xfrm>
-            <a:off x="713232" y="5669280"/>
-            <a:ext cx="10058400" cy="365760"/>
+            <a:off x="713232" y="5440680"/>
+            <a:ext cx="9144000" cy="274320"/>
           </a:xfrm>
           <a:prstGeom prst="rect">
             <a:avLst/>
@@ -8987,13 +10414,13 @@
             <a:r>
               <a:rPr sz="1400" b="0" i="0">
                 <a:solidFill>
-                  <a:srgbClr val="8A9BA8"/>
+                  <a:srgbClr val="C9D4DC"/>
                 </a:solidFill>
                 <a:latin typeface="Calibri"/>
                 <a:ea typeface="Calibri"/>
                 <a:cs typeface="Calibri"/>
               </a:rPr>
-              <a:t>Simulation-based estimate; assumed traffic mix</a:t>
+              <a:t>github.com/couder-04/XtraFlow</a:t>
             </a:r>
           </a:p>
         </p:txBody>
@@ -9006,35 +10433,77 @@
         </p:nvSpPr>
         <p:spPr>
           <a:xfrm>
-            <a:off x="502920" y="6510528"/>
-            <a:ext cx="8412480" cy="237744"/>
-          </a:xfrm>
-          <a:prstGeom prst="rect">
-            <a:avLst/>
-          </a:prstGeom>
-          <a:noFill/>
-        </p:spPr>
-        <p:txBody>
-          <a:bodyPr wrap="square" lIns="0" rIns="0" tIns="0" bIns="0" anchor="t"/>
-          <a:lstStyle/>
-          <a:p>
-            <a:pPr algn="l">
-              <a:spcBef>
-                <a:spcPts val="0"/>
-              </a:spcBef>
-              <a:spcAft>
-                <a:spcPts val="0"/>
-              </a:spcAft>
-            </a:pPr>
-            <a:r>
-              <a:rPr sz="1200" b="0" i="0">
-                <a:solidFill>
-                  <a:srgbClr val="C9D4DC"/>
+            <a:off x="713232" y="5760720"/>
+            <a:ext cx="10058400" cy="365760"/>
+          </a:xfrm>
+          <a:prstGeom prst="rect">
+            <a:avLst/>
+          </a:prstGeom>
+          <a:noFill/>
+        </p:spPr>
+        <p:txBody>
+          <a:bodyPr wrap="square" lIns="0" rIns="0" tIns="0" bIns="0" anchor="t"/>
+          <a:lstStyle/>
+          <a:p>
+            <a:pPr algn="l">
+              <a:spcBef>
+                <a:spcPts val="0"/>
+              </a:spcBef>
+              <a:spcAft>
+                <a:spcPts val="0"/>
+              </a:spcAft>
+            </a:pPr>
+            <a:r>
+              <a:rPr sz="1400" b="0" i="0">
+                <a:solidFill>
+                  <a:srgbClr val="8A9BA8"/>
                 </a:solidFill>
                 <a:latin typeface="Calibri"/>
                 <a:ea typeface="Calibri"/>
                 <a:cs typeface="Calibri"/>
               </a:rPr>
+              <a:t>Simulation-based estimate; assumed traffic mix</a:t>
+            </a:r>
+          </a:p>
+        </p:txBody>
+      </p:sp>
+      <p:sp>
+        <p:nvSpPr>
+          <p:cNvPr id="21" name="TextBox 20"/>
+          <p:cNvSpPr txBox="1"/>
+          <p:nvPr/>
+        </p:nvSpPr>
+        <p:spPr>
+          <a:xfrm>
+            <a:off x="502920" y="6510528"/>
+            <a:ext cx="8412480" cy="237744"/>
+          </a:xfrm>
+          <a:prstGeom prst="rect">
+            <a:avLst/>
+          </a:prstGeom>
+          <a:noFill/>
+        </p:spPr>
+        <p:txBody>
+          <a:bodyPr wrap="square" lIns="0" rIns="0" tIns="0" bIns="0" anchor="t"/>
+          <a:lstStyle/>
+          <a:p>
+            <a:pPr algn="l">
+              <a:spcBef>
+                <a:spcPts val="0"/>
+              </a:spcBef>
+              <a:spcAft>
+                <a:spcPts val="0"/>
+              </a:spcAft>
+            </a:pPr>
+            <a:r>
+              <a:rPr sz="1200" b="0" i="0">
+                <a:solidFill>
+                  <a:srgbClr val="C9D4DC"/>
+                </a:solidFill>
+                <a:latin typeface="Calibri"/>
+                <a:ea typeface="Calibri"/>
+                <a:cs typeface="Calibri"/>
+              </a:rPr>
               <a:t>XtraFlow    ·    Simulation-based estimate</a:t>
             </a:r>
           </a:p>
@@ -9042,7 +10511,7 @@
       </p:sp>
       <p:sp>
         <p:nvSpPr>
-          <p:cNvPr id="21" name="TextBox 20"/>
+          <p:cNvPr id="22" name="TextBox 21"/>
           <p:cNvSpPr txBox="1"/>
           <p:nvPr/>
         </p:nvSpPr>
@@ -9077,7 +10546,7 @@
                 <a:ea typeface="Georgia"/>
                 <a:cs typeface="Georgia"/>
               </a:rPr>
-              <a:t>13</a:t>
+              <a:t>15</a:t>
             </a:r>
           </a:p>
         </p:txBody>
@@ -12740,7 +14209,7 @@
                 <a:ea typeface="Calibri"/>
                 <a:cs typeface="Calibri"/>
               </a:rPr>
-              <a:t>Settings are frozen before the test. A seed is one hour of the same demand, replayed.</a:t>
+              <a:t>Settings are frozen before the test. 5 test seeds (1–5). A seed is one hour of the same demand, replayed.</a:t>
             </a:r>
           </a:p>
         </p:txBody>
@@ -13301,7 +14770,7 @@
                 <a:ea typeface="Georgia"/>
                 <a:cs typeface="Georgia"/>
               </a:rPr>
-              <a:t>1 – 30</a:t>
+              <a:t>1 – 5</a:t>
             </a:r>
           </a:p>
         </p:txBody>
@@ -13343,7 +14812,7 @@
                 <a:ea typeface="Calibri"/>
                 <a:cs typeface="Calibri"/>
               </a:rPr>
-              <a:t>The numbers in the rest of this deck</a:t>
+              <a:t>5 locked seeds in raw_runs.csv</a:t>
             </a:r>
           </a:p>
         </p:txBody>
@@ -13909,7 +15378,49 @@
                 <a:ea typeface="Calibri"/>
                 <a:cs typeface="Calibri"/>
               </a:rPr>
-              <a:t>Compared with Fixed time, Webster, Actuated, Max-pressure, Count only.</a:t>
+              <a:t>Compared with Fixed time, Tuned fixed, Webster, Actuated, Queue pressure, Max-pressure, Count only. PPO was trained to the config budget and is not in this TEST table.</a:t>
+            </a:r>
+          </a:p>
+        </p:txBody>
+      </p:sp>
+      <p:sp>
+        <p:nvSpPr>
+          <p:cNvPr id="33" name="TextBox 32"/>
+          <p:cNvSpPr txBox="1"/>
+          <p:nvPr/>
+        </p:nvSpPr>
+        <p:spPr>
+          <a:xfrm>
+            <a:off x="502920" y="5669280"/>
+            <a:ext cx="11228832" cy="320040"/>
+          </a:xfrm>
+          <a:prstGeom prst="rect">
+            <a:avLst/>
+          </a:prstGeom>
+          <a:noFill/>
+        </p:spPr>
+        <p:txBody>
+          <a:bodyPr wrap="square" lIns="0" rIns="0" tIns="0" bIns="0" anchor="t"/>
+          <a:lstStyle/>
+          <a:p>
+            <a:pPr algn="l">
+              <a:spcBef>
+                <a:spcPts val="0"/>
+              </a:spcBef>
+              <a:spcAft>
+                <a:spcPts val="0"/>
+              </a:spcAft>
+            </a:pPr>
+            <a:r>
+              <a:rPr sz="1300" b="0" i="0">
+                <a:solidFill>
+                  <a:srgbClr val="5E6E7C"/>
+                </a:solidFill>
+                <a:latin typeface="Calibri"/>
+                <a:ea typeface="Calibri"/>
+                <a:cs typeface="Calibri"/>
+              </a:rPr>
+              <a:t>Sublane probe used. Full-demand stability under that setting is not re-claimed here.</a:t>
             </a:r>
           </a:p>
         </p:txBody>
@@ -14062,7 +15573,7 @@
                 <a:ea typeface="Georgia"/>
                 <a:cs typeface="Georgia"/>
               </a:rPr>
-              <a:t>Less fuel than fixed time, every scenario</a:t>
+              <a:t>Lower mean fuel than the strongest baseline</a:t>
             </a:r>
           </a:p>
         </p:txBody>
@@ -14104,7 +15615,7 @@
                 <a:ea typeface="Calibri"/>
                 <a:cs typeface="Calibri"/>
               </a:rPr>
-              <a:t>Fuel per completed vehicle against fixed time. 5 paired seeds. Bootstrap 95% intervals.</a:t>
+              <a:t>Fuel per completed vehicle versus the best tuned baseline. 5 paired seeds. Bootstrap 95% intervals.</a:t>
             </a:r>
           </a:p>
         </p:txBody>
@@ -14292,27 +15803,27 @@
         <p:spPr>
           <a:xfrm>
             <a:off x="704088" y="1965960"/>
-            <a:ext cx="2331720" cy="502920"/>
-          </a:xfrm>
-          <a:prstGeom prst="rect">
-            <a:avLst/>
-          </a:prstGeom>
-          <a:noFill/>
-        </p:spPr>
-        <p:txBody>
-          <a:bodyPr wrap="square" lIns="0" rIns="0" tIns="0" bIns="0" anchor="t"/>
-          <a:lstStyle/>
-          <a:p>
-            <a:pPr algn="l">
-              <a:spcBef>
-                <a:spcPts val="0"/>
-              </a:spcBef>
-              <a:spcAft>
-                <a:spcPts val="0"/>
-              </a:spcAft>
-            </a:pPr>
-            <a:r>
-              <a:rPr sz="1600" b="1" i="0">
+            <a:ext cx="2331720" cy="411480"/>
+          </a:xfrm>
+          <a:prstGeom prst="rect">
+            <a:avLst/>
+          </a:prstGeom>
+          <a:noFill/>
+        </p:spPr>
+        <p:txBody>
+          <a:bodyPr wrap="square" lIns="0" rIns="0" tIns="0" bIns="0" anchor="t"/>
+          <a:lstStyle/>
+          <a:p>
+            <a:pPr algn="l">
+              <a:spcBef>
+                <a:spcPts val="0"/>
+              </a:spcBef>
+              <a:spcAft>
+                <a:spcPts val="0"/>
+              </a:spcAft>
+            </a:pPr>
+            <a:r>
+              <a:rPr sz="1500" b="1" i="0">
                 <a:solidFill>
                   <a:srgbClr val="1A2834"/>
                 </a:solidFill>
@@ -14333,28 +15844,28 @@
         </p:nvSpPr>
         <p:spPr>
           <a:xfrm>
-            <a:off x="704088" y="2606040"/>
-            <a:ext cx="2331720" cy="640080"/>
-          </a:xfrm>
-          <a:prstGeom prst="rect">
-            <a:avLst/>
-          </a:prstGeom>
-          <a:noFill/>
-        </p:spPr>
-        <p:txBody>
-          <a:bodyPr wrap="square" lIns="0" rIns="0" tIns="0" bIns="0" anchor="t"/>
-          <a:lstStyle/>
-          <a:p>
-            <a:pPr algn="l">
-              <a:spcBef>
-                <a:spcPts val="0"/>
-              </a:spcBef>
-              <a:spcAft>
-                <a:spcPts val="0"/>
-              </a:spcAft>
-            </a:pPr>
-            <a:r>
-              <a:rPr sz="3600" b="1" i="0">
+            <a:off x="704088" y="2468880"/>
+            <a:ext cx="2331720" cy="594360"/>
+          </a:xfrm>
+          <a:prstGeom prst="rect">
+            <a:avLst/>
+          </a:prstGeom>
+          <a:noFill/>
+        </p:spPr>
+        <p:txBody>
+          <a:bodyPr wrap="square" lIns="0" rIns="0" tIns="0" bIns="0" anchor="t"/>
+          <a:lstStyle/>
+          <a:p>
+            <a:pPr algn="l">
+              <a:spcBef>
+                <a:spcPts val="0"/>
+              </a:spcBef>
+              <a:spcAft>
+                <a:spcPts val="0"/>
+              </a:spcAft>
+            </a:pPr>
+            <a:r>
+              <a:rPr sz="3400" b="1" i="0">
                 <a:solidFill>
                   <a:srgbClr val="1B6B5A"/>
                 </a:solidFill>
@@ -14365,7 +15876,7 @@
               <a:t>1.9</a:t>
             </a:r>
             <a:r>
-              <a:rPr sz="1800" b="1" i="0">
+              <a:rPr sz="1600" b="1" i="0">
                 <a:solidFill>
                   <a:srgbClr val="1B6B5A"/>
                 </a:solidFill>
@@ -14386,28 +15897,28 @@
         </p:nvSpPr>
         <p:spPr>
           <a:xfrm>
-            <a:off x="704088" y="3337560"/>
-            <a:ext cx="2331720" cy="502920"/>
-          </a:xfrm>
-          <a:prstGeom prst="rect">
-            <a:avLst/>
-          </a:prstGeom>
-          <a:noFill/>
-        </p:spPr>
-        <p:txBody>
-          <a:bodyPr wrap="square" lIns="0" rIns="0" tIns="0" bIns="0" anchor="t"/>
-          <a:lstStyle/>
-          <a:p>
-            <a:pPr algn="l">
-              <a:spcBef>
-                <a:spcPts val="0"/>
-              </a:spcBef>
-              <a:spcAft>
-                <a:spcPts val="0"/>
-              </a:spcAft>
-            </a:pPr>
-            <a:r>
-              <a:rPr sz="1400" b="0" i="0">
+            <a:off x="704088" y="3108960"/>
+            <a:ext cx="2331720" cy="411480"/>
+          </a:xfrm>
+          <a:prstGeom prst="rect">
+            <a:avLst/>
+          </a:prstGeom>
+          <a:noFill/>
+        </p:spPr>
+        <p:txBody>
+          <a:bodyPr wrap="square" lIns="0" rIns="0" tIns="0" bIns="0" anchor="t"/>
+          <a:lstStyle/>
+          <a:p>
+            <a:pPr algn="l">
+              <a:spcBef>
+                <a:spcPts val="0"/>
+              </a:spcBef>
+              <a:spcAft>
+                <a:spcPts val="0"/>
+              </a:spcAft>
+            </a:pPr>
+            <a:r>
+              <a:rPr sz="1300" b="0" i="0">
                 <a:solidFill>
                   <a:srgbClr val="5E6E7C"/>
                 </a:solidFill>
@@ -14428,8 +15939,8 @@
         </p:nvSpPr>
         <p:spPr>
           <a:xfrm>
-            <a:off x="704088" y="3794760"/>
-            <a:ext cx="2331720" cy="274320"/>
+            <a:off x="704088" y="3520440"/>
+            <a:ext cx="2331720" cy="256032"/>
           </a:xfrm>
           <a:prstGeom prst="rect">
             <a:avLst/>
@@ -14457,14 +15968,56 @@
                 <a:ea typeface="Calibri"/>
                 <a:cs typeface="Calibri"/>
               </a:rPr>
-              <a:t>95% interval</a:t>
-            </a:r>
-          </a:p>
-        </p:txBody>
-      </p:sp>
-      <p:sp>
-        <p:nvSpPr>
-          <p:cNvPr id="14" name="Rectangle 13"/>
+              <a:t>vs Max-pressure</a:t>
+            </a:r>
+          </a:p>
+        </p:txBody>
+      </p:sp>
+      <p:sp>
+        <p:nvSpPr>
+          <p:cNvPr id="14" name="TextBox 13"/>
+          <p:cNvSpPr txBox="1"/>
+          <p:nvPr/>
+        </p:nvSpPr>
+        <p:spPr>
+          <a:xfrm>
+            <a:off x="704088" y="3886200"/>
+            <a:ext cx="2331720" cy="411480"/>
+          </a:xfrm>
+          <a:prstGeom prst="rect">
+            <a:avLst/>
+          </a:prstGeom>
+          <a:noFill/>
+        </p:spPr>
+        <p:txBody>
+          <a:bodyPr wrap="square" lIns="0" rIns="0" tIns="0" bIns="0" anchor="t"/>
+          <a:lstStyle/>
+          <a:p>
+            <a:pPr algn="l">
+              <a:spcBef>
+                <a:spcPts val="0"/>
+              </a:spcBef>
+              <a:spcAft>
+                <a:spcPts val="0"/>
+              </a:spcAft>
+            </a:pPr>
+            <a:r>
+              <a:rPr sz="1200" b="0" i="0">
+                <a:solidFill>
+                  <a:srgbClr val="1A2834"/>
+                </a:solidFill>
+                <a:latin typeface="Calibri"/>
+                <a:ea typeface="Calibri"/>
+                <a:cs typeface="Calibri"/>
+              </a:rPr>
+              <a:t>vs legacy fixed  14.1%</a:t>
+            </a:r>
+          </a:p>
+        </p:txBody>
+      </p:sp>
+      <p:sp>
+        <p:nvSpPr>
+          <p:cNvPr id="15" name="Rectangle 14"/>
           <p:cNvSpPr/>
           <p:nvPr/>
         </p:nvSpPr>
@@ -14507,7 +16060,7 @@
       </p:sp>
       <p:sp>
         <p:nvSpPr>
-          <p:cNvPr id="15" name="Rectangle 14"/>
+          <p:cNvPr id="16" name="Rectangle 15"/>
           <p:cNvSpPr/>
           <p:nvPr/>
         </p:nvSpPr>
@@ -14550,7 +16103,7 @@
       </p:sp>
       <p:sp>
         <p:nvSpPr>
-          <p:cNvPr id="16" name="Rounded Rectangle 15"/>
+          <p:cNvPr id="17" name="Rounded Rectangle 16"/>
           <p:cNvSpPr/>
           <p:nvPr/>
         </p:nvSpPr>
@@ -14597,7 +16150,7 @@
       </p:sp>
       <p:sp>
         <p:nvSpPr>
-          <p:cNvPr id="17" name="Rectangle 16"/>
+          <p:cNvPr id="18" name="Rectangle 17"/>
           <p:cNvSpPr/>
           <p:nvPr/>
         </p:nvSpPr>
@@ -14640,34 +16193,34 @@
       </p:sp>
       <p:sp>
         <p:nvSpPr>
-          <p:cNvPr id="18" name="TextBox 17"/>
+          <p:cNvPr id="19" name="TextBox 18"/>
           <p:cNvSpPr txBox="1"/>
           <p:nvPr/>
         </p:nvSpPr>
         <p:spPr>
           <a:xfrm>
             <a:off x="3547872" y="1965960"/>
-            <a:ext cx="2331720" cy="502920"/>
-          </a:xfrm>
-          <a:prstGeom prst="rect">
-            <a:avLst/>
-          </a:prstGeom>
-          <a:noFill/>
-        </p:spPr>
-        <p:txBody>
-          <a:bodyPr wrap="square" lIns="0" rIns="0" tIns="0" bIns="0" anchor="t"/>
-          <a:lstStyle/>
-          <a:p>
-            <a:pPr algn="l">
-              <a:spcBef>
-                <a:spcPts val="0"/>
-              </a:spcBef>
-              <a:spcAft>
-                <a:spcPts val="0"/>
-              </a:spcAft>
-            </a:pPr>
-            <a:r>
-              <a:rPr sz="1600" b="1" i="0">
+            <a:ext cx="2331720" cy="411480"/>
+          </a:xfrm>
+          <a:prstGeom prst="rect">
+            <a:avLst/>
+          </a:prstGeom>
+          <a:noFill/>
+        </p:spPr>
+        <p:txBody>
+          <a:bodyPr wrap="square" lIns="0" rIns="0" tIns="0" bIns="0" anchor="t"/>
+          <a:lstStyle/>
+          <a:p>
+            <a:pPr algn="l">
+              <a:spcBef>
+                <a:spcPts val="0"/>
+              </a:spcBef>
+              <a:spcAft>
+                <a:spcPts val="0"/>
+              </a:spcAft>
+            </a:pPr>
+            <a:r>
+              <a:rPr sz="1500" b="1" i="0">
                 <a:solidFill>
                   <a:srgbClr val="1A2834"/>
                 </a:solidFill>
@@ -14682,34 +16235,34 @@
       </p:sp>
       <p:sp>
         <p:nvSpPr>
-          <p:cNvPr id="19" name="TextBox 18"/>
-          <p:cNvSpPr txBox="1"/>
-          <p:nvPr/>
-        </p:nvSpPr>
-        <p:spPr>
-          <a:xfrm>
-            <a:off x="3547872" y="2606040"/>
-            <a:ext cx="2331720" cy="640080"/>
-          </a:xfrm>
-          <a:prstGeom prst="rect">
-            <a:avLst/>
-          </a:prstGeom>
-          <a:noFill/>
-        </p:spPr>
-        <p:txBody>
-          <a:bodyPr wrap="square" lIns="0" rIns="0" tIns="0" bIns="0" anchor="t"/>
-          <a:lstStyle/>
-          <a:p>
-            <a:pPr algn="l">
-              <a:spcBef>
-                <a:spcPts val="0"/>
-              </a:spcBef>
-              <a:spcAft>
-                <a:spcPts val="0"/>
-              </a:spcAft>
-            </a:pPr>
-            <a:r>
-              <a:rPr sz="3600" b="1" i="0">
+          <p:cNvPr id="20" name="TextBox 19"/>
+          <p:cNvSpPr txBox="1"/>
+          <p:nvPr/>
+        </p:nvSpPr>
+        <p:spPr>
+          <a:xfrm>
+            <a:off x="3547872" y="2468880"/>
+            <a:ext cx="2331720" cy="594360"/>
+          </a:xfrm>
+          <a:prstGeom prst="rect">
+            <a:avLst/>
+          </a:prstGeom>
+          <a:noFill/>
+        </p:spPr>
+        <p:txBody>
+          <a:bodyPr wrap="square" lIns="0" rIns="0" tIns="0" bIns="0" anchor="t"/>
+          <a:lstStyle/>
+          <a:p>
+            <a:pPr algn="l">
+              <a:spcBef>
+                <a:spcPts val="0"/>
+              </a:spcBef>
+              <a:spcAft>
+                <a:spcPts val="0"/>
+              </a:spcAft>
+            </a:pPr>
+            <a:r>
+              <a:rPr sz="3400" b="1" i="0">
                 <a:solidFill>
                   <a:srgbClr val="1B6B5A"/>
                 </a:solidFill>
@@ -14720,7 +16273,7 @@
               <a:t>1.1</a:t>
             </a:r>
             <a:r>
-              <a:rPr sz="1800" b="1" i="0">
+              <a:rPr sz="1600" b="1" i="0">
                 <a:solidFill>
                   <a:srgbClr val="1B6B5A"/>
                 </a:solidFill>
@@ -14735,34 +16288,34 @@
       </p:sp>
       <p:sp>
         <p:nvSpPr>
-          <p:cNvPr id="20" name="TextBox 19"/>
-          <p:cNvSpPr txBox="1"/>
-          <p:nvPr/>
-        </p:nvSpPr>
-        <p:spPr>
-          <a:xfrm>
-            <a:off x="3547872" y="3337560"/>
-            <a:ext cx="2331720" cy="502920"/>
-          </a:xfrm>
-          <a:prstGeom prst="rect">
-            <a:avLst/>
-          </a:prstGeom>
-          <a:noFill/>
-        </p:spPr>
-        <p:txBody>
-          <a:bodyPr wrap="square" lIns="0" rIns="0" tIns="0" bIns="0" anchor="t"/>
-          <a:lstStyle/>
-          <a:p>
-            <a:pPr algn="l">
-              <a:spcBef>
-                <a:spcPts val="0"/>
-              </a:spcBef>
-              <a:spcAft>
-                <a:spcPts val="0"/>
-              </a:spcAft>
-            </a:pPr>
-            <a:r>
-              <a:rPr sz="1400" b="0" i="0">
+          <p:cNvPr id="21" name="TextBox 20"/>
+          <p:cNvSpPr txBox="1"/>
+          <p:nvPr/>
+        </p:nvSpPr>
+        <p:spPr>
+          <a:xfrm>
+            <a:off x="3547872" y="3108960"/>
+            <a:ext cx="2331720" cy="411480"/>
+          </a:xfrm>
+          <a:prstGeom prst="rect">
+            <a:avLst/>
+          </a:prstGeom>
+          <a:noFill/>
+        </p:spPr>
+        <p:txBody>
+          <a:bodyPr wrap="square" lIns="0" rIns="0" tIns="0" bIns="0" anchor="t"/>
+          <a:lstStyle/>
+          <a:p>
+            <a:pPr algn="l">
+              <a:spcBef>
+                <a:spcPts val="0"/>
+              </a:spcBef>
+              <a:spcAft>
+                <a:spcPts val="0"/>
+              </a:spcAft>
+            </a:pPr>
+            <a:r>
+              <a:rPr sz="1300" b="0" i="0">
                 <a:solidFill>
                   <a:srgbClr val="5E6E7C"/>
                 </a:solidFill>
@@ -14777,14 +16330,14 @@
       </p:sp>
       <p:sp>
         <p:nvSpPr>
-          <p:cNvPr id="21" name="TextBox 20"/>
-          <p:cNvSpPr txBox="1"/>
-          <p:nvPr/>
-        </p:nvSpPr>
-        <p:spPr>
-          <a:xfrm>
-            <a:off x="3547872" y="3794760"/>
-            <a:ext cx="2331720" cy="274320"/>
+          <p:cNvPr id="22" name="TextBox 21"/>
+          <p:cNvSpPr txBox="1"/>
+          <p:nvPr/>
+        </p:nvSpPr>
+        <p:spPr>
+          <a:xfrm>
+            <a:off x="3547872" y="3520440"/>
+            <a:ext cx="2331720" cy="256032"/>
           </a:xfrm>
           <a:prstGeom prst="rect">
             <a:avLst/>
@@ -14812,14 +16365,56 @@
                 <a:ea typeface="Calibri"/>
                 <a:cs typeface="Calibri"/>
               </a:rPr>
-              <a:t>95% interval</a:t>
-            </a:r>
-          </a:p>
-        </p:txBody>
-      </p:sp>
-      <p:sp>
-        <p:nvSpPr>
-          <p:cNvPr id="22" name="Rectangle 21"/>
+              <a:t>vs Max-pressure</a:t>
+            </a:r>
+          </a:p>
+        </p:txBody>
+      </p:sp>
+      <p:sp>
+        <p:nvSpPr>
+          <p:cNvPr id="23" name="TextBox 22"/>
+          <p:cNvSpPr txBox="1"/>
+          <p:nvPr/>
+        </p:nvSpPr>
+        <p:spPr>
+          <a:xfrm>
+            <a:off x="3547872" y="3886200"/>
+            <a:ext cx="2331720" cy="411480"/>
+          </a:xfrm>
+          <a:prstGeom prst="rect">
+            <a:avLst/>
+          </a:prstGeom>
+          <a:noFill/>
+        </p:spPr>
+        <p:txBody>
+          <a:bodyPr wrap="square" lIns="0" rIns="0" tIns="0" bIns="0" anchor="t"/>
+          <a:lstStyle/>
+          <a:p>
+            <a:pPr algn="l">
+              <a:spcBef>
+                <a:spcPts val="0"/>
+              </a:spcBef>
+              <a:spcAft>
+                <a:spcPts val="0"/>
+              </a:spcAft>
+            </a:pPr>
+            <a:r>
+              <a:rPr sz="1200" b="0" i="0">
+                <a:solidFill>
+                  <a:srgbClr val="1A2834"/>
+                </a:solidFill>
+                <a:latin typeface="Calibri"/>
+                <a:ea typeface="Calibri"/>
+                <a:cs typeface="Calibri"/>
+              </a:rPr>
+              <a:t>vs legacy fixed  13.2%</a:t>
+            </a:r>
+          </a:p>
+        </p:txBody>
+      </p:sp>
+      <p:sp>
+        <p:nvSpPr>
+          <p:cNvPr id="24" name="Rectangle 23"/>
           <p:cNvSpPr/>
           <p:nvPr/>
         </p:nvSpPr>
@@ -14862,7 +16457,7 @@
       </p:sp>
       <p:sp>
         <p:nvSpPr>
-          <p:cNvPr id="23" name="Rectangle 22"/>
+          <p:cNvPr id="25" name="Rectangle 24"/>
           <p:cNvSpPr/>
           <p:nvPr/>
         </p:nvSpPr>
@@ -14905,7 +16500,7 @@
       </p:sp>
       <p:sp>
         <p:nvSpPr>
-          <p:cNvPr id="24" name="Rounded Rectangle 23"/>
+          <p:cNvPr id="26" name="Rounded Rectangle 25"/>
           <p:cNvSpPr/>
           <p:nvPr/>
         </p:nvSpPr>
@@ -14952,7 +16547,7 @@
       </p:sp>
       <p:sp>
         <p:nvSpPr>
-          <p:cNvPr id="25" name="Rectangle 24"/>
+          <p:cNvPr id="27" name="Rectangle 26"/>
           <p:cNvSpPr/>
           <p:nvPr/>
         </p:nvSpPr>
@@ -14995,34 +16590,34 @@
       </p:sp>
       <p:sp>
         <p:nvSpPr>
-          <p:cNvPr id="26" name="TextBox 25"/>
+          <p:cNvPr id="28" name="TextBox 27"/>
           <p:cNvSpPr txBox="1"/>
           <p:nvPr/>
         </p:nvSpPr>
         <p:spPr>
           <a:xfrm>
             <a:off x="6391655" y="1965960"/>
-            <a:ext cx="2331720" cy="502920"/>
-          </a:xfrm>
-          <a:prstGeom prst="rect">
-            <a:avLst/>
-          </a:prstGeom>
-          <a:noFill/>
-        </p:spPr>
-        <p:txBody>
-          <a:bodyPr wrap="square" lIns="0" rIns="0" tIns="0" bIns="0" anchor="t"/>
-          <a:lstStyle/>
-          <a:p>
-            <a:pPr algn="l">
-              <a:spcBef>
-                <a:spcPts val="0"/>
-              </a:spcBef>
-              <a:spcAft>
-                <a:spcPts val="0"/>
-              </a:spcAft>
-            </a:pPr>
-            <a:r>
-              <a:rPr sz="1600" b="1" i="0">
+            <a:ext cx="2331720" cy="411480"/>
+          </a:xfrm>
+          <a:prstGeom prst="rect">
+            <a:avLst/>
+          </a:prstGeom>
+          <a:noFill/>
+        </p:spPr>
+        <p:txBody>
+          <a:bodyPr wrap="square" lIns="0" rIns="0" tIns="0" bIns="0" anchor="t"/>
+          <a:lstStyle/>
+          <a:p>
+            <a:pPr algn="l">
+              <a:spcBef>
+                <a:spcPts val="0"/>
+              </a:spcBef>
+              <a:spcAft>
+                <a:spcPts val="0"/>
+              </a:spcAft>
+            </a:pPr>
+            <a:r>
+              <a:rPr sz="1500" b="1" i="0">
                 <a:solidFill>
                   <a:srgbClr val="1A2834"/>
                 </a:solidFill>
@@ -15037,34 +16632,34 @@
       </p:sp>
       <p:sp>
         <p:nvSpPr>
-          <p:cNvPr id="27" name="TextBox 26"/>
-          <p:cNvSpPr txBox="1"/>
-          <p:nvPr/>
-        </p:nvSpPr>
-        <p:spPr>
-          <a:xfrm>
-            <a:off x="6391655" y="2606040"/>
-            <a:ext cx="2331720" cy="640080"/>
-          </a:xfrm>
-          <a:prstGeom prst="rect">
-            <a:avLst/>
-          </a:prstGeom>
-          <a:noFill/>
-        </p:spPr>
-        <p:txBody>
-          <a:bodyPr wrap="square" lIns="0" rIns="0" tIns="0" bIns="0" anchor="t"/>
-          <a:lstStyle/>
-          <a:p>
-            <a:pPr algn="l">
-              <a:spcBef>
-                <a:spcPts val="0"/>
-              </a:spcBef>
-              <a:spcAft>
-                <a:spcPts val="0"/>
-              </a:spcAft>
-            </a:pPr>
-            <a:r>
-              <a:rPr sz="3600" b="1" i="0">
+          <p:cNvPr id="29" name="TextBox 28"/>
+          <p:cNvSpPr txBox="1"/>
+          <p:nvPr/>
+        </p:nvSpPr>
+        <p:spPr>
+          <a:xfrm>
+            <a:off x="6391655" y="2468880"/>
+            <a:ext cx="2331720" cy="594360"/>
+          </a:xfrm>
+          <a:prstGeom prst="rect">
+            <a:avLst/>
+          </a:prstGeom>
+          <a:noFill/>
+        </p:spPr>
+        <p:txBody>
+          <a:bodyPr wrap="square" lIns="0" rIns="0" tIns="0" bIns="0" anchor="t"/>
+          <a:lstStyle/>
+          <a:p>
+            <a:pPr algn="l">
+              <a:spcBef>
+                <a:spcPts val="0"/>
+              </a:spcBef>
+              <a:spcAft>
+                <a:spcPts val="0"/>
+              </a:spcAft>
+            </a:pPr>
+            <a:r>
+              <a:rPr sz="3400" b="1" i="0">
                 <a:solidFill>
                   <a:srgbClr val="1B6B5A"/>
                 </a:solidFill>
@@ -15075,7 +16670,7 @@
               <a:t>0.7</a:t>
             </a:r>
             <a:r>
-              <a:rPr sz="1800" b="1" i="0">
+              <a:rPr sz="1600" b="1" i="0">
                 <a:solidFill>
                   <a:srgbClr val="1B6B5A"/>
                 </a:solidFill>
@@ -15090,34 +16685,34 @@
       </p:sp>
       <p:sp>
         <p:nvSpPr>
-          <p:cNvPr id="28" name="TextBox 27"/>
-          <p:cNvSpPr txBox="1"/>
-          <p:nvPr/>
-        </p:nvSpPr>
-        <p:spPr>
-          <a:xfrm>
-            <a:off x="6391655" y="3337560"/>
-            <a:ext cx="2331720" cy="502920"/>
-          </a:xfrm>
-          <a:prstGeom prst="rect">
-            <a:avLst/>
-          </a:prstGeom>
-          <a:noFill/>
-        </p:spPr>
-        <p:txBody>
-          <a:bodyPr wrap="square" lIns="0" rIns="0" tIns="0" bIns="0" anchor="t"/>
-          <a:lstStyle/>
-          <a:p>
-            <a:pPr algn="l">
-              <a:spcBef>
-                <a:spcPts val="0"/>
-              </a:spcBef>
-              <a:spcAft>
-                <a:spcPts val="0"/>
-              </a:spcAft>
-            </a:pPr>
-            <a:r>
-              <a:rPr sz="1400" b="0" i="0">
+          <p:cNvPr id="30" name="TextBox 29"/>
+          <p:cNvSpPr txBox="1"/>
+          <p:nvPr/>
+        </p:nvSpPr>
+        <p:spPr>
+          <a:xfrm>
+            <a:off x="6391655" y="3108960"/>
+            <a:ext cx="2331720" cy="411480"/>
+          </a:xfrm>
+          <a:prstGeom prst="rect">
+            <a:avLst/>
+          </a:prstGeom>
+          <a:noFill/>
+        </p:spPr>
+        <p:txBody>
+          <a:bodyPr wrap="square" lIns="0" rIns="0" tIns="0" bIns="0" anchor="t"/>
+          <a:lstStyle/>
+          <a:p>
+            <a:pPr algn="l">
+              <a:spcBef>
+                <a:spcPts val="0"/>
+              </a:spcBef>
+              <a:spcAft>
+                <a:spcPts val="0"/>
+              </a:spcAft>
+            </a:pPr>
+            <a:r>
+              <a:rPr sz="1300" b="0" i="0">
                 <a:solidFill>
                   <a:srgbClr val="5E6E7C"/>
                 </a:solidFill>
@@ -15132,14 +16727,14 @@
       </p:sp>
       <p:sp>
         <p:nvSpPr>
-          <p:cNvPr id="29" name="TextBox 28"/>
-          <p:cNvSpPr txBox="1"/>
-          <p:nvPr/>
-        </p:nvSpPr>
-        <p:spPr>
-          <a:xfrm>
-            <a:off x="6391655" y="3794760"/>
-            <a:ext cx="2331720" cy="274320"/>
+          <p:cNvPr id="31" name="TextBox 30"/>
+          <p:cNvSpPr txBox="1"/>
+          <p:nvPr/>
+        </p:nvSpPr>
+        <p:spPr>
+          <a:xfrm>
+            <a:off x="6391655" y="3520440"/>
+            <a:ext cx="2331720" cy="256032"/>
           </a:xfrm>
           <a:prstGeom prst="rect">
             <a:avLst/>
@@ -15167,14 +16762,56 @@
                 <a:ea typeface="Calibri"/>
                 <a:cs typeface="Calibri"/>
               </a:rPr>
-              <a:t>95% interval</a:t>
-            </a:r>
-          </a:p>
-        </p:txBody>
-      </p:sp>
-      <p:sp>
-        <p:nvSpPr>
-          <p:cNvPr id="30" name="Rectangle 29"/>
+              <a:t>vs Max-pressure</a:t>
+            </a:r>
+          </a:p>
+        </p:txBody>
+      </p:sp>
+      <p:sp>
+        <p:nvSpPr>
+          <p:cNvPr id="32" name="TextBox 31"/>
+          <p:cNvSpPr txBox="1"/>
+          <p:nvPr/>
+        </p:nvSpPr>
+        <p:spPr>
+          <a:xfrm>
+            <a:off x="6391655" y="3886200"/>
+            <a:ext cx="2331720" cy="411480"/>
+          </a:xfrm>
+          <a:prstGeom prst="rect">
+            <a:avLst/>
+          </a:prstGeom>
+          <a:noFill/>
+        </p:spPr>
+        <p:txBody>
+          <a:bodyPr wrap="square" lIns="0" rIns="0" tIns="0" bIns="0" anchor="t"/>
+          <a:lstStyle/>
+          <a:p>
+            <a:pPr algn="l">
+              <a:spcBef>
+                <a:spcPts val="0"/>
+              </a:spcBef>
+              <a:spcAft>
+                <a:spcPts val="0"/>
+              </a:spcAft>
+            </a:pPr>
+            <a:r>
+              <a:rPr sz="1200" b="0" i="0">
+                <a:solidFill>
+                  <a:srgbClr val="1A2834"/>
+                </a:solidFill>
+                <a:latin typeface="Calibri"/>
+                <a:ea typeface="Calibri"/>
+                <a:cs typeface="Calibri"/>
+              </a:rPr>
+              <a:t>vs legacy fixed  17.5%</a:t>
+            </a:r>
+          </a:p>
+        </p:txBody>
+      </p:sp>
+      <p:sp>
+        <p:nvSpPr>
+          <p:cNvPr id="33" name="Rectangle 32"/>
           <p:cNvSpPr/>
           <p:nvPr/>
         </p:nvSpPr>
@@ -15217,7 +16854,7 @@
       </p:sp>
       <p:sp>
         <p:nvSpPr>
-          <p:cNvPr id="31" name="Rectangle 30"/>
+          <p:cNvPr id="34" name="Rectangle 33"/>
           <p:cNvSpPr/>
           <p:nvPr/>
         </p:nvSpPr>
@@ -15260,7 +16897,7 @@
       </p:sp>
       <p:sp>
         <p:nvSpPr>
-          <p:cNvPr id="32" name="Rounded Rectangle 31"/>
+          <p:cNvPr id="35" name="Rounded Rectangle 34"/>
           <p:cNvSpPr/>
           <p:nvPr/>
         </p:nvSpPr>
@@ -15307,7 +16944,7 @@
       </p:sp>
       <p:sp>
         <p:nvSpPr>
-          <p:cNvPr id="33" name="Rectangle 32"/>
+          <p:cNvPr id="36" name="Rectangle 35"/>
           <p:cNvSpPr/>
           <p:nvPr/>
         </p:nvSpPr>
@@ -15350,34 +16987,34 @@
       </p:sp>
       <p:sp>
         <p:nvSpPr>
-          <p:cNvPr id="34" name="TextBox 33"/>
+          <p:cNvPr id="37" name="TextBox 36"/>
           <p:cNvSpPr txBox="1"/>
           <p:nvPr/>
         </p:nvSpPr>
         <p:spPr>
           <a:xfrm>
             <a:off x="9235440" y="1965960"/>
-            <a:ext cx="2331720" cy="502920"/>
-          </a:xfrm>
-          <a:prstGeom prst="rect">
-            <a:avLst/>
-          </a:prstGeom>
-          <a:noFill/>
-        </p:spPr>
-        <p:txBody>
-          <a:bodyPr wrap="square" lIns="0" rIns="0" tIns="0" bIns="0" anchor="t"/>
-          <a:lstStyle/>
-          <a:p>
-            <a:pPr algn="l">
-              <a:spcBef>
-                <a:spcPts val="0"/>
-              </a:spcBef>
-              <a:spcAft>
-                <a:spcPts val="0"/>
-              </a:spcAft>
-            </a:pPr>
-            <a:r>
-              <a:rPr sz="1600" b="1" i="0">
+            <a:ext cx="2331720" cy="411480"/>
+          </a:xfrm>
+          <a:prstGeom prst="rect">
+            <a:avLst/>
+          </a:prstGeom>
+          <a:noFill/>
+        </p:spPr>
+        <p:txBody>
+          <a:bodyPr wrap="square" lIns="0" rIns="0" tIns="0" bIns="0" anchor="t"/>
+          <a:lstStyle/>
+          <a:p>
+            <a:pPr algn="l">
+              <a:spcBef>
+                <a:spcPts val="0"/>
+              </a:spcBef>
+              <a:spcAft>
+                <a:spcPts val="0"/>
+              </a:spcAft>
+            </a:pPr>
+            <a:r>
+              <a:rPr sz="1500" b="1" i="0">
                 <a:solidFill>
                   <a:srgbClr val="1A2834"/>
                 </a:solidFill>
@@ -15392,34 +17029,34 @@
       </p:sp>
       <p:sp>
         <p:nvSpPr>
-          <p:cNvPr id="35" name="TextBox 34"/>
-          <p:cNvSpPr txBox="1"/>
-          <p:nvPr/>
-        </p:nvSpPr>
-        <p:spPr>
-          <a:xfrm>
-            <a:off x="9235440" y="2606040"/>
-            <a:ext cx="2331720" cy="640080"/>
-          </a:xfrm>
-          <a:prstGeom prst="rect">
-            <a:avLst/>
-          </a:prstGeom>
-          <a:noFill/>
-        </p:spPr>
-        <p:txBody>
-          <a:bodyPr wrap="square" lIns="0" rIns="0" tIns="0" bIns="0" anchor="t"/>
-          <a:lstStyle/>
-          <a:p>
-            <a:pPr algn="l">
-              <a:spcBef>
-                <a:spcPts val="0"/>
-              </a:spcBef>
-              <a:spcAft>
-                <a:spcPts val="0"/>
-              </a:spcAft>
-            </a:pPr>
-            <a:r>
-              <a:rPr sz="3600" b="1" i="0">
+          <p:cNvPr id="38" name="TextBox 37"/>
+          <p:cNvSpPr txBox="1"/>
+          <p:nvPr/>
+        </p:nvSpPr>
+        <p:spPr>
+          <a:xfrm>
+            <a:off x="9235440" y="2468880"/>
+            <a:ext cx="2331720" cy="594360"/>
+          </a:xfrm>
+          <a:prstGeom prst="rect">
+            <a:avLst/>
+          </a:prstGeom>
+          <a:noFill/>
+        </p:spPr>
+        <p:txBody>
+          <a:bodyPr wrap="square" lIns="0" rIns="0" tIns="0" bIns="0" anchor="t"/>
+          <a:lstStyle/>
+          <a:p>
+            <a:pPr algn="l">
+              <a:spcBef>
+                <a:spcPts val="0"/>
+              </a:spcBef>
+              <a:spcAft>
+                <a:spcPts val="0"/>
+              </a:spcAft>
+            </a:pPr>
+            <a:r>
+              <a:rPr sz="3400" b="1" i="0">
                 <a:solidFill>
                   <a:srgbClr val="1B6B5A"/>
                 </a:solidFill>
@@ -15430,7 +17067,7 @@
               <a:t>0.3</a:t>
             </a:r>
             <a:r>
-              <a:rPr sz="1800" b="1" i="0">
+              <a:rPr sz="1600" b="1" i="0">
                 <a:solidFill>
                   <a:srgbClr val="1B6B5A"/>
                 </a:solidFill>
@@ -15445,34 +17082,34 @@
       </p:sp>
       <p:sp>
         <p:nvSpPr>
-          <p:cNvPr id="36" name="TextBox 35"/>
-          <p:cNvSpPr txBox="1"/>
-          <p:nvPr/>
-        </p:nvSpPr>
-        <p:spPr>
-          <a:xfrm>
-            <a:off x="9235440" y="3337560"/>
-            <a:ext cx="2331720" cy="502920"/>
-          </a:xfrm>
-          <a:prstGeom prst="rect">
-            <a:avLst/>
-          </a:prstGeom>
-          <a:noFill/>
-        </p:spPr>
-        <p:txBody>
-          <a:bodyPr wrap="square" lIns="0" rIns="0" tIns="0" bIns="0" anchor="t"/>
-          <a:lstStyle/>
-          <a:p>
-            <a:pPr algn="l">
-              <a:spcBef>
-                <a:spcPts val="0"/>
-              </a:spcBef>
-              <a:spcAft>
-                <a:spcPts val="0"/>
-              </a:spcAft>
-            </a:pPr>
-            <a:r>
-              <a:rPr sz="1400" b="0" i="0">
+          <p:cNvPr id="39" name="TextBox 38"/>
+          <p:cNvSpPr txBox="1"/>
+          <p:nvPr/>
+        </p:nvSpPr>
+        <p:spPr>
+          <a:xfrm>
+            <a:off x="9235440" y="3108960"/>
+            <a:ext cx="2331720" cy="411480"/>
+          </a:xfrm>
+          <a:prstGeom prst="rect">
+            <a:avLst/>
+          </a:prstGeom>
+          <a:noFill/>
+        </p:spPr>
+        <p:txBody>
+          <a:bodyPr wrap="square" lIns="0" rIns="0" tIns="0" bIns="0" anchor="t"/>
+          <a:lstStyle/>
+          <a:p>
+            <a:pPr algn="l">
+              <a:spcBef>
+                <a:spcPts val="0"/>
+              </a:spcBef>
+              <a:spcAft>
+                <a:spcPts val="0"/>
+              </a:spcAft>
+            </a:pPr>
+            <a:r>
+              <a:rPr sz="1300" b="0" i="0">
                 <a:solidFill>
                   <a:srgbClr val="5E6E7C"/>
                 </a:solidFill>
@@ -15487,14 +17124,14 @@
       </p:sp>
       <p:sp>
         <p:nvSpPr>
-          <p:cNvPr id="37" name="TextBox 36"/>
-          <p:cNvSpPr txBox="1"/>
-          <p:nvPr/>
-        </p:nvSpPr>
-        <p:spPr>
-          <a:xfrm>
-            <a:off x="9235440" y="3794760"/>
-            <a:ext cx="2331720" cy="274320"/>
+          <p:cNvPr id="40" name="TextBox 39"/>
+          <p:cNvSpPr txBox="1"/>
+          <p:nvPr/>
+        </p:nvSpPr>
+        <p:spPr>
+          <a:xfrm>
+            <a:off x="9235440" y="3520440"/>
+            <a:ext cx="2331720" cy="256032"/>
           </a:xfrm>
           <a:prstGeom prst="rect">
             <a:avLst/>
@@ -15522,14 +17159,56 @@
                 <a:ea typeface="Calibri"/>
                 <a:cs typeface="Calibri"/>
               </a:rPr>
-              <a:t>95% interval</a:t>
-            </a:r>
-          </a:p>
-        </p:txBody>
-      </p:sp>
-      <p:sp>
-        <p:nvSpPr>
-          <p:cNvPr id="38" name="Rectangle 37"/>
+              <a:t>vs Max-pressure</a:t>
+            </a:r>
+          </a:p>
+        </p:txBody>
+      </p:sp>
+      <p:sp>
+        <p:nvSpPr>
+          <p:cNvPr id="41" name="TextBox 40"/>
+          <p:cNvSpPr txBox="1"/>
+          <p:nvPr/>
+        </p:nvSpPr>
+        <p:spPr>
+          <a:xfrm>
+            <a:off x="9235440" y="3886200"/>
+            <a:ext cx="2331720" cy="411480"/>
+          </a:xfrm>
+          <a:prstGeom prst="rect">
+            <a:avLst/>
+          </a:prstGeom>
+          <a:noFill/>
+        </p:spPr>
+        <p:txBody>
+          <a:bodyPr wrap="square" lIns="0" rIns="0" tIns="0" bIns="0" anchor="t"/>
+          <a:lstStyle/>
+          <a:p>
+            <a:pPr algn="l">
+              <a:spcBef>
+                <a:spcPts val="0"/>
+              </a:spcBef>
+              <a:spcAft>
+                <a:spcPts val="0"/>
+              </a:spcAft>
+            </a:pPr>
+            <a:r>
+              <a:rPr sz="1200" b="0" i="0">
+                <a:solidFill>
+                  <a:srgbClr val="1A2834"/>
+                </a:solidFill>
+                <a:latin typeface="Calibri"/>
+                <a:ea typeface="Calibri"/>
+                <a:cs typeface="Calibri"/>
+              </a:rPr>
+              <a:t>vs legacy fixed  7.9%</a:t>
+            </a:r>
+          </a:p>
+        </p:txBody>
+      </p:sp>
+      <p:sp>
+        <p:nvSpPr>
+          <p:cNvPr id="42" name="Rectangle 41"/>
           <p:cNvSpPr/>
           <p:nvPr/>
         </p:nvSpPr>
@@ -15572,7 +17251,7 @@
       </p:sp>
       <p:sp>
         <p:nvSpPr>
-          <p:cNvPr id="39" name="Rectangle 38"/>
+          <p:cNvPr id="43" name="Rectangle 42"/>
           <p:cNvSpPr/>
           <p:nvPr/>
         </p:nvSpPr>
@@ -15615,7 +17294,7 @@
       </p:sp>
       <p:sp>
         <p:nvSpPr>
-          <p:cNvPr id="40" name="Rounded Rectangle 39"/>
+          <p:cNvPr id="44" name="Rounded Rectangle 43"/>
           <p:cNvSpPr/>
           <p:nvPr/>
         </p:nvSpPr>
@@ -15660,7 +17339,7 @@
       </p:sp>
       <p:sp>
         <p:nvSpPr>
-          <p:cNvPr id="41" name="TextBox 40"/>
+          <p:cNvPr id="45" name="TextBox 44"/>
           <p:cNvSpPr txBox="1"/>
           <p:nvPr/>
         </p:nvSpPr>
@@ -15687,7 +17366,7 @@
               </a:spcAft>
             </a:pPr>
             <a:r>
-              <a:rPr sz="1500" b="0" i="0">
+              <a:rPr sz="1400" b="0" i="0">
                 <a:solidFill>
                   <a:srgbClr val="1A2834"/>
                 </a:solidFill>
@@ -15695,7 +17374,7 @@
                 <a:ea typeface="Calibri"/>
                 <a:cs typeface="Calibri"/>
               </a:rPr>
-              <a:t>All four scenarios are flagged OK. Tuning stopped before these seeds were scored.</a:t>
+              <a:t>Mean fuel is lower than the best baseline in every scenario. Some 95% intervals still cross zero — read the interval, not only the point estimate.</a:t>
             </a:r>
           </a:p>
         </p:txBody>
@@ -15848,7 +17527,7 @@
                 <a:ea typeface="Georgia"/>
                 <a:cs typeface="Georgia"/>
               </a:rPr>
-              <a:t>The gap that matters is versus fixed time</a:t>
+              <a:t>Versus strong adaptive controllers, the edge is small</a:t>
             </a:r>
           </a:p>
         </p:txBody>
@@ -15890,7 +17569,7 @@
                 <a:ea typeface="Calibri"/>
                 <a:cs typeface="Calibri"/>
               </a:rPr>
-              <a:t>Against a strong adaptive controller, fuel weighting is a smaller edge. It is still on the same side every time.</a:t>
+              <a:t>Legacy fixed is the easy win. The test that matters is against tuned fixed, actuated, and max-pressure.</a:t>
             </a:r>
           </a:p>
         </p:txBody>
@@ -16031,7 +17710,7 @@
         <p:spPr>
           <a:xfrm>
             <a:off x="612648" y="1572768"/>
-            <a:ext cx="2185415" cy="420624"/>
+            <a:ext cx="2002536" cy="420624"/>
           </a:xfrm>
           <a:prstGeom prst="rect">
             <a:avLst/>
@@ -16051,7 +17730,7 @@
               </a:spcAft>
             </a:pPr>
             <a:r>
-              <a:rPr sz="1300" b="1" i="0">
+              <a:rPr sz="1200" b="1" i="0">
                 <a:solidFill>
                   <a:srgbClr val="FFFFFF"/>
                 </a:solidFill>
@@ -16072,8 +17751,8 @@
         </p:nvSpPr>
         <p:spPr>
           <a:xfrm>
-            <a:off x="2944368" y="1572768"/>
-            <a:ext cx="2075688" cy="420624"/>
+            <a:off x="2761488" y="1572768"/>
+            <a:ext cx="2002536" cy="420624"/>
           </a:xfrm>
           <a:prstGeom prst="rect">
             <a:avLst/>
@@ -16093,7 +17772,7 @@
               </a:spcAft>
             </a:pPr>
             <a:r>
-              <a:rPr sz="1300" b="1" i="0">
+              <a:rPr sz="1200" b="1" i="0">
                 <a:solidFill>
                   <a:srgbClr val="FFFFFF"/>
                 </a:solidFill>
@@ -16101,7 +17780,7 @@
                 <a:ea typeface="Calibri"/>
                 <a:cs typeface="Calibri"/>
               </a:rPr>
-              <a:t>vs fixed</a:t>
+              <a:t>vs legacy fixed</a:t>
             </a:r>
           </a:p>
         </p:txBody>
@@ -16114,8 +17793,8 @@
         </p:nvSpPr>
         <p:spPr>
           <a:xfrm>
-            <a:off x="5166359" y="1572768"/>
-            <a:ext cx="2075688" cy="420624"/>
+            <a:off x="4910328" y="1572768"/>
+            <a:ext cx="2002536" cy="420624"/>
           </a:xfrm>
           <a:prstGeom prst="rect">
             <a:avLst/>
@@ -16135,7 +17814,7 @@
               </a:spcAft>
             </a:pPr>
             <a:r>
-              <a:rPr sz="1300" b="1" i="0">
+              <a:rPr sz="1200" b="1" i="0">
                 <a:solidFill>
                   <a:srgbClr val="FFFFFF"/>
                 </a:solidFill>
@@ -16143,7 +17822,7 @@
                 <a:ea typeface="Calibri"/>
                 <a:cs typeface="Calibri"/>
               </a:rPr>
-              <a:t>vs actuated</a:t>
+              <a:t>vs tuned fixed</a:t>
             </a:r>
           </a:p>
         </p:txBody>
@@ -16156,8 +17835,8 @@
         </p:nvSpPr>
         <p:spPr>
           <a:xfrm>
-            <a:off x="7388351" y="1572768"/>
-            <a:ext cx="2185415" cy="420624"/>
+            <a:off x="7059168" y="1572768"/>
+            <a:ext cx="2002536" cy="420624"/>
           </a:xfrm>
           <a:prstGeom prst="rect">
             <a:avLst/>
@@ -16177,7 +17856,7 @@
               </a:spcAft>
             </a:pPr>
             <a:r>
-              <a:rPr sz="1300" b="1" i="0">
+              <a:rPr sz="1200" b="1" i="0">
                 <a:solidFill>
                   <a:srgbClr val="FFFFFF"/>
                 </a:solidFill>
@@ -16185,7 +17864,7 @@
                 <a:ea typeface="Calibri"/>
                 <a:cs typeface="Calibri"/>
               </a:rPr>
-              <a:t>vs max-pressure</a:t>
+              <a:t>vs actuated</a:t>
             </a:r>
           </a:p>
         </p:txBody>
@@ -16198,8 +17877,8 @@
         </p:nvSpPr>
         <p:spPr>
           <a:xfrm>
-            <a:off x="9720071" y="1572768"/>
-            <a:ext cx="1975103" cy="420624"/>
+            <a:off x="9208007" y="1572768"/>
+            <a:ext cx="2487168" cy="420624"/>
           </a:xfrm>
           <a:prstGeom prst="rect">
             <a:avLst/>
@@ -16219,7 +17898,7 @@
               </a:spcAft>
             </a:pPr>
             <a:r>
-              <a:rPr sz="1300" b="1" i="0">
+              <a:rPr sz="1200" b="1" i="0">
                 <a:solidFill>
                   <a:srgbClr val="FFFFFF"/>
                 </a:solidFill>
@@ -16227,7 +17906,7 @@
                 <a:ea typeface="Calibri"/>
                 <a:cs typeface="Calibri"/>
               </a:rPr>
-              <a:t>vs count only</a:t>
+              <a:t>vs max-pressure</a:t>
             </a:r>
           </a:p>
         </p:txBody>
@@ -16284,7 +17963,7 @@
         <p:spPr>
           <a:xfrm>
             <a:off x="630936" y="1993392"/>
-            <a:ext cx="2148839" cy="713232"/>
+            <a:ext cx="1965960" cy="713232"/>
           </a:xfrm>
           <a:prstGeom prst="rect">
             <a:avLst/>
@@ -16325,8 +18004,8 @@
         </p:nvSpPr>
         <p:spPr>
           <a:xfrm>
-            <a:off x="2907791" y="2066544"/>
-            <a:ext cx="2112264" cy="329184"/>
+            <a:off x="2724912" y="2066544"/>
+            <a:ext cx="2039112" cy="329184"/>
           </a:xfrm>
           <a:prstGeom prst="rect">
             <a:avLst/>
@@ -16367,8 +18046,8 @@
         </p:nvSpPr>
         <p:spPr>
           <a:xfrm>
-            <a:off x="2889503" y="2359152"/>
-            <a:ext cx="2130552" cy="256032"/>
+            <a:off x="2706624" y="2359152"/>
+            <a:ext cx="2057400" cy="256032"/>
           </a:xfrm>
           <a:prstGeom prst="rect">
             <a:avLst/>
@@ -16409,8 +18088,8 @@
         </p:nvSpPr>
         <p:spPr>
           <a:xfrm>
-            <a:off x="5129783" y="2066544"/>
-            <a:ext cx="2112264" cy="329184"/>
+            <a:off x="4873752" y="2066544"/>
+            <a:ext cx="2039112" cy="329184"/>
           </a:xfrm>
           <a:prstGeom prst="rect">
             <a:avLst/>
@@ -16438,7 +18117,7 @@
                 <a:ea typeface="Georgia"/>
                 <a:cs typeface="Georgia"/>
               </a:rPr>
-              <a:t>10.7%</a:t>
+              <a:t>12.1%</a:t>
             </a:r>
           </a:p>
         </p:txBody>
@@ -16451,8 +18130,8 @@
         </p:nvSpPr>
         <p:spPr>
           <a:xfrm>
-            <a:off x="5111495" y="2359152"/>
-            <a:ext cx="2130552" cy="256032"/>
+            <a:off x="4855464" y="2359152"/>
+            <a:ext cx="2057400" cy="256032"/>
           </a:xfrm>
           <a:prstGeom prst="rect">
             <a:avLst/>
@@ -16480,7 +18159,7 @@
                 <a:ea typeface="Calibri"/>
                 <a:cs typeface="Calibri"/>
               </a:rPr>
-              <a:t>9.0 – 12.4</a:t>
+              <a:t>11.4 – 12.8</a:t>
             </a:r>
           </a:p>
         </p:txBody>
@@ -16493,8 +18172,8 @@
         </p:nvSpPr>
         <p:spPr>
           <a:xfrm>
-            <a:off x="7351775" y="2066544"/>
-            <a:ext cx="2221991" cy="329184"/>
+            <a:off x="7022592" y="2066544"/>
+            <a:ext cx="2039112" cy="329184"/>
           </a:xfrm>
           <a:prstGeom prst="rect">
             <a:avLst/>
@@ -16522,7 +18201,7 @@
                 <a:ea typeface="Georgia"/>
                 <a:cs typeface="Georgia"/>
               </a:rPr>
-              <a:t>1.9%</a:t>
+              <a:t>10.7%</a:t>
             </a:r>
           </a:p>
         </p:txBody>
@@ -16535,8 +18214,8 @@
         </p:nvSpPr>
         <p:spPr>
           <a:xfrm>
-            <a:off x="7333488" y="2359152"/>
-            <a:ext cx="2240279" cy="256032"/>
+            <a:off x="7004303" y="2359152"/>
+            <a:ext cx="2057400" cy="256032"/>
           </a:xfrm>
           <a:prstGeom prst="rect">
             <a:avLst/>
@@ -16564,7 +18243,7 @@
                 <a:ea typeface="Calibri"/>
                 <a:cs typeface="Calibri"/>
               </a:rPr>
-              <a:t>0.5 – 3.0</a:t>
+              <a:t>9.0 – 12.4</a:t>
             </a:r>
           </a:p>
         </p:txBody>
@@ -16577,8 +18256,8 @@
         </p:nvSpPr>
         <p:spPr>
           <a:xfrm>
-            <a:off x="9683495" y="2066544"/>
-            <a:ext cx="2011679" cy="329184"/>
+            <a:off x="9171432" y="2066544"/>
+            <a:ext cx="2523744" cy="329184"/>
           </a:xfrm>
           <a:prstGeom prst="rect">
             <a:avLst/>
@@ -16606,7 +18285,7 @@
                 <a:ea typeface="Georgia"/>
                 <a:cs typeface="Georgia"/>
               </a:rPr>
-              <a:t>2.0%</a:t>
+              <a:t>1.9%</a:t>
             </a:r>
           </a:p>
         </p:txBody>
@@ -16619,8 +18298,8 @@
         </p:nvSpPr>
         <p:spPr>
           <a:xfrm>
-            <a:off x="9665207" y="2359152"/>
-            <a:ext cx="2029967" cy="256032"/>
+            <a:off x="9153144" y="2359152"/>
+            <a:ext cx="2542032" cy="256032"/>
           </a:xfrm>
           <a:prstGeom prst="rect">
             <a:avLst/>
@@ -16648,7 +18327,7 @@
                 <a:ea typeface="Calibri"/>
                 <a:cs typeface="Calibri"/>
               </a:rPr>
-              <a:t>0.5 – 3.3</a:t>
+              <a:t>0.5 – 3.0</a:t>
             </a:r>
           </a:p>
         </p:txBody>
@@ -16705,7 +18384,7 @@
         <p:spPr>
           <a:xfrm>
             <a:off x="630936" y="2706624"/>
-            <a:ext cx="2148839" cy="713232"/>
+            <a:ext cx="1965960" cy="713232"/>
           </a:xfrm>
           <a:prstGeom prst="rect">
             <a:avLst/>
@@ -16746,8 +18425,8 @@
         </p:nvSpPr>
         <p:spPr>
           <a:xfrm>
-            <a:off x="2907791" y="2779776"/>
-            <a:ext cx="2112264" cy="329184"/>
+            <a:off x="2724912" y="2779776"/>
+            <a:ext cx="2039112" cy="329184"/>
           </a:xfrm>
           <a:prstGeom prst="rect">
             <a:avLst/>
@@ -16788,8 +18467,8 @@
         </p:nvSpPr>
         <p:spPr>
           <a:xfrm>
-            <a:off x="2889503" y="3072384"/>
-            <a:ext cx="2130552" cy="256032"/>
+            <a:off x="2706624" y="3072384"/>
+            <a:ext cx="2057400" cy="256032"/>
           </a:xfrm>
           <a:prstGeom prst="rect">
             <a:avLst/>
@@ -16830,8 +18509,8 @@
         </p:nvSpPr>
         <p:spPr>
           <a:xfrm>
-            <a:off x="5129783" y="2779776"/>
-            <a:ext cx="2112264" cy="329184"/>
+            <a:off x="4873752" y="2779776"/>
+            <a:ext cx="2039112" cy="329184"/>
           </a:xfrm>
           <a:prstGeom prst="rect">
             <a:avLst/>
@@ -16859,7 +18538,7 @@
                 <a:ea typeface="Georgia"/>
                 <a:cs typeface="Georgia"/>
               </a:rPr>
-              <a:t>8.5%</a:t>
+              <a:t>17.0%</a:t>
             </a:r>
           </a:p>
         </p:txBody>
@@ -16872,8 +18551,8 @@
         </p:nvSpPr>
         <p:spPr>
           <a:xfrm>
-            <a:off x="5111495" y="3072384"/>
-            <a:ext cx="2130552" cy="256032"/>
+            <a:off x="4855464" y="3072384"/>
+            <a:ext cx="2057400" cy="256032"/>
           </a:xfrm>
           <a:prstGeom prst="rect">
             <a:avLst/>
@@ -16901,7 +18580,7 @@
                 <a:ea typeface="Calibri"/>
                 <a:cs typeface="Calibri"/>
               </a:rPr>
-              <a:t>7.8 – 9.2</a:t>
+              <a:t>15.1 – 18.9</a:t>
             </a:r>
           </a:p>
         </p:txBody>
@@ -16914,8 +18593,8 @@
         </p:nvSpPr>
         <p:spPr>
           <a:xfrm>
-            <a:off x="7351775" y="2779776"/>
-            <a:ext cx="2221991" cy="329184"/>
+            <a:off x="7022592" y="2779776"/>
+            <a:ext cx="2039112" cy="329184"/>
           </a:xfrm>
           <a:prstGeom prst="rect">
             <a:avLst/>
@@ -16943,7 +18622,7 @@
                 <a:ea typeface="Georgia"/>
                 <a:cs typeface="Georgia"/>
               </a:rPr>
-              <a:t>1.1%</a:t>
+              <a:t>8.5%</a:t>
             </a:r>
           </a:p>
         </p:txBody>
@@ -16956,8 +18635,8 @@
         </p:nvSpPr>
         <p:spPr>
           <a:xfrm>
-            <a:off x="7333488" y="3072384"/>
-            <a:ext cx="2240279" cy="256032"/>
+            <a:off x="7004303" y="3072384"/>
+            <a:ext cx="2057400" cy="256032"/>
           </a:xfrm>
           <a:prstGeom prst="rect">
             <a:avLst/>
@@ -16985,7 +18664,7 @@
                 <a:ea typeface="Calibri"/>
                 <a:cs typeface="Calibri"/>
               </a:rPr>
-              <a:t>0.6 – 1.7</a:t>
+              <a:t>7.8 – 9.2</a:t>
             </a:r>
           </a:p>
         </p:txBody>
@@ -16998,8 +18677,8 @@
         </p:nvSpPr>
         <p:spPr>
           <a:xfrm>
-            <a:off x="9683495" y="2779776"/>
-            <a:ext cx="2011679" cy="329184"/>
+            <a:off x="9171432" y="2779776"/>
+            <a:ext cx="2523744" cy="329184"/>
           </a:xfrm>
           <a:prstGeom prst="rect">
             <a:avLst/>
@@ -17027,7 +18706,7 @@
                 <a:ea typeface="Georgia"/>
                 <a:cs typeface="Georgia"/>
               </a:rPr>
-              <a:t>0.1%</a:t>
+              <a:t>1.1%</a:t>
             </a:r>
           </a:p>
         </p:txBody>
@@ -17040,8 +18719,8 @@
         </p:nvSpPr>
         <p:spPr>
           <a:xfrm>
-            <a:off x="9665207" y="3072384"/>
-            <a:ext cx="2029967" cy="256032"/>
+            <a:off x="9153144" y="3072384"/>
+            <a:ext cx="2542032" cy="256032"/>
           </a:xfrm>
           <a:prstGeom prst="rect">
             <a:avLst/>
@@ -17069,7 +18748,7 @@
                 <a:ea typeface="Calibri"/>
                 <a:cs typeface="Calibri"/>
               </a:rPr>
-              <a:t>-0.4 – 0.6</a:t>
+              <a:t>0.6 – 1.7</a:t>
             </a:r>
           </a:p>
         </p:txBody>
@@ -17126,7 +18805,7 @@
         <p:spPr>
           <a:xfrm>
             <a:off x="630936" y="3419856"/>
-            <a:ext cx="2148839" cy="713232"/>
+            <a:ext cx="1965960" cy="713232"/>
           </a:xfrm>
           <a:prstGeom prst="rect">
             <a:avLst/>
@@ -17167,8 +18846,8 @@
         </p:nvSpPr>
         <p:spPr>
           <a:xfrm>
-            <a:off x="2907791" y="3493008"/>
-            <a:ext cx="2112264" cy="329184"/>
+            <a:off x="2724912" y="3493008"/>
+            <a:ext cx="2039112" cy="329184"/>
           </a:xfrm>
           <a:prstGeom prst="rect">
             <a:avLst/>
@@ -17209,8 +18888,8 @@
         </p:nvSpPr>
         <p:spPr>
           <a:xfrm>
-            <a:off x="2889503" y="3785616"/>
-            <a:ext cx="2130552" cy="256032"/>
+            <a:off x="2706624" y="3785616"/>
+            <a:ext cx="2057400" cy="256032"/>
           </a:xfrm>
           <a:prstGeom prst="rect">
             <a:avLst/>
@@ -17251,8 +18930,8 @@
         </p:nvSpPr>
         <p:spPr>
           <a:xfrm>
-            <a:off x="5129783" y="3493008"/>
-            <a:ext cx="2112264" cy="329184"/>
+            <a:off x="4873752" y="3493008"/>
+            <a:ext cx="2039112" cy="329184"/>
           </a:xfrm>
           <a:prstGeom prst="rect">
             <a:avLst/>
@@ -17280,7 +18959,7 @@
                 <a:ea typeface="Georgia"/>
                 <a:cs typeface="Georgia"/>
               </a:rPr>
-              <a:t>8.5%</a:t>
+              <a:t>9.6%</a:t>
             </a:r>
           </a:p>
         </p:txBody>
@@ -17293,8 +18972,8 @@
         </p:nvSpPr>
         <p:spPr>
           <a:xfrm>
-            <a:off x="5111495" y="3785616"/>
-            <a:ext cx="2130552" cy="256032"/>
+            <a:off x="4855464" y="3785616"/>
+            <a:ext cx="2057400" cy="256032"/>
           </a:xfrm>
           <a:prstGeom prst="rect">
             <a:avLst/>
@@ -17322,7 +19001,7 @@
                 <a:ea typeface="Calibri"/>
                 <a:cs typeface="Calibri"/>
               </a:rPr>
-              <a:t>6.6 – 10.0</a:t>
+              <a:t>8.0 – 11.2</a:t>
             </a:r>
           </a:p>
         </p:txBody>
@@ -17335,8 +19014,8 @@
         </p:nvSpPr>
         <p:spPr>
           <a:xfrm>
-            <a:off x="7351775" y="3493008"/>
-            <a:ext cx="2221991" cy="329184"/>
+            <a:off x="7022592" y="3493008"/>
+            <a:ext cx="2039112" cy="329184"/>
           </a:xfrm>
           <a:prstGeom prst="rect">
             <a:avLst/>
@@ -17364,7 +19043,7 @@
                 <a:ea typeface="Georgia"/>
                 <a:cs typeface="Georgia"/>
               </a:rPr>
-              <a:t>0.7%</a:t>
+              <a:t>8.5%</a:t>
             </a:r>
           </a:p>
         </p:txBody>
@@ -17377,8 +19056,8 @@
         </p:nvSpPr>
         <p:spPr>
           <a:xfrm>
-            <a:off x="7333488" y="3785616"/>
-            <a:ext cx="2240279" cy="256032"/>
+            <a:off x="7004303" y="3785616"/>
+            <a:ext cx="2057400" cy="256032"/>
           </a:xfrm>
           <a:prstGeom prst="rect">
             <a:avLst/>
@@ -17406,7 +19085,7 @@
                 <a:ea typeface="Calibri"/>
                 <a:cs typeface="Calibri"/>
               </a:rPr>
-              <a:t>-0.4 – 1.8</a:t>
+              <a:t>6.6 – 10.0</a:t>
             </a:r>
           </a:p>
         </p:txBody>
@@ -17419,8 +19098,8 @@
         </p:nvSpPr>
         <p:spPr>
           <a:xfrm>
-            <a:off x="9683495" y="3493008"/>
-            <a:ext cx="2011679" cy="329184"/>
+            <a:off x="9171432" y="3493008"/>
+            <a:ext cx="2523744" cy="329184"/>
           </a:xfrm>
           <a:prstGeom prst="rect">
             <a:avLst/>
@@ -17448,7 +19127,7 @@
                 <a:ea typeface="Georgia"/>
                 <a:cs typeface="Georgia"/>
               </a:rPr>
-              <a:t>0.9%</a:t>
+              <a:t>0.7%</a:t>
             </a:r>
           </a:p>
         </p:txBody>
@@ -17461,8 +19140,8 @@
         </p:nvSpPr>
         <p:spPr>
           <a:xfrm>
-            <a:off x="9665207" y="3785616"/>
-            <a:ext cx="2029967" cy="256032"/>
+            <a:off x="9153144" y="3785616"/>
+            <a:ext cx="2542032" cy="256032"/>
           </a:xfrm>
           <a:prstGeom prst="rect">
             <a:avLst/>
@@ -17490,7 +19169,7 @@
                 <a:ea typeface="Calibri"/>
                 <a:cs typeface="Calibri"/>
               </a:rPr>
-              <a:t>-0.1 – 1.8</a:t>
+              <a:t>-0.4 – 1.8</a:t>
             </a:r>
           </a:p>
         </p:txBody>
@@ -17547,7 +19226,7 @@
         <p:spPr>
           <a:xfrm>
             <a:off x="630936" y="4133087"/>
-            <a:ext cx="2148839" cy="713232"/>
+            <a:ext cx="1965960" cy="713232"/>
           </a:xfrm>
           <a:prstGeom prst="rect">
             <a:avLst/>
@@ -17588,8 +19267,8 @@
         </p:nvSpPr>
         <p:spPr>
           <a:xfrm>
-            <a:off x="2907791" y="4206240"/>
-            <a:ext cx="2112264" cy="329184"/>
+            <a:off x="2724912" y="4206240"/>
+            <a:ext cx="2039112" cy="329184"/>
           </a:xfrm>
           <a:prstGeom prst="rect">
             <a:avLst/>
@@ -17630,8 +19309,8 @@
         </p:nvSpPr>
         <p:spPr>
           <a:xfrm>
-            <a:off x="2889503" y="4498848"/>
-            <a:ext cx="2130552" cy="256032"/>
+            <a:off x="2706624" y="4498848"/>
+            <a:ext cx="2057400" cy="256032"/>
           </a:xfrm>
           <a:prstGeom prst="rect">
             <a:avLst/>
@@ -17672,8 +19351,8 @@
         </p:nvSpPr>
         <p:spPr>
           <a:xfrm>
-            <a:off x="5129783" y="4206240"/>
-            <a:ext cx="2112264" cy="329184"/>
+            <a:off x="4873752" y="4206240"/>
+            <a:ext cx="2039112" cy="329184"/>
           </a:xfrm>
           <a:prstGeom prst="rect">
             <a:avLst/>
@@ -17701,7 +19380,7 @@
                 <a:ea typeface="Georgia"/>
                 <a:cs typeface="Georgia"/>
               </a:rPr>
-              <a:t>4.8%</a:t>
+              <a:t>7.6%</a:t>
             </a:r>
           </a:p>
         </p:txBody>
@@ -17714,8 +19393,8 @@
         </p:nvSpPr>
         <p:spPr>
           <a:xfrm>
-            <a:off x="5111495" y="4498848"/>
-            <a:ext cx="2130552" cy="256032"/>
+            <a:off x="4855464" y="4498848"/>
+            <a:ext cx="2057400" cy="256032"/>
           </a:xfrm>
           <a:prstGeom prst="rect">
             <a:avLst/>
@@ -17743,7 +19422,7 @@
                 <a:ea typeface="Calibri"/>
                 <a:cs typeface="Calibri"/>
               </a:rPr>
-              <a:t>4.3 – 5.3</a:t>
+              <a:t>6.7 – 8.4</a:t>
             </a:r>
           </a:p>
         </p:txBody>
@@ -17756,8 +19435,8 @@
         </p:nvSpPr>
         <p:spPr>
           <a:xfrm>
-            <a:off x="7351775" y="4206240"/>
-            <a:ext cx="2221991" cy="329184"/>
+            <a:off x="7022592" y="4206240"/>
+            <a:ext cx="2039112" cy="329184"/>
           </a:xfrm>
           <a:prstGeom prst="rect">
             <a:avLst/>
@@ -17785,7 +19464,7 @@
                 <a:ea typeface="Georgia"/>
                 <a:cs typeface="Georgia"/>
               </a:rPr>
-              <a:t>0.3%</a:t>
+              <a:t>4.8%</a:t>
             </a:r>
           </a:p>
         </p:txBody>
@@ -17798,8 +19477,8 @@
         </p:nvSpPr>
         <p:spPr>
           <a:xfrm>
-            <a:off x="7333488" y="4498848"/>
-            <a:ext cx="2240279" cy="256032"/>
+            <a:off x="7004303" y="4498848"/>
+            <a:ext cx="2057400" cy="256032"/>
           </a:xfrm>
           <a:prstGeom prst="rect">
             <a:avLst/>
@@ -17827,7 +19506,7 @@
                 <a:ea typeface="Calibri"/>
                 <a:cs typeface="Calibri"/>
               </a:rPr>
-              <a:t>-0.4 – 1.0</a:t>
+              <a:t>4.3 – 5.3</a:t>
             </a:r>
           </a:p>
         </p:txBody>
@@ -17840,8 +19519,8 @@
         </p:nvSpPr>
         <p:spPr>
           <a:xfrm>
-            <a:off x="9683495" y="4206240"/>
-            <a:ext cx="2011679" cy="329184"/>
+            <a:off x="9171432" y="4206240"/>
+            <a:ext cx="2523744" cy="329184"/>
           </a:xfrm>
           <a:prstGeom prst="rect">
             <a:avLst/>
@@ -17869,7 +19548,7 @@
                 <a:ea typeface="Georgia"/>
                 <a:cs typeface="Georgia"/>
               </a:rPr>
-              <a:t>0.4%</a:t>
+              <a:t>0.3%</a:t>
             </a:r>
           </a:p>
         </p:txBody>
@@ -17882,8 +19561,8 @@
         </p:nvSpPr>
         <p:spPr>
           <a:xfrm>
-            <a:off x="9665207" y="4498848"/>
-            <a:ext cx="2029967" cy="256032"/>
+            <a:off x="9153144" y="4498848"/>
+            <a:ext cx="2542032" cy="256032"/>
           </a:xfrm>
           <a:prstGeom prst="rect">
             <a:avLst/>
@@ -17911,7 +19590,7 @@
                 <a:ea typeface="Calibri"/>
                 <a:cs typeface="Calibri"/>
               </a:rPr>
-              <a:t>-0.8 – 1.2</a:t>
+              <a:t>-0.4 – 1.0</a:t>
             </a:r>
           </a:p>
         </p:txBody>
@@ -17998,7 +19677,7 @@
                 <a:ea typeface="Calibri"/>
                 <a:cs typeface="Calibri"/>
               </a:rPr>
-              <a:t>Versus max-pressure: 0.3% to 1.9%. Versus the count-only ablation: 0.1% to 2.0%.</a:t>
+              <a:t>Versus max-pressure: 0.3% to 1.9%. Some intervals still cross zero. Versus the count-only ablation: 0.1% to 2.0%. PPO is trained but not scored in this TEST table.</a:t>
             </a:r>
           </a:p>
         </p:txBody>
@@ -18193,7 +19872,7 @@
                 <a:ea typeface="Calibri"/>
                 <a:cs typeface="Calibri"/>
               </a:rPr>
-              <a:t>Low demand, the tuning scenario, on the locked test. Completed trips match fixed time (603).</a:t>
+              <a:t>Peak, one-sided on the locked test. Completed trips match fixed time (1,801).</a:t>
             </a:r>
           </a:p>
         </p:txBody>
@@ -18408,7 +20087,7 @@
                 <a:ea typeface="Calibri"/>
                 <a:cs typeface="Calibri"/>
               </a:rPr>
-              <a:t>0.136 L</a:t>
+              <a:t>0.151 L</a:t>
             </a:r>
           </a:p>
         </p:txBody>
@@ -18450,7 +20129,7 @@
                 <a:ea typeface="Georgia"/>
                 <a:cs typeface="Georgia"/>
               </a:rPr>
-              <a:t>0.117 L</a:t>
+              <a:t>0.125 L</a:t>
             </a:r>
           </a:p>
         </p:txBody>
@@ -18623,7 +20302,7 @@
                 <a:ea typeface="Calibri"/>
                 <a:cs typeface="Calibri"/>
               </a:rPr>
-              <a:t>27.2 s</a:t>
+              <a:t>37.0 s</a:t>
             </a:r>
           </a:p>
         </p:txBody>
@@ -18665,7 +20344,7 @@
                 <a:ea typeface="Georgia"/>
                 <a:cs typeface="Georgia"/>
               </a:rPr>
-              <a:t>16.2 s</a:t>
+              <a:t>18.4 s</a:t>
             </a:r>
           </a:p>
         </p:txBody>
@@ -18838,7 +20517,7 @@
                 <a:ea typeface="Calibri"/>
                 <a:cs typeface="Calibri"/>
               </a:rPr>
-              <a:t>4.4 veh</a:t>
+              <a:t>17.5 veh</a:t>
             </a:r>
           </a:p>
         </p:txBody>
@@ -18880,7 +20559,7 @@
                 <a:ea typeface="Georgia"/>
                 <a:cs typeface="Georgia"/>
               </a:rPr>
-              <a:t>2.7 veh</a:t>
+              <a:t>9.0 veh</a:t>
             </a:r>
           </a:p>
         </p:txBody>
@@ -19053,7 +20732,7 @@
                 <a:ea typeface="Calibri"/>
                 <a:cs typeface="Calibri"/>
               </a:rPr>
-              <a:t>205 kg</a:t>
+              <a:t>679 kg</a:t>
             </a:r>
           </a:p>
         </p:txBody>
@@ -19095,7 +20774,7 @@
                 <a:ea typeface="Georgia"/>
                 <a:cs typeface="Georgia"/>
               </a:rPr>
-              <a:t>176 kg</a:t>
+              <a:t>560 kg</a:t>
             </a:r>
           </a:p>
         </p:txBody>
@@ -19268,7 +20947,7 @@
                 <a:ea typeface="Calibri"/>
                 <a:cs typeface="Calibri"/>
               </a:rPr>
-              <a:t>Shifting</a:t>
+              <a:t>Low demand</a:t>
             </a:r>
           </a:p>
         </p:txBody>
@@ -19310,7 +20989,7 @@
                 <a:ea typeface="Calibri"/>
                 <a:cs typeface="Calibri"/>
               </a:rPr>
-              <a:t>32.2 s   to   18.8 s</a:t>
+              <a:t>27.2 s   to   16.2 s</a:t>
             </a:r>
           </a:p>
         </p:txBody>
@@ -19352,7 +21031,7 @@
                 <a:ea typeface="Calibri"/>
                 <a:cs typeface="Calibri"/>
               </a:rPr>
-              <a:t>42% shorter</a:t>
+              <a:t>41% shorter</a:t>
             </a:r>
           </a:p>
         </p:txBody>
@@ -19441,7 +21120,7 @@
                 <a:ea typeface="Calibri"/>
                 <a:cs typeface="Calibri"/>
               </a:rPr>
-              <a:t>Peak, one-sided</a:t>
+              <a:t>Shifting</a:t>
             </a:r>
           </a:p>
         </p:txBody>
@@ -19483,7 +21162,7 @@
                 <a:ea typeface="Calibri"/>
                 <a:cs typeface="Calibri"/>
               </a:rPr>
-              <a:t>37.0 s   to   18.4 s</a:t>
+              <a:t>32.2 s   to   18.8 s</a:t>
             </a:r>
           </a:p>
         </p:txBody>
@@ -19525,7 +21204,7 @@
                 <a:ea typeface="Calibri"/>
                 <a:cs typeface="Calibri"/>
               </a:rPr>
-              <a:t>50% shorter</a:t>
+              <a:t>42% shorter</a:t>
             </a:r>
           </a:p>
         </p:txBody>
@@ -19809,7 +21488,7 @@
                 <a:ea typeface="Calibri"/>
                 <a:cs typeface="Calibri"/>
               </a:rPr>
-              <a:t>IF THE CAMERA MISSES</a:t>
+              <a:t>EVIDENCE ON DISK</a:t>
             </a:r>
           </a:p>
         </p:txBody>
@@ -19851,7 +21530,7 @@
                 <a:ea typeface="Georgia"/>
                 <a:cs typeface="Georgia"/>
               </a:rPr>
-              <a:t>At the highest miss rate, mean fuel is under the reference lines</a:t>
+              <a:t>Figures are regenerated from the locked TEST</a:t>
             </a:r>
           </a:p>
         </p:txBody>
@@ -19893,7 +21572,7 @@
                 <a:ea typeface="Calibri"/>
                 <a:cs typeface="Calibri"/>
               </a:rPr>
-              <a:t>Peak, one-sided. 3 seeds. Vehicles are dropped from the detector at random.</a:t>
+              <a:t>Nothing on this slide is typed by hand. Open results/figures/ if you want the source PNGs.</a:t>
             </a:r>
           </a:p>
         </p:txBody>
@@ -19990,8 +21669,8 @@
         </p:nvSpPr>
         <p:spPr>
           <a:xfrm>
-            <a:off x="502920" y="1600200"/>
-            <a:ext cx="2697479" cy="2240280"/>
+            <a:off x="502920" y="1554480"/>
+            <a:ext cx="5486400" cy="4434840"/>
           </a:xfrm>
           <a:prstGeom prst="roundRect">
             <a:avLst>
@@ -20037,28 +21716,28 @@
         </p:nvSpPr>
         <p:spPr>
           <a:xfrm>
-            <a:off x="667512" y="1755648"/>
-            <a:ext cx="2404872" cy="274320"/>
-          </a:xfrm>
-          <a:prstGeom prst="rect">
-            <a:avLst/>
-          </a:prstGeom>
-          <a:noFill/>
-        </p:spPr>
-        <p:txBody>
-          <a:bodyPr wrap="square" lIns="0" rIns="0" tIns="0" bIns="0" anchor="t"/>
-          <a:lstStyle/>
-          <a:p>
-            <a:pPr algn="l">
-              <a:spcBef>
-                <a:spcPts val="0"/>
-              </a:spcBef>
-              <a:spcAft>
-                <a:spcPts val="0"/>
-              </a:spcAft>
-            </a:pPr>
-            <a:r>
-              <a:rPr sz="1300" b="1" i="0">
+            <a:off x="704088" y="1691640"/>
+            <a:ext cx="5029200" cy="274320"/>
+          </a:xfrm>
+          <a:prstGeom prst="rect">
+            <a:avLst/>
+          </a:prstGeom>
+          <a:noFill/>
+        </p:spPr>
+        <p:txBody>
+          <a:bodyPr wrap="square" lIns="0" rIns="0" tIns="0" bIns="0" anchor="t"/>
+          <a:lstStyle/>
+          <a:p>
+            <a:pPr algn="l">
+              <a:spcBef>
+                <a:spcPts val="0"/>
+              </a:spcBef>
+              <a:spcAft>
+                <a:spcPts val="0"/>
+              </a:spcAft>
+            </a:pPr>
+            <a:r>
+              <a:rPr sz="1200" b="1" i="0">
                 <a:solidFill>
                   <a:srgbClr val="C4841D"/>
                 </a:solidFill>
@@ -20066,147 +21745,45 @@
                 <a:ea typeface="Calibri"/>
                 <a:cs typeface="Calibri"/>
               </a:rPr>
-              <a:t>0% missed</a:t>
-            </a:r>
-          </a:p>
-        </p:txBody>
-      </p:sp>
-      <p:sp>
-        <p:nvSpPr>
-          <p:cNvPr id="10" name="TextBox 9"/>
-          <p:cNvSpPr txBox="1"/>
-          <p:nvPr/>
-        </p:nvSpPr>
-        <p:spPr>
-          <a:xfrm>
-            <a:off x="667512" y="2148840"/>
-            <a:ext cx="2404872" cy="548640"/>
-          </a:xfrm>
-          <a:prstGeom prst="rect">
-            <a:avLst/>
-          </a:prstGeom>
-          <a:noFill/>
-        </p:spPr>
-        <p:txBody>
-          <a:bodyPr wrap="square" lIns="0" rIns="0" tIns="0" bIns="0" anchor="t"/>
-          <a:lstStyle/>
-          <a:p>
-            <a:pPr algn="l">
-              <a:spcBef>
-                <a:spcPts val="0"/>
-              </a:spcBef>
-              <a:spcAft>
-                <a:spcPts val="0"/>
-              </a:spcAft>
-            </a:pPr>
-            <a:r>
-              <a:rPr sz="2800" b="1" i="0">
-                <a:solidFill>
-                  <a:srgbClr val="1B6B5A"/>
-                </a:solidFill>
-                <a:latin typeface="Georgia"/>
-                <a:ea typeface="Georgia"/>
-                <a:cs typeface="Georgia"/>
-              </a:rPr>
-              <a:t>0.123</a:t>
-            </a:r>
-          </a:p>
-        </p:txBody>
-      </p:sp>
-      <p:sp>
-        <p:nvSpPr>
-          <p:cNvPr id="11" name="TextBox 10"/>
-          <p:cNvSpPr txBox="1"/>
-          <p:nvPr/>
-        </p:nvSpPr>
-        <p:spPr>
-          <a:xfrm>
-            <a:off x="667512" y="2788920"/>
-            <a:ext cx="2404872" cy="274320"/>
-          </a:xfrm>
-          <a:prstGeom prst="rect">
-            <a:avLst/>
-          </a:prstGeom>
-          <a:noFill/>
-        </p:spPr>
-        <p:txBody>
-          <a:bodyPr wrap="square" lIns="0" rIns="0" tIns="0" bIns="0" anchor="t"/>
-          <a:lstStyle/>
-          <a:p>
-            <a:pPr algn="l">
-              <a:spcBef>
-                <a:spcPts val="0"/>
-              </a:spcBef>
-              <a:spcAft>
-                <a:spcPts val="0"/>
-              </a:spcAft>
-            </a:pPr>
-            <a:r>
-              <a:rPr sz="1300" b="0" i="0">
-                <a:solidFill>
-                  <a:srgbClr val="5E6E7C"/>
-                </a:solidFill>
-                <a:latin typeface="Calibri"/>
-                <a:ea typeface="Calibri"/>
-                <a:cs typeface="Calibri"/>
-              </a:rPr>
-              <a:t>litres / vehicle</a:t>
-            </a:r>
-          </a:p>
-        </p:txBody>
-      </p:sp>
-      <p:sp>
-        <p:nvSpPr>
-          <p:cNvPr id="12" name="TextBox 11"/>
-          <p:cNvSpPr txBox="1"/>
-          <p:nvPr/>
-        </p:nvSpPr>
-        <p:spPr>
-          <a:xfrm>
-            <a:off x="667512" y="3200400"/>
-            <a:ext cx="2404872" cy="320040"/>
-          </a:xfrm>
-          <a:prstGeom prst="rect">
-            <a:avLst/>
-          </a:prstGeom>
-          <a:noFill/>
-        </p:spPr>
-        <p:txBody>
-          <a:bodyPr wrap="square" lIns="0" rIns="0" tIns="0" bIns="0" anchor="t"/>
-          <a:lstStyle/>
-          <a:p>
-            <a:pPr algn="l">
-              <a:spcBef>
-                <a:spcPts val="0"/>
-              </a:spcBef>
-              <a:spcAft>
-                <a:spcPts val="0"/>
-              </a:spcAft>
-            </a:pPr>
-            <a:r>
-              <a:rPr sz="1200" b="0" i="0">
-                <a:solidFill>
-                  <a:srgbClr val="5E6E7C"/>
-                </a:solidFill>
-                <a:latin typeface="Calibri"/>
-                <a:ea typeface="Calibri"/>
-                <a:cs typeface="Calibri"/>
-              </a:rPr>
-              <a:t>± 0.002   ·   n=3</a:t>
-            </a:r>
-          </a:p>
-        </p:txBody>
-      </p:sp>
-      <p:sp>
-        <p:nvSpPr>
-          <p:cNvPr id="13" name="Rounded Rectangle 12"/>
+              <a:t>FUEL CUT VS BASELINES</a:t>
+            </a:r>
+          </a:p>
+        </p:txBody>
+      </p:sp>
+      <p:pic>
+        <p:nvPicPr>
+          <p:cNvPr id="10" name="Picture 9" descr="ii_pct_reduction.png"/>
+          <p:cNvPicPr>
+            <a:picLocks noChangeAspect="1"/>
+          </p:cNvPicPr>
+          <p:nvPr/>
+        </p:nvPicPr>
+        <p:blipFill>
+          <a:blip r:embed="rId2"/>
+          <a:stretch>
+            <a:fillRect/>
+          </a:stretch>
+        </p:blipFill>
+        <p:spPr>
+          <a:xfrm>
+            <a:off x="731520" y="2057400"/>
+            <a:ext cx="5029200" cy="3566160"/>
+          </a:xfrm>
+          <a:prstGeom prst="rect">
+            <a:avLst/>
+          </a:prstGeom>
+        </p:spPr>
+      </p:pic>
+      <p:sp>
+        <p:nvSpPr>
+          <p:cNvPr id="11" name="Rounded Rectangle 10"/>
           <p:cNvSpPr/>
           <p:nvPr/>
         </p:nvSpPr>
         <p:spPr>
           <a:xfrm>
-            <a:off x="3346704" y="1600200"/>
-            <a:ext cx="2697479" cy="2240280"/>
+            <a:off x="6245352" y="1554480"/>
+            <a:ext cx="5486400" cy="4434840"/>
           </a:xfrm>
           <a:prstGeom prst="roundRect">
             <a:avLst>
@@ -20246,34 +21823,34 @@
       </p:sp>
       <p:sp>
         <p:nvSpPr>
-          <p:cNvPr id="14" name="TextBox 13"/>
-          <p:cNvSpPr txBox="1"/>
-          <p:nvPr/>
-        </p:nvSpPr>
-        <p:spPr>
-          <a:xfrm>
-            <a:off x="3511296" y="1755648"/>
-            <a:ext cx="2404872" cy="274320"/>
-          </a:xfrm>
-          <a:prstGeom prst="rect">
-            <a:avLst/>
-          </a:prstGeom>
-          <a:noFill/>
-        </p:spPr>
-        <p:txBody>
-          <a:bodyPr wrap="square" lIns="0" rIns="0" tIns="0" bIns="0" anchor="t"/>
-          <a:lstStyle/>
-          <a:p>
-            <a:pPr algn="l">
-              <a:spcBef>
-                <a:spcPts val="0"/>
-              </a:spcBef>
-              <a:spcAft>
-                <a:spcPts val="0"/>
-              </a:spcAft>
-            </a:pPr>
-            <a:r>
-              <a:rPr sz="1300" b="1" i="0">
+          <p:cNvPr id="12" name="TextBox 11"/>
+          <p:cNvSpPr txBox="1"/>
+          <p:nvPr/>
+        </p:nvSpPr>
+        <p:spPr>
+          <a:xfrm>
+            <a:off x="6446520" y="1691640"/>
+            <a:ext cx="5029200" cy="274320"/>
+          </a:xfrm>
+          <a:prstGeom prst="rect">
+            <a:avLst/>
+          </a:prstGeom>
+          <a:noFill/>
+        </p:spPr>
+        <p:txBody>
+          <a:bodyPr wrap="square" lIns="0" rIns="0" tIns="0" bIns="0" anchor="t"/>
+          <a:lstStyle/>
+          <a:p>
+            <a:pPr algn="l">
+              <a:spcBef>
+                <a:spcPts val="0"/>
+              </a:spcBef>
+              <a:spcAft>
+                <a:spcPts val="0"/>
+              </a:spcAft>
+            </a:pPr>
+            <a:r>
+              <a:rPr sz="1200" b="1" i="0">
                 <a:solidFill>
                   <a:srgbClr val="C4841D"/>
                 </a:solidFill>
@@ -20281,866 +21858,35 @@
                 <a:ea typeface="Calibri"/>
                 <a:cs typeface="Calibri"/>
               </a:rPr>
-              <a:t>10% missed</a:t>
-            </a:r>
-          </a:p>
-        </p:txBody>
-      </p:sp>
-      <p:sp>
-        <p:nvSpPr>
-          <p:cNvPr id="15" name="TextBox 14"/>
-          <p:cNvSpPr txBox="1"/>
-          <p:nvPr/>
-        </p:nvSpPr>
-        <p:spPr>
-          <a:xfrm>
-            <a:off x="3511296" y="2148840"/>
-            <a:ext cx="2404872" cy="548640"/>
-          </a:xfrm>
-          <a:prstGeom prst="rect">
-            <a:avLst/>
-          </a:prstGeom>
-          <a:noFill/>
-        </p:spPr>
-        <p:txBody>
-          <a:bodyPr wrap="square" lIns="0" rIns="0" tIns="0" bIns="0" anchor="t"/>
-          <a:lstStyle/>
-          <a:p>
-            <a:pPr algn="l">
-              <a:spcBef>
-                <a:spcPts val="0"/>
-              </a:spcBef>
-              <a:spcAft>
-                <a:spcPts val="0"/>
-              </a:spcAft>
-            </a:pPr>
-            <a:r>
-              <a:rPr sz="2800" b="1" i="0">
-                <a:solidFill>
-                  <a:srgbClr val="1B6B5A"/>
-                </a:solidFill>
-                <a:latin typeface="Georgia"/>
-                <a:ea typeface="Georgia"/>
-                <a:cs typeface="Georgia"/>
-              </a:rPr>
-              <a:t>0.123</a:t>
-            </a:r>
-          </a:p>
-        </p:txBody>
-      </p:sp>
-      <p:sp>
-        <p:nvSpPr>
-          <p:cNvPr id="16" name="TextBox 15"/>
-          <p:cNvSpPr txBox="1"/>
-          <p:nvPr/>
-        </p:nvSpPr>
-        <p:spPr>
-          <a:xfrm>
-            <a:off x="3511296" y="2788920"/>
-            <a:ext cx="2404872" cy="274320"/>
-          </a:xfrm>
-          <a:prstGeom prst="rect">
-            <a:avLst/>
-          </a:prstGeom>
-          <a:noFill/>
-        </p:spPr>
-        <p:txBody>
-          <a:bodyPr wrap="square" lIns="0" rIns="0" tIns="0" bIns="0" anchor="t"/>
-          <a:lstStyle/>
-          <a:p>
-            <a:pPr algn="l">
-              <a:spcBef>
-                <a:spcPts val="0"/>
-              </a:spcBef>
-              <a:spcAft>
-                <a:spcPts val="0"/>
-              </a:spcAft>
-            </a:pPr>
-            <a:r>
-              <a:rPr sz="1300" b="0" i="0">
-                <a:solidFill>
-                  <a:srgbClr val="5E6E7C"/>
-                </a:solidFill>
-                <a:latin typeface="Calibri"/>
-                <a:ea typeface="Calibri"/>
-                <a:cs typeface="Calibri"/>
-              </a:rPr>
-              <a:t>litres / vehicle</a:t>
-            </a:r>
-          </a:p>
-        </p:txBody>
-      </p:sp>
-      <p:sp>
-        <p:nvSpPr>
-          <p:cNvPr id="17" name="TextBox 16"/>
-          <p:cNvSpPr txBox="1"/>
-          <p:nvPr/>
-        </p:nvSpPr>
-        <p:spPr>
-          <a:xfrm>
-            <a:off x="3511296" y="3200400"/>
-            <a:ext cx="2404872" cy="320040"/>
-          </a:xfrm>
-          <a:prstGeom prst="rect">
-            <a:avLst/>
-          </a:prstGeom>
-          <a:noFill/>
-        </p:spPr>
-        <p:txBody>
-          <a:bodyPr wrap="square" lIns="0" rIns="0" tIns="0" bIns="0" anchor="t"/>
-          <a:lstStyle/>
-          <a:p>
-            <a:pPr algn="l">
-              <a:spcBef>
-                <a:spcPts val="0"/>
-              </a:spcBef>
-              <a:spcAft>
-                <a:spcPts val="0"/>
-              </a:spcAft>
-            </a:pPr>
-            <a:r>
-              <a:rPr sz="1200" b="0" i="0">
-                <a:solidFill>
-                  <a:srgbClr val="5E6E7C"/>
-                </a:solidFill>
-                <a:latin typeface="Calibri"/>
-                <a:ea typeface="Calibri"/>
-                <a:cs typeface="Calibri"/>
-              </a:rPr>
-              <a:t>± 0.002   ·   n=3</a:t>
-            </a:r>
-          </a:p>
-        </p:txBody>
-      </p:sp>
-      <p:sp>
-        <p:nvSpPr>
-          <p:cNvPr id="18" name="Rounded Rectangle 17"/>
-          <p:cNvSpPr/>
-          <p:nvPr/>
-        </p:nvSpPr>
-        <p:spPr>
-          <a:xfrm>
-            <a:off x="6190488" y="1600200"/>
-            <a:ext cx="2697479" cy="2240280"/>
-          </a:xfrm>
-          <a:prstGeom prst="roundRect">
-            <a:avLst>
-              <a:gd name="adj" fmla="val 8000"/>
-            </a:avLst>
-          </a:prstGeom>
-          <a:solidFill>
-            <a:srgbClr val="FFFFFF"/>
-          </a:solidFill>
-          <a:ln w="12700">
-            <a:solidFill>
-              <a:srgbClr val="E3DBD0"/>
-            </a:solidFill>
-          </a:ln>
-        </p:spPr>
-        <p:style>
-          <a:lnRef idx="1">
-            <a:schemeClr val="accent1"/>
-          </a:lnRef>
-          <a:fillRef idx="3">
-            <a:schemeClr val="accent1"/>
-          </a:fillRef>
-          <a:effectRef idx="2">
-            <a:schemeClr val="accent1"/>
-          </a:effectRef>
-          <a:fontRef idx="minor">
-            <a:schemeClr val="lt1"/>
-          </a:fontRef>
-        </p:style>
-        <p:txBody>
-          <a:bodyPr rtlCol="0" anchor="ctr"/>
-          <a:lstStyle/>
-          <a:p>
-            <a:pPr algn="ctr"/>
-          </a:p>
-        </p:txBody>
-      </p:sp>
-      <p:sp>
-        <p:nvSpPr>
-          <p:cNvPr id="19" name="TextBox 18"/>
-          <p:cNvSpPr txBox="1"/>
-          <p:nvPr/>
-        </p:nvSpPr>
-        <p:spPr>
-          <a:xfrm>
-            <a:off x="6355079" y="1755648"/>
-            <a:ext cx="2404872" cy="274320"/>
-          </a:xfrm>
-          <a:prstGeom prst="rect">
-            <a:avLst/>
-          </a:prstGeom>
-          <a:noFill/>
-        </p:spPr>
-        <p:txBody>
-          <a:bodyPr wrap="square" lIns="0" rIns="0" tIns="0" bIns="0" anchor="t"/>
-          <a:lstStyle/>
-          <a:p>
-            <a:pPr algn="l">
-              <a:spcBef>
-                <a:spcPts val="0"/>
-              </a:spcBef>
-              <a:spcAft>
-                <a:spcPts val="0"/>
-              </a:spcAft>
-            </a:pPr>
-            <a:r>
-              <a:rPr sz="1300" b="1" i="0">
-                <a:solidFill>
-                  <a:srgbClr val="C4841D"/>
-                </a:solidFill>
-                <a:latin typeface="Calibri"/>
-                <a:ea typeface="Calibri"/>
-                <a:cs typeface="Calibri"/>
-              </a:rPr>
-              <a:t>20% missed</a:t>
-            </a:r>
-          </a:p>
-        </p:txBody>
-      </p:sp>
-      <p:sp>
-        <p:nvSpPr>
-          <p:cNvPr id="20" name="TextBox 19"/>
-          <p:cNvSpPr txBox="1"/>
-          <p:nvPr/>
-        </p:nvSpPr>
-        <p:spPr>
-          <a:xfrm>
-            <a:off x="6355079" y="2148840"/>
-            <a:ext cx="2404872" cy="548640"/>
-          </a:xfrm>
-          <a:prstGeom prst="rect">
-            <a:avLst/>
-          </a:prstGeom>
-          <a:noFill/>
-        </p:spPr>
-        <p:txBody>
-          <a:bodyPr wrap="square" lIns="0" rIns="0" tIns="0" bIns="0" anchor="t"/>
-          <a:lstStyle/>
-          <a:p>
-            <a:pPr algn="l">
-              <a:spcBef>
-                <a:spcPts val="0"/>
-              </a:spcBef>
-              <a:spcAft>
-                <a:spcPts val="0"/>
-              </a:spcAft>
-            </a:pPr>
-            <a:r>
-              <a:rPr sz="2800" b="1" i="0">
-                <a:solidFill>
-                  <a:srgbClr val="1B6B5A"/>
-                </a:solidFill>
-                <a:latin typeface="Georgia"/>
-                <a:ea typeface="Georgia"/>
-                <a:cs typeface="Georgia"/>
-              </a:rPr>
-              <a:t>0.124</a:t>
-            </a:r>
-          </a:p>
-        </p:txBody>
-      </p:sp>
-      <p:sp>
-        <p:nvSpPr>
-          <p:cNvPr id="21" name="TextBox 20"/>
-          <p:cNvSpPr txBox="1"/>
-          <p:nvPr/>
-        </p:nvSpPr>
-        <p:spPr>
-          <a:xfrm>
-            <a:off x="6355079" y="2788920"/>
-            <a:ext cx="2404872" cy="274320"/>
-          </a:xfrm>
-          <a:prstGeom prst="rect">
-            <a:avLst/>
-          </a:prstGeom>
-          <a:noFill/>
-        </p:spPr>
-        <p:txBody>
-          <a:bodyPr wrap="square" lIns="0" rIns="0" tIns="0" bIns="0" anchor="t"/>
-          <a:lstStyle/>
-          <a:p>
-            <a:pPr algn="l">
-              <a:spcBef>
-                <a:spcPts val="0"/>
-              </a:spcBef>
-              <a:spcAft>
-                <a:spcPts val="0"/>
-              </a:spcAft>
-            </a:pPr>
-            <a:r>
-              <a:rPr sz="1300" b="0" i="0">
-                <a:solidFill>
-                  <a:srgbClr val="5E6E7C"/>
-                </a:solidFill>
-                <a:latin typeface="Calibri"/>
-                <a:ea typeface="Calibri"/>
-                <a:cs typeface="Calibri"/>
-              </a:rPr>
-              <a:t>litres / vehicle</a:t>
-            </a:r>
-          </a:p>
-        </p:txBody>
-      </p:sp>
-      <p:sp>
-        <p:nvSpPr>
-          <p:cNvPr id="22" name="TextBox 21"/>
-          <p:cNvSpPr txBox="1"/>
-          <p:nvPr/>
-        </p:nvSpPr>
-        <p:spPr>
-          <a:xfrm>
-            <a:off x="6355079" y="3200400"/>
-            <a:ext cx="2404872" cy="320040"/>
-          </a:xfrm>
-          <a:prstGeom prst="rect">
-            <a:avLst/>
-          </a:prstGeom>
-          <a:noFill/>
-        </p:spPr>
-        <p:txBody>
-          <a:bodyPr wrap="square" lIns="0" rIns="0" tIns="0" bIns="0" anchor="t"/>
-          <a:lstStyle/>
-          <a:p>
-            <a:pPr algn="l">
-              <a:spcBef>
-                <a:spcPts val="0"/>
-              </a:spcBef>
-              <a:spcAft>
-                <a:spcPts val="0"/>
-              </a:spcAft>
-            </a:pPr>
-            <a:r>
-              <a:rPr sz="1200" b="0" i="0">
-                <a:solidFill>
-                  <a:srgbClr val="5E6E7C"/>
-                </a:solidFill>
-                <a:latin typeface="Calibri"/>
-                <a:ea typeface="Calibri"/>
-                <a:cs typeface="Calibri"/>
-              </a:rPr>
-              <a:t>± 0.001   ·   n=3</a:t>
-            </a:r>
-          </a:p>
-        </p:txBody>
-      </p:sp>
-      <p:sp>
-        <p:nvSpPr>
-          <p:cNvPr id="23" name="Rounded Rectangle 22"/>
-          <p:cNvSpPr/>
-          <p:nvPr/>
-        </p:nvSpPr>
-        <p:spPr>
-          <a:xfrm>
-            <a:off x="9034272" y="1600200"/>
-            <a:ext cx="2697479" cy="2240280"/>
-          </a:xfrm>
-          <a:prstGeom prst="roundRect">
-            <a:avLst>
-              <a:gd name="adj" fmla="val 8000"/>
-            </a:avLst>
-          </a:prstGeom>
-          <a:solidFill>
-            <a:srgbClr val="FFFFFF"/>
-          </a:solidFill>
-          <a:ln w="12700">
-            <a:solidFill>
-              <a:srgbClr val="E3DBD0"/>
-            </a:solidFill>
-          </a:ln>
-        </p:spPr>
-        <p:style>
-          <a:lnRef idx="1">
-            <a:schemeClr val="accent1"/>
-          </a:lnRef>
-          <a:fillRef idx="3">
-            <a:schemeClr val="accent1"/>
-          </a:fillRef>
-          <a:effectRef idx="2">
-            <a:schemeClr val="accent1"/>
-          </a:effectRef>
-          <a:fontRef idx="minor">
-            <a:schemeClr val="lt1"/>
-          </a:fontRef>
-        </p:style>
-        <p:txBody>
-          <a:bodyPr rtlCol="0" anchor="ctr"/>
-          <a:lstStyle/>
-          <a:p>
-            <a:pPr algn="ctr"/>
-          </a:p>
-        </p:txBody>
-      </p:sp>
-      <p:sp>
-        <p:nvSpPr>
-          <p:cNvPr id="24" name="TextBox 23"/>
-          <p:cNvSpPr txBox="1"/>
-          <p:nvPr/>
-        </p:nvSpPr>
-        <p:spPr>
-          <a:xfrm>
-            <a:off x="9198864" y="1755648"/>
-            <a:ext cx="2404872" cy="274320"/>
-          </a:xfrm>
-          <a:prstGeom prst="rect">
-            <a:avLst/>
-          </a:prstGeom>
-          <a:noFill/>
-        </p:spPr>
-        <p:txBody>
-          <a:bodyPr wrap="square" lIns="0" rIns="0" tIns="0" bIns="0" anchor="t"/>
-          <a:lstStyle/>
-          <a:p>
-            <a:pPr algn="l">
-              <a:spcBef>
-                <a:spcPts val="0"/>
-              </a:spcBef>
-              <a:spcAft>
-                <a:spcPts val="0"/>
-              </a:spcAft>
-            </a:pPr>
-            <a:r>
-              <a:rPr sz="1300" b="1" i="0">
-                <a:solidFill>
-                  <a:srgbClr val="C4841D"/>
-                </a:solidFill>
-                <a:latin typeface="Calibri"/>
-                <a:ea typeface="Calibri"/>
-                <a:cs typeface="Calibri"/>
-              </a:rPr>
-              <a:t>30% missed</a:t>
-            </a:r>
-          </a:p>
-        </p:txBody>
-      </p:sp>
-      <p:sp>
-        <p:nvSpPr>
-          <p:cNvPr id="25" name="TextBox 24"/>
-          <p:cNvSpPr txBox="1"/>
-          <p:nvPr/>
-        </p:nvSpPr>
-        <p:spPr>
-          <a:xfrm>
-            <a:off x="9198864" y="2148840"/>
-            <a:ext cx="2404872" cy="548640"/>
-          </a:xfrm>
-          <a:prstGeom prst="rect">
-            <a:avLst/>
-          </a:prstGeom>
-          <a:noFill/>
-        </p:spPr>
-        <p:txBody>
-          <a:bodyPr wrap="square" lIns="0" rIns="0" tIns="0" bIns="0" anchor="t"/>
-          <a:lstStyle/>
-          <a:p>
-            <a:pPr algn="l">
-              <a:spcBef>
-                <a:spcPts val="0"/>
-              </a:spcBef>
-              <a:spcAft>
-                <a:spcPts val="0"/>
-              </a:spcAft>
-            </a:pPr>
-            <a:r>
-              <a:rPr sz="2800" b="1" i="0">
-                <a:solidFill>
-                  <a:srgbClr val="1B6B5A"/>
-                </a:solidFill>
-                <a:latin typeface="Georgia"/>
-                <a:ea typeface="Georgia"/>
-                <a:cs typeface="Georgia"/>
-              </a:rPr>
-              <a:t>0.124</a:t>
-            </a:r>
-          </a:p>
-        </p:txBody>
-      </p:sp>
-      <p:sp>
-        <p:nvSpPr>
-          <p:cNvPr id="26" name="TextBox 25"/>
-          <p:cNvSpPr txBox="1"/>
-          <p:nvPr/>
-        </p:nvSpPr>
-        <p:spPr>
-          <a:xfrm>
-            <a:off x="9198864" y="2788920"/>
-            <a:ext cx="2404872" cy="274320"/>
-          </a:xfrm>
-          <a:prstGeom prst="rect">
-            <a:avLst/>
-          </a:prstGeom>
-          <a:noFill/>
-        </p:spPr>
-        <p:txBody>
-          <a:bodyPr wrap="square" lIns="0" rIns="0" tIns="0" bIns="0" anchor="t"/>
-          <a:lstStyle/>
-          <a:p>
-            <a:pPr algn="l">
-              <a:spcBef>
-                <a:spcPts val="0"/>
-              </a:spcBef>
-              <a:spcAft>
-                <a:spcPts val="0"/>
-              </a:spcAft>
-            </a:pPr>
-            <a:r>
-              <a:rPr sz="1300" b="0" i="0">
-                <a:solidFill>
-                  <a:srgbClr val="5E6E7C"/>
-                </a:solidFill>
-                <a:latin typeface="Calibri"/>
-                <a:ea typeface="Calibri"/>
-                <a:cs typeface="Calibri"/>
-              </a:rPr>
-              <a:t>litres / vehicle</a:t>
-            </a:r>
-          </a:p>
-        </p:txBody>
-      </p:sp>
-      <p:sp>
-        <p:nvSpPr>
-          <p:cNvPr id="27" name="TextBox 26"/>
-          <p:cNvSpPr txBox="1"/>
-          <p:nvPr/>
-        </p:nvSpPr>
-        <p:spPr>
-          <a:xfrm>
-            <a:off x="9198864" y="3200400"/>
-            <a:ext cx="2404872" cy="320040"/>
-          </a:xfrm>
-          <a:prstGeom prst="rect">
-            <a:avLst/>
-          </a:prstGeom>
-          <a:noFill/>
-        </p:spPr>
-        <p:txBody>
-          <a:bodyPr wrap="square" lIns="0" rIns="0" tIns="0" bIns="0" anchor="t"/>
-          <a:lstStyle/>
-          <a:p>
-            <a:pPr algn="l">
-              <a:spcBef>
-                <a:spcPts val="0"/>
-              </a:spcBef>
-              <a:spcAft>
-                <a:spcPts val="0"/>
-              </a:spcAft>
-            </a:pPr>
-            <a:r>
-              <a:rPr sz="1200" b="0" i="0">
-                <a:solidFill>
-                  <a:srgbClr val="5E6E7C"/>
-                </a:solidFill>
-                <a:latin typeface="Calibri"/>
-                <a:ea typeface="Calibri"/>
-                <a:cs typeface="Calibri"/>
-              </a:rPr>
-              <a:t>± 0.001   ·   n=3</a:t>
-            </a:r>
-          </a:p>
-        </p:txBody>
-      </p:sp>
-      <p:sp>
-        <p:nvSpPr>
-          <p:cNvPr id="28" name="Rounded Rectangle 27"/>
-          <p:cNvSpPr/>
-          <p:nvPr/>
-        </p:nvSpPr>
-        <p:spPr>
-          <a:xfrm>
-            <a:off x="502920" y="4069080"/>
-            <a:ext cx="11228832" cy="2148840"/>
-          </a:xfrm>
-          <a:prstGeom prst="roundRect">
-            <a:avLst>
-              <a:gd name="adj" fmla="val 8000"/>
-            </a:avLst>
-          </a:prstGeom>
-          <a:solidFill>
-            <a:srgbClr val="FFFFFF"/>
-          </a:solidFill>
-          <a:ln w="12700">
-            <a:solidFill>
-              <a:srgbClr val="E3DBD0"/>
-            </a:solidFill>
-          </a:ln>
-        </p:spPr>
-        <p:style>
-          <a:lnRef idx="1">
-            <a:schemeClr val="accent1"/>
-          </a:lnRef>
-          <a:fillRef idx="3">
-            <a:schemeClr val="accent1"/>
-          </a:fillRef>
-          <a:effectRef idx="2">
-            <a:schemeClr val="accent1"/>
-          </a:effectRef>
-          <a:fontRef idx="minor">
-            <a:schemeClr val="lt1"/>
-          </a:fontRef>
-        </p:style>
-        <p:txBody>
-          <a:bodyPr rtlCol="0" anchor="ctr"/>
-          <a:lstStyle/>
-          <a:p>
-            <a:pPr algn="ctr"/>
-          </a:p>
-        </p:txBody>
-      </p:sp>
-      <p:sp>
-        <p:nvSpPr>
-          <p:cNvPr id="29" name="TextBox 28"/>
-          <p:cNvSpPr txBox="1"/>
-          <p:nvPr/>
-        </p:nvSpPr>
-        <p:spPr>
-          <a:xfrm>
-            <a:off x="777240" y="4224528"/>
-            <a:ext cx="7315200" cy="274320"/>
-          </a:xfrm>
-          <a:prstGeom prst="rect">
-            <a:avLst/>
-          </a:prstGeom>
-          <a:noFill/>
-        </p:spPr>
-        <p:txBody>
-          <a:bodyPr wrap="square" lIns="0" rIns="0" tIns="0" bIns="0" anchor="t"/>
-          <a:lstStyle/>
-          <a:p>
-            <a:pPr algn="l">
-              <a:spcBef>
-                <a:spcPts val="0"/>
-              </a:spcBef>
-              <a:spcAft>
-                <a:spcPts val="0"/>
-              </a:spcAft>
-            </a:pPr>
-            <a:r>
-              <a:rPr sz="1200" b="1" i="0">
-                <a:solidFill>
-                  <a:srgbClr val="C4841D"/>
-                </a:solidFill>
-                <a:latin typeface="Calibri"/>
-                <a:ea typeface="Calibri"/>
-                <a:cs typeface="Calibri"/>
-              </a:rPr>
-              <a:t>SAME SEEDS, NO MISSES</a:t>
-            </a:r>
-          </a:p>
-        </p:txBody>
-      </p:sp>
-      <p:sp>
-        <p:nvSpPr>
-          <p:cNvPr id="30" name="TextBox 29"/>
-          <p:cNvSpPr txBox="1"/>
-          <p:nvPr/>
-        </p:nvSpPr>
-        <p:spPr>
-          <a:xfrm>
-            <a:off x="777240" y="4617720"/>
-            <a:ext cx="3108960" cy="411480"/>
-          </a:xfrm>
-          <a:prstGeom prst="rect">
-            <a:avLst/>
-          </a:prstGeom>
-          <a:noFill/>
-        </p:spPr>
-        <p:txBody>
-          <a:bodyPr wrap="square" lIns="0" rIns="0" tIns="0" bIns="0" anchor="t"/>
-          <a:lstStyle/>
-          <a:p>
-            <a:pPr algn="l">
-              <a:spcBef>
-                <a:spcPts val="0"/>
-              </a:spcBef>
-              <a:spcAft>
-                <a:spcPts val="0"/>
-              </a:spcAft>
-            </a:pPr>
-            <a:r>
-              <a:rPr sz="2200" b="1" i="0">
-                <a:solidFill>
-                  <a:srgbClr val="1B6B5A"/>
-                </a:solidFill>
-                <a:latin typeface="Georgia"/>
-                <a:ea typeface="Georgia"/>
-                <a:cs typeface="Georgia"/>
-              </a:rPr>
-              <a:t>0.123 L</a:t>
-            </a:r>
-          </a:p>
-        </p:txBody>
-      </p:sp>
-      <p:sp>
-        <p:nvSpPr>
-          <p:cNvPr id="31" name="TextBox 30"/>
-          <p:cNvSpPr txBox="1"/>
-          <p:nvPr/>
-        </p:nvSpPr>
-        <p:spPr>
-          <a:xfrm>
-            <a:off x="777240" y="5074920"/>
-            <a:ext cx="3108960" cy="274320"/>
-          </a:xfrm>
-          <a:prstGeom prst="rect">
-            <a:avLst/>
-          </a:prstGeom>
-          <a:noFill/>
-        </p:spPr>
-        <p:txBody>
-          <a:bodyPr wrap="square" lIns="0" rIns="0" tIns="0" bIns="0" anchor="t"/>
-          <a:lstStyle/>
-          <a:p>
-            <a:pPr algn="l">
-              <a:spcBef>
-                <a:spcPts val="0"/>
-              </a:spcBef>
-              <a:spcAft>
-                <a:spcPts val="0"/>
-              </a:spcAft>
-            </a:pPr>
-            <a:r>
-              <a:rPr sz="1300" b="0" i="0">
-                <a:solidFill>
-                  <a:srgbClr val="5E6E7C"/>
-                </a:solidFill>
-                <a:latin typeface="Calibri"/>
-                <a:ea typeface="Calibri"/>
-                <a:cs typeface="Calibri"/>
-              </a:rPr>
-              <a:t>XtraFlow</a:t>
-            </a:r>
-          </a:p>
-        </p:txBody>
-      </p:sp>
-      <p:sp>
-        <p:nvSpPr>
-          <p:cNvPr id="32" name="TextBox 31"/>
-          <p:cNvSpPr txBox="1"/>
-          <p:nvPr/>
-        </p:nvSpPr>
-        <p:spPr>
-          <a:xfrm>
-            <a:off x="4069080" y="4617720"/>
-            <a:ext cx="3108960" cy="411480"/>
-          </a:xfrm>
-          <a:prstGeom prst="rect">
-            <a:avLst/>
-          </a:prstGeom>
-          <a:noFill/>
-        </p:spPr>
-        <p:txBody>
-          <a:bodyPr wrap="square" lIns="0" rIns="0" tIns="0" bIns="0" anchor="t"/>
-          <a:lstStyle/>
-          <a:p>
-            <a:pPr algn="l">
-              <a:spcBef>
-                <a:spcPts val="0"/>
-              </a:spcBef>
-              <a:spcAft>
-                <a:spcPts val="0"/>
-              </a:spcAft>
-            </a:pPr>
-            <a:r>
-              <a:rPr sz="2200" b="1" i="0">
-                <a:solidFill>
-                  <a:srgbClr val="1A2834"/>
-                </a:solidFill>
-                <a:latin typeface="Georgia"/>
-                <a:ea typeface="Georgia"/>
-                <a:cs typeface="Georgia"/>
-              </a:rPr>
-              <a:t>0.136 L</a:t>
-            </a:r>
-          </a:p>
-        </p:txBody>
-      </p:sp>
-      <p:sp>
-        <p:nvSpPr>
-          <p:cNvPr id="33" name="TextBox 32"/>
-          <p:cNvSpPr txBox="1"/>
-          <p:nvPr/>
-        </p:nvSpPr>
-        <p:spPr>
-          <a:xfrm>
-            <a:off x="4069080" y="5074920"/>
-            <a:ext cx="3108960" cy="274320"/>
-          </a:xfrm>
-          <a:prstGeom prst="rect">
-            <a:avLst/>
-          </a:prstGeom>
-          <a:noFill/>
-        </p:spPr>
-        <p:txBody>
-          <a:bodyPr wrap="square" lIns="0" rIns="0" tIns="0" bIns="0" anchor="t"/>
-          <a:lstStyle/>
-          <a:p>
-            <a:pPr algn="l">
-              <a:spcBef>
-                <a:spcPts val="0"/>
-              </a:spcBef>
-              <a:spcAft>
-                <a:spcPts val="0"/>
-              </a:spcAft>
-            </a:pPr>
-            <a:r>
-              <a:rPr sz="1300" b="0" i="0">
-                <a:solidFill>
-                  <a:srgbClr val="5E6E7C"/>
-                </a:solidFill>
-                <a:latin typeface="Calibri"/>
-                <a:ea typeface="Calibri"/>
-                <a:cs typeface="Calibri"/>
-              </a:rPr>
-              <a:t>Actuated</a:t>
-            </a:r>
-          </a:p>
-        </p:txBody>
-      </p:sp>
-      <p:sp>
-        <p:nvSpPr>
-          <p:cNvPr id="34" name="TextBox 33"/>
-          <p:cNvSpPr txBox="1"/>
-          <p:nvPr/>
-        </p:nvSpPr>
-        <p:spPr>
-          <a:xfrm>
-            <a:off x="777240" y="5532120"/>
-            <a:ext cx="10680192" cy="457200"/>
-          </a:xfrm>
-          <a:prstGeom prst="rect">
-            <a:avLst/>
-          </a:prstGeom>
-          <a:noFill/>
-        </p:spPr>
-        <p:txBody>
-          <a:bodyPr wrap="square" lIns="0" rIns="0" tIns="0" bIns="0" anchor="t"/>
-          <a:lstStyle/>
-          <a:p>
-            <a:pPr algn="l">
-              <a:spcBef>
-                <a:spcPts val="0"/>
-              </a:spcBef>
-              <a:spcAft>
-                <a:spcPts val="0"/>
-              </a:spcAft>
-            </a:pPr>
-            <a:r>
-              <a:rPr sz="1400" b="0" i="0">
-                <a:solidFill>
-                  <a:srgbClr val="1A2834"/>
-                </a:solidFill>
-                <a:latin typeface="Calibri"/>
-                <a:ea typeface="Calibri"/>
-                <a:cs typeface="Calibri"/>
-              </a:rPr>
-              <a:t>Every miss level on this slide has lower mean fuel than every reference line. Noise-model point (see noise_model.json) is 0.125 L.</a:t>
-            </a:r>
-          </a:p>
-        </p:txBody>
-      </p:sp>
+              <a:t>FUEL, CO₂, WAIT, QUEUE</a:t>
+            </a:r>
+          </a:p>
+        </p:txBody>
+      </p:sp>
+      <p:pic>
+        <p:nvPicPr>
+          <p:cNvPr id="13" name="Picture 12" descr="i_grouped_bars.png"/>
+          <p:cNvPicPr>
+            <a:picLocks noChangeAspect="1"/>
+          </p:cNvPicPr>
+          <p:nvPr/>
+        </p:nvPicPr>
+        <p:blipFill>
+          <a:blip r:embed="rId3"/>
+          <a:stretch>
+            <a:fillRect/>
+          </a:stretch>
+        </p:blipFill>
+        <p:spPr>
+          <a:xfrm>
+            <a:off x="6446520" y="2057400"/>
+            <a:ext cx="5029200" cy="3566160"/>
+          </a:xfrm>
+          <a:prstGeom prst="rect">
+            <a:avLst/>
+          </a:prstGeom>
+        </p:spPr>
+      </p:pic>
     </p:spTree>
   </p:cSld>
   <p:clrMapOvr>

--- a/results/deck.pptx
+++ b/results/deck.pptx
@@ -20,6 +20,7 @@
     <p:sldId id="268" r:id="rId20"/>
     <p:sldId id="269" r:id="rId21"/>
     <p:sldId id="270" r:id="rId22"/>
+    <p:sldId id="271" r:id="rId23"/>
   </p:sldIdLst>
   <p:sldSz cx="12191695" cy="6858000" type="screen4x3"/>
   <p:notesSz cx="6858000" cy="9144000"/>
@@ -586,7 +587,7 @@
           <a:lstStyle/>
           <a:p>
             <a:r>
-              <a:t>Open results/demo/demo.mp4 (or demo.gif) while presenting. Say that the demo is qualitative; the headline numbers are on the previous slides.</a:t>
+              <a:t>Open results/demo/demo.mp4 (or demo.gif) while presenting. Then advance to the YOLO slide and play the mosaic. Say that the SUMO demo is qualitative; the headline numbers are on the previous slides.</a:t>
             </a:r>
           </a:p>
         </p:txBody>
@@ -656,7 +657,7 @@
           <a:lstStyle/>
           <a:p>
             <a:r>
-              <a:t>Means are grouped from results/robustness.json. Do not describe the curve as flat unless the loaded means say so. The noise-model source field is empirical only when labels exist.</a:t>
+              <a:t>Play results/demo/yolo/yolo_mosaic.mp4 first, then one overlay if asked. Attribution and caveats are in results/demo/yolo/SOURCE.md and yolo_demo_summary.json. Do not present Bellevue clips as an Indian field site or as synchronized approaches.</a:t>
             </a:r>
           </a:p>
         </p:txBody>
@@ -726,7 +727,7 @@
           <a:lstStyle/>
           <a:p>
             <a:r>
-              <a:t>Read results/grid_results.json. If rows and summary_means are empty, say the grid was not scored. Label: simulation-based estimate; assumed traffic mix.</a:t>
+              <a:t>Means are grouped from results/robustness.json. Do not describe the curve as flat unless the loaded means say so. The noise-model source field is empirical only when labels exist.</a:t>
             </a:r>
           </a:p>
         </p:txBody>
@@ -796,7 +797,7 @@
           <a:lstStyle/>
           <a:p>
             <a:r>
-              <a:t>Safety verdict comes from results/safety.json. Emission cross-check is HBEFA3 versus PHEMlight on a smaller seed set than the main test; quote both percentages. Perception flag is ASSUMED_NOISE_MODEL_NO_USER_VIDEO.</a:t>
+              <a:t>Read results/grid_results.json. If rows and summary_means are empty, say the grid was not scored. Label: simulation-based estimate; assumed traffic mix.</a:t>
             </a:r>
           </a:p>
         </p:txBody>
@@ -866,7 +867,7 @@
           <a:lstStyle/>
           <a:p>
             <a:r>
-              <a:t>Lead with the per-vehicle litres. The annual figure multiplies that saving by the ranges on the right, Monte Carlo from config.yaml. The price in fuel.price_inr_per_L is a placeholder. Quote the extrapolation label: simulation-based estimate, not a deployment result.</a:t>
+              <a:t>Safety verdict comes from results/safety.json. Emission cross-check is HBEFA3 versus PHEMlight on a smaller seed set than the main test; quote both percentages. YOLO demo does not replace the oracle TEST claim.</a:t>
             </a:r>
           </a:p>
         </p:txBody>
@@ -936,7 +937,77 @@
           <a:lstStyle/>
           <a:p>
             <a:r>
-              <a:t>Close on the three conditions. Do not end on the annual litre range. The headline comparison is in results/headlines.json.</a:t>
+              <a:t>Lead with the per-vehicle litres. The annual figure multiplies that saving by the ranges on the right, Monte Carlo from config.yaml. The price in fuel.price_inr_per_L is a placeholder. Quote the extrapolation label: simulation-based estimate, not a deployment result.</a:t>
+            </a:r>
+          </a:p>
+        </p:txBody>
+      </p:sp>
+      <p:sp>
+        <p:nvSpPr>
+          <p:cNvPr id="4" name="Slide Number Placeholder 3"/>
+          <p:cNvSpPr>
+            <a:spLocks noGrp="1"/>
+          </p:cNvSpPr>
+          <p:nvPr>
+            <p:ph type="sldNum" idx="5" sz="quarter"/>
+          </p:nvPr>
+        </p:nvSpPr>
+        <p:spPr/>
+      </p:sp>
+    </p:spTree>
+  </p:cSld>
+  <p:clrMapOvr>
+    <a:masterClrMapping/>
+  </p:clrMapOvr>
+</p:notes>
+</file>
+
+<file path=ppt/notesSlides/notesSlide16.xml><?xml version="1.0" encoding="utf-8"?>
+<p:notes xmlns:a="http://schemas.openxmlformats.org/drawingml/2006/main" xmlns:p="http://schemas.openxmlformats.org/presentationml/2006/main" xmlns:r="http://schemas.openxmlformats.org/officeDocument/2006/relationships">
+  <p:cSld>
+    <p:spTree>
+      <p:nvGrpSpPr>
+        <p:cNvPr id="1" name=""/>
+        <p:cNvGrpSpPr/>
+        <p:nvPr/>
+      </p:nvGrpSpPr>
+      <p:grpSpPr>
+        <a:xfrm>
+          <a:off x="0" y="0"/>
+          <a:ext cx="0" cy="0"/>
+          <a:chOff x="0" y="0"/>
+          <a:chExt cx="0" cy="0"/>
+        </a:xfrm>
+      </p:grpSpPr>
+      <p:sp>
+        <p:nvSpPr>
+          <p:cNvPr id="2" name="Slide Image Placeholder 1"/>
+          <p:cNvSpPr>
+            <a:spLocks noGrp="1"/>
+          </p:cNvSpPr>
+          <p:nvPr>
+            <p:ph type="sldImg" idx="2"/>
+          </p:nvPr>
+        </p:nvSpPr>
+        <p:spPr/>
+      </p:sp>
+      <p:sp>
+        <p:nvSpPr>
+          <p:cNvPr id="3" name="Notes Placeholder 2"/>
+          <p:cNvSpPr>
+            <a:spLocks noGrp="1"/>
+          </p:cNvSpPr>
+          <p:nvPr>
+            <p:ph type="body" idx="3" sz="quarter"/>
+          </p:nvPr>
+        </p:nvSpPr>
+        <p:spPr/>
+        <p:txBody>
+          <a:bodyPr/>
+          <a:lstStyle/>
+          <a:p>
+            <a:r>
+              <a:t>Close on the three conditions. Demo order was: SUMO side-by-side, then YOLO mosaic. Do not end on the annual litre range. The headline comparison is in results/headlines.json.</a:t>
             </a:r>
           </a:p>
         </p:txBody>
@@ -1146,7 +1217,7 @@
           <a:lstStyle/>
           <a:p>
             <a:r>
-              <a:t>If asked about the camera: the noise model is assumed. Supply data/video and labels to replace it. Do not claim a field detector result.</a:t>
+              <a:t>Play the YOLO mosaic after the side-by-side SUMO demo. Say clearly: YOLO is input feasibility; headline fuel numbers are oracle TEST. Do not claim a field detector result.</a:t>
             </a:r>
           </a:p>
         </p:txBody>
@@ -5206,7 +5277,7 @@
                 <a:ea typeface="Calibri"/>
                 <a:cs typeface="Calibri"/>
               </a:rPr>
-              <a:t>SAME DEMAND, SIDE BY SIDE</a:t>
+              <a:t>LIVE CLIP 1 · CONTROL</a:t>
             </a:r>
           </a:p>
         </p:txBody>
@@ -5290,7 +5361,7 @@
                 <a:ea typeface="Calibri"/>
                 <a:cs typeface="Calibri"/>
               </a:rPr>
-              <a:t>One seed, same arrivals. The clip is a feasibility demo, not a fuel-saving proof.</a:t>
+              <a:t>One seed, same arrivals. Qualitative demo — the fuel numbers are on the previous slides.</a:t>
             </a:r>
           </a:p>
         </p:txBody>
@@ -5388,7 +5459,7 @@
         <p:spPr>
           <a:xfrm>
             <a:off x="502920" y="1554480"/>
-            <a:ext cx="11228832" cy="4434840"/>
+            <a:ext cx="7040880" cy="4434840"/>
           </a:xfrm>
           <a:prstGeom prst="roundRect">
             <a:avLst>
@@ -5432,8 +5503,8 @@
         </p:nvSpPr>
         <p:spPr>
           <a:xfrm>
-            <a:off x="868680" y="2148840"/>
-            <a:ext cx="10497311" cy="320040"/>
+            <a:off x="822960" y="1965960"/>
+            <a:ext cx="6400800" cy="274320"/>
           </a:xfrm>
           <a:prstGeom prst="rect">
             <a:avLst/>
@@ -5461,7 +5532,7 @@
                 <a:ea typeface="Calibri"/>
                 <a:cs typeface="Calibri"/>
               </a:rPr>
-              <a:t>SIDE-BY-SIDE DEMO</a:t>
+              <a:t>PLAY NOW</a:t>
             </a:r>
           </a:p>
         </p:txBody>
@@ -5474,28 +5545,28 @@
         </p:nvSpPr>
         <p:spPr>
           <a:xfrm>
-            <a:off x="868680" y="2743200"/>
-            <a:ext cx="10497311" cy="640080"/>
-          </a:xfrm>
-          <a:prstGeom prst="rect">
-            <a:avLst/>
-          </a:prstGeom>
-          <a:noFill/>
-        </p:spPr>
-        <p:txBody>
-          <a:bodyPr wrap="square" lIns="0" rIns="0" tIns="0" bIns="0" anchor="t"/>
-          <a:lstStyle/>
-          <a:p>
-            <a:pPr algn="l">
-              <a:spcBef>
-                <a:spcPts val="0"/>
-              </a:spcBef>
-              <a:spcAft>
-                <a:spcPts val="0"/>
-              </a:spcAft>
-            </a:pPr>
-            <a:r>
-              <a:rPr sz="2800" b="1" i="0">
+            <a:off x="822960" y="2423160"/>
+            <a:ext cx="6400800" cy="502920"/>
+          </a:xfrm>
+          <a:prstGeom prst="rect">
+            <a:avLst/>
+          </a:prstGeom>
+          <a:noFill/>
+        </p:spPr>
+        <p:txBody>
+          <a:bodyPr wrap="square" lIns="0" rIns="0" tIns="0" bIns="0" anchor="t"/>
+          <a:lstStyle/>
+          <a:p>
+            <a:pPr algn="l">
+              <a:spcBef>
+                <a:spcPts val="0"/>
+              </a:spcBef>
+              <a:spcAft>
+                <a:spcPts val="0"/>
+              </a:spcAft>
+            </a:pPr>
+            <a:r>
+              <a:rPr sz="2200" b="1" i="0">
                 <a:solidFill>
                   <a:srgbClr val="FFFFFF"/>
                 </a:solidFill>
@@ -5516,8 +5587,8 @@
         </p:nvSpPr>
         <p:spPr>
           <a:xfrm>
-            <a:off x="868680" y="3566160"/>
-            <a:ext cx="10497311" cy="1097280"/>
+            <a:off x="822960" y="3154680"/>
+            <a:ext cx="6400800" cy="1280160"/>
           </a:xfrm>
           <a:prstGeom prst="rect">
             <a:avLst/>
@@ -5545,7 +5616,306 @@
                 <a:ea typeface="Calibri"/>
                 <a:cs typeface="Calibri"/>
               </a:rPr>
-              <a:t>Play this file beside the talk. PowerPoint does not need the binary embedded here. Same demand seed: fixed timing versus XtraFlow.</a:t>
+              <a:t>Open the file in a video player beside the deck. Same demand seed: legacy fixed versus XtraFlow. Do not treat the clip as a percentage claim.</a:t>
+            </a:r>
+          </a:p>
+        </p:txBody>
+      </p:sp>
+      <p:sp>
+        <p:nvSpPr>
+          <p:cNvPr id="12" name="TextBox 11"/>
+          <p:cNvSpPr txBox="1"/>
+          <p:nvPr/>
+        </p:nvSpPr>
+        <p:spPr>
+          <a:xfrm>
+            <a:off x="822960" y="4846320"/>
+            <a:ext cx="6400800" cy="640080"/>
+          </a:xfrm>
+          <a:prstGeom prst="rect">
+            <a:avLst/>
+          </a:prstGeom>
+          <a:noFill/>
+        </p:spPr>
+        <p:txBody>
+          <a:bodyPr wrap="square" lIns="0" rIns="0" tIns="0" bIns="0" anchor="t"/>
+          <a:lstStyle/>
+          <a:p>
+            <a:pPr algn="l">
+              <a:spcBef>
+                <a:spcPts val="0"/>
+              </a:spcBef>
+              <a:spcAft>
+                <a:spcPts val="0"/>
+              </a:spcAft>
+            </a:pPr>
+            <a:r>
+              <a:rPr sz="1500" b="0" i="0">
+                <a:solidFill>
+                  <a:srgbClr val="F0C26A"/>
+                </a:solidFill>
+                <a:latin typeface="Calibri"/>
+                <a:ea typeface="Calibri"/>
+                <a:cs typeface="Calibri"/>
+              </a:rPr>
+              <a:t>Next: YOLO camera overlays — how the controller can see the queue.</a:t>
+            </a:r>
+          </a:p>
+        </p:txBody>
+      </p:sp>
+      <p:sp>
+        <p:nvSpPr>
+          <p:cNvPr id="13" name="Rounded Rectangle 12"/>
+          <p:cNvSpPr/>
+          <p:nvPr/>
+        </p:nvSpPr>
+        <p:spPr>
+          <a:xfrm>
+            <a:off x="7818120" y="1554480"/>
+            <a:ext cx="3913632" cy="4434840"/>
+          </a:xfrm>
+          <a:prstGeom prst="roundRect">
+            <a:avLst>
+              <a:gd name="adj" fmla="val 8000"/>
+            </a:avLst>
+          </a:prstGeom>
+          <a:solidFill>
+            <a:srgbClr val="FFFFFF"/>
+          </a:solidFill>
+          <a:ln w="12700">
+            <a:solidFill>
+              <a:srgbClr val="E3DBD0"/>
+            </a:solidFill>
+          </a:ln>
+        </p:spPr>
+        <p:style>
+          <a:lnRef idx="1">
+            <a:schemeClr val="accent1"/>
+          </a:lnRef>
+          <a:fillRef idx="3">
+            <a:schemeClr val="accent1"/>
+          </a:fillRef>
+          <a:effectRef idx="2">
+            <a:schemeClr val="accent1"/>
+          </a:effectRef>
+          <a:fontRef idx="minor">
+            <a:schemeClr val="lt1"/>
+          </a:fontRef>
+        </p:style>
+        <p:txBody>
+          <a:bodyPr rtlCol="0" anchor="ctr"/>
+          <a:lstStyle/>
+          <a:p>
+            <a:pPr algn="ctr"/>
+          </a:p>
+        </p:txBody>
+      </p:sp>
+      <p:sp>
+        <p:nvSpPr>
+          <p:cNvPr id="14" name="TextBox 13"/>
+          <p:cNvSpPr txBox="1"/>
+          <p:nvPr/>
+        </p:nvSpPr>
+        <p:spPr>
+          <a:xfrm>
+            <a:off x="8019288" y="1783080"/>
+            <a:ext cx="3566160" cy="320040"/>
+          </a:xfrm>
+          <a:prstGeom prst="rect">
+            <a:avLst/>
+          </a:prstGeom>
+          <a:noFill/>
+        </p:spPr>
+        <p:txBody>
+          <a:bodyPr wrap="square" lIns="0" rIns="0" tIns="0" bIns="0" anchor="t"/>
+          <a:lstStyle/>
+          <a:p>
+            <a:pPr algn="l">
+              <a:spcBef>
+                <a:spcPts val="0"/>
+              </a:spcBef>
+              <a:spcAft>
+                <a:spcPts val="0"/>
+              </a:spcAft>
+            </a:pPr>
+            <a:r>
+              <a:rPr sz="1200" b="1" i="0">
+                <a:solidFill>
+                  <a:srgbClr val="C4841D"/>
+                </a:solidFill>
+                <a:latin typeface="Calibri"/>
+                <a:ea typeface="Calibri"/>
+                <a:cs typeface="Calibri"/>
+              </a:rPr>
+              <a:t>WHAT TO SAY</a:t>
+            </a:r>
+          </a:p>
+        </p:txBody>
+      </p:sp>
+      <p:sp>
+        <p:nvSpPr>
+          <p:cNvPr id="15" name="TextBox 14"/>
+          <p:cNvSpPr txBox="1"/>
+          <p:nvPr/>
+        </p:nvSpPr>
+        <p:spPr>
+          <a:xfrm>
+            <a:off x="8019288" y="2286000"/>
+            <a:ext cx="3566160" cy="640080"/>
+          </a:xfrm>
+          <a:prstGeom prst="rect">
+            <a:avLst/>
+          </a:prstGeom>
+          <a:noFill/>
+        </p:spPr>
+        <p:txBody>
+          <a:bodyPr wrap="square" lIns="0" rIns="0" tIns="0" bIns="0" anchor="t"/>
+          <a:lstStyle/>
+          <a:p>
+            <a:pPr algn="l">
+              <a:spcBef>
+                <a:spcPts val="0"/>
+              </a:spcBef>
+              <a:spcAft>
+                <a:spcPts val="0"/>
+              </a:spcAft>
+            </a:pPr>
+            <a:r>
+              <a:rPr sz="1500" b="0" i="0">
+                <a:solidFill>
+                  <a:srgbClr val="1A2834"/>
+                </a:solidFill>
+                <a:latin typeface="Calibri"/>
+                <a:ea typeface="Calibri"/>
+                <a:cs typeface="Calibri"/>
+              </a:rPr>
+              <a:t>1.  Same cars on both sides.</a:t>
+            </a:r>
+          </a:p>
+        </p:txBody>
+      </p:sp>
+      <p:sp>
+        <p:nvSpPr>
+          <p:cNvPr id="16" name="TextBox 15"/>
+          <p:cNvSpPr txBox="1"/>
+          <p:nvPr/>
+        </p:nvSpPr>
+        <p:spPr>
+          <a:xfrm>
+            <a:off x="8019288" y="3063240"/>
+            <a:ext cx="3566160" cy="640080"/>
+          </a:xfrm>
+          <a:prstGeom prst="rect">
+            <a:avLst/>
+          </a:prstGeom>
+          <a:noFill/>
+        </p:spPr>
+        <p:txBody>
+          <a:bodyPr wrap="square" lIns="0" rIns="0" tIns="0" bIns="0" anchor="t"/>
+          <a:lstStyle/>
+          <a:p>
+            <a:pPr algn="l">
+              <a:spcBef>
+                <a:spcPts val="0"/>
+              </a:spcBef>
+              <a:spcAft>
+                <a:spcPts val="0"/>
+              </a:spcAft>
+            </a:pPr>
+            <a:r>
+              <a:rPr sz="1500" b="0" i="0">
+                <a:solidFill>
+                  <a:srgbClr val="1A2834"/>
+                </a:solidFill>
+                <a:latin typeface="Calibri"/>
+                <a:ea typeface="Calibri"/>
+                <a:cs typeface="Calibri"/>
+              </a:rPr>
+              <a:t>2.  Left is fixed green.</a:t>
+            </a:r>
+          </a:p>
+        </p:txBody>
+      </p:sp>
+      <p:sp>
+        <p:nvSpPr>
+          <p:cNvPr id="17" name="TextBox 16"/>
+          <p:cNvSpPr txBox="1"/>
+          <p:nvPr/>
+        </p:nvSpPr>
+        <p:spPr>
+          <a:xfrm>
+            <a:off x="8019288" y="3840480"/>
+            <a:ext cx="3566160" cy="640080"/>
+          </a:xfrm>
+          <a:prstGeom prst="rect">
+            <a:avLst/>
+          </a:prstGeom>
+          <a:noFill/>
+        </p:spPr>
+        <p:txBody>
+          <a:bodyPr wrap="square" lIns="0" rIns="0" tIns="0" bIns="0" anchor="t"/>
+          <a:lstStyle/>
+          <a:p>
+            <a:pPr algn="l">
+              <a:spcBef>
+                <a:spcPts val="0"/>
+              </a:spcBef>
+              <a:spcAft>
+                <a:spcPts val="0"/>
+              </a:spcAft>
+            </a:pPr>
+            <a:r>
+              <a:rPr sz="1500" b="0" i="0">
+                <a:solidFill>
+                  <a:srgbClr val="1A2834"/>
+                </a:solidFill>
+                <a:latin typeface="Calibri"/>
+                <a:ea typeface="Calibri"/>
+                <a:cs typeface="Calibri"/>
+              </a:rPr>
+              <a:t>3.  Right is fuel-weighted pressure.</a:t>
+            </a:r>
+          </a:p>
+        </p:txBody>
+      </p:sp>
+      <p:sp>
+        <p:nvSpPr>
+          <p:cNvPr id="18" name="TextBox 17"/>
+          <p:cNvSpPr txBox="1"/>
+          <p:nvPr/>
+        </p:nvSpPr>
+        <p:spPr>
+          <a:xfrm>
+            <a:off x="8019288" y="4617720"/>
+            <a:ext cx="3566160" cy="640080"/>
+          </a:xfrm>
+          <a:prstGeom prst="rect">
+            <a:avLst/>
+          </a:prstGeom>
+          <a:noFill/>
+        </p:spPr>
+        <p:txBody>
+          <a:bodyPr wrap="square" lIns="0" rIns="0" tIns="0" bIns="0" anchor="t"/>
+          <a:lstStyle/>
+          <a:p>
+            <a:pPr algn="l">
+              <a:spcBef>
+                <a:spcPts val="0"/>
+              </a:spcBef>
+              <a:spcAft>
+                <a:spcPts val="0"/>
+              </a:spcAft>
+            </a:pPr>
+            <a:r>
+              <a:rPr sz="1500" b="0" i="0">
+                <a:solidFill>
+                  <a:srgbClr val="1A2834"/>
+                </a:solidFill>
+                <a:latin typeface="Calibri"/>
+                <a:ea typeface="Calibri"/>
+                <a:cs typeface="Calibri"/>
+              </a:rPr>
+              <a:t>4.  Watch which approach gets green when the queue is heavy.</a:t>
             </a:r>
           </a:p>
         </p:txBody>
@@ -5656,7 +6026,7 @@
                 <a:ea typeface="Calibri"/>
                 <a:cs typeface="Calibri"/>
               </a:rPr>
-              <a:t>IF THE CAMERA MISSES</a:t>
+              <a:t>LIVE CLIP 2 · PERCEPTION</a:t>
             </a:r>
           </a:p>
         </p:txBody>
@@ -5698,7 +6068,7 @@
                 <a:ea typeface="Georgia"/>
                 <a:cs typeface="Georgia"/>
               </a:rPr>
-              <a:t>At the highest miss rate, mean fuel is under the reference lines</a:t>
+              <a:t>YOLO reads the approach from camera video</a:t>
             </a:r>
           </a:p>
         </p:txBody>
@@ -5740,7 +6110,7 @@
                 <a:ea typeface="Calibri"/>
                 <a:cs typeface="Calibri"/>
               </a:rPr>
-              <a:t>Peak, one-sided. 3 seeds. Vehicles are dropped from the detector at random.</a:t>
+              <a:t>Input feasibility — not a fuel-saving result</a:t>
             </a:r>
           </a:p>
         </p:txBody>
@@ -5837,8 +6207,452 @@
         </p:nvSpPr>
         <p:spPr>
           <a:xfrm>
-            <a:off x="502920" y="1600200"/>
-            <a:ext cx="2697479" cy="2240280"/>
+            <a:off x="502920" y="1536192"/>
+            <a:ext cx="2606040" cy="1554480"/>
+          </a:xfrm>
+          <a:prstGeom prst="roundRect">
+            <a:avLst>
+              <a:gd name="adj" fmla="val 6000"/>
+            </a:avLst>
+          </a:prstGeom>
+          <a:solidFill>
+            <a:srgbClr val="0E1C2B"/>
+          </a:solidFill>
+          <a:ln>
+            <a:noFill/>
+          </a:ln>
+        </p:spPr>
+        <p:style>
+          <a:lnRef idx="1">
+            <a:schemeClr val="accent1"/>
+          </a:lnRef>
+          <a:fillRef idx="3">
+            <a:schemeClr val="accent1"/>
+          </a:fillRef>
+          <a:effectRef idx="2">
+            <a:schemeClr val="accent1"/>
+          </a:effectRef>
+          <a:fontRef idx="minor">
+            <a:schemeClr val="lt1"/>
+          </a:fontRef>
+        </p:style>
+        <p:txBody>
+          <a:bodyPr rtlCol="0" anchor="ctr"/>
+          <a:lstStyle/>
+          <a:p>
+            <a:pPr algn="ctr"/>
+          </a:p>
+        </p:txBody>
+      </p:sp>
+      <p:pic>
+        <p:nvPicPr>
+          <p:cNvPr id="9" name="Picture 8" descr="cam_N_eastgate.jpg"/>
+          <p:cNvPicPr>
+            <a:picLocks noChangeAspect="1"/>
+          </p:cNvPicPr>
+          <p:nvPr/>
+        </p:nvPicPr>
+        <p:blipFill>
+          <a:blip r:embed="rId2"/>
+          <a:stretch>
+            <a:fillRect/>
+          </a:stretch>
+        </p:blipFill>
+        <p:spPr>
+          <a:xfrm>
+            <a:off x="576072" y="1792224"/>
+            <a:ext cx="2459736" cy="1188719"/>
+          </a:xfrm>
+          <a:prstGeom prst="rect">
+            <a:avLst/>
+          </a:prstGeom>
+        </p:spPr>
+      </p:pic>
+      <p:sp>
+        <p:nvSpPr>
+          <p:cNvPr id="10" name="TextBox 9"/>
+          <p:cNvSpPr txBox="1"/>
+          <p:nvPr/>
+        </p:nvSpPr>
+        <p:spPr>
+          <a:xfrm>
+            <a:off x="594360" y="1572768"/>
+            <a:ext cx="2423160" cy="219456"/>
+          </a:xfrm>
+          <a:prstGeom prst="rect">
+            <a:avLst/>
+          </a:prstGeom>
+          <a:noFill/>
+        </p:spPr>
+        <p:txBody>
+          <a:bodyPr wrap="square" lIns="0" rIns="0" tIns="0" bIns="0" anchor="t"/>
+          <a:lstStyle/>
+          <a:p>
+            <a:pPr algn="l">
+              <a:spcBef>
+                <a:spcPts val="0"/>
+              </a:spcBef>
+              <a:spcAft>
+                <a:spcPts val="0"/>
+              </a:spcAft>
+            </a:pPr>
+            <a:r>
+              <a:rPr sz="1100" b="1" i="0">
+                <a:solidFill>
+                  <a:srgbClr val="FFFFFF"/>
+                </a:solidFill>
+                <a:latin typeface="Calibri"/>
+                <a:ea typeface="Calibri"/>
+                <a:cs typeface="Calibri"/>
+              </a:rPr>
+              <a:t>N  ·  Bellevue 150th &amp; Eastgate</a:t>
+            </a:r>
+          </a:p>
+        </p:txBody>
+      </p:sp>
+      <p:sp>
+        <p:nvSpPr>
+          <p:cNvPr id="11" name="Rounded Rectangle 10"/>
+          <p:cNvSpPr/>
+          <p:nvPr/>
+        </p:nvSpPr>
+        <p:spPr>
+          <a:xfrm>
+            <a:off x="3218688" y="1536192"/>
+            <a:ext cx="2606040" cy="1554480"/>
+          </a:xfrm>
+          <a:prstGeom prst="roundRect">
+            <a:avLst>
+              <a:gd name="adj" fmla="val 6000"/>
+            </a:avLst>
+          </a:prstGeom>
+          <a:solidFill>
+            <a:srgbClr val="0E1C2B"/>
+          </a:solidFill>
+          <a:ln>
+            <a:noFill/>
+          </a:ln>
+        </p:spPr>
+        <p:style>
+          <a:lnRef idx="1">
+            <a:schemeClr val="accent1"/>
+          </a:lnRef>
+          <a:fillRef idx="3">
+            <a:schemeClr val="accent1"/>
+          </a:fillRef>
+          <a:effectRef idx="2">
+            <a:schemeClr val="accent1"/>
+          </a:effectRef>
+          <a:fontRef idx="minor">
+            <a:schemeClr val="lt1"/>
+          </a:fontRef>
+        </p:style>
+        <p:txBody>
+          <a:bodyPr rtlCol="0" anchor="ctr"/>
+          <a:lstStyle/>
+          <a:p>
+            <a:pPr algn="ctr"/>
+          </a:p>
+        </p:txBody>
+      </p:sp>
+      <p:pic>
+        <p:nvPicPr>
+          <p:cNvPr id="12" name="Picture 11" descr="cam_E_newport.jpg"/>
+          <p:cNvPicPr>
+            <a:picLocks noChangeAspect="1"/>
+          </p:cNvPicPr>
+          <p:nvPr/>
+        </p:nvPicPr>
+        <p:blipFill>
+          <a:blip r:embed="rId3"/>
+          <a:stretch>
+            <a:fillRect/>
+          </a:stretch>
+        </p:blipFill>
+        <p:spPr>
+          <a:xfrm>
+            <a:off x="3291840" y="1792224"/>
+            <a:ext cx="2459736" cy="1188719"/>
+          </a:xfrm>
+          <a:prstGeom prst="rect">
+            <a:avLst/>
+          </a:prstGeom>
+        </p:spPr>
+      </p:pic>
+      <p:sp>
+        <p:nvSpPr>
+          <p:cNvPr id="13" name="TextBox 12"/>
+          <p:cNvSpPr txBox="1"/>
+          <p:nvPr/>
+        </p:nvSpPr>
+        <p:spPr>
+          <a:xfrm>
+            <a:off x="3310128" y="1572768"/>
+            <a:ext cx="2423160" cy="219456"/>
+          </a:xfrm>
+          <a:prstGeom prst="rect">
+            <a:avLst/>
+          </a:prstGeom>
+          <a:noFill/>
+        </p:spPr>
+        <p:txBody>
+          <a:bodyPr wrap="square" lIns="0" rIns="0" tIns="0" bIns="0" anchor="t"/>
+          <a:lstStyle/>
+          <a:p>
+            <a:pPr algn="l">
+              <a:spcBef>
+                <a:spcPts val="0"/>
+              </a:spcBef>
+              <a:spcAft>
+                <a:spcPts val="0"/>
+              </a:spcAft>
+            </a:pPr>
+            <a:r>
+              <a:rPr sz="1100" b="1" i="0">
+                <a:solidFill>
+                  <a:srgbClr val="FFFFFF"/>
+                </a:solidFill>
+                <a:latin typeface="Calibri"/>
+                <a:ea typeface="Calibri"/>
+                <a:cs typeface="Calibri"/>
+              </a:rPr>
+              <a:t>E  ·  Bellevue 150th &amp; Newport</a:t>
+            </a:r>
+          </a:p>
+        </p:txBody>
+      </p:sp>
+      <p:sp>
+        <p:nvSpPr>
+          <p:cNvPr id="14" name="Rounded Rectangle 13"/>
+          <p:cNvSpPr/>
+          <p:nvPr/>
+        </p:nvSpPr>
+        <p:spPr>
+          <a:xfrm>
+            <a:off x="502920" y="3200400"/>
+            <a:ext cx="2606040" cy="1554480"/>
+          </a:xfrm>
+          <a:prstGeom prst="roundRect">
+            <a:avLst>
+              <a:gd name="adj" fmla="val 6000"/>
+            </a:avLst>
+          </a:prstGeom>
+          <a:solidFill>
+            <a:srgbClr val="0E1C2B"/>
+          </a:solidFill>
+          <a:ln>
+            <a:noFill/>
+          </a:ln>
+        </p:spPr>
+        <p:style>
+          <a:lnRef idx="1">
+            <a:schemeClr val="accent1"/>
+          </a:lnRef>
+          <a:fillRef idx="3">
+            <a:schemeClr val="accent1"/>
+          </a:fillRef>
+          <a:effectRef idx="2">
+            <a:schemeClr val="accent1"/>
+          </a:effectRef>
+          <a:fontRef idx="minor">
+            <a:schemeClr val="lt1"/>
+          </a:fontRef>
+        </p:style>
+        <p:txBody>
+          <a:bodyPr rtlCol="0" anchor="ctr"/>
+          <a:lstStyle/>
+          <a:p>
+            <a:pPr algn="ctr"/>
+          </a:p>
+        </p:txBody>
+      </p:sp>
+      <p:pic>
+        <p:nvPicPr>
+          <p:cNvPr id="15" name="Picture 14" descr="cam_S_se38th.jpg"/>
+          <p:cNvPicPr>
+            <a:picLocks noChangeAspect="1"/>
+          </p:cNvPicPr>
+          <p:nvPr/>
+        </p:nvPicPr>
+        <p:blipFill>
+          <a:blip r:embed="rId4"/>
+          <a:stretch>
+            <a:fillRect/>
+          </a:stretch>
+        </p:blipFill>
+        <p:spPr>
+          <a:xfrm>
+            <a:off x="576072" y="3456432"/>
+            <a:ext cx="2459736" cy="1188719"/>
+          </a:xfrm>
+          <a:prstGeom prst="rect">
+            <a:avLst/>
+          </a:prstGeom>
+        </p:spPr>
+      </p:pic>
+      <p:sp>
+        <p:nvSpPr>
+          <p:cNvPr id="16" name="TextBox 15"/>
+          <p:cNvSpPr txBox="1"/>
+          <p:nvPr/>
+        </p:nvSpPr>
+        <p:spPr>
+          <a:xfrm>
+            <a:off x="594360" y="3236976"/>
+            <a:ext cx="2423160" cy="219456"/>
+          </a:xfrm>
+          <a:prstGeom prst="rect">
+            <a:avLst/>
+          </a:prstGeom>
+          <a:noFill/>
+        </p:spPr>
+        <p:txBody>
+          <a:bodyPr wrap="square" lIns="0" rIns="0" tIns="0" bIns="0" anchor="t"/>
+          <a:lstStyle/>
+          <a:p>
+            <a:pPr algn="l">
+              <a:spcBef>
+                <a:spcPts val="0"/>
+              </a:spcBef>
+              <a:spcAft>
+                <a:spcPts val="0"/>
+              </a:spcAft>
+            </a:pPr>
+            <a:r>
+              <a:rPr sz="1100" b="1" i="0">
+                <a:solidFill>
+                  <a:srgbClr val="FFFFFF"/>
+                </a:solidFill>
+                <a:latin typeface="Calibri"/>
+                <a:ea typeface="Calibri"/>
+                <a:cs typeface="Calibri"/>
+              </a:rPr>
+              <a:t>S  ·  Bellevue 150th &amp; SE 38th</a:t>
+            </a:r>
+          </a:p>
+        </p:txBody>
+      </p:sp>
+      <p:sp>
+        <p:nvSpPr>
+          <p:cNvPr id="17" name="Rounded Rectangle 16"/>
+          <p:cNvSpPr/>
+          <p:nvPr/>
+        </p:nvSpPr>
+        <p:spPr>
+          <a:xfrm>
+            <a:off x="3218688" y="3200400"/>
+            <a:ext cx="2606040" cy="1554480"/>
+          </a:xfrm>
+          <a:prstGeom prst="roundRect">
+            <a:avLst>
+              <a:gd name="adj" fmla="val 6000"/>
+            </a:avLst>
+          </a:prstGeom>
+          <a:solidFill>
+            <a:srgbClr val="0E1C2B"/>
+          </a:solidFill>
+          <a:ln>
+            <a:noFill/>
+          </a:ln>
+        </p:spPr>
+        <p:style>
+          <a:lnRef idx="1">
+            <a:schemeClr val="accent1"/>
+          </a:lnRef>
+          <a:fillRef idx="3">
+            <a:schemeClr val="accent1"/>
+          </a:fillRef>
+          <a:effectRef idx="2">
+            <a:schemeClr val="accent1"/>
+          </a:effectRef>
+          <a:fontRef idx="minor">
+            <a:schemeClr val="lt1"/>
+          </a:fontRef>
+        </p:style>
+        <p:txBody>
+          <a:bodyPr rtlCol="0" anchor="ctr"/>
+          <a:lstStyle/>
+          <a:p>
+            <a:pPr algn="ctr"/>
+          </a:p>
+        </p:txBody>
+      </p:sp>
+      <p:pic>
+        <p:nvPicPr>
+          <p:cNvPr id="18" name="Picture 17" descr="cam_W_ne8th.jpg"/>
+          <p:cNvPicPr>
+            <a:picLocks noChangeAspect="1"/>
+          </p:cNvPicPr>
+          <p:nvPr/>
+        </p:nvPicPr>
+        <p:blipFill>
+          <a:blip r:embed="rId5"/>
+          <a:stretch>
+            <a:fillRect/>
+          </a:stretch>
+        </p:blipFill>
+        <p:spPr>
+          <a:xfrm>
+            <a:off x="3291840" y="3456432"/>
+            <a:ext cx="2459736" cy="1188719"/>
+          </a:xfrm>
+          <a:prstGeom prst="rect">
+            <a:avLst/>
+          </a:prstGeom>
+        </p:spPr>
+      </p:pic>
+      <p:sp>
+        <p:nvSpPr>
+          <p:cNvPr id="19" name="TextBox 18"/>
+          <p:cNvSpPr txBox="1"/>
+          <p:nvPr/>
+        </p:nvSpPr>
+        <p:spPr>
+          <a:xfrm>
+            <a:off x="3310128" y="3236976"/>
+            <a:ext cx="2423160" cy="219456"/>
+          </a:xfrm>
+          <a:prstGeom prst="rect">
+            <a:avLst/>
+          </a:prstGeom>
+          <a:noFill/>
+        </p:spPr>
+        <p:txBody>
+          <a:bodyPr wrap="square" lIns="0" rIns="0" tIns="0" bIns="0" anchor="t"/>
+          <a:lstStyle/>
+          <a:p>
+            <a:pPr algn="l">
+              <a:spcBef>
+                <a:spcPts val="0"/>
+              </a:spcBef>
+              <a:spcAft>
+                <a:spcPts val="0"/>
+              </a:spcAft>
+            </a:pPr>
+            <a:r>
+              <a:rPr sz="1100" b="1" i="0">
+                <a:solidFill>
+                  <a:srgbClr val="FFFFFF"/>
+                </a:solidFill>
+                <a:latin typeface="Calibri"/>
+                <a:ea typeface="Calibri"/>
+                <a:cs typeface="Calibri"/>
+              </a:rPr>
+              <a:t>W  ·  Bellevue Way &amp; NE 8th</a:t>
+            </a:r>
+          </a:p>
+        </p:txBody>
+      </p:sp>
+      <p:sp>
+        <p:nvSpPr>
+          <p:cNvPr id="20" name="Rounded Rectangle 19"/>
+          <p:cNvSpPr/>
+          <p:nvPr/>
+        </p:nvSpPr>
+        <p:spPr>
+          <a:xfrm>
+            <a:off x="6117336" y="1536192"/>
+            <a:ext cx="5614415" cy="3218688"/>
           </a:xfrm>
           <a:prstGeom prst="roundRect">
             <a:avLst>
@@ -5878,34 +6692,34 @@
       </p:sp>
       <p:sp>
         <p:nvSpPr>
-          <p:cNvPr id="9" name="TextBox 8"/>
-          <p:cNvSpPr txBox="1"/>
-          <p:nvPr/>
-        </p:nvSpPr>
-        <p:spPr>
-          <a:xfrm>
-            <a:off x="667512" y="1755648"/>
-            <a:ext cx="2404872" cy="274320"/>
-          </a:xfrm>
-          <a:prstGeom prst="rect">
-            <a:avLst/>
-          </a:prstGeom>
-          <a:noFill/>
-        </p:spPr>
-        <p:txBody>
-          <a:bodyPr wrap="square" lIns="0" rIns="0" tIns="0" bIns="0" anchor="t"/>
-          <a:lstStyle/>
-          <a:p>
-            <a:pPr algn="l">
-              <a:spcBef>
-                <a:spcPts val="0"/>
-              </a:spcBef>
-              <a:spcAft>
-                <a:spcPts val="0"/>
-              </a:spcAft>
-            </a:pPr>
-            <a:r>
-              <a:rPr sz="1300" b="1" i="0">
+          <p:cNvPr id="21" name="TextBox 20"/>
+          <p:cNvSpPr txBox="1"/>
+          <p:nvPr/>
+        </p:nvSpPr>
+        <p:spPr>
+          <a:xfrm>
+            <a:off x="6318504" y="1691640"/>
+            <a:ext cx="5248655" cy="256032"/>
+          </a:xfrm>
+          <a:prstGeom prst="rect">
+            <a:avLst/>
+          </a:prstGeom>
+          <a:noFill/>
+        </p:spPr>
+        <p:txBody>
+          <a:bodyPr wrap="square" lIns="0" rIns="0" tIns="0" bIns="0" anchor="t"/>
+          <a:lstStyle/>
+          <a:p>
+            <a:pPr algn="l">
+              <a:spcBef>
+                <a:spcPts val="0"/>
+              </a:spcBef>
+              <a:spcAft>
+                <a:spcPts val="0"/>
+              </a:spcAft>
+            </a:pPr>
+            <a:r>
+              <a:rPr sz="1200" b="1" i="0">
                 <a:solidFill>
                   <a:srgbClr val="C4841D"/>
                 </a:solidFill>
@@ -5913,125 +6727,83 @@
                 <a:ea typeface="Calibri"/>
                 <a:cs typeface="Calibri"/>
               </a:rPr>
-              <a:t>0% missed</a:t>
-            </a:r>
-          </a:p>
-        </p:txBody>
-      </p:sp>
-      <p:sp>
-        <p:nvSpPr>
-          <p:cNvPr id="10" name="TextBox 9"/>
-          <p:cNvSpPr txBox="1"/>
-          <p:nvPr/>
-        </p:nvSpPr>
-        <p:spPr>
-          <a:xfrm>
-            <a:off x="667512" y="2148840"/>
-            <a:ext cx="2404872" cy="548640"/>
-          </a:xfrm>
-          <a:prstGeom prst="rect">
-            <a:avLst/>
-          </a:prstGeom>
-          <a:noFill/>
-        </p:spPr>
-        <p:txBody>
-          <a:bodyPr wrap="square" lIns="0" rIns="0" tIns="0" bIns="0" anchor="t"/>
-          <a:lstStyle/>
-          <a:p>
-            <a:pPr algn="l">
-              <a:spcBef>
-                <a:spcPts val="0"/>
-              </a:spcBef>
-              <a:spcAft>
-                <a:spcPts val="0"/>
-              </a:spcAft>
-            </a:pPr>
-            <a:r>
-              <a:rPr sz="2800" b="1" i="0">
+              <a:t>PLAY THESE</a:t>
+            </a:r>
+          </a:p>
+        </p:txBody>
+      </p:sp>
+      <p:sp>
+        <p:nvSpPr>
+          <p:cNvPr id="22" name="TextBox 21"/>
+          <p:cNvSpPr txBox="1"/>
+          <p:nvPr/>
+        </p:nvSpPr>
+        <p:spPr>
+          <a:xfrm>
+            <a:off x="6318504" y="2057400"/>
+            <a:ext cx="5248655" cy="201168"/>
+          </a:xfrm>
+          <a:prstGeom prst="rect">
+            <a:avLst/>
+          </a:prstGeom>
+          <a:noFill/>
+        </p:spPr>
+        <p:txBody>
+          <a:bodyPr wrap="square" lIns="0" rIns="0" tIns="0" bIns="0" anchor="t"/>
+          <a:lstStyle/>
+          <a:p>
+            <a:pPr algn="l">
+              <a:spcBef>
+                <a:spcPts val="0"/>
+              </a:spcBef>
+              <a:spcAft>
+                <a:spcPts val="0"/>
+              </a:spcAft>
+            </a:pPr>
+            <a:r>
+              <a:rPr sz="1300" b="1" i="0">
                 <a:solidFill>
                   <a:srgbClr val="1B6B5A"/>
-                </a:solidFill>
-                <a:latin typeface="Georgia"/>
-                <a:ea typeface="Georgia"/>
-                <a:cs typeface="Georgia"/>
-              </a:rPr>
-              <a:t>0.123</a:t>
-            </a:r>
-          </a:p>
-        </p:txBody>
-      </p:sp>
-      <p:sp>
-        <p:nvSpPr>
-          <p:cNvPr id="11" name="TextBox 10"/>
-          <p:cNvSpPr txBox="1"/>
-          <p:nvPr/>
-        </p:nvSpPr>
-        <p:spPr>
-          <a:xfrm>
-            <a:off x="667512" y="2788920"/>
-            <a:ext cx="2404872" cy="274320"/>
-          </a:xfrm>
-          <a:prstGeom prst="rect">
-            <a:avLst/>
-          </a:prstGeom>
-          <a:noFill/>
-        </p:spPr>
-        <p:txBody>
-          <a:bodyPr wrap="square" lIns="0" rIns="0" tIns="0" bIns="0" anchor="t"/>
-          <a:lstStyle/>
-          <a:p>
-            <a:pPr algn="l">
-              <a:spcBef>
-                <a:spcPts val="0"/>
-              </a:spcBef>
-              <a:spcAft>
-                <a:spcPts val="0"/>
-              </a:spcAft>
-            </a:pPr>
-            <a:r>
-              <a:rPr sz="1300" b="0" i="0">
-                <a:solidFill>
-                  <a:srgbClr val="5E6E7C"/>
                 </a:solidFill>
                 <a:latin typeface="Calibri"/>
                 <a:ea typeface="Calibri"/>
                 <a:cs typeface="Calibri"/>
               </a:rPr>
-              <a:t>litres / vehicle</a:t>
-            </a:r>
-          </a:p>
-        </p:txBody>
-      </p:sp>
-      <p:sp>
-        <p:nvSpPr>
-          <p:cNvPr id="12" name="TextBox 11"/>
-          <p:cNvSpPr txBox="1"/>
-          <p:nvPr/>
-        </p:nvSpPr>
-        <p:spPr>
-          <a:xfrm>
-            <a:off x="667512" y="3200400"/>
-            <a:ext cx="2404872" cy="320040"/>
-          </a:xfrm>
-          <a:prstGeom prst="rect">
-            <a:avLst/>
-          </a:prstGeom>
-          <a:noFill/>
-        </p:spPr>
-        <p:txBody>
-          <a:bodyPr wrap="square" lIns="0" rIns="0" tIns="0" bIns="0" anchor="t"/>
-          <a:lstStyle/>
-          <a:p>
-            <a:pPr algn="l">
-              <a:spcBef>
-                <a:spcPts val="0"/>
-              </a:spcBef>
-              <a:spcAft>
-                <a:spcPts val="0"/>
-              </a:spcAft>
-            </a:pPr>
-            <a:r>
-              <a:rPr sz="1200" b="0" i="0">
+              <a:t>●  Mosaic (2×2)</a:t>
+            </a:r>
+          </a:p>
+        </p:txBody>
+      </p:sp>
+      <p:sp>
+        <p:nvSpPr>
+          <p:cNvPr id="23" name="TextBox 22"/>
+          <p:cNvSpPr txBox="1"/>
+          <p:nvPr/>
+        </p:nvSpPr>
+        <p:spPr>
+          <a:xfrm>
+            <a:off x="6501384" y="2258568"/>
+            <a:ext cx="5065775" cy="201168"/>
+          </a:xfrm>
+          <a:prstGeom prst="rect">
+            <a:avLst/>
+          </a:prstGeom>
+          <a:noFill/>
+        </p:spPr>
+        <p:txBody>
+          <a:bodyPr wrap="square" lIns="0" rIns="0" tIns="0" bIns="0" anchor="t"/>
+          <a:lstStyle/>
+          <a:p>
+            <a:pPr algn="l">
+              <a:spcBef>
+                <a:spcPts val="0"/>
+              </a:spcBef>
+              <a:spcAft>
+                <a:spcPts val="0"/>
+              </a:spcAft>
+            </a:pPr>
+            <a:r>
+              <a:rPr sz="1100" b="0" i="0">
                 <a:solidFill>
                   <a:srgbClr val="5E6E7C"/>
                 </a:solidFill>
@@ -6039,21 +6811,441 @@
                 <a:ea typeface="Calibri"/>
                 <a:cs typeface="Calibri"/>
               </a:rPr>
-              <a:t>± 0.002   ·   n=3</a:t>
-            </a:r>
-          </a:p>
-        </p:txBody>
-      </p:sp>
-      <p:sp>
-        <p:nvSpPr>
-          <p:cNvPr id="13" name="Rounded Rectangle 12"/>
+              <a:t>results/demo/yolo/yolo_mosaic.mp4</a:t>
+            </a:r>
+          </a:p>
+        </p:txBody>
+      </p:sp>
+      <p:sp>
+        <p:nvSpPr>
+          <p:cNvPr id="24" name="TextBox 23"/>
+          <p:cNvSpPr txBox="1"/>
+          <p:nvPr/>
+        </p:nvSpPr>
+        <p:spPr>
+          <a:xfrm>
+            <a:off x="6318504" y="2496312"/>
+            <a:ext cx="5248655" cy="201168"/>
+          </a:xfrm>
+          <a:prstGeom prst="rect">
+            <a:avLst/>
+          </a:prstGeom>
+          <a:noFill/>
+        </p:spPr>
+        <p:txBody>
+          <a:bodyPr wrap="square" lIns="0" rIns="0" tIns="0" bIns="0" anchor="t"/>
+          <a:lstStyle/>
+          <a:p>
+            <a:pPr algn="l">
+              <a:spcBef>
+                <a:spcPts val="0"/>
+              </a:spcBef>
+              <a:spcAft>
+                <a:spcPts val="0"/>
+              </a:spcAft>
+            </a:pPr>
+            <a:r>
+              <a:rPr sz="1300" b="1" i="0">
+                <a:solidFill>
+                  <a:srgbClr val="1B6B5A"/>
+                </a:solidFill>
+                <a:latin typeface="Calibri"/>
+                <a:ea typeface="Calibri"/>
+                <a:cs typeface="Calibri"/>
+              </a:rPr>
+              <a:t>●  Primary overlay</a:t>
+            </a:r>
+          </a:p>
+        </p:txBody>
+      </p:sp>
+      <p:sp>
+        <p:nvSpPr>
+          <p:cNvPr id="25" name="TextBox 24"/>
+          <p:cNvSpPr txBox="1"/>
+          <p:nvPr/>
+        </p:nvSpPr>
+        <p:spPr>
+          <a:xfrm>
+            <a:off x="6501384" y="2697480"/>
+            <a:ext cx="5065775" cy="201168"/>
+          </a:xfrm>
+          <a:prstGeom prst="rect">
+            <a:avLst/>
+          </a:prstGeom>
+          <a:noFill/>
+        </p:spPr>
+        <p:txBody>
+          <a:bodyPr wrap="square" lIns="0" rIns="0" tIns="0" bIns="0" anchor="t"/>
+          <a:lstStyle/>
+          <a:p>
+            <a:pPr algn="l">
+              <a:spcBef>
+                <a:spcPts val="0"/>
+              </a:spcBef>
+              <a:spcAft>
+                <a:spcPts val="0"/>
+              </a:spcAft>
+            </a:pPr>
+            <a:r>
+              <a:rPr sz="1100" b="0" i="0">
+                <a:solidFill>
+                  <a:srgbClr val="5E6E7C"/>
+                </a:solidFill>
+                <a:latin typeface="Calibri"/>
+                <a:ea typeface="Calibri"/>
+                <a:cs typeface="Calibri"/>
+              </a:rPr>
+              <a:t>results/demo/yolo_overlay.mp4</a:t>
+            </a:r>
+          </a:p>
+        </p:txBody>
+      </p:sp>
+      <p:sp>
+        <p:nvSpPr>
+          <p:cNvPr id="26" name="TextBox 25"/>
+          <p:cNvSpPr txBox="1"/>
+          <p:nvPr/>
+        </p:nvSpPr>
+        <p:spPr>
+          <a:xfrm>
+            <a:off x="6318504" y="2935224"/>
+            <a:ext cx="5248655" cy="201168"/>
+          </a:xfrm>
+          <a:prstGeom prst="rect">
+            <a:avLst/>
+          </a:prstGeom>
+          <a:noFill/>
+        </p:spPr>
+        <p:txBody>
+          <a:bodyPr wrap="square" lIns="0" rIns="0" tIns="0" bIns="0" anchor="t"/>
+          <a:lstStyle/>
+          <a:p>
+            <a:pPr algn="l">
+              <a:spcBef>
+                <a:spcPts val="0"/>
+              </a:spcBef>
+              <a:spcAft>
+                <a:spcPts val="0"/>
+              </a:spcAft>
+            </a:pPr>
+            <a:r>
+              <a:rPr sz="1300" b="1" i="0">
+                <a:solidFill>
+                  <a:srgbClr val="1B6B5A"/>
+                </a:solidFill>
+                <a:latin typeface="Calibri"/>
+                <a:ea typeface="Calibri"/>
+                <a:cs typeface="Calibri"/>
+              </a:rPr>
+              <a:t>●  Cam N</a:t>
+            </a:r>
+          </a:p>
+        </p:txBody>
+      </p:sp>
+      <p:sp>
+        <p:nvSpPr>
+          <p:cNvPr id="27" name="TextBox 26"/>
+          <p:cNvSpPr txBox="1"/>
+          <p:nvPr/>
+        </p:nvSpPr>
+        <p:spPr>
+          <a:xfrm>
+            <a:off x="6501384" y="3136392"/>
+            <a:ext cx="5065775" cy="201168"/>
+          </a:xfrm>
+          <a:prstGeom prst="rect">
+            <a:avLst/>
+          </a:prstGeom>
+          <a:noFill/>
+        </p:spPr>
+        <p:txBody>
+          <a:bodyPr wrap="square" lIns="0" rIns="0" tIns="0" bIns="0" anchor="t"/>
+          <a:lstStyle/>
+          <a:p>
+            <a:pPr algn="l">
+              <a:spcBef>
+                <a:spcPts val="0"/>
+              </a:spcBef>
+              <a:spcAft>
+                <a:spcPts val="0"/>
+              </a:spcAft>
+            </a:pPr>
+            <a:r>
+              <a:rPr sz="1100" b="0" i="0">
+                <a:solidFill>
+                  <a:srgbClr val="5E6E7C"/>
+                </a:solidFill>
+                <a:latin typeface="Calibri"/>
+                <a:ea typeface="Calibri"/>
+                <a:cs typeface="Calibri"/>
+              </a:rPr>
+              <a:t>results/demo/yolo/overlay_N.mp4</a:t>
+            </a:r>
+          </a:p>
+        </p:txBody>
+      </p:sp>
+      <p:sp>
+        <p:nvSpPr>
+          <p:cNvPr id="28" name="TextBox 27"/>
+          <p:cNvSpPr txBox="1"/>
+          <p:nvPr/>
+        </p:nvSpPr>
+        <p:spPr>
+          <a:xfrm>
+            <a:off x="6318504" y="3374136"/>
+            <a:ext cx="5248655" cy="201168"/>
+          </a:xfrm>
+          <a:prstGeom prst="rect">
+            <a:avLst/>
+          </a:prstGeom>
+          <a:noFill/>
+        </p:spPr>
+        <p:txBody>
+          <a:bodyPr wrap="square" lIns="0" rIns="0" tIns="0" bIns="0" anchor="t"/>
+          <a:lstStyle/>
+          <a:p>
+            <a:pPr algn="l">
+              <a:spcBef>
+                <a:spcPts val="0"/>
+              </a:spcBef>
+              <a:spcAft>
+                <a:spcPts val="0"/>
+              </a:spcAft>
+            </a:pPr>
+            <a:r>
+              <a:rPr sz="1300" b="1" i="0">
+                <a:solidFill>
+                  <a:srgbClr val="1B6B5A"/>
+                </a:solidFill>
+                <a:latin typeface="Calibri"/>
+                <a:ea typeface="Calibri"/>
+                <a:cs typeface="Calibri"/>
+              </a:rPr>
+              <a:t>●  Cam E</a:t>
+            </a:r>
+          </a:p>
+        </p:txBody>
+      </p:sp>
+      <p:sp>
+        <p:nvSpPr>
+          <p:cNvPr id="29" name="TextBox 28"/>
+          <p:cNvSpPr txBox="1"/>
+          <p:nvPr/>
+        </p:nvSpPr>
+        <p:spPr>
+          <a:xfrm>
+            <a:off x="6501384" y="3575304"/>
+            <a:ext cx="5065775" cy="201168"/>
+          </a:xfrm>
+          <a:prstGeom prst="rect">
+            <a:avLst/>
+          </a:prstGeom>
+          <a:noFill/>
+        </p:spPr>
+        <p:txBody>
+          <a:bodyPr wrap="square" lIns="0" rIns="0" tIns="0" bIns="0" anchor="t"/>
+          <a:lstStyle/>
+          <a:p>
+            <a:pPr algn="l">
+              <a:spcBef>
+                <a:spcPts val="0"/>
+              </a:spcBef>
+              <a:spcAft>
+                <a:spcPts val="0"/>
+              </a:spcAft>
+            </a:pPr>
+            <a:r>
+              <a:rPr sz="1100" b="0" i="0">
+                <a:solidFill>
+                  <a:srgbClr val="5E6E7C"/>
+                </a:solidFill>
+                <a:latin typeface="Calibri"/>
+                <a:ea typeface="Calibri"/>
+                <a:cs typeface="Calibri"/>
+              </a:rPr>
+              <a:t>results/demo/yolo/overlay_E.mp4</a:t>
+            </a:r>
+          </a:p>
+        </p:txBody>
+      </p:sp>
+      <p:sp>
+        <p:nvSpPr>
+          <p:cNvPr id="30" name="TextBox 29"/>
+          <p:cNvSpPr txBox="1"/>
+          <p:nvPr/>
+        </p:nvSpPr>
+        <p:spPr>
+          <a:xfrm>
+            <a:off x="6318504" y="3813048"/>
+            <a:ext cx="5248655" cy="201168"/>
+          </a:xfrm>
+          <a:prstGeom prst="rect">
+            <a:avLst/>
+          </a:prstGeom>
+          <a:noFill/>
+        </p:spPr>
+        <p:txBody>
+          <a:bodyPr wrap="square" lIns="0" rIns="0" tIns="0" bIns="0" anchor="t"/>
+          <a:lstStyle/>
+          <a:p>
+            <a:pPr algn="l">
+              <a:spcBef>
+                <a:spcPts val="0"/>
+              </a:spcBef>
+              <a:spcAft>
+                <a:spcPts val="0"/>
+              </a:spcAft>
+            </a:pPr>
+            <a:r>
+              <a:rPr sz="1300" b="1" i="0">
+                <a:solidFill>
+                  <a:srgbClr val="1B6B5A"/>
+                </a:solidFill>
+                <a:latin typeface="Calibri"/>
+                <a:ea typeface="Calibri"/>
+                <a:cs typeface="Calibri"/>
+              </a:rPr>
+              <a:t>●  Cam S</a:t>
+            </a:r>
+          </a:p>
+        </p:txBody>
+      </p:sp>
+      <p:sp>
+        <p:nvSpPr>
+          <p:cNvPr id="31" name="TextBox 30"/>
+          <p:cNvSpPr txBox="1"/>
+          <p:nvPr/>
+        </p:nvSpPr>
+        <p:spPr>
+          <a:xfrm>
+            <a:off x="6501384" y="4014215"/>
+            <a:ext cx="5065775" cy="201168"/>
+          </a:xfrm>
+          <a:prstGeom prst="rect">
+            <a:avLst/>
+          </a:prstGeom>
+          <a:noFill/>
+        </p:spPr>
+        <p:txBody>
+          <a:bodyPr wrap="square" lIns="0" rIns="0" tIns="0" bIns="0" anchor="t"/>
+          <a:lstStyle/>
+          <a:p>
+            <a:pPr algn="l">
+              <a:spcBef>
+                <a:spcPts val="0"/>
+              </a:spcBef>
+              <a:spcAft>
+                <a:spcPts val="0"/>
+              </a:spcAft>
+            </a:pPr>
+            <a:r>
+              <a:rPr sz="1100" b="0" i="0">
+                <a:solidFill>
+                  <a:srgbClr val="5E6E7C"/>
+                </a:solidFill>
+                <a:latin typeface="Calibri"/>
+                <a:ea typeface="Calibri"/>
+                <a:cs typeface="Calibri"/>
+              </a:rPr>
+              <a:t>results/demo/yolo/overlay_S.mp4</a:t>
+            </a:r>
+          </a:p>
+        </p:txBody>
+      </p:sp>
+      <p:sp>
+        <p:nvSpPr>
+          <p:cNvPr id="32" name="TextBox 31"/>
+          <p:cNvSpPr txBox="1"/>
+          <p:nvPr/>
+        </p:nvSpPr>
+        <p:spPr>
+          <a:xfrm>
+            <a:off x="6318504" y="4251960"/>
+            <a:ext cx="5248655" cy="201168"/>
+          </a:xfrm>
+          <a:prstGeom prst="rect">
+            <a:avLst/>
+          </a:prstGeom>
+          <a:noFill/>
+        </p:spPr>
+        <p:txBody>
+          <a:bodyPr wrap="square" lIns="0" rIns="0" tIns="0" bIns="0" anchor="t"/>
+          <a:lstStyle/>
+          <a:p>
+            <a:pPr algn="l">
+              <a:spcBef>
+                <a:spcPts val="0"/>
+              </a:spcBef>
+              <a:spcAft>
+                <a:spcPts val="0"/>
+              </a:spcAft>
+            </a:pPr>
+            <a:r>
+              <a:rPr sz="1300" b="1" i="0">
+                <a:solidFill>
+                  <a:srgbClr val="1B6B5A"/>
+                </a:solidFill>
+                <a:latin typeface="Calibri"/>
+                <a:ea typeface="Calibri"/>
+                <a:cs typeface="Calibri"/>
+              </a:rPr>
+              <a:t>●  Cam W</a:t>
+            </a:r>
+          </a:p>
+        </p:txBody>
+      </p:sp>
+      <p:sp>
+        <p:nvSpPr>
+          <p:cNvPr id="33" name="TextBox 32"/>
+          <p:cNvSpPr txBox="1"/>
+          <p:nvPr/>
+        </p:nvSpPr>
+        <p:spPr>
+          <a:xfrm>
+            <a:off x="6501384" y="4453128"/>
+            <a:ext cx="5065775" cy="201168"/>
+          </a:xfrm>
+          <a:prstGeom prst="rect">
+            <a:avLst/>
+          </a:prstGeom>
+          <a:noFill/>
+        </p:spPr>
+        <p:txBody>
+          <a:bodyPr wrap="square" lIns="0" rIns="0" tIns="0" bIns="0" anchor="t"/>
+          <a:lstStyle/>
+          <a:p>
+            <a:pPr algn="l">
+              <a:spcBef>
+                <a:spcPts val="0"/>
+              </a:spcBef>
+              <a:spcAft>
+                <a:spcPts val="0"/>
+              </a:spcAft>
+            </a:pPr>
+            <a:r>
+              <a:rPr sz="1100" b="0" i="0">
+                <a:solidFill>
+                  <a:srgbClr val="5E6E7C"/>
+                </a:solidFill>
+                <a:latin typeface="Calibri"/>
+                <a:ea typeface="Calibri"/>
+                <a:cs typeface="Calibri"/>
+              </a:rPr>
+              <a:t>results/demo/yolo/overlay_W.mp4</a:t>
+            </a:r>
+          </a:p>
+        </p:txBody>
+      </p:sp>
+      <p:sp>
+        <p:nvSpPr>
+          <p:cNvPr id="34" name="Rounded Rectangle 33"/>
           <p:cNvSpPr/>
           <p:nvPr/>
         </p:nvSpPr>
         <p:spPr>
           <a:xfrm>
-            <a:off x="3346704" y="1600200"/>
-            <a:ext cx="2697479" cy="2240280"/>
+            <a:off x="502920" y="4892040"/>
+            <a:ext cx="11228832" cy="1325880"/>
           </a:xfrm>
           <a:prstGeom prst="roundRect">
             <a:avLst>
@@ -6061,12 +7253,10 @@
             </a:avLst>
           </a:prstGeom>
           <a:solidFill>
-            <a:srgbClr val="FFFFFF"/>
+            <a:srgbClr val="0E1C2B"/>
           </a:solidFill>
-          <a:ln w="12700">
-            <a:solidFill>
-              <a:srgbClr val="E3DBD0"/>
-            </a:solidFill>
+          <a:ln>
+            <a:noFill/>
           </a:ln>
         </p:spPr>
         <p:style>
@@ -6093,34 +7283,34 @@
       </p:sp>
       <p:sp>
         <p:nvSpPr>
-          <p:cNvPr id="14" name="TextBox 13"/>
-          <p:cNvSpPr txBox="1"/>
-          <p:nvPr/>
-        </p:nvSpPr>
-        <p:spPr>
-          <a:xfrm>
-            <a:off x="3511296" y="1755648"/>
-            <a:ext cx="2404872" cy="274320"/>
-          </a:xfrm>
-          <a:prstGeom prst="rect">
-            <a:avLst/>
-          </a:prstGeom>
-          <a:noFill/>
-        </p:spPr>
-        <p:txBody>
-          <a:bodyPr wrap="square" lIns="0" rIns="0" tIns="0" bIns="0" anchor="t"/>
-          <a:lstStyle/>
-          <a:p>
-            <a:pPr algn="l">
-              <a:spcBef>
-                <a:spcPts val="0"/>
-              </a:spcBef>
-              <a:spcAft>
-                <a:spcPts val="0"/>
-              </a:spcAft>
-            </a:pPr>
-            <a:r>
-              <a:rPr sz="1300" b="1" i="0">
+          <p:cNvPr id="35" name="TextBox 34"/>
+          <p:cNvSpPr txBox="1"/>
+          <p:nvPr/>
+        </p:nvSpPr>
+        <p:spPr>
+          <a:xfrm>
+            <a:off x="795528" y="5029200"/>
+            <a:ext cx="10680192" cy="256032"/>
+          </a:xfrm>
+          <a:prstGeom prst="rect">
+            <a:avLst/>
+          </a:prstGeom>
+          <a:noFill/>
+        </p:spPr>
+        <p:txBody>
+          <a:bodyPr wrap="square" lIns="0" rIns="0" tIns="0" bIns="0" anchor="t"/>
+          <a:lstStyle/>
+          <a:p>
+            <a:pPr algn="l">
+              <a:spcBef>
+                <a:spcPts val="0"/>
+              </a:spcBef>
+              <a:spcAft>
+                <a:spcPts val="0"/>
+              </a:spcAft>
+            </a:pPr>
+            <a:r>
+              <a:rPr sz="1200" b="1" i="0">
                 <a:solidFill>
                   <a:srgbClr val="C4841D"/>
                 </a:solidFill>
@@ -6128,105 +7318,63 @@
                 <a:ea typeface="Calibri"/>
                 <a:cs typeface="Calibri"/>
               </a:rPr>
-              <a:t>10% missed</a:t>
-            </a:r>
-          </a:p>
-        </p:txBody>
-      </p:sp>
-      <p:sp>
-        <p:nvSpPr>
-          <p:cNvPr id="15" name="TextBox 14"/>
-          <p:cNvSpPr txBox="1"/>
-          <p:nvPr/>
-        </p:nvSpPr>
-        <p:spPr>
-          <a:xfrm>
-            <a:off x="3511296" y="2148840"/>
-            <a:ext cx="2404872" cy="548640"/>
-          </a:xfrm>
-          <a:prstGeom prst="rect">
-            <a:avLst/>
-          </a:prstGeom>
-          <a:noFill/>
-        </p:spPr>
-        <p:txBody>
-          <a:bodyPr wrap="square" lIns="0" rIns="0" tIns="0" bIns="0" anchor="t"/>
-          <a:lstStyle/>
-          <a:p>
-            <a:pPr algn="l">
-              <a:spcBef>
-                <a:spcPts val="0"/>
-              </a:spcBef>
-              <a:spcAft>
-                <a:spcPts val="0"/>
-              </a:spcAft>
-            </a:pPr>
-            <a:r>
-              <a:rPr sz="2800" b="1" i="0">
-                <a:solidFill>
-                  <a:srgbClr val="1B6B5A"/>
-                </a:solidFill>
-                <a:latin typeface="Georgia"/>
-                <a:ea typeface="Georgia"/>
-                <a:cs typeface="Georgia"/>
-              </a:rPr>
-              <a:t>0.123</a:t>
-            </a:r>
-          </a:p>
-        </p:txBody>
-      </p:sp>
-      <p:sp>
-        <p:nvSpPr>
-          <p:cNvPr id="16" name="TextBox 15"/>
-          <p:cNvSpPr txBox="1"/>
-          <p:nvPr/>
-        </p:nvSpPr>
-        <p:spPr>
-          <a:xfrm>
-            <a:off x="3511296" y="2788920"/>
-            <a:ext cx="2404872" cy="274320"/>
-          </a:xfrm>
-          <a:prstGeom prst="rect">
-            <a:avLst/>
-          </a:prstGeom>
-          <a:noFill/>
-        </p:spPr>
-        <p:txBody>
-          <a:bodyPr wrap="square" lIns="0" rIns="0" tIns="0" bIns="0" anchor="t"/>
-          <a:lstStyle/>
-          <a:p>
-            <a:pPr algn="l">
-              <a:spcBef>
-                <a:spcPts val="0"/>
-              </a:spcBef>
-              <a:spcAft>
-                <a:spcPts val="0"/>
-              </a:spcAft>
-            </a:pPr>
-            <a:r>
-              <a:rPr sz="1300" b="0" i="0">
-                <a:solidFill>
-                  <a:srgbClr val="5E6E7C"/>
+              <a:t>SAY THIS OUT LOUD</a:t>
+            </a:r>
+          </a:p>
+        </p:txBody>
+      </p:sp>
+      <p:sp>
+        <p:nvSpPr>
+          <p:cNvPr id="36" name="TextBox 35"/>
+          <p:cNvSpPr txBox="1"/>
+          <p:nvPr/>
+        </p:nvSpPr>
+        <p:spPr>
+          <a:xfrm>
+            <a:off x="795528" y="5349240"/>
+            <a:ext cx="10680192" cy="502920"/>
+          </a:xfrm>
+          <a:prstGeom prst="rect">
+            <a:avLst/>
+          </a:prstGeom>
+          <a:noFill/>
+        </p:spPr>
+        <p:txBody>
+          <a:bodyPr wrap="square" lIns="0" rIns="0" tIns="0" bIns="0" anchor="t"/>
+          <a:lstStyle/>
+          <a:p>
+            <a:pPr algn="l">
+              <a:spcBef>
+                <a:spcPts val="0"/>
+              </a:spcBef>
+              <a:spcAft>
+                <a:spcPts val="0"/>
+              </a:spcAft>
+            </a:pPr>
+            <a:r>
+              <a:rPr sz="1500" b="0" i="0">
+                <a:solidFill>
+                  <a:srgbClr val="FFFFFF"/>
                 </a:solidFill>
                 <a:latin typeface="Calibri"/>
                 <a:ea typeface="Calibri"/>
                 <a:cs typeface="Calibri"/>
               </a:rPr>
-              <a:t>litres / vehicle</a:t>
-            </a:r>
-          </a:p>
-        </p:txBody>
-      </p:sp>
-      <p:sp>
-        <p:nvSpPr>
-          <p:cNvPr id="17" name="TextBox 16"/>
-          <p:cNvSpPr txBox="1"/>
-          <p:nvPr/>
-        </p:nvSpPr>
-        <p:spPr>
-          <a:xfrm>
-            <a:off x="3511296" y="3200400"/>
-            <a:ext cx="2404872" cy="320040"/>
+              <a:t>This shows the controller can ingest camera counts. It is not the locked fuel result. TEST headlines still use the oracle detector.</a:t>
+            </a:r>
+          </a:p>
+        </p:txBody>
+      </p:sp>
+      <p:sp>
+        <p:nvSpPr>
+          <p:cNvPr id="37" name="TextBox 36"/>
+          <p:cNvSpPr txBox="1"/>
+          <p:nvPr/>
+        </p:nvSpPr>
+        <p:spPr>
+          <a:xfrm>
+            <a:off x="795528" y="5897880"/>
+            <a:ext cx="10680192" cy="228600"/>
           </a:xfrm>
           <a:prstGeom prst="rect">
             <a:avLst/>
@@ -6248,742 +7396,13 @@
             <a:r>
               <a:rPr sz="1200" b="0" i="0">
                 <a:solidFill>
-                  <a:srgbClr val="5E6E7C"/>
+                  <a:srgbClr val="C9D4DC"/>
                 </a:solidFill>
                 <a:latin typeface="Calibri"/>
                 <a:ea typeface="Calibri"/>
                 <a:cs typeface="Calibri"/>
               </a:rPr>
-              <a:t>± 0.002   ·   n=3</a:t>
-            </a:r>
-          </a:p>
-        </p:txBody>
-      </p:sp>
-      <p:sp>
-        <p:nvSpPr>
-          <p:cNvPr id="18" name="Rounded Rectangle 17"/>
-          <p:cNvSpPr/>
-          <p:nvPr/>
-        </p:nvSpPr>
-        <p:spPr>
-          <a:xfrm>
-            <a:off x="6190488" y="1600200"/>
-            <a:ext cx="2697479" cy="2240280"/>
-          </a:xfrm>
-          <a:prstGeom prst="roundRect">
-            <a:avLst>
-              <a:gd name="adj" fmla="val 8000"/>
-            </a:avLst>
-          </a:prstGeom>
-          <a:solidFill>
-            <a:srgbClr val="FFFFFF"/>
-          </a:solidFill>
-          <a:ln w="12700">
-            <a:solidFill>
-              <a:srgbClr val="E3DBD0"/>
-            </a:solidFill>
-          </a:ln>
-        </p:spPr>
-        <p:style>
-          <a:lnRef idx="1">
-            <a:schemeClr val="accent1"/>
-          </a:lnRef>
-          <a:fillRef idx="3">
-            <a:schemeClr val="accent1"/>
-          </a:fillRef>
-          <a:effectRef idx="2">
-            <a:schemeClr val="accent1"/>
-          </a:effectRef>
-          <a:fontRef idx="minor">
-            <a:schemeClr val="lt1"/>
-          </a:fontRef>
-        </p:style>
-        <p:txBody>
-          <a:bodyPr rtlCol="0" anchor="ctr"/>
-          <a:lstStyle/>
-          <a:p>
-            <a:pPr algn="ctr"/>
-          </a:p>
-        </p:txBody>
-      </p:sp>
-      <p:sp>
-        <p:nvSpPr>
-          <p:cNvPr id="19" name="TextBox 18"/>
-          <p:cNvSpPr txBox="1"/>
-          <p:nvPr/>
-        </p:nvSpPr>
-        <p:spPr>
-          <a:xfrm>
-            <a:off x="6355079" y="1755648"/>
-            <a:ext cx="2404872" cy="274320"/>
-          </a:xfrm>
-          <a:prstGeom prst="rect">
-            <a:avLst/>
-          </a:prstGeom>
-          <a:noFill/>
-        </p:spPr>
-        <p:txBody>
-          <a:bodyPr wrap="square" lIns="0" rIns="0" tIns="0" bIns="0" anchor="t"/>
-          <a:lstStyle/>
-          <a:p>
-            <a:pPr algn="l">
-              <a:spcBef>
-                <a:spcPts val="0"/>
-              </a:spcBef>
-              <a:spcAft>
-                <a:spcPts val="0"/>
-              </a:spcAft>
-            </a:pPr>
-            <a:r>
-              <a:rPr sz="1300" b="1" i="0">
-                <a:solidFill>
-                  <a:srgbClr val="C4841D"/>
-                </a:solidFill>
-                <a:latin typeface="Calibri"/>
-                <a:ea typeface="Calibri"/>
-                <a:cs typeface="Calibri"/>
-              </a:rPr>
-              <a:t>20% missed</a:t>
-            </a:r>
-          </a:p>
-        </p:txBody>
-      </p:sp>
-      <p:sp>
-        <p:nvSpPr>
-          <p:cNvPr id="20" name="TextBox 19"/>
-          <p:cNvSpPr txBox="1"/>
-          <p:nvPr/>
-        </p:nvSpPr>
-        <p:spPr>
-          <a:xfrm>
-            <a:off x="6355079" y="2148840"/>
-            <a:ext cx="2404872" cy="548640"/>
-          </a:xfrm>
-          <a:prstGeom prst="rect">
-            <a:avLst/>
-          </a:prstGeom>
-          <a:noFill/>
-        </p:spPr>
-        <p:txBody>
-          <a:bodyPr wrap="square" lIns="0" rIns="0" tIns="0" bIns="0" anchor="t"/>
-          <a:lstStyle/>
-          <a:p>
-            <a:pPr algn="l">
-              <a:spcBef>
-                <a:spcPts val="0"/>
-              </a:spcBef>
-              <a:spcAft>
-                <a:spcPts val="0"/>
-              </a:spcAft>
-            </a:pPr>
-            <a:r>
-              <a:rPr sz="2800" b="1" i="0">
-                <a:solidFill>
-                  <a:srgbClr val="1B6B5A"/>
-                </a:solidFill>
-                <a:latin typeface="Georgia"/>
-                <a:ea typeface="Georgia"/>
-                <a:cs typeface="Georgia"/>
-              </a:rPr>
-              <a:t>0.124</a:t>
-            </a:r>
-          </a:p>
-        </p:txBody>
-      </p:sp>
-      <p:sp>
-        <p:nvSpPr>
-          <p:cNvPr id="21" name="TextBox 20"/>
-          <p:cNvSpPr txBox="1"/>
-          <p:nvPr/>
-        </p:nvSpPr>
-        <p:spPr>
-          <a:xfrm>
-            <a:off x="6355079" y="2788920"/>
-            <a:ext cx="2404872" cy="274320"/>
-          </a:xfrm>
-          <a:prstGeom prst="rect">
-            <a:avLst/>
-          </a:prstGeom>
-          <a:noFill/>
-        </p:spPr>
-        <p:txBody>
-          <a:bodyPr wrap="square" lIns="0" rIns="0" tIns="0" bIns="0" anchor="t"/>
-          <a:lstStyle/>
-          <a:p>
-            <a:pPr algn="l">
-              <a:spcBef>
-                <a:spcPts val="0"/>
-              </a:spcBef>
-              <a:spcAft>
-                <a:spcPts val="0"/>
-              </a:spcAft>
-            </a:pPr>
-            <a:r>
-              <a:rPr sz="1300" b="0" i="0">
-                <a:solidFill>
-                  <a:srgbClr val="5E6E7C"/>
-                </a:solidFill>
-                <a:latin typeface="Calibri"/>
-                <a:ea typeface="Calibri"/>
-                <a:cs typeface="Calibri"/>
-              </a:rPr>
-              <a:t>litres / vehicle</a:t>
-            </a:r>
-          </a:p>
-        </p:txBody>
-      </p:sp>
-      <p:sp>
-        <p:nvSpPr>
-          <p:cNvPr id="22" name="TextBox 21"/>
-          <p:cNvSpPr txBox="1"/>
-          <p:nvPr/>
-        </p:nvSpPr>
-        <p:spPr>
-          <a:xfrm>
-            <a:off x="6355079" y="3200400"/>
-            <a:ext cx="2404872" cy="320040"/>
-          </a:xfrm>
-          <a:prstGeom prst="rect">
-            <a:avLst/>
-          </a:prstGeom>
-          <a:noFill/>
-        </p:spPr>
-        <p:txBody>
-          <a:bodyPr wrap="square" lIns="0" rIns="0" tIns="0" bIns="0" anchor="t"/>
-          <a:lstStyle/>
-          <a:p>
-            <a:pPr algn="l">
-              <a:spcBef>
-                <a:spcPts val="0"/>
-              </a:spcBef>
-              <a:spcAft>
-                <a:spcPts val="0"/>
-              </a:spcAft>
-            </a:pPr>
-            <a:r>
-              <a:rPr sz="1200" b="0" i="0">
-                <a:solidFill>
-                  <a:srgbClr val="5E6E7C"/>
-                </a:solidFill>
-                <a:latin typeface="Calibri"/>
-                <a:ea typeface="Calibri"/>
-                <a:cs typeface="Calibri"/>
-              </a:rPr>
-              <a:t>± 0.001   ·   n=3</a:t>
-            </a:r>
-          </a:p>
-        </p:txBody>
-      </p:sp>
-      <p:sp>
-        <p:nvSpPr>
-          <p:cNvPr id="23" name="Rounded Rectangle 22"/>
-          <p:cNvSpPr/>
-          <p:nvPr/>
-        </p:nvSpPr>
-        <p:spPr>
-          <a:xfrm>
-            <a:off x="9034272" y="1600200"/>
-            <a:ext cx="2697479" cy="2240280"/>
-          </a:xfrm>
-          <a:prstGeom prst="roundRect">
-            <a:avLst>
-              <a:gd name="adj" fmla="val 8000"/>
-            </a:avLst>
-          </a:prstGeom>
-          <a:solidFill>
-            <a:srgbClr val="FFFFFF"/>
-          </a:solidFill>
-          <a:ln w="12700">
-            <a:solidFill>
-              <a:srgbClr val="E3DBD0"/>
-            </a:solidFill>
-          </a:ln>
-        </p:spPr>
-        <p:style>
-          <a:lnRef idx="1">
-            <a:schemeClr val="accent1"/>
-          </a:lnRef>
-          <a:fillRef idx="3">
-            <a:schemeClr val="accent1"/>
-          </a:fillRef>
-          <a:effectRef idx="2">
-            <a:schemeClr val="accent1"/>
-          </a:effectRef>
-          <a:fontRef idx="minor">
-            <a:schemeClr val="lt1"/>
-          </a:fontRef>
-        </p:style>
-        <p:txBody>
-          <a:bodyPr rtlCol="0" anchor="ctr"/>
-          <a:lstStyle/>
-          <a:p>
-            <a:pPr algn="ctr"/>
-          </a:p>
-        </p:txBody>
-      </p:sp>
-      <p:sp>
-        <p:nvSpPr>
-          <p:cNvPr id="24" name="TextBox 23"/>
-          <p:cNvSpPr txBox="1"/>
-          <p:nvPr/>
-        </p:nvSpPr>
-        <p:spPr>
-          <a:xfrm>
-            <a:off x="9198864" y="1755648"/>
-            <a:ext cx="2404872" cy="274320"/>
-          </a:xfrm>
-          <a:prstGeom prst="rect">
-            <a:avLst/>
-          </a:prstGeom>
-          <a:noFill/>
-        </p:spPr>
-        <p:txBody>
-          <a:bodyPr wrap="square" lIns="0" rIns="0" tIns="0" bIns="0" anchor="t"/>
-          <a:lstStyle/>
-          <a:p>
-            <a:pPr algn="l">
-              <a:spcBef>
-                <a:spcPts val="0"/>
-              </a:spcBef>
-              <a:spcAft>
-                <a:spcPts val="0"/>
-              </a:spcAft>
-            </a:pPr>
-            <a:r>
-              <a:rPr sz="1300" b="1" i="0">
-                <a:solidFill>
-                  <a:srgbClr val="C4841D"/>
-                </a:solidFill>
-                <a:latin typeface="Calibri"/>
-                <a:ea typeface="Calibri"/>
-                <a:cs typeface="Calibri"/>
-              </a:rPr>
-              <a:t>30% missed</a:t>
-            </a:r>
-          </a:p>
-        </p:txBody>
-      </p:sp>
-      <p:sp>
-        <p:nvSpPr>
-          <p:cNvPr id="25" name="TextBox 24"/>
-          <p:cNvSpPr txBox="1"/>
-          <p:nvPr/>
-        </p:nvSpPr>
-        <p:spPr>
-          <a:xfrm>
-            <a:off x="9198864" y="2148840"/>
-            <a:ext cx="2404872" cy="548640"/>
-          </a:xfrm>
-          <a:prstGeom prst="rect">
-            <a:avLst/>
-          </a:prstGeom>
-          <a:noFill/>
-        </p:spPr>
-        <p:txBody>
-          <a:bodyPr wrap="square" lIns="0" rIns="0" tIns="0" bIns="0" anchor="t"/>
-          <a:lstStyle/>
-          <a:p>
-            <a:pPr algn="l">
-              <a:spcBef>
-                <a:spcPts val="0"/>
-              </a:spcBef>
-              <a:spcAft>
-                <a:spcPts val="0"/>
-              </a:spcAft>
-            </a:pPr>
-            <a:r>
-              <a:rPr sz="2800" b="1" i="0">
-                <a:solidFill>
-                  <a:srgbClr val="1B6B5A"/>
-                </a:solidFill>
-                <a:latin typeface="Georgia"/>
-                <a:ea typeface="Georgia"/>
-                <a:cs typeface="Georgia"/>
-              </a:rPr>
-              <a:t>0.124</a:t>
-            </a:r>
-          </a:p>
-        </p:txBody>
-      </p:sp>
-      <p:sp>
-        <p:nvSpPr>
-          <p:cNvPr id="26" name="TextBox 25"/>
-          <p:cNvSpPr txBox="1"/>
-          <p:nvPr/>
-        </p:nvSpPr>
-        <p:spPr>
-          <a:xfrm>
-            <a:off x="9198864" y="2788920"/>
-            <a:ext cx="2404872" cy="274320"/>
-          </a:xfrm>
-          <a:prstGeom prst="rect">
-            <a:avLst/>
-          </a:prstGeom>
-          <a:noFill/>
-        </p:spPr>
-        <p:txBody>
-          <a:bodyPr wrap="square" lIns="0" rIns="0" tIns="0" bIns="0" anchor="t"/>
-          <a:lstStyle/>
-          <a:p>
-            <a:pPr algn="l">
-              <a:spcBef>
-                <a:spcPts val="0"/>
-              </a:spcBef>
-              <a:spcAft>
-                <a:spcPts val="0"/>
-              </a:spcAft>
-            </a:pPr>
-            <a:r>
-              <a:rPr sz="1300" b="0" i="0">
-                <a:solidFill>
-                  <a:srgbClr val="5E6E7C"/>
-                </a:solidFill>
-                <a:latin typeface="Calibri"/>
-                <a:ea typeface="Calibri"/>
-                <a:cs typeface="Calibri"/>
-              </a:rPr>
-              <a:t>litres / vehicle</a:t>
-            </a:r>
-          </a:p>
-        </p:txBody>
-      </p:sp>
-      <p:sp>
-        <p:nvSpPr>
-          <p:cNvPr id="27" name="TextBox 26"/>
-          <p:cNvSpPr txBox="1"/>
-          <p:nvPr/>
-        </p:nvSpPr>
-        <p:spPr>
-          <a:xfrm>
-            <a:off x="9198864" y="3200400"/>
-            <a:ext cx="2404872" cy="320040"/>
-          </a:xfrm>
-          <a:prstGeom prst="rect">
-            <a:avLst/>
-          </a:prstGeom>
-          <a:noFill/>
-        </p:spPr>
-        <p:txBody>
-          <a:bodyPr wrap="square" lIns="0" rIns="0" tIns="0" bIns="0" anchor="t"/>
-          <a:lstStyle/>
-          <a:p>
-            <a:pPr algn="l">
-              <a:spcBef>
-                <a:spcPts val="0"/>
-              </a:spcBef>
-              <a:spcAft>
-                <a:spcPts val="0"/>
-              </a:spcAft>
-            </a:pPr>
-            <a:r>
-              <a:rPr sz="1200" b="0" i="0">
-                <a:solidFill>
-                  <a:srgbClr val="5E6E7C"/>
-                </a:solidFill>
-                <a:latin typeface="Calibri"/>
-                <a:ea typeface="Calibri"/>
-                <a:cs typeface="Calibri"/>
-              </a:rPr>
-              <a:t>± 0.001   ·   n=3</a:t>
-            </a:r>
-          </a:p>
-        </p:txBody>
-      </p:sp>
-      <p:sp>
-        <p:nvSpPr>
-          <p:cNvPr id="28" name="Rounded Rectangle 27"/>
-          <p:cNvSpPr/>
-          <p:nvPr/>
-        </p:nvSpPr>
-        <p:spPr>
-          <a:xfrm>
-            <a:off x="502920" y="4069080"/>
-            <a:ext cx="11228832" cy="2148840"/>
-          </a:xfrm>
-          <a:prstGeom prst="roundRect">
-            <a:avLst>
-              <a:gd name="adj" fmla="val 8000"/>
-            </a:avLst>
-          </a:prstGeom>
-          <a:solidFill>
-            <a:srgbClr val="FFFFFF"/>
-          </a:solidFill>
-          <a:ln w="12700">
-            <a:solidFill>
-              <a:srgbClr val="E3DBD0"/>
-            </a:solidFill>
-          </a:ln>
-        </p:spPr>
-        <p:style>
-          <a:lnRef idx="1">
-            <a:schemeClr val="accent1"/>
-          </a:lnRef>
-          <a:fillRef idx="3">
-            <a:schemeClr val="accent1"/>
-          </a:fillRef>
-          <a:effectRef idx="2">
-            <a:schemeClr val="accent1"/>
-          </a:effectRef>
-          <a:fontRef idx="minor">
-            <a:schemeClr val="lt1"/>
-          </a:fontRef>
-        </p:style>
-        <p:txBody>
-          <a:bodyPr rtlCol="0" anchor="ctr"/>
-          <a:lstStyle/>
-          <a:p>
-            <a:pPr algn="ctr"/>
-          </a:p>
-        </p:txBody>
-      </p:sp>
-      <p:sp>
-        <p:nvSpPr>
-          <p:cNvPr id="29" name="TextBox 28"/>
-          <p:cNvSpPr txBox="1"/>
-          <p:nvPr/>
-        </p:nvSpPr>
-        <p:spPr>
-          <a:xfrm>
-            <a:off x="777240" y="4224528"/>
-            <a:ext cx="7315200" cy="274320"/>
-          </a:xfrm>
-          <a:prstGeom prst="rect">
-            <a:avLst/>
-          </a:prstGeom>
-          <a:noFill/>
-        </p:spPr>
-        <p:txBody>
-          <a:bodyPr wrap="square" lIns="0" rIns="0" tIns="0" bIns="0" anchor="t"/>
-          <a:lstStyle/>
-          <a:p>
-            <a:pPr algn="l">
-              <a:spcBef>
-                <a:spcPts val="0"/>
-              </a:spcBef>
-              <a:spcAft>
-                <a:spcPts val="0"/>
-              </a:spcAft>
-            </a:pPr>
-            <a:r>
-              <a:rPr sz="1200" b="1" i="0">
-                <a:solidFill>
-                  <a:srgbClr val="C4841D"/>
-                </a:solidFill>
-                <a:latin typeface="Calibri"/>
-                <a:ea typeface="Calibri"/>
-                <a:cs typeface="Calibri"/>
-              </a:rPr>
-              <a:t>SAME SEEDS, NO MISSES</a:t>
-            </a:r>
-          </a:p>
-        </p:txBody>
-      </p:sp>
-      <p:sp>
-        <p:nvSpPr>
-          <p:cNvPr id="30" name="TextBox 29"/>
-          <p:cNvSpPr txBox="1"/>
-          <p:nvPr/>
-        </p:nvSpPr>
-        <p:spPr>
-          <a:xfrm>
-            <a:off x="777240" y="4617720"/>
-            <a:ext cx="3108960" cy="411480"/>
-          </a:xfrm>
-          <a:prstGeom prst="rect">
-            <a:avLst/>
-          </a:prstGeom>
-          <a:noFill/>
-        </p:spPr>
-        <p:txBody>
-          <a:bodyPr wrap="square" lIns="0" rIns="0" tIns="0" bIns="0" anchor="t"/>
-          <a:lstStyle/>
-          <a:p>
-            <a:pPr algn="l">
-              <a:spcBef>
-                <a:spcPts val="0"/>
-              </a:spcBef>
-              <a:spcAft>
-                <a:spcPts val="0"/>
-              </a:spcAft>
-            </a:pPr>
-            <a:r>
-              <a:rPr sz="2200" b="1" i="0">
-                <a:solidFill>
-                  <a:srgbClr val="1B6B5A"/>
-                </a:solidFill>
-                <a:latin typeface="Georgia"/>
-                <a:ea typeface="Georgia"/>
-                <a:cs typeface="Georgia"/>
-              </a:rPr>
-              <a:t>0.123 L</a:t>
-            </a:r>
-          </a:p>
-        </p:txBody>
-      </p:sp>
-      <p:sp>
-        <p:nvSpPr>
-          <p:cNvPr id="31" name="TextBox 30"/>
-          <p:cNvSpPr txBox="1"/>
-          <p:nvPr/>
-        </p:nvSpPr>
-        <p:spPr>
-          <a:xfrm>
-            <a:off x="777240" y="5074920"/>
-            <a:ext cx="3108960" cy="274320"/>
-          </a:xfrm>
-          <a:prstGeom prst="rect">
-            <a:avLst/>
-          </a:prstGeom>
-          <a:noFill/>
-        </p:spPr>
-        <p:txBody>
-          <a:bodyPr wrap="square" lIns="0" rIns="0" tIns="0" bIns="0" anchor="t"/>
-          <a:lstStyle/>
-          <a:p>
-            <a:pPr algn="l">
-              <a:spcBef>
-                <a:spcPts val="0"/>
-              </a:spcBef>
-              <a:spcAft>
-                <a:spcPts val="0"/>
-              </a:spcAft>
-            </a:pPr>
-            <a:r>
-              <a:rPr sz="1300" b="0" i="0">
-                <a:solidFill>
-                  <a:srgbClr val="5E6E7C"/>
-                </a:solidFill>
-                <a:latin typeface="Calibri"/>
-                <a:ea typeface="Calibri"/>
-                <a:cs typeface="Calibri"/>
-              </a:rPr>
-              <a:t>XtraFlow</a:t>
-            </a:r>
-          </a:p>
-        </p:txBody>
-      </p:sp>
-      <p:sp>
-        <p:nvSpPr>
-          <p:cNvPr id="32" name="TextBox 31"/>
-          <p:cNvSpPr txBox="1"/>
-          <p:nvPr/>
-        </p:nvSpPr>
-        <p:spPr>
-          <a:xfrm>
-            <a:off x="4069080" y="4617720"/>
-            <a:ext cx="3108960" cy="411480"/>
-          </a:xfrm>
-          <a:prstGeom prst="rect">
-            <a:avLst/>
-          </a:prstGeom>
-          <a:noFill/>
-        </p:spPr>
-        <p:txBody>
-          <a:bodyPr wrap="square" lIns="0" rIns="0" tIns="0" bIns="0" anchor="t"/>
-          <a:lstStyle/>
-          <a:p>
-            <a:pPr algn="l">
-              <a:spcBef>
-                <a:spcPts val="0"/>
-              </a:spcBef>
-              <a:spcAft>
-                <a:spcPts val="0"/>
-              </a:spcAft>
-            </a:pPr>
-            <a:r>
-              <a:rPr sz="2200" b="1" i="0">
-                <a:solidFill>
-                  <a:srgbClr val="1A2834"/>
-                </a:solidFill>
-                <a:latin typeface="Georgia"/>
-                <a:ea typeface="Georgia"/>
-                <a:cs typeface="Georgia"/>
-              </a:rPr>
-              <a:t>0.136 L</a:t>
-            </a:r>
-          </a:p>
-        </p:txBody>
-      </p:sp>
-      <p:sp>
-        <p:nvSpPr>
-          <p:cNvPr id="33" name="TextBox 32"/>
-          <p:cNvSpPr txBox="1"/>
-          <p:nvPr/>
-        </p:nvSpPr>
-        <p:spPr>
-          <a:xfrm>
-            <a:off x="4069080" y="5074920"/>
-            <a:ext cx="3108960" cy="274320"/>
-          </a:xfrm>
-          <a:prstGeom prst="rect">
-            <a:avLst/>
-          </a:prstGeom>
-          <a:noFill/>
-        </p:spPr>
-        <p:txBody>
-          <a:bodyPr wrap="square" lIns="0" rIns="0" tIns="0" bIns="0" anchor="t"/>
-          <a:lstStyle/>
-          <a:p>
-            <a:pPr algn="l">
-              <a:spcBef>
-                <a:spcPts val="0"/>
-              </a:spcBef>
-              <a:spcAft>
-                <a:spcPts val="0"/>
-              </a:spcAft>
-            </a:pPr>
-            <a:r>
-              <a:rPr sz="1300" b="0" i="0">
-                <a:solidFill>
-                  <a:srgbClr val="5E6E7C"/>
-                </a:solidFill>
-                <a:latin typeface="Calibri"/>
-                <a:ea typeface="Calibri"/>
-                <a:cs typeface="Calibri"/>
-              </a:rPr>
-              <a:t>Actuated</a:t>
-            </a:r>
-          </a:p>
-        </p:txBody>
-      </p:sp>
-      <p:sp>
-        <p:nvSpPr>
-          <p:cNvPr id="34" name="TextBox 33"/>
-          <p:cNvSpPr txBox="1"/>
-          <p:nvPr/>
-        </p:nvSpPr>
-        <p:spPr>
-          <a:xfrm>
-            <a:off x="777240" y="5532120"/>
-            <a:ext cx="10680192" cy="457200"/>
-          </a:xfrm>
-          <a:prstGeom prst="rect">
-            <a:avLst/>
-          </a:prstGeom>
-          <a:noFill/>
-        </p:spPr>
-        <p:txBody>
-          <a:bodyPr wrap="square" lIns="0" rIns="0" tIns="0" bIns="0" anchor="t"/>
-          <a:lstStyle/>
-          <a:p>
-            <a:pPr algn="l">
-              <a:spcBef>
-                <a:spcPts val="0"/>
-              </a:spcBef>
-              <a:spcAft>
-                <a:spcPts val="0"/>
-              </a:spcAft>
-            </a:pPr>
-            <a:r>
-              <a:rPr sz="1400" b="0" i="0">
-                <a:solidFill>
-                  <a:srgbClr val="1A2834"/>
-                </a:solidFill>
-                <a:latin typeface="Calibri"/>
-                <a:ea typeface="Calibri"/>
-                <a:cs typeface="Calibri"/>
-              </a:rPr>
-              <a:t>Every miss level on this slide has lower mean fuel than every reference line. Noise-model point (see noise_model.json) is 0.125 L.</a:t>
+              <a:t>Four cameras are four different Bellevue junctions, mapped to N/E/S/W for a mosaic demo. Not synchronized approaches of one intersection.  ·  Bellevue Traffic Video Dataset (City of Bellevue) — research use</a:t>
             </a:r>
           </a:p>
         </p:txBody>
@@ -7094,7 +7513,7 @@
                 <a:ea typeface="Calibri"/>
                 <a:cs typeface="Calibri"/>
               </a:rPr>
-              <a:t>WHERE IT DOES NOT TRANSFER</a:t>
+              <a:t>IF THE CAMERA MISSES</a:t>
             </a:r>
           </a:p>
         </p:txBody>
@@ -7136,7 +7555,7 @@
                 <a:ea typeface="Georgia"/>
                 <a:cs typeface="Georgia"/>
               </a:rPr>
-              <a:t>The 2×2 grid was not scored in this publish</a:t>
+              <a:t>At the highest miss rate, mean fuel is under the reference lines</a:t>
             </a:r>
           </a:p>
         </p:txBody>
@@ -7178,7 +7597,7 @@
                 <a:ea typeface="Calibri"/>
                 <a:cs typeface="Calibri"/>
               </a:rPr>
-              <a:t>A corridor result is only quoted from results/grid_results.json after a successful sweep.</a:t>
+              <a:t>Peak, one-sided. 3 seeds. Vehicles are dropped from the detector at random.</a:t>
             </a:r>
           </a:p>
         </p:txBody>
@@ -7275,8 +7694,8 @@
         </p:nvSpPr>
         <p:spPr>
           <a:xfrm>
-            <a:off x="502920" y="1737360"/>
-            <a:ext cx="11228832" cy="3291840"/>
+            <a:off x="502920" y="1600200"/>
+            <a:ext cx="2697479" cy="2240280"/>
           </a:xfrm>
           <a:prstGeom prst="roundRect">
             <a:avLst>
@@ -7284,10 +7703,12 @@
             </a:avLst>
           </a:prstGeom>
           <a:solidFill>
-            <a:srgbClr val="0E1C2B"/>
+            <a:srgbClr val="FFFFFF"/>
           </a:solidFill>
-          <a:ln>
-            <a:noFill/>
+          <a:ln w="12700">
+            <a:solidFill>
+              <a:srgbClr val="E3DBD0"/>
+            </a:solidFill>
           </a:ln>
         </p:spPr>
         <p:style>
@@ -7320,28 +7741,28 @@
         </p:nvSpPr>
         <p:spPr>
           <a:xfrm>
-            <a:off x="868680" y="2057400"/>
-            <a:ext cx="10497311" cy="365760"/>
-          </a:xfrm>
-          <a:prstGeom prst="rect">
-            <a:avLst/>
-          </a:prstGeom>
-          <a:noFill/>
-        </p:spPr>
-        <p:txBody>
-          <a:bodyPr wrap="square" lIns="0" rIns="0" tIns="0" bIns="0" anchor="t"/>
-          <a:lstStyle/>
-          <a:p>
-            <a:pPr algn="l">
-              <a:spcBef>
-                <a:spcPts val="0"/>
-              </a:spcBef>
-              <a:spcAft>
-                <a:spcPts val="0"/>
-              </a:spcAft>
-            </a:pPr>
-            <a:r>
-              <a:rPr sz="1400" b="1" i="0">
+            <a:off x="667512" y="1755648"/>
+            <a:ext cx="2404872" cy="274320"/>
+          </a:xfrm>
+          <a:prstGeom prst="rect">
+            <a:avLst/>
+          </a:prstGeom>
+          <a:noFill/>
+        </p:spPr>
+        <p:txBody>
+          <a:bodyPr wrap="square" lIns="0" rIns="0" tIns="0" bIns="0" anchor="t"/>
+          <a:lstStyle/>
+          <a:p>
+            <a:pPr algn="l">
+              <a:spcBef>
+                <a:spcPts val="0"/>
+              </a:spcBef>
+              <a:spcAft>
+                <a:spcPts val="0"/>
+              </a:spcAft>
+            </a:pPr>
+            <a:r>
+              <a:rPr sz="1300" b="1" i="0">
                 <a:solidFill>
                   <a:srgbClr val="C4841D"/>
                 </a:solidFill>
@@ -7349,7 +7770,7 @@
                 <a:ea typeface="Calibri"/>
                 <a:cs typeface="Calibri"/>
               </a:rPr>
-              <a:t>NO NUMERIC GRID CLAIM</a:t>
+              <a:t>0% missed</a:t>
             </a:r>
           </a:p>
         </p:txBody>
@@ -7362,78 +7783,1064 @@
         </p:nvSpPr>
         <p:spPr>
           <a:xfrm>
-            <a:off x="868680" y="2606040"/>
-            <a:ext cx="10497311" cy="1645920"/>
-          </a:xfrm>
-          <a:prstGeom prst="rect">
-            <a:avLst/>
-          </a:prstGeom>
-          <a:noFill/>
-        </p:spPr>
-        <p:txBody>
-          <a:bodyPr wrap="square" lIns="0" rIns="0" tIns="0" bIns="0" anchor="t"/>
-          <a:lstStyle/>
-          <a:p>
-            <a:pPr algn="l">
-              <a:spcBef>
-                <a:spcPts val="0"/>
-              </a:spcBef>
-              <a:spcAft>
-                <a:spcPts val="0"/>
-              </a:spcAft>
-            </a:pPr>
-            <a:r>
-              <a:rPr sz="1800" b="0" i="0">
-                <a:solidFill>
-                  <a:srgbClr val="FFFFFF"/>
+            <a:off x="667512" y="2148840"/>
+            <a:ext cx="2404872" cy="548640"/>
+          </a:xfrm>
+          <a:prstGeom prst="rect">
+            <a:avLst/>
+          </a:prstGeom>
+          <a:noFill/>
+        </p:spPr>
+        <p:txBody>
+          <a:bodyPr wrap="square" lIns="0" rIns="0" tIns="0" bIns="0" anchor="t"/>
+          <a:lstStyle/>
+          <a:p>
+            <a:pPr algn="l">
+              <a:spcBef>
+                <a:spcPts val="0"/>
+              </a:spcBef>
+              <a:spcAft>
+                <a:spcPts val="0"/>
+              </a:spcAft>
+            </a:pPr>
+            <a:r>
+              <a:rPr sz="2800" b="1" i="0">
+                <a:solidFill>
+                  <a:srgbClr val="1B6B5A"/>
+                </a:solidFill>
+                <a:latin typeface="Georgia"/>
+                <a:ea typeface="Georgia"/>
+                <a:cs typeface="Georgia"/>
+              </a:rPr>
+              <a:t>0.123</a:t>
+            </a:r>
+          </a:p>
+        </p:txBody>
+      </p:sp>
+      <p:sp>
+        <p:nvSpPr>
+          <p:cNvPr id="11" name="TextBox 10"/>
+          <p:cNvSpPr txBox="1"/>
+          <p:nvPr/>
+        </p:nvSpPr>
+        <p:spPr>
+          <a:xfrm>
+            <a:off x="667512" y="2788920"/>
+            <a:ext cx="2404872" cy="274320"/>
+          </a:xfrm>
+          <a:prstGeom prst="rect">
+            <a:avLst/>
+          </a:prstGeom>
+          <a:noFill/>
+        </p:spPr>
+        <p:txBody>
+          <a:bodyPr wrap="square" lIns="0" rIns="0" tIns="0" bIns="0" anchor="t"/>
+          <a:lstStyle/>
+          <a:p>
+            <a:pPr algn="l">
+              <a:spcBef>
+                <a:spcPts val="0"/>
+              </a:spcBef>
+              <a:spcAft>
+                <a:spcPts val="0"/>
+              </a:spcAft>
+            </a:pPr>
+            <a:r>
+              <a:rPr sz="1300" b="0" i="0">
+                <a:solidFill>
+                  <a:srgbClr val="5E6E7C"/>
                 </a:solidFill>
                 <a:latin typeface="Calibri"/>
                 <a:ea typeface="Calibri"/>
                 <a:cs typeface="Calibri"/>
               </a:rPr>
-              <a:t>2x2 grid not scored in this time-cut run. duarouter path was fixed, but the single-intersection tls.add.xml does not provide programs for the grid TLS ids, so SUMO aborts.</a:t>
-            </a:r>
-          </a:p>
-        </p:txBody>
-      </p:sp>
-      <p:sp>
-        <p:nvSpPr>
-          <p:cNvPr id="11" name="TextBox 10"/>
-          <p:cNvSpPr txBox="1"/>
-          <p:nvPr/>
-        </p:nvSpPr>
-        <p:spPr>
-          <a:xfrm>
-            <a:off x="868680" y="4434840"/>
-            <a:ext cx="10497311" cy="365760"/>
-          </a:xfrm>
-          <a:prstGeom prst="rect">
-            <a:avLst/>
-          </a:prstGeom>
-          <a:noFill/>
-        </p:spPr>
-        <p:txBody>
-          <a:bodyPr wrap="square" lIns="0" rIns="0" tIns="0" bIns="0" anchor="t"/>
-          <a:lstStyle/>
-          <a:p>
-            <a:pPr algn="l">
-              <a:spcBef>
-                <a:spcPts val="0"/>
-              </a:spcBef>
-              <a:spcAft>
-                <a:spcPts val="0"/>
-              </a:spcAft>
-            </a:pPr>
-            <a:r>
-              <a:rPr sz="1500" b="0" i="0">
-                <a:solidFill>
-                  <a:srgbClr val="C9D4DC"/>
+              <a:t>litres / vehicle</a:t>
+            </a:r>
+          </a:p>
+        </p:txBody>
+      </p:sp>
+      <p:sp>
+        <p:nvSpPr>
+          <p:cNvPr id="12" name="TextBox 11"/>
+          <p:cNvSpPr txBox="1"/>
+          <p:nvPr/>
+        </p:nvSpPr>
+        <p:spPr>
+          <a:xfrm>
+            <a:off x="667512" y="3200400"/>
+            <a:ext cx="2404872" cy="320040"/>
+          </a:xfrm>
+          <a:prstGeom prst="rect">
+            <a:avLst/>
+          </a:prstGeom>
+          <a:noFill/>
+        </p:spPr>
+        <p:txBody>
+          <a:bodyPr wrap="square" lIns="0" rIns="0" tIns="0" bIns="0" anchor="t"/>
+          <a:lstStyle/>
+          <a:p>
+            <a:pPr algn="l">
+              <a:spcBef>
+                <a:spcPts val="0"/>
+              </a:spcBef>
+              <a:spcAft>
+                <a:spcPts val="0"/>
+              </a:spcAft>
+            </a:pPr>
+            <a:r>
+              <a:rPr sz="1200" b="0" i="0">
+                <a:solidFill>
+                  <a:srgbClr val="5E6E7C"/>
                 </a:solidFill>
                 <a:latin typeface="Calibri"/>
                 <a:ea typeface="Calibri"/>
                 <a:cs typeface="Calibri"/>
               </a:rPr>
-              <a:t>Do not scale the single-junction result to a city.</a:t>
+              <a:t>± 0.002   ·   n=3</a:t>
+            </a:r>
+          </a:p>
+        </p:txBody>
+      </p:sp>
+      <p:sp>
+        <p:nvSpPr>
+          <p:cNvPr id="13" name="Rounded Rectangle 12"/>
+          <p:cNvSpPr/>
+          <p:nvPr/>
+        </p:nvSpPr>
+        <p:spPr>
+          <a:xfrm>
+            <a:off x="3346704" y="1600200"/>
+            <a:ext cx="2697479" cy="2240280"/>
+          </a:xfrm>
+          <a:prstGeom prst="roundRect">
+            <a:avLst>
+              <a:gd name="adj" fmla="val 8000"/>
+            </a:avLst>
+          </a:prstGeom>
+          <a:solidFill>
+            <a:srgbClr val="FFFFFF"/>
+          </a:solidFill>
+          <a:ln w="12700">
+            <a:solidFill>
+              <a:srgbClr val="E3DBD0"/>
+            </a:solidFill>
+          </a:ln>
+        </p:spPr>
+        <p:style>
+          <a:lnRef idx="1">
+            <a:schemeClr val="accent1"/>
+          </a:lnRef>
+          <a:fillRef idx="3">
+            <a:schemeClr val="accent1"/>
+          </a:fillRef>
+          <a:effectRef idx="2">
+            <a:schemeClr val="accent1"/>
+          </a:effectRef>
+          <a:fontRef idx="minor">
+            <a:schemeClr val="lt1"/>
+          </a:fontRef>
+        </p:style>
+        <p:txBody>
+          <a:bodyPr rtlCol="0" anchor="ctr"/>
+          <a:lstStyle/>
+          <a:p>
+            <a:pPr algn="ctr"/>
+          </a:p>
+        </p:txBody>
+      </p:sp>
+      <p:sp>
+        <p:nvSpPr>
+          <p:cNvPr id="14" name="TextBox 13"/>
+          <p:cNvSpPr txBox="1"/>
+          <p:nvPr/>
+        </p:nvSpPr>
+        <p:spPr>
+          <a:xfrm>
+            <a:off x="3511296" y="1755648"/>
+            <a:ext cx="2404872" cy="274320"/>
+          </a:xfrm>
+          <a:prstGeom prst="rect">
+            <a:avLst/>
+          </a:prstGeom>
+          <a:noFill/>
+        </p:spPr>
+        <p:txBody>
+          <a:bodyPr wrap="square" lIns="0" rIns="0" tIns="0" bIns="0" anchor="t"/>
+          <a:lstStyle/>
+          <a:p>
+            <a:pPr algn="l">
+              <a:spcBef>
+                <a:spcPts val="0"/>
+              </a:spcBef>
+              <a:spcAft>
+                <a:spcPts val="0"/>
+              </a:spcAft>
+            </a:pPr>
+            <a:r>
+              <a:rPr sz="1300" b="1" i="0">
+                <a:solidFill>
+                  <a:srgbClr val="C4841D"/>
+                </a:solidFill>
+                <a:latin typeface="Calibri"/>
+                <a:ea typeface="Calibri"/>
+                <a:cs typeface="Calibri"/>
+              </a:rPr>
+              <a:t>10% missed</a:t>
+            </a:r>
+          </a:p>
+        </p:txBody>
+      </p:sp>
+      <p:sp>
+        <p:nvSpPr>
+          <p:cNvPr id="15" name="TextBox 14"/>
+          <p:cNvSpPr txBox="1"/>
+          <p:nvPr/>
+        </p:nvSpPr>
+        <p:spPr>
+          <a:xfrm>
+            <a:off x="3511296" y="2148840"/>
+            <a:ext cx="2404872" cy="548640"/>
+          </a:xfrm>
+          <a:prstGeom prst="rect">
+            <a:avLst/>
+          </a:prstGeom>
+          <a:noFill/>
+        </p:spPr>
+        <p:txBody>
+          <a:bodyPr wrap="square" lIns="0" rIns="0" tIns="0" bIns="0" anchor="t"/>
+          <a:lstStyle/>
+          <a:p>
+            <a:pPr algn="l">
+              <a:spcBef>
+                <a:spcPts val="0"/>
+              </a:spcBef>
+              <a:spcAft>
+                <a:spcPts val="0"/>
+              </a:spcAft>
+            </a:pPr>
+            <a:r>
+              <a:rPr sz="2800" b="1" i="0">
+                <a:solidFill>
+                  <a:srgbClr val="1B6B5A"/>
+                </a:solidFill>
+                <a:latin typeface="Georgia"/>
+                <a:ea typeface="Georgia"/>
+                <a:cs typeface="Georgia"/>
+              </a:rPr>
+              <a:t>0.123</a:t>
+            </a:r>
+          </a:p>
+        </p:txBody>
+      </p:sp>
+      <p:sp>
+        <p:nvSpPr>
+          <p:cNvPr id="16" name="TextBox 15"/>
+          <p:cNvSpPr txBox="1"/>
+          <p:nvPr/>
+        </p:nvSpPr>
+        <p:spPr>
+          <a:xfrm>
+            <a:off x="3511296" y="2788920"/>
+            <a:ext cx="2404872" cy="274320"/>
+          </a:xfrm>
+          <a:prstGeom prst="rect">
+            <a:avLst/>
+          </a:prstGeom>
+          <a:noFill/>
+        </p:spPr>
+        <p:txBody>
+          <a:bodyPr wrap="square" lIns="0" rIns="0" tIns="0" bIns="0" anchor="t"/>
+          <a:lstStyle/>
+          <a:p>
+            <a:pPr algn="l">
+              <a:spcBef>
+                <a:spcPts val="0"/>
+              </a:spcBef>
+              <a:spcAft>
+                <a:spcPts val="0"/>
+              </a:spcAft>
+            </a:pPr>
+            <a:r>
+              <a:rPr sz="1300" b="0" i="0">
+                <a:solidFill>
+                  <a:srgbClr val="5E6E7C"/>
+                </a:solidFill>
+                <a:latin typeface="Calibri"/>
+                <a:ea typeface="Calibri"/>
+                <a:cs typeface="Calibri"/>
+              </a:rPr>
+              <a:t>litres / vehicle</a:t>
+            </a:r>
+          </a:p>
+        </p:txBody>
+      </p:sp>
+      <p:sp>
+        <p:nvSpPr>
+          <p:cNvPr id="17" name="TextBox 16"/>
+          <p:cNvSpPr txBox="1"/>
+          <p:nvPr/>
+        </p:nvSpPr>
+        <p:spPr>
+          <a:xfrm>
+            <a:off x="3511296" y="3200400"/>
+            <a:ext cx="2404872" cy="320040"/>
+          </a:xfrm>
+          <a:prstGeom prst="rect">
+            <a:avLst/>
+          </a:prstGeom>
+          <a:noFill/>
+        </p:spPr>
+        <p:txBody>
+          <a:bodyPr wrap="square" lIns="0" rIns="0" tIns="0" bIns="0" anchor="t"/>
+          <a:lstStyle/>
+          <a:p>
+            <a:pPr algn="l">
+              <a:spcBef>
+                <a:spcPts val="0"/>
+              </a:spcBef>
+              <a:spcAft>
+                <a:spcPts val="0"/>
+              </a:spcAft>
+            </a:pPr>
+            <a:r>
+              <a:rPr sz="1200" b="0" i="0">
+                <a:solidFill>
+                  <a:srgbClr val="5E6E7C"/>
+                </a:solidFill>
+                <a:latin typeface="Calibri"/>
+                <a:ea typeface="Calibri"/>
+                <a:cs typeface="Calibri"/>
+              </a:rPr>
+              <a:t>± 0.002   ·   n=3</a:t>
+            </a:r>
+          </a:p>
+        </p:txBody>
+      </p:sp>
+      <p:sp>
+        <p:nvSpPr>
+          <p:cNvPr id="18" name="Rounded Rectangle 17"/>
+          <p:cNvSpPr/>
+          <p:nvPr/>
+        </p:nvSpPr>
+        <p:spPr>
+          <a:xfrm>
+            <a:off x="6190488" y="1600200"/>
+            <a:ext cx="2697479" cy="2240280"/>
+          </a:xfrm>
+          <a:prstGeom prst="roundRect">
+            <a:avLst>
+              <a:gd name="adj" fmla="val 8000"/>
+            </a:avLst>
+          </a:prstGeom>
+          <a:solidFill>
+            <a:srgbClr val="FFFFFF"/>
+          </a:solidFill>
+          <a:ln w="12700">
+            <a:solidFill>
+              <a:srgbClr val="E3DBD0"/>
+            </a:solidFill>
+          </a:ln>
+        </p:spPr>
+        <p:style>
+          <a:lnRef idx="1">
+            <a:schemeClr val="accent1"/>
+          </a:lnRef>
+          <a:fillRef idx="3">
+            <a:schemeClr val="accent1"/>
+          </a:fillRef>
+          <a:effectRef idx="2">
+            <a:schemeClr val="accent1"/>
+          </a:effectRef>
+          <a:fontRef idx="minor">
+            <a:schemeClr val="lt1"/>
+          </a:fontRef>
+        </p:style>
+        <p:txBody>
+          <a:bodyPr rtlCol="0" anchor="ctr"/>
+          <a:lstStyle/>
+          <a:p>
+            <a:pPr algn="ctr"/>
+          </a:p>
+        </p:txBody>
+      </p:sp>
+      <p:sp>
+        <p:nvSpPr>
+          <p:cNvPr id="19" name="TextBox 18"/>
+          <p:cNvSpPr txBox="1"/>
+          <p:nvPr/>
+        </p:nvSpPr>
+        <p:spPr>
+          <a:xfrm>
+            <a:off x="6355079" y="1755648"/>
+            <a:ext cx="2404872" cy="274320"/>
+          </a:xfrm>
+          <a:prstGeom prst="rect">
+            <a:avLst/>
+          </a:prstGeom>
+          <a:noFill/>
+        </p:spPr>
+        <p:txBody>
+          <a:bodyPr wrap="square" lIns="0" rIns="0" tIns="0" bIns="0" anchor="t"/>
+          <a:lstStyle/>
+          <a:p>
+            <a:pPr algn="l">
+              <a:spcBef>
+                <a:spcPts val="0"/>
+              </a:spcBef>
+              <a:spcAft>
+                <a:spcPts val="0"/>
+              </a:spcAft>
+            </a:pPr>
+            <a:r>
+              <a:rPr sz="1300" b="1" i="0">
+                <a:solidFill>
+                  <a:srgbClr val="C4841D"/>
+                </a:solidFill>
+                <a:latin typeface="Calibri"/>
+                <a:ea typeface="Calibri"/>
+                <a:cs typeface="Calibri"/>
+              </a:rPr>
+              <a:t>20% missed</a:t>
+            </a:r>
+          </a:p>
+        </p:txBody>
+      </p:sp>
+      <p:sp>
+        <p:nvSpPr>
+          <p:cNvPr id="20" name="TextBox 19"/>
+          <p:cNvSpPr txBox="1"/>
+          <p:nvPr/>
+        </p:nvSpPr>
+        <p:spPr>
+          <a:xfrm>
+            <a:off x="6355079" y="2148840"/>
+            <a:ext cx="2404872" cy="548640"/>
+          </a:xfrm>
+          <a:prstGeom prst="rect">
+            <a:avLst/>
+          </a:prstGeom>
+          <a:noFill/>
+        </p:spPr>
+        <p:txBody>
+          <a:bodyPr wrap="square" lIns="0" rIns="0" tIns="0" bIns="0" anchor="t"/>
+          <a:lstStyle/>
+          <a:p>
+            <a:pPr algn="l">
+              <a:spcBef>
+                <a:spcPts val="0"/>
+              </a:spcBef>
+              <a:spcAft>
+                <a:spcPts val="0"/>
+              </a:spcAft>
+            </a:pPr>
+            <a:r>
+              <a:rPr sz="2800" b="1" i="0">
+                <a:solidFill>
+                  <a:srgbClr val="1B6B5A"/>
+                </a:solidFill>
+                <a:latin typeface="Georgia"/>
+                <a:ea typeface="Georgia"/>
+                <a:cs typeface="Georgia"/>
+              </a:rPr>
+              <a:t>0.124</a:t>
+            </a:r>
+          </a:p>
+        </p:txBody>
+      </p:sp>
+      <p:sp>
+        <p:nvSpPr>
+          <p:cNvPr id="21" name="TextBox 20"/>
+          <p:cNvSpPr txBox="1"/>
+          <p:nvPr/>
+        </p:nvSpPr>
+        <p:spPr>
+          <a:xfrm>
+            <a:off x="6355079" y="2788920"/>
+            <a:ext cx="2404872" cy="274320"/>
+          </a:xfrm>
+          <a:prstGeom prst="rect">
+            <a:avLst/>
+          </a:prstGeom>
+          <a:noFill/>
+        </p:spPr>
+        <p:txBody>
+          <a:bodyPr wrap="square" lIns="0" rIns="0" tIns="0" bIns="0" anchor="t"/>
+          <a:lstStyle/>
+          <a:p>
+            <a:pPr algn="l">
+              <a:spcBef>
+                <a:spcPts val="0"/>
+              </a:spcBef>
+              <a:spcAft>
+                <a:spcPts val="0"/>
+              </a:spcAft>
+            </a:pPr>
+            <a:r>
+              <a:rPr sz="1300" b="0" i="0">
+                <a:solidFill>
+                  <a:srgbClr val="5E6E7C"/>
+                </a:solidFill>
+                <a:latin typeface="Calibri"/>
+                <a:ea typeface="Calibri"/>
+                <a:cs typeface="Calibri"/>
+              </a:rPr>
+              <a:t>litres / vehicle</a:t>
+            </a:r>
+          </a:p>
+        </p:txBody>
+      </p:sp>
+      <p:sp>
+        <p:nvSpPr>
+          <p:cNvPr id="22" name="TextBox 21"/>
+          <p:cNvSpPr txBox="1"/>
+          <p:nvPr/>
+        </p:nvSpPr>
+        <p:spPr>
+          <a:xfrm>
+            <a:off x="6355079" y="3200400"/>
+            <a:ext cx="2404872" cy="320040"/>
+          </a:xfrm>
+          <a:prstGeom prst="rect">
+            <a:avLst/>
+          </a:prstGeom>
+          <a:noFill/>
+        </p:spPr>
+        <p:txBody>
+          <a:bodyPr wrap="square" lIns="0" rIns="0" tIns="0" bIns="0" anchor="t"/>
+          <a:lstStyle/>
+          <a:p>
+            <a:pPr algn="l">
+              <a:spcBef>
+                <a:spcPts val="0"/>
+              </a:spcBef>
+              <a:spcAft>
+                <a:spcPts val="0"/>
+              </a:spcAft>
+            </a:pPr>
+            <a:r>
+              <a:rPr sz="1200" b="0" i="0">
+                <a:solidFill>
+                  <a:srgbClr val="5E6E7C"/>
+                </a:solidFill>
+                <a:latin typeface="Calibri"/>
+                <a:ea typeface="Calibri"/>
+                <a:cs typeface="Calibri"/>
+              </a:rPr>
+              <a:t>± 0.001   ·   n=3</a:t>
+            </a:r>
+          </a:p>
+        </p:txBody>
+      </p:sp>
+      <p:sp>
+        <p:nvSpPr>
+          <p:cNvPr id="23" name="Rounded Rectangle 22"/>
+          <p:cNvSpPr/>
+          <p:nvPr/>
+        </p:nvSpPr>
+        <p:spPr>
+          <a:xfrm>
+            <a:off x="9034272" y="1600200"/>
+            <a:ext cx="2697479" cy="2240280"/>
+          </a:xfrm>
+          <a:prstGeom prst="roundRect">
+            <a:avLst>
+              <a:gd name="adj" fmla="val 8000"/>
+            </a:avLst>
+          </a:prstGeom>
+          <a:solidFill>
+            <a:srgbClr val="FFFFFF"/>
+          </a:solidFill>
+          <a:ln w="12700">
+            <a:solidFill>
+              <a:srgbClr val="E3DBD0"/>
+            </a:solidFill>
+          </a:ln>
+        </p:spPr>
+        <p:style>
+          <a:lnRef idx="1">
+            <a:schemeClr val="accent1"/>
+          </a:lnRef>
+          <a:fillRef idx="3">
+            <a:schemeClr val="accent1"/>
+          </a:fillRef>
+          <a:effectRef idx="2">
+            <a:schemeClr val="accent1"/>
+          </a:effectRef>
+          <a:fontRef idx="minor">
+            <a:schemeClr val="lt1"/>
+          </a:fontRef>
+        </p:style>
+        <p:txBody>
+          <a:bodyPr rtlCol="0" anchor="ctr"/>
+          <a:lstStyle/>
+          <a:p>
+            <a:pPr algn="ctr"/>
+          </a:p>
+        </p:txBody>
+      </p:sp>
+      <p:sp>
+        <p:nvSpPr>
+          <p:cNvPr id="24" name="TextBox 23"/>
+          <p:cNvSpPr txBox="1"/>
+          <p:nvPr/>
+        </p:nvSpPr>
+        <p:spPr>
+          <a:xfrm>
+            <a:off x="9198864" y="1755648"/>
+            <a:ext cx="2404872" cy="274320"/>
+          </a:xfrm>
+          <a:prstGeom prst="rect">
+            <a:avLst/>
+          </a:prstGeom>
+          <a:noFill/>
+        </p:spPr>
+        <p:txBody>
+          <a:bodyPr wrap="square" lIns="0" rIns="0" tIns="0" bIns="0" anchor="t"/>
+          <a:lstStyle/>
+          <a:p>
+            <a:pPr algn="l">
+              <a:spcBef>
+                <a:spcPts val="0"/>
+              </a:spcBef>
+              <a:spcAft>
+                <a:spcPts val="0"/>
+              </a:spcAft>
+            </a:pPr>
+            <a:r>
+              <a:rPr sz="1300" b="1" i="0">
+                <a:solidFill>
+                  <a:srgbClr val="C4841D"/>
+                </a:solidFill>
+                <a:latin typeface="Calibri"/>
+                <a:ea typeface="Calibri"/>
+                <a:cs typeface="Calibri"/>
+              </a:rPr>
+              <a:t>30% missed</a:t>
+            </a:r>
+          </a:p>
+        </p:txBody>
+      </p:sp>
+      <p:sp>
+        <p:nvSpPr>
+          <p:cNvPr id="25" name="TextBox 24"/>
+          <p:cNvSpPr txBox="1"/>
+          <p:nvPr/>
+        </p:nvSpPr>
+        <p:spPr>
+          <a:xfrm>
+            <a:off x="9198864" y="2148840"/>
+            <a:ext cx="2404872" cy="548640"/>
+          </a:xfrm>
+          <a:prstGeom prst="rect">
+            <a:avLst/>
+          </a:prstGeom>
+          <a:noFill/>
+        </p:spPr>
+        <p:txBody>
+          <a:bodyPr wrap="square" lIns="0" rIns="0" tIns="0" bIns="0" anchor="t"/>
+          <a:lstStyle/>
+          <a:p>
+            <a:pPr algn="l">
+              <a:spcBef>
+                <a:spcPts val="0"/>
+              </a:spcBef>
+              <a:spcAft>
+                <a:spcPts val="0"/>
+              </a:spcAft>
+            </a:pPr>
+            <a:r>
+              <a:rPr sz="2800" b="1" i="0">
+                <a:solidFill>
+                  <a:srgbClr val="1B6B5A"/>
+                </a:solidFill>
+                <a:latin typeface="Georgia"/>
+                <a:ea typeface="Georgia"/>
+                <a:cs typeface="Georgia"/>
+              </a:rPr>
+              <a:t>0.124</a:t>
+            </a:r>
+          </a:p>
+        </p:txBody>
+      </p:sp>
+      <p:sp>
+        <p:nvSpPr>
+          <p:cNvPr id="26" name="TextBox 25"/>
+          <p:cNvSpPr txBox="1"/>
+          <p:nvPr/>
+        </p:nvSpPr>
+        <p:spPr>
+          <a:xfrm>
+            <a:off x="9198864" y="2788920"/>
+            <a:ext cx="2404872" cy="274320"/>
+          </a:xfrm>
+          <a:prstGeom prst="rect">
+            <a:avLst/>
+          </a:prstGeom>
+          <a:noFill/>
+        </p:spPr>
+        <p:txBody>
+          <a:bodyPr wrap="square" lIns="0" rIns="0" tIns="0" bIns="0" anchor="t"/>
+          <a:lstStyle/>
+          <a:p>
+            <a:pPr algn="l">
+              <a:spcBef>
+                <a:spcPts val="0"/>
+              </a:spcBef>
+              <a:spcAft>
+                <a:spcPts val="0"/>
+              </a:spcAft>
+            </a:pPr>
+            <a:r>
+              <a:rPr sz="1300" b="0" i="0">
+                <a:solidFill>
+                  <a:srgbClr val="5E6E7C"/>
+                </a:solidFill>
+                <a:latin typeface="Calibri"/>
+                <a:ea typeface="Calibri"/>
+                <a:cs typeface="Calibri"/>
+              </a:rPr>
+              <a:t>litres / vehicle</a:t>
+            </a:r>
+          </a:p>
+        </p:txBody>
+      </p:sp>
+      <p:sp>
+        <p:nvSpPr>
+          <p:cNvPr id="27" name="TextBox 26"/>
+          <p:cNvSpPr txBox="1"/>
+          <p:nvPr/>
+        </p:nvSpPr>
+        <p:spPr>
+          <a:xfrm>
+            <a:off x="9198864" y="3200400"/>
+            <a:ext cx="2404872" cy="320040"/>
+          </a:xfrm>
+          <a:prstGeom prst="rect">
+            <a:avLst/>
+          </a:prstGeom>
+          <a:noFill/>
+        </p:spPr>
+        <p:txBody>
+          <a:bodyPr wrap="square" lIns="0" rIns="0" tIns="0" bIns="0" anchor="t"/>
+          <a:lstStyle/>
+          <a:p>
+            <a:pPr algn="l">
+              <a:spcBef>
+                <a:spcPts val="0"/>
+              </a:spcBef>
+              <a:spcAft>
+                <a:spcPts val="0"/>
+              </a:spcAft>
+            </a:pPr>
+            <a:r>
+              <a:rPr sz="1200" b="0" i="0">
+                <a:solidFill>
+                  <a:srgbClr val="5E6E7C"/>
+                </a:solidFill>
+                <a:latin typeface="Calibri"/>
+                <a:ea typeface="Calibri"/>
+                <a:cs typeface="Calibri"/>
+              </a:rPr>
+              <a:t>± 0.001   ·   n=3</a:t>
+            </a:r>
+          </a:p>
+        </p:txBody>
+      </p:sp>
+      <p:sp>
+        <p:nvSpPr>
+          <p:cNvPr id="28" name="Rounded Rectangle 27"/>
+          <p:cNvSpPr/>
+          <p:nvPr/>
+        </p:nvSpPr>
+        <p:spPr>
+          <a:xfrm>
+            <a:off x="502920" y="4069080"/>
+            <a:ext cx="11228832" cy="2148840"/>
+          </a:xfrm>
+          <a:prstGeom prst="roundRect">
+            <a:avLst>
+              <a:gd name="adj" fmla="val 8000"/>
+            </a:avLst>
+          </a:prstGeom>
+          <a:solidFill>
+            <a:srgbClr val="FFFFFF"/>
+          </a:solidFill>
+          <a:ln w="12700">
+            <a:solidFill>
+              <a:srgbClr val="E3DBD0"/>
+            </a:solidFill>
+          </a:ln>
+        </p:spPr>
+        <p:style>
+          <a:lnRef idx="1">
+            <a:schemeClr val="accent1"/>
+          </a:lnRef>
+          <a:fillRef idx="3">
+            <a:schemeClr val="accent1"/>
+          </a:fillRef>
+          <a:effectRef idx="2">
+            <a:schemeClr val="accent1"/>
+          </a:effectRef>
+          <a:fontRef idx="minor">
+            <a:schemeClr val="lt1"/>
+          </a:fontRef>
+        </p:style>
+        <p:txBody>
+          <a:bodyPr rtlCol="0" anchor="ctr"/>
+          <a:lstStyle/>
+          <a:p>
+            <a:pPr algn="ctr"/>
+          </a:p>
+        </p:txBody>
+      </p:sp>
+      <p:sp>
+        <p:nvSpPr>
+          <p:cNvPr id="29" name="TextBox 28"/>
+          <p:cNvSpPr txBox="1"/>
+          <p:nvPr/>
+        </p:nvSpPr>
+        <p:spPr>
+          <a:xfrm>
+            <a:off x="777240" y="4224528"/>
+            <a:ext cx="7315200" cy="274320"/>
+          </a:xfrm>
+          <a:prstGeom prst="rect">
+            <a:avLst/>
+          </a:prstGeom>
+          <a:noFill/>
+        </p:spPr>
+        <p:txBody>
+          <a:bodyPr wrap="square" lIns="0" rIns="0" tIns="0" bIns="0" anchor="t"/>
+          <a:lstStyle/>
+          <a:p>
+            <a:pPr algn="l">
+              <a:spcBef>
+                <a:spcPts val="0"/>
+              </a:spcBef>
+              <a:spcAft>
+                <a:spcPts val="0"/>
+              </a:spcAft>
+            </a:pPr>
+            <a:r>
+              <a:rPr sz="1200" b="1" i="0">
+                <a:solidFill>
+                  <a:srgbClr val="C4841D"/>
+                </a:solidFill>
+                <a:latin typeface="Calibri"/>
+                <a:ea typeface="Calibri"/>
+                <a:cs typeface="Calibri"/>
+              </a:rPr>
+              <a:t>SAME SEEDS, NO MISSES</a:t>
+            </a:r>
+          </a:p>
+        </p:txBody>
+      </p:sp>
+      <p:sp>
+        <p:nvSpPr>
+          <p:cNvPr id="30" name="TextBox 29"/>
+          <p:cNvSpPr txBox="1"/>
+          <p:nvPr/>
+        </p:nvSpPr>
+        <p:spPr>
+          <a:xfrm>
+            <a:off x="777240" y="4617720"/>
+            <a:ext cx="3108960" cy="411480"/>
+          </a:xfrm>
+          <a:prstGeom prst="rect">
+            <a:avLst/>
+          </a:prstGeom>
+          <a:noFill/>
+        </p:spPr>
+        <p:txBody>
+          <a:bodyPr wrap="square" lIns="0" rIns="0" tIns="0" bIns="0" anchor="t"/>
+          <a:lstStyle/>
+          <a:p>
+            <a:pPr algn="l">
+              <a:spcBef>
+                <a:spcPts val="0"/>
+              </a:spcBef>
+              <a:spcAft>
+                <a:spcPts val="0"/>
+              </a:spcAft>
+            </a:pPr>
+            <a:r>
+              <a:rPr sz="2200" b="1" i="0">
+                <a:solidFill>
+                  <a:srgbClr val="1B6B5A"/>
+                </a:solidFill>
+                <a:latin typeface="Georgia"/>
+                <a:ea typeface="Georgia"/>
+                <a:cs typeface="Georgia"/>
+              </a:rPr>
+              <a:t>0.123 L</a:t>
+            </a:r>
+          </a:p>
+        </p:txBody>
+      </p:sp>
+      <p:sp>
+        <p:nvSpPr>
+          <p:cNvPr id="31" name="TextBox 30"/>
+          <p:cNvSpPr txBox="1"/>
+          <p:nvPr/>
+        </p:nvSpPr>
+        <p:spPr>
+          <a:xfrm>
+            <a:off x="777240" y="5074920"/>
+            <a:ext cx="3108960" cy="274320"/>
+          </a:xfrm>
+          <a:prstGeom prst="rect">
+            <a:avLst/>
+          </a:prstGeom>
+          <a:noFill/>
+        </p:spPr>
+        <p:txBody>
+          <a:bodyPr wrap="square" lIns="0" rIns="0" tIns="0" bIns="0" anchor="t"/>
+          <a:lstStyle/>
+          <a:p>
+            <a:pPr algn="l">
+              <a:spcBef>
+                <a:spcPts val="0"/>
+              </a:spcBef>
+              <a:spcAft>
+                <a:spcPts val="0"/>
+              </a:spcAft>
+            </a:pPr>
+            <a:r>
+              <a:rPr sz="1300" b="0" i="0">
+                <a:solidFill>
+                  <a:srgbClr val="5E6E7C"/>
+                </a:solidFill>
+                <a:latin typeface="Calibri"/>
+                <a:ea typeface="Calibri"/>
+                <a:cs typeface="Calibri"/>
+              </a:rPr>
+              <a:t>XtraFlow</a:t>
+            </a:r>
+          </a:p>
+        </p:txBody>
+      </p:sp>
+      <p:sp>
+        <p:nvSpPr>
+          <p:cNvPr id="32" name="TextBox 31"/>
+          <p:cNvSpPr txBox="1"/>
+          <p:nvPr/>
+        </p:nvSpPr>
+        <p:spPr>
+          <a:xfrm>
+            <a:off x="4069080" y="4617720"/>
+            <a:ext cx="3108960" cy="411480"/>
+          </a:xfrm>
+          <a:prstGeom prst="rect">
+            <a:avLst/>
+          </a:prstGeom>
+          <a:noFill/>
+        </p:spPr>
+        <p:txBody>
+          <a:bodyPr wrap="square" lIns="0" rIns="0" tIns="0" bIns="0" anchor="t"/>
+          <a:lstStyle/>
+          <a:p>
+            <a:pPr algn="l">
+              <a:spcBef>
+                <a:spcPts val="0"/>
+              </a:spcBef>
+              <a:spcAft>
+                <a:spcPts val="0"/>
+              </a:spcAft>
+            </a:pPr>
+            <a:r>
+              <a:rPr sz="2200" b="1" i="0">
+                <a:solidFill>
+                  <a:srgbClr val="1A2834"/>
+                </a:solidFill>
+                <a:latin typeface="Georgia"/>
+                <a:ea typeface="Georgia"/>
+                <a:cs typeface="Georgia"/>
+              </a:rPr>
+              <a:t>0.136 L</a:t>
+            </a:r>
+          </a:p>
+        </p:txBody>
+      </p:sp>
+      <p:sp>
+        <p:nvSpPr>
+          <p:cNvPr id="33" name="TextBox 32"/>
+          <p:cNvSpPr txBox="1"/>
+          <p:nvPr/>
+        </p:nvSpPr>
+        <p:spPr>
+          <a:xfrm>
+            <a:off x="4069080" y="5074920"/>
+            <a:ext cx="3108960" cy="274320"/>
+          </a:xfrm>
+          <a:prstGeom prst="rect">
+            <a:avLst/>
+          </a:prstGeom>
+          <a:noFill/>
+        </p:spPr>
+        <p:txBody>
+          <a:bodyPr wrap="square" lIns="0" rIns="0" tIns="0" bIns="0" anchor="t"/>
+          <a:lstStyle/>
+          <a:p>
+            <a:pPr algn="l">
+              <a:spcBef>
+                <a:spcPts val="0"/>
+              </a:spcBef>
+              <a:spcAft>
+                <a:spcPts val="0"/>
+              </a:spcAft>
+            </a:pPr>
+            <a:r>
+              <a:rPr sz="1300" b="0" i="0">
+                <a:solidFill>
+                  <a:srgbClr val="5E6E7C"/>
+                </a:solidFill>
+                <a:latin typeface="Calibri"/>
+                <a:ea typeface="Calibri"/>
+                <a:cs typeface="Calibri"/>
+              </a:rPr>
+              <a:t>Actuated</a:t>
+            </a:r>
+          </a:p>
+        </p:txBody>
+      </p:sp>
+      <p:sp>
+        <p:nvSpPr>
+          <p:cNvPr id="34" name="TextBox 33"/>
+          <p:cNvSpPr txBox="1"/>
+          <p:nvPr/>
+        </p:nvSpPr>
+        <p:spPr>
+          <a:xfrm>
+            <a:off x="777240" y="5532120"/>
+            <a:ext cx="10680192" cy="457200"/>
+          </a:xfrm>
+          <a:prstGeom prst="rect">
+            <a:avLst/>
+          </a:prstGeom>
+          <a:noFill/>
+        </p:spPr>
+        <p:txBody>
+          <a:bodyPr wrap="square" lIns="0" rIns="0" tIns="0" bIns="0" anchor="t"/>
+          <a:lstStyle/>
+          <a:p>
+            <a:pPr algn="l">
+              <a:spcBef>
+                <a:spcPts val="0"/>
+              </a:spcBef>
+              <a:spcAft>
+                <a:spcPts val="0"/>
+              </a:spcAft>
+            </a:pPr>
+            <a:r>
+              <a:rPr sz="1400" b="0" i="0">
+                <a:solidFill>
+                  <a:srgbClr val="1A2834"/>
+                </a:solidFill>
+                <a:latin typeface="Calibri"/>
+                <a:ea typeface="Calibri"/>
+                <a:cs typeface="Calibri"/>
+              </a:rPr>
+              <a:t>Every miss level on this slide has lower mean fuel than every reference line. Noise-model point (see noise_model.json) is 0.125 L.</a:t>
             </a:r>
           </a:p>
         </p:txBody>
@@ -7544,7 +8951,7 @@
                 <a:ea typeface="Calibri"/>
                 <a:cs typeface="Calibri"/>
               </a:rPr>
-              <a:t>BESIDE THE HEADLINE</a:t>
+              <a:t>WHERE IT DOES NOT TRANSFER</a:t>
             </a:r>
           </a:p>
         </p:txBody>
@@ -7586,7 +8993,7 @@
                 <a:ea typeface="Georgia"/>
                 <a:cs typeface="Georgia"/>
               </a:rPr>
-              <a:t>Safety: Fewer conflicts. Emissions: Intervals overlap.</a:t>
+              <a:t>The 2×2 grid was not scored in this publish</a:t>
             </a:r>
           </a:p>
         </p:txBody>
@@ -7628,7 +9035,7 @@
                 <a:ea typeface="Calibri"/>
                 <a:cs typeface="Calibri"/>
               </a:rPr>
-              <a:t>Both lines are the verdict fields in the loaded JSON, not a fixed sentence.</a:t>
+              <a:t>A corridor result is only quoted from results/grid_results.json after a successful sweep.</a:t>
             </a:r>
           </a:p>
         </p:txBody>
@@ -7725,8 +9132,8 @@
         </p:nvSpPr>
         <p:spPr>
           <a:xfrm>
-            <a:off x="502920" y="1600200"/>
-            <a:ext cx="3633216" cy="3794760"/>
+            <a:off x="502920" y="1737360"/>
+            <a:ext cx="11228832" cy="3291840"/>
           </a:xfrm>
           <a:prstGeom prst="roundRect">
             <a:avLst>
@@ -7734,12 +9141,10 @@
             </a:avLst>
           </a:prstGeom>
           <a:solidFill>
-            <a:srgbClr val="FFFFFF"/>
+            <a:srgbClr val="0E1C2B"/>
           </a:solidFill>
-          <a:ln w="12700">
-            <a:solidFill>
-              <a:srgbClr val="E3DBD0"/>
-            </a:solidFill>
+          <a:ln>
+            <a:noFill/>
           </a:ln>
         </p:spPr>
         <p:style>
@@ -7766,601 +9171,126 @@
       </p:sp>
       <p:sp>
         <p:nvSpPr>
-          <p:cNvPr id="9" name="Rectangle 8"/>
-          <p:cNvSpPr/>
-          <p:nvPr/>
-        </p:nvSpPr>
-        <p:spPr>
-          <a:xfrm>
-            <a:off x="740664" y="1828800"/>
-            <a:ext cx="502920" cy="41148"/>
-          </a:xfrm>
-          <a:prstGeom prst="rect">
-            <a:avLst/>
-          </a:prstGeom>
-          <a:solidFill>
-            <a:srgbClr val="1B6B5A"/>
-          </a:solidFill>
-          <a:ln>
-            <a:noFill/>
-          </a:ln>
-        </p:spPr>
-        <p:style>
-          <a:lnRef idx="1">
-            <a:schemeClr val="accent1"/>
-          </a:lnRef>
-          <a:fillRef idx="3">
-            <a:schemeClr val="accent1"/>
-          </a:fillRef>
-          <a:effectRef idx="2">
-            <a:schemeClr val="accent1"/>
-          </a:effectRef>
-          <a:fontRef idx="minor">
-            <a:schemeClr val="lt1"/>
-          </a:fontRef>
-        </p:style>
-        <p:txBody>
-          <a:bodyPr rtlCol="0" anchor="ctr"/>
-          <a:lstStyle/>
-          <a:p>
-            <a:pPr algn="ctr"/>
-          </a:p>
-        </p:txBody>
-      </p:sp>
-      <p:sp>
-        <p:nvSpPr>
-          <p:cNvPr id="10" name="TextBox 9"/>
-          <p:cNvSpPr txBox="1"/>
-          <p:nvPr/>
-        </p:nvSpPr>
-        <p:spPr>
-          <a:xfrm>
-            <a:off x="722376" y="2011680"/>
-            <a:ext cx="3221735" cy="274320"/>
-          </a:xfrm>
-          <a:prstGeom prst="rect">
-            <a:avLst/>
-          </a:prstGeom>
-          <a:noFill/>
-        </p:spPr>
-        <p:txBody>
-          <a:bodyPr wrap="square" lIns="0" rIns="0" tIns="0" bIns="0" anchor="t"/>
-          <a:lstStyle/>
-          <a:p>
-            <a:pPr algn="l">
-              <a:spcBef>
-                <a:spcPts val="0"/>
-              </a:spcBef>
-              <a:spcAft>
-                <a:spcPts val="0"/>
-              </a:spcAft>
-            </a:pPr>
-            <a:r>
-              <a:rPr sz="1200" b="1" i="0">
-                <a:solidFill>
-                  <a:srgbClr val="1B6B5A"/>
+          <p:cNvPr id="9" name="TextBox 8"/>
+          <p:cNvSpPr txBox="1"/>
+          <p:nvPr/>
+        </p:nvSpPr>
+        <p:spPr>
+          <a:xfrm>
+            <a:off x="868680" y="2057400"/>
+            <a:ext cx="10497311" cy="365760"/>
+          </a:xfrm>
+          <a:prstGeom prst="rect">
+            <a:avLst/>
+          </a:prstGeom>
+          <a:noFill/>
+        </p:spPr>
+        <p:txBody>
+          <a:bodyPr wrap="square" lIns="0" rIns="0" tIns="0" bIns="0" anchor="t"/>
+          <a:lstStyle/>
+          <a:p>
+            <a:pPr algn="l">
+              <a:spcBef>
+                <a:spcPts val="0"/>
+              </a:spcBef>
+              <a:spcAft>
+                <a:spcPts val="0"/>
+              </a:spcAft>
+            </a:pPr>
+            <a:r>
+              <a:rPr sz="1400" b="1" i="0">
+                <a:solidFill>
+                  <a:srgbClr val="C4841D"/>
                 </a:solidFill>
                 <a:latin typeface="Calibri"/>
                 <a:ea typeface="Calibri"/>
                 <a:cs typeface="Calibri"/>
               </a:rPr>
-              <a:t>SAFETY</a:t>
-            </a:r>
-          </a:p>
-        </p:txBody>
-      </p:sp>
-      <p:sp>
-        <p:nvSpPr>
-          <p:cNvPr id="11" name="TextBox 10"/>
-          <p:cNvSpPr txBox="1"/>
-          <p:nvPr/>
-        </p:nvSpPr>
-        <p:spPr>
-          <a:xfrm>
-            <a:off x="722376" y="2331720"/>
-            <a:ext cx="3221735" cy="777240"/>
-          </a:xfrm>
-          <a:prstGeom prst="rect">
-            <a:avLst/>
-          </a:prstGeom>
-          <a:noFill/>
-        </p:spPr>
-        <p:txBody>
-          <a:bodyPr wrap="square" lIns="0" rIns="0" tIns="0" bIns="0" anchor="t"/>
-          <a:lstStyle/>
-          <a:p>
-            <a:pPr algn="l">
-              <a:spcBef>
-                <a:spcPts val="0"/>
-              </a:spcBef>
-              <a:spcAft>
-                <a:spcPts val="0"/>
-              </a:spcAft>
-            </a:pPr>
-            <a:r>
-              <a:rPr sz="2800" b="1" i="0">
-                <a:solidFill>
-                  <a:srgbClr val="1A2834"/>
-                </a:solidFill>
-                <a:latin typeface="Georgia"/>
-                <a:ea typeface="Georgia"/>
-                <a:cs typeface="Georgia"/>
-              </a:rPr>
-              <a:t>Fewer conflicts</a:t>
-            </a:r>
-          </a:p>
-        </p:txBody>
-      </p:sp>
-      <p:sp>
-        <p:nvSpPr>
-          <p:cNvPr id="12" name="TextBox 11"/>
-          <p:cNvSpPr txBox="1"/>
-          <p:nvPr/>
-        </p:nvSpPr>
-        <p:spPr>
-          <a:xfrm>
-            <a:off x="722376" y="3246120"/>
-            <a:ext cx="3194304" cy="1874519"/>
-          </a:xfrm>
-          <a:prstGeom prst="rect">
-            <a:avLst/>
-          </a:prstGeom>
-          <a:noFill/>
-        </p:spPr>
-        <p:txBody>
-          <a:bodyPr wrap="square" lIns="0" rIns="0" tIns="0" bIns="0" anchor="t"/>
-          <a:lstStyle/>
-          <a:p>
-            <a:pPr algn="l">
-              <a:spcBef>
-                <a:spcPts val="0"/>
-              </a:spcBef>
-              <a:spcAft>
-                <a:spcPts val="0"/>
-              </a:spcAft>
-            </a:pPr>
-            <a:r>
-              <a:rPr sz="1500" b="0" i="0">
-                <a:solidFill>
-                  <a:srgbClr val="1A2834"/>
+              <a:t>NO NUMERIC GRID CLAIM</a:t>
+            </a:r>
+          </a:p>
+        </p:txBody>
+      </p:sp>
+      <p:sp>
+        <p:nvSpPr>
+          <p:cNvPr id="10" name="TextBox 9"/>
+          <p:cNvSpPr txBox="1"/>
+          <p:nvPr/>
+        </p:nvSpPr>
+        <p:spPr>
+          <a:xfrm>
+            <a:off x="868680" y="2606040"/>
+            <a:ext cx="10497311" cy="1645920"/>
+          </a:xfrm>
+          <a:prstGeom prst="rect">
+            <a:avLst/>
+          </a:prstGeom>
+          <a:noFill/>
+        </p:spPr>
+        <p:txBody>
+          <a:bodyPr wrap="square" lIns="0" rIns="0" tIns="0" bIns="0" anchor="t"/>
+          <a:lstStyle/>
+          <a:p>
+            <a:pPr algn="l">
+              <a:spcBef>
+                <a:spcPts val="0"/>
+              </a:spcBef>
+              <a:spcAft>
+                <a:spcPts val="0"/>
+              </a:spcAft>
+            </a:pPr>
+            <a:r>
+              <a:rPr sz="1800" b="0" i="0">
+                <a:solidFill>
+                  <a:srgbClr val="FFFFFF"/>
                 </a:solidFill>
                 <a:latin typeface="Calibri"/>
                 <a:ea typeface="Calibri"/>
                 <a:cs typeface="Calibri"/>
               </a:rPr>
-              <a:t>Time-to-collision conflicts from the simulator. A model count, not a crash record.</a:t>
-            </a:r>
-          </a:p>
-        </p:txBody>
-      </p:sp>
-      <p:sp>
-        <p:nvSpPr>
-          <p:cNvPr id="13" name="Rounded Rectangle 12"/>
-          <p:cNvSpPr/>
-          <p:nvPr/>
-        </p:nvSpPr>
-        <p:spPr>
-          <a:xfrm>
-            <a:off x="4300728" y="1600200"/>
-            <a:ext cx="3633216" cy="3794760"/>
-          </a:xfrm>
-          <a:prstGeom prst="roundRect">
-            <a:avLst>
-              <a:gd name="adj" fmla="val 8000"/>
-            </a:avLst>
-          </a:prstGeom>
-          <a:solidFill>
-            <a:srgbClr val="FFFFFF"/>
-          </a:solidFill>
-          <a:ln w="12700">
-            <a:solidFill>
-              <a:srgbClr val="E3DBD0"/>
-            </a:solidFill>
-          </a:ln>
-        </p:spPr>
-        <p:style>
-          <a:lnRef idx="1">
-            <a:schemeClr val="accent1"/>
-          </a:lnRef>
-          <a:fillRef idx="3">
-            <a:schemeClr val="accent1"/>
-          </a:fillRef>
-          <a:effectRef idx="2">
-            <a:schemeClr val="accent1"/>
-          </a:effectRef>
-          <a:fontRef idx="minor">
-            <a:schemeClr val="lt1"/>
-          </a:fontRef>
-        </p:style>
-        <p:txBody>
-          <a:bodyPr rtlCol="0" anchor="ctr"/>
-          <a:lstStyle/>
-          <a:p>
-            <a:pPr algn="ctr"/>
-          </a:p>
-        </p:txBody>
-      </p:sp>
-      <p:sp>
-        <p:nvSpPr>
-          <p:cNvPr id="14" name="Rectangle 13"/>
-          <p:cNvSpPr/>
-          <p:nvPr/>
-        </p:nvSpPr>
-        <p:spPr>
-          <a:xfrm>
-            <a:off x="4538472" y="1828800"/>
-            <a:ext cx="502920" cy="41148"/>
-          </a:xfrm>
-          <a:prstGeom prst="rect">
-            <a:avLst/>
-          </a:prstGeom>
-          <a:solidFill>
-            <a:srgbClr val="1B6B5A"/>
-          </a:solidFill>
-          <a:ln>
-            <a:noFill/>
-          </a:ln>
-        </p:spPr>
-        <p:style>
-          <a:lnRef idx="1">
-            <a:schemeClr val="accent1"/>
-          </a:lnRef>
-          <a:fillRef idx="3">
-            <a:schemeClr val="accent1"/>
-          </a:fillRef>
-          <a:effectRef idx="2">
-            <a:schemeClr val="accent1"/>
-          </a:effectRef>
-          <a:fontRef idx="minor">
-            <a:schemeClr val="lt1"/>
-          </a:fontRef>
-        </p:style>
-        <p:txBody>
-          <a:bodyPr rtlCol="0" anchor="ctr"/>
-          <a:lstStyle/>
-          <a:p>
-            <a:pPr algn="ctr"/>
-          </a:p>
-        </p:txBody>
-      </p:sp>
-      <p:sp>
-        <p:nvSpPr>
-          <p:cNvPr id="15" name="TextBox 14"/>
-          <p:cNvSpPr txBox="1"/>
-          <p:nvPr/>
-        </p:nvSpPr>
-        <p:spPr>
-          <a:xfrm>
-            <a:off x="4520184" y="2011680"/>
-            <a:ext cx="3221735" cy="274320"/>
-          </a:xfrm>
-          <a:prstGeom prst="rect">
-            <a:avLst/>
-          </a:prstGeom>
-          <a:noFill/>
-        </p:spPr>
-        <p:txBody>
-          <a:bodyPr wrap="square" lIns="0" rIns="0" tIns="0" bIns="0" anchor="t"/>
-          <a:lstStyle/>
-          <a:p>
-            <a:pPr algn="l">
-              <a:spcBef>
-                <a:spcPts val="0"/>
-              </a:spcBef>
-              <a:spcAft>
-                <a:spcPts val="0"/>
-              </a:spcAft>
-            </a:pPr>
-            <a:r>
-              <a:rPr sz="1200" b="1" i="0">
-                <a:solidFill>
-                  <a:srgbClr val="1B6B5A"/>
+              <a:t>2x2 grid not scored in this time-cut run. duarouter path was fixed, but the single-intersection tls.add.xml does not provide programs for the grid TLS ids, so SUMO aborts.</a:t>
+            </a:r>
+          </a:p>
+        </p:txBody>
+      </p:sp>
+      <p:sp>
+        <p:nvSpPr>
+          <p:cNvPr id="11" name="TextBox 10"/>
+          <p:cNvSpPr txBox="1"/>
+          <p:nvPr/>
+        </p:nvSpPr>
+        <p:spPr>
+          <a:xfrm>
+            <a:off x="868680" y="4434840"/>
+            <a:ext cx="10497311" cy="365760"/>
+          </a:xfrm>
+          <a:prstGeom prst="rect">
+            <a:avLst/>
+          </a:prstGeom>
+          <a:noFill/>
+        </p:spPr>
+        <p:txBody>
+          <a:bodyPr wrap="square" lIns="0" rIns="0" tIns="0" bIns="0" anchor="t"/>
+          <a:lstStyle/>
+          <a:p>
+            <a:pPr algn="l">
+              <a:spcBef>
+                <a:spcPts val="0"/>
+              </a:spcBef>
+              <a:spcAft>
+                <a:spcPts val="0"/>
+              </a:spcAft>
+            </a:pPr>
+            <a:r>
+              <a:rPr sz="1500" b="0" i="0">
+                <a:solidFill>
+                  <a:srgbClr val="C9D4DC"/>
                 </a:solidFill>
                 <a:latin typeface="Calibri"/>
                 <a:ea typeface="Calibri"/>
                 <a:cs typeface="Calibri"/>
               </a:rPr>
-              <a:t>EMISSIONS MODEL</a:t>
-            </a:r>
-          </a:p>
-        </p:txBody>
-      </p:sp>
-      <p:sp>
-        <p:nvSpPr>
-          <p:cNvPr id="16" name="TextBox 15"/>
-          <p:cNvSpPr txBox="1"/>
-          <p:nvPr/>
-        </p:nvSpPr>
-        <p:spPr>
-          <a:xfrm>
-            <a:off x="4520184" y="2331720"/>
-            <a:ext cx="3221735" cy="777240"/>
-          </a:xfrm>
-          <a:prstGeom prst="rect">
-            <a:avLst/>
-          </a:prstGeom>
-          <a:noFill/>
-        </p:spPr>
-        <p:txBody>
-          <a:bodyPr wrap="square" lIns="0" rIns="0" tIns="0" bIns="0" anchor="t"/>
-          <a:lstStyle/>
-          <a:p>
-            <a:pPr algn="l">
-              <a:spcBef>
-                <a:spcPts val="0"/>
-              </a:spcBef>
-              <a:spcAft>
-                <a:spcPts val="0"/>
-              </a:spcAft>
-            </a:pPr>
-            <a:r>
-              <a:rPr sz="2800" b="1" i="0">
-                <a:solidFill>
-                  <a:srgbClr val="1A2834"/>
-                </a:solidFill>
-                <a:latin typeface="Georgia"/>
-                <a:ea typeface="Georgia"/>
-                <a:cs typeface="Georgia"/>
-              </a:rPr>
-              <a:t>Intervals overlap</a:t>
-            </a:r>
-          </a:p>
-        </p:txBody>
-      </p:sp>
-      <p:sp>
-        <p:nvSpPr>
-          <p:cNvPr id="17" name="TextBox 16"/>
-          <p:cNvSpPr txBox="1"/>
-          <p:nvPr/>
-        </p:nvSpPr>
-        <p:spPr>
-          <a:xfrm>
-            <a:off x="4520184" y="3246120"/>
-            <a:ext cx="3194304" cy="1874519"/>
-          </a:xfrm>
-          <a:prstGeom prst="rect">
-            <a:avLst/>
-          </a:prstGeom>
-          <a:noFill/>
-        </p:spPr>
-        <p:txBody>
-          <a:bodyPr wrap="square" lIns="0" rIns="0" tIns="0" bIns="0" anchor="t"/>
-          <a:lstStyle/>
-          <a:p>
-            <a:pPr algn="l">
-              <a:spcBef>
-                <a:spcPts val="0"/>
-              </a:spcBef>
-              <a:spcAft>
-                <a:spcPts val="0"/>
-              </a:spcAft>
-            </a:pPr>
-            <a:r>
-              <a:rPr sz="1500" b="0" i="0">
-                <a:solidFill>
-                  <a:srgbClr val="1A2834"/>
-                </a:solidFill>
-                <a:latin typeface="Calibri"/>
-                <a:ea typeface="Calibri"/>
-                <a:cs typeface="Calibri"/>
-              </a:rPr>
-              <a:t>Primary model 13.9%. Alternate model 13.7%. The reduction shrinks. It does not flip.</a:t>
-            </a:r>
-          </a:p>
-        </p:txBody>
-      </p:sp>
-      <p:sp>
-        <p:nvSpPr>
-          <p:cNvPr id="18" name="Rounded Rectangle 17"/>
-          <p:cNvSpPr/>
-          <p:nvPr/>
-        </p:nvSpPr>
-        <p:spPr>
-          <a:xfrm>
-            <a:off x="8098536" y="1600200"/>
-            <a:ext cx="3633216" cy="3794760"/>
-          </a:xfrm>
-          <a:prstGeom prst="roundRect">
-            <a:avLst>
-              <a:gd name="adj" fmla="val 8000"/>
-            </a:avLst>
-          </a:prstGeom>
-          <a:solidFill>
-            <a:srgbClr val="FFFFFF"/>
-          </a:solidFill>
-          <a:ln w="12700">
-            <a:solidFill>
-              <a:srgbClr val="E3DBD0"/>
-            </a:solidFill>
-          </a:ln>
-        </p:spPr>
-        <p:style>
-          <a:lnRef idx="1">
-            <a:schemeClr val="accent1"/>
-          </a:lnRef>
-          <a:fillRef idx="3">
-            <a:schemeClr val="accent1"/>
-          </a:fillRef>
-          <a:effectRef idx="2">
-            <a:schemeClr val="accent1"/>
-          </a:effectRef>
-          <a:fontRef idx="minor">
-            <a:schemeClr val="lt1"/>
-          </a:fontRef>
-        </p:style>
-        <p:txBody>
-          <a:bodyPr rtlCol="0" anchor="ctr"/>
-          <a:lstStyle/>
-          <a:p>
-            <a:pPr algn="ctr"/>
-          </a:p>
-        </p:txBody>
-      </p:sp>
-      <p:sp>
-        <p:nvSpPr>
-          <p:cNvPr id="19" name="Rectangle 18"/>
-          <p:cNvSpPr/>
-          <p:nvPr/>
-        </p:nvSpPr>
-        <p:spPr>
-          <a:xfrm>
-            <a:off x="8336280" y="1828800"/>
-            <a:ext cx="502920" cy="41148"/>
-          </a:xfrm>
-          <a:prstGeom prst="rect">
-            <a:avLst/>
-          </a:prstGeom>
-          <a:solidFill>
-            <a:srgbClr val="C4841D"/>
-          </a:solidFill>
-          <a:ln>
-            <a:noFill/>
-          </a:ln>
-        </p:spPr>
-        <p:style>
-          <a:lnRef idx="1">
-            <a:schemeClr val="accent1"/>
-          </a:lnRef>
-          <a:fillRef idx="3">
-            <a:schemeClr val="accent1"/>
-          </a:fillRef>
-          <a:effectRef idx="2">
-            <a:schemeClr val="accent1"/>
-          </a:effectRef>
-          <a:fontRef idx="minor">
-            <a:schemeClr val="lt1"/>
-          </a:fontRef>
-        </p:style>
-        <p:txBody>
-          <a:bodyPr rtlCol="0" anchor="ctr"/>
-          <a:lstStyle/>
-          <a:p>
-            <a:pPr algn="ctr"/>
-          </a:p>
-        </p:txBody>
-      </p:sp>
-      <p:sp>
-        <p:nvSpPr>
-          <p:cNvPr id="20" name="TextBox 19"/>
-          <p:cNvSpPr txBox="1"/>
-          <p:nvPr/>
-        </p:nvSpPr>
-        <p:spPr>
-          <a:xfrm>
-            <a:off x="8317992" y="2011680"/>
-            <a:ext cx="3221735" cy="274320"/>
-          </a:xfrm>
-          <a:prstGeom prst="rect">
-            <a:avLst/>
-          </a:prstGeom>
-          <a:noFill/>
-        </p:spPr>
-        <p:txBody>
-          <a:bodyPr wrap="square" lIns="0" rIns="0" tIns="0" bIns="0" anchor="t"/>
-          <a:lstStyle/>
-          <a:p>
-            <a:pPr algn="l">
-              <a:spcBef>
-                <a:spcPts val="0"/>
-              </a:spcBef>
-              <a:spcAft>
-                <a:spcPts val="0"/>
-              </a:spcAft>
-            </a:pPr>
-            <a:r>
-              <a:rPr sz="1200" b="1" i="0">
-                <a:solidFill>
-                  <a:srgbClr val="C4841D"/>
-                </a:solidFill>
-                <a:latin typeface="Calibri"/>
-                <a:ea typeface="Calibri"/>
-                <a:cs typeface="Calibri"/>
-              </a:rPr>
-              <a:t>PERCEPTION</a:t>
-            </a:r>
-          </a:p>
-        </p:txBody>
-      </p:sp>
-      <p:sp>
-        <p:nvSpPr>
-          <p:cNvPr id="21" name="TextBox 20"/>
-          <p:cNvSpPr txBox="1"/>
-          <p:nvPr/>
-        </p:nvSpPr>
-        <p:spPr>
-          <a:xfrm>
-            <a:off x="8317992" y="2331720"/>
-            <a:ext cx="3221735" cy="777240"/>
-          </a:xfrm>
-          <a:prstGeom prst="rect">
-            <a:avLst/>
-          </a:prstGeom>
-          <a:noFill/>
-        </p:spPr>
-        <p:txBody>
-          <a:bodyPr wrap="square" lIns="0" rIns="0" tIns="0" bIns="0" anchor="t"/>
-          <a:lstStyle/>
-          <a:p>
-            <a:pPr algn="l">
-              <a:spcBef>
-                <a:spcPts val="0"/>
-              </a:spcBef>
-              <a:spcAft>
-                <a:spcPts val="0"/>
-              </a:spcAft>
-            </a:pPr>
-            <a:r>
-              <a:rPr sz="2800" b="1" i="0">
-                <a:solidFill>
-                  <a:srgbClr val="1A2834"/>
-                </a:solidFill>
-                <a:latin typeface="Georgia"/>
-                <a:ea typeface="Georgia"/>
-                <a:cs typeface="Georgia"/>
-              </a:rPr>
-              <a:t>Assumed</a:t>
-            </a:r>
-          </a:p>
-        </p:txBody>
-      </p:sp>
-      <p:sp>
-        <p:nvSpPr>
-          <p:cNvPr id="22" name="TextBox 21"/>
-          <p:cNvSpPr txBox="1"/>
-          <p:nvPr/>
-        </p:nvSpPr>
-        <p:spPr>
-          <a:xfrm>
-            <a:off x="8317992" y="3246120"/>
-            <a:ext cx="3194304" cy="1874519"/>
-          </a:xfrm>
-          <a:prstGeom prst="rect">
-            <a:avLst/>
-          </a:prstGeom>
-          <a:noFill/>
-        </p:spPr>
-        <p:txBody>
-          <a:bodyPr wrap="square" lIns="0" rIns="0" tIns="0" bIns="0" anchor="t"/>
-          <a:lstStyle/>
-          <a:p>
-            <a:pPr algn="l">
-              <a:spcBef>
-                <a:spcPts val="0"/>
-              </a:spcBef>
-              <a:spcAft>
-                <a:spcPts val="0"/>
-              </a:spcAft>
-            </a:pPr>
-            <a:r>
-              <a:rPr sz="1500" b="0" i="0">
-                <a:solidFill>
-                  <a:srgbClr val="1A2834"/>
-                </a:solidFill>
-                <a:latin typeface="Calibri"/>
-                <a:ea typeface="Calibri"/>
-                <a:cs typeface="Calibri"/>
-              </a:rPr>
-              <a:t>No field video in this run. Smoke-test miss rate 15%. Treat detector error as assumed until labels exist.</a:t>
+              <a:t>Do not scale the single-junction result to a city.</a:t>
             </a:r>
           </a:p>
         </p:txBody>
@@ -8471,7 +9401,7 @@
                 <a:ea typeface="Calibri"/>
                 <a:cs typeface="Calibri"/>
               </a:rPr>
-              <a:t>SCALING</a:t>
+              <a:t>BESIDE THE HEADLINE</a:t>
             </a:r>
           </a:p>
         </p:txBody>
@@ -8513,7 +9443,7 @@
                 <a:ea typeface="Georgia"/>
                 <a:cs typeface="Georgia"/>
               </a:rPr>
-              <a:t>Per vehicle is measured. Per year is a range.</a:t>
+              <a:t>Safety: Fewer conflicts. Emissions: Intervals overlap.</a:t>
             </a:r>
           </a:p>
         </p:txBody>
@@ -8555,7 +9485,7 @@
                 <a:ea typeface="Calibri"/>
                 <a:cs typeface="Calibri"/>
               </a:rPr>
-              <a:t>The wide bar is the assumed city size, not uncertainty in the junction test.</a:t>
+              <a:t>Both lines are the verdict fields in the loaded JSON, not a fixed sentence.</a:t>
             </a:r>
           </a:p>
         </p:txBody>
@@ -8652,8 +9582,8 @@
         </p:nvSpPr>
         <p:spPr>
           <a:xfrm>
-            <a:off x="502920" y="1572768"/>
-            <a:ext cx="6720840" cy="1965960"/>
+            <a:off x="502920" y="1600200"/>
+            <a:ext cx="3633216" cy="3794760"/>
           </a:xfrm>
           <a:prstGeom prst="roundRect">
             <a:avLst>
@@ -8693,236 +9623,14 @@
       </p:sp>
       <p:sp>
         <p:nvSpPr>
-          <p:cNvPr id="9" name="TextBox 8"/>
-          <p:cNvSpPr txBox="1"/>
-          <p:nvPr/>
-        </p:nvSpPr>
-        <p:spPr>
-          <a:xfrm>
-            <a:off x="758952" y="1719072"/>
-            <a:ext cx="6217920" cy="256032"/>
-          </a:xfrm>
-          <a:prstGeom prst="rect">
-            <a:avLst/>
-          </a:prstGeom>
-          <a:noFill/>
-        </p:spPr>
-        <p:txBody>
-          <a:bodyPr wrap="square" lIns="0" rIns="0" tIns="0" bIns="0" anchor="t"/>
-          <a:lstStyle/>
-          <a:p>
-            <a:pPr algn="l">
-              <a:spcBef>
-                <a:spcPts val="0"/>
-              </a:spcBef>
-              <a:spcAft>
-                <a:spcPts val="0"/>
-              </a:spcAft>
-            </a:pPr>
-            <a:r>
-              <a:rPr sz="1200" b="1" i="0">
-                <a:solidFill>
-                  <a:srgbClr val="C4841D"/>
-                </a:solidFill>
-                <a:latin typeface="Calibri"/>
-                <a:ea typeface="Calibri"/>
-                <a:cs typeface="Calibri"/>
-              </a:rPr>
-              <a:t>MEASURED VS BEST BASELINE (SCENARIO-WEIGHTED)</a:t>
-            </a:r>
-          </a:p>
-        </p:txBody>
-      </p:sp>
-      <p:sp>
-        <p:nvSpPr>
-          <p:cNvPr id="10" name="TextBox 9"/>
-          <p:cNvSpPr txBox="1"/>
-          <p:nvPr/>
-        </p:nvSpPr>
-        <p:spPr>
-          <a:xfrm>
-            <a:off x="758952" y="2029968"/>
-            <a:ext cx="6217920" cy="594360"/>
-          </a:xfrm>
-          <a:prstGeom prst="rect">
-            <a:avLst/>
-          </a:prstGeom>
-          <a:noFill/>
-        </p:spPr>
-        <p:txBody>
-          <a:bodyPr wrap="square" lIns="0" rIns="0" tIns="0" bIns="0" anchor="t"/>
-          <a:lstStyle/>
-          <a:p>
-            <a:pPr algn="l">
-              <a:spcBef>
-                <a:spcPts val="0"/>
-              </a:spcBef>
-              <a:spcAft>
-                <a:spcPts val="0"/>
-              </a:spcAft>
-            </a:pPr>
-            <a:r>
-              <a:rPr sz="3200" b="1" i="0">
-                <a:solidFill>
-                  <a:srgbClr val="1B6B5A"/>
-                </a:solidFill>
-                <a:latin typeface="Georgia"/>
-                <a:ea typeface="Georgia"/>
-                <a:cs typeface="Georgia"/>
-              </a:rPr>
-              <a:t>0.001</a:t>
-            </a:r>
-            <a:r>
-              <a:rPr sz="1600" b="0" i="0">
-                <a:solidFill>
-                  <a:srgbClr val="1A2834"/>
-                </a:solidFill>
-                <a:latin typeface="Calibri"/>
-                <a:ea typeface="Calibri"/>
-                <a:cs typeface="Calibri"/>
-              </a:rPr>
-              <a:t>  L saved / vehicle</a:t>
-            </a:r>
-          </a:p>
-        </p:txBody>
-      </p:sp>
-      <p:sp>
-        <p:nvSpPr>
-          <p:cNvPr id="11" name="TextBox 10"/>
-          <p:cNvSpPr txBox="1"/>
-          <p:nvPr/>
-        </p:nvSpPr>
-        <p:spPr>
-          <a:xfrm>
-            <a:off x="758952" y="2788920"/>
-            <a:ext cx="6217920" cy="457200"/>
-          </a:xfrm>
-          <a:prstGeom prst="rect">
-            <a:avLst/>
-          </a:prstGeom>
-          <a:noFill/>
-        </p:spPr>
-        <p:txBody>
-          <a:bodyPr wrap="square" lIns="0" rIns="0" tIns="0" bIns="0" anchor="t"/>
-          <a:lstStyle/>
-          <a:p>
-            <a:pPr algn="l">
-              <a:spcBef>
-                <a:spcPts val="0"/>
-              </a:spcBef>
-              <a:spcAft>
-                <a:spcPts val="0"/>
-              </a:spcAft>
-            </a:pPr>
-            <a:r>
-              <a:rPr sz="1400" b="0" i="0">
-                <a:solidFill>
-                  <a:srgbClr val="5E6E7C"/>
-                </a:solidFill>
-                <a:latin typeface="Calibri"/>
-                <a:ea typeface="Calibri"/>
-                <a:cs typeface="Calibri"/>
-              </a:rPr>
-              <a:t>5th – 95th percentile of that mean: 0.001 – 0.002 L</a:t>
-            </a:r>
-          </a:p>
-        </p:txBody>
-      </p:sp>
-      <p:sp>
-        <p:nvSpPr>
-          <p:cNvPr id="12" name="TextBox 11"/>
-          <p:cNvSpPr txBox="1"/>
-          <p:nvPr/>
-        </p:nvSpPr>
-        <p:spPr>
-          <a:xfrm>
-            <a:off x="502920" y="3703320"/>
-            <a:ext cx="6675120" cy="256032"/>
-          </a:xfrm>
-          <a:prstGeom prst="rect">
-            <a:avLst/>
-          </a:prstGeom>
-          <a:noFill/>
-        </p:spPr>
-        <p:txBody>
-          <a:bodyPr wrap="square" lIns="0" rIns="0" tIns="0" bIns="0" anchor="t"/>
-          <a:lstStyle/>
-          <a:p>
-            <a:pPr algn="l">
-              <a:spcBef>
-                <a:spcPts val="0"/>
-              </a:spcBef>
-              <a:spcAft>
-                <a:spcPts val="0"/>
-              </a:spcAft>
-            </a:pPr>
-            <a:r>
-              <a:rPr sz="1200" b="1" i="0">
-                <a:solidFill>
-                  <a:srgbClr val="C4841D"/>
-                </a:solidFill>
-                <a:latin typeface="Calibri"/>
-                <a:ea typeface="Calibri"/>
-                <a:cs typeface="Calibri"/>
-              </a:rPr>
-              <a:t>IF THAT SAVING IS MULTIPLIED OUT</a:t>
-            </a:r>
-          </a:p>
-        </p:txBody>
-      </p:sp>
-      <p:sp>
-        <p:nvSpPr>
-          <p:cNvPr id="13" name="Rectangle 12"/>
+          <p:cNvPr id="9" name="Rectangle 8"/>
           <p:cNvSpPr/>
           <p:nvPr/>
         </p:nvSpPr>
         <p:spPr>
           <a:xfrm>
-            <a:off x="502920" y="4041648"/>
-            <a:ext cx="6720840" cy="128016"/>
-          </a:xfrm>
-          <a:prstGeom prst="rect">
-            <a:avLst/>
-          </a:prstGeom>
-          <a:solidFill>
-            <a:srgbClr val="C5DDD4"/>
-          </a:solidFill>
-          <a:ln>
-            <a:noFill/>
-          </a:ln>
-        </p:spPr>
-        <p:style>
-          <a:lnRef idx="1">
-            <a:schemeClr val="accent1"/>
-          </a:lnRef>
-          <a:fillRef idx="3">
-            <a:schemeClr val="accent1"/>
-          </a:fillRef>
-          <a:effectRef idx="2">
-            <a:schemeClr val="accent1"/>
-          </a:effectRef>
-          <a:fontRef idx="minor">
-            <a:schemeClr val="lt1"/>
-          </a:fontRef>
-        </p:style>
-        <p:txBody>
-          <a:bodyPr rtlCol="0" anchor="ctr"/>
-          <a:lstStyle/>
-          <a:p>
-            <a:pPr algn="ctr"/>
-          </a:p>
-        </p:txBody>
-      </p:sp>
-      <p:sp>
-        <p:nvSpPr>
-          <p:cNvPr id="14" name="Rectangle 13"/>
-          <p:cNvSpPr/>
-          <p:nvPr/>
-        </p:nvSpPr>
-        <p:spPr>
-          <a:xfrm>
-            <a:off x="2339803" y="3913632"/>
-            <a:ext cx="54864" cy="384048"/>
+            <a:off x="740664" y="1828800"/>
+            <a:ext cx="502920" cy="41148"/>
           </a:xfrm>
           <a:prstGeom prst="rect">
             <a:avLst/>
@@ -8958,224 +9666,140 @@
       </p:sp>
       <p:sp>
         <p:nvSpPr>
-          <p:cNvPr id="15" name="TextBox 14"/>
-          <p:cNvSpPr txBox="1"/>
-          <p:nvPr/>
-        </p:nvSpPr>
-        <p:spPr>
-          <a:xfrm>
-            <a:off x="502920" y="4370832"/>
-            <a:ext cx="2926080" cy="256032"/>
-          </a:xfrm>
-          <a:prstGeom prst="rect">
-            <a:avLst/>
-          </a:prstGeom>
-          <a:noFill/>
-        </p:spPr>
-        <p:txBody>
-          <a:bodyPr wrap="square" lIns="0" rIns="0" tIns="0" bIns="0" anchor="t"/>
-          <a:lstStyle/>
-          <a:p>
-            <a:pPr algn="l">
-              <a:spcBef>
-                <a:spcPts val="0"/>
-              </a:spcBef>
-              <a:spcAft>
-                <a:spcPts val="0"/>
-              </a:spcAft>
-            </a:pPr>
-            <a:r>
-              <a:rPr sz="1200" b="0" i="0">
-                <a:solidFill>
-                  <a:srgbClr val="5E6E7C"/>
+          <p:cNvPr id="10" name="TextBox 9"/>
+          <p:cNvSpPr txBox="1"/>
+          <p:nvPr/>
+        </p:nvSpPr>
+        <p:spPr>
+          <a:xfrm>
+            <a:off x="722376" y="2011680"/>
+            <a:ext cx="3221735" cy="274320"/>
+          </a:xfrm>
+          <a:prstGeom prst="rect">
+            <a:avLst/>
+          </a:prstGeom>
+          <a:noFill/>
+        </p:spPr>
+        <p:txBody>
+          <a:bodyPr wrap="square" lIns="0" rIns="0" tIns="0" bIns="0" anchor="t"/>
+          <a:lstStyle/>
+          <a:p>
+            <a:pPr algn="l">
+              <a:spcBef>
+                <a:spcPts val="0"/>
+              </a:spcBef>
+              <a:spcAft>
+                <a:spcPts val="0"/>
+              </a:spcAft>
+            </a:pPr>
+            <a:r>
+              <a:rPr sz="1200" b="1" i="0">
+                <a:solidFill>
+                  <a:srgbClr val="1B6B5A"/>
                 </a:solidFill>
                 <a:latin typeface="Calibri"/>
                 <a:ea typeface="Calibri"/>
                 <a:cs typeface="Calibri"/>
               </a:rPr>
-              <a:t>0.3 million litres</a:t>
-            </a:r>
-          </a:p>
-        </p:txBody>
-      </p:sp>
-      <p:sp>
-        <p:nvSpPr>
-          <p:cNvPr id="16" name="TextBox 15"/>
-          <p:cNvSpPr txBox="1"/>
-          <p:nvPr/>
-        </p:nvSpPr>
-        <p:spPr>
-          <a:xfrm>
-            <a:off x="4297680" y="4370832"/>
-            <a:ext cx="2926080" cy="256032"/>
-          </a:xfrm>
-          <a:prstGeom prst="rect">
-            <a:avLst/>
-          </a:prstGeom>
-          <a:noFill/>
-        </p:spPr>
-        <p:txBody>
-          <a:bodyPr wrap="square" lIns="0" rIns="0" tIns="0" bIns="0" anchor="t"/>
-          <a:lstStyle/>
-          <a:p>
-            <a:pPr algn="r">
-              <a:spcBef>
-                <a:spcPts val="0"/>
-              </a:spcBef>
-              <a:spcAft>
-                <a:spcPts val="0"/>
-              </a:spcAft>
-            </a:pPr>
-            <a:r>
-              <a:rPr sz="1200" b="0" i="0">
-                <a:solidFill>
-                  <a:srgbClr val="5E6E7C"/>
+              <a:t>SAFETY</a:t>
+            </a:r>
+          </a:p>
+        </p:txBody>
+      </p:sp>
+      <p:sp>
+        <p:nvSpPr>
+          <p:cNvPr id="11" name="TextBox 10"/>
+          <p:cNvSpPr txBox="1"/>
+          <p:nvPr/>
+        </p:nvSpPr>
+        <p:spPr>
+          <a:xfrm>
+            <a:off x="722376" y="2331720"/>
+            <a:ext cx="3221735" cy="777240"/>
+          </a:xfrm>
+          <a:prstGeom prst="rect">
+            <a:avLst/>
+          </a:prstGeom>
+          <a:noFill/>
+        </p:spPr>
+        <p:txBody>
+          <a:bodyPr wrap="square" lIns="0" rIns="0" tIns="0" bIns="0" anchor="t"/>
+          <a:lstStyle/>
+          <a:p>
+            <a:pPr algn="l">
+              <a:spcBef>
+                <a:spcPts val="0"/>
+              </a:spcBef>
+              <a:spcAft>
+                <a:spcPts val="0"/>
+              </a:spcAft>
+            </a:pPr>
+            <a:r>
+              <a:rPr sz="2800" b="1" i="0">
+                <a:solidFill>
+                  <a:srgbClr val="1A2834"/>
+                </a:solidFill>
+                <a:latin typeface="Georgia"/>
+                <a:ea typeface="Georgia"/>
+                <a:cs typeface="Georgia"/>
+              </a:rPr>
+              <a:t>Fewer conflicts</a:t>
+            </a:r>
+          </a:p>
+        </p:txBody>
+      </p:sp>
+      <p:sp>
+        <p:nvSpPr>
+          <p:cNvPr id="12" name="TextBox 11"/>
+          <p:cNvSpPr txBox="1"/>
+          <p:nvPr/>
+        </p:nvSpPr>
+        <p:spPr>
+          <a:xfrm>
+            <a:off x="722376" y="3246120"/>
+            <a:ext cx="3194304" cy="1874519"/>
+          </a:xfrm>
+          <a:prstGeom prst="rect">
+            <a:avLst/>
+          </a:prstGeom>
+          <a:noFill/>
+        </p:spPr>
+        <p:txBody>
+          <a:bodyPr wrap="square" lIns="0" rIns="0" tIns="0" bIns="0" anchor="t"/>
+          <a:lstStyle/>
+          <a:p>
+            <a:pPr algn="l">
+              <a:spcBef>
+                <a:spcPts val="0"/>
+              </a:spcBef>
+              <a:spcAft>
+                <a:spcPts val="0"/>
+              </a:spcAft>
+            </a:pPr>
+            <a:r>
+              <a:rPr sz="1500" b="0" i="0">
+                <a:solidFill>
+                  <a:srgbClr val="1A2834"/>
                 </a:solidFill>
                 <a:latin typeface="Calibri"/>
                 <a:ea typeface="Calibri"/>
                 <a:cs typeface="Calibri"/>
               </a:rPr>
-              <a:t>2.7 million litres</a:t>
-            </a:r>
-          </a:p>
-        </p:txBody>
-      </p:sp>
-      <p:sp>
-        <p:nvSpPr>
-          <p:cNvPr id="17" name="TextBox 16"/>
-          <p:cNvSpPr txBox="1"/>
-          <p:nvPr/>
-        </p:nvSpPr>
-        <p:spPr>
-          <a:xfrm>
-            <a:off x="502920" y="4754880"/>
-            <a:ext cx="6675120" cy="438912"/>
-          </a:xfrm>
-          <a:prstGeom prst="rect">
-            <a:avLst/>
-          </a:prstGeom>
-          <a:noFill/>
-        </p:spPr>
-        <p:txBody>
-          <a:bodyPr wrap="square" lIns="0" rIns="0" tIns="0" bIns="0" anchor="t"/>
-          <a:lstStyle/>
-          <a:p>
-            <a:pPr algn="l">
-              <a:spcBef>
-                <a:spcPts val="0"/>
-              </a:spcBef>
-              <a:spcAft>
-                <a:spcPts val="0"/>
-              </a:spcAft>
-            </a:pPr>
-            <a:r>
-              <a:rPr sz="2200" b="1" i="0">
-                <a:solidFill>
-                  <a:srgbClr val="1A2834"/>
-                </a:solidFill>
-                <a:latin typeface="Georgia"/>
-                <a:ea typeface="Georgia"/>
-                <a:cs typeface="Georgia"/>
-              </a:rPr>
-              <a:t>0.9 million litres</a:t>
-            </a:r>
-          </a:p>
-        </p:txBody>
-      </p:sp>
-      <p:sp>
-        <p:nvSpPr>
-          <p:cNvPr id="18" name="TextBox 17"/>
-          <p:cNvSpPr txBox="1"/>
-          <p:nvPr/>
-        </p:nvSpPr>
-        <p:spPr>
-          <a:xfrm>
-            <a:off x="502920" y="5193792"/>
-            <a:ext cx="6675120" cy="256032"/>
-          </a:xfrm>
-          <a:prstGeom prst="rect">
-            <a:avLst/>
-          </a:prstGeom>
-          <a:noFill/>
-        </p:spPr>
-        <p:txBody>
-          <a:bodyPr wrap="square" lIns="0" rIns="0" tIns="0" bIns="0" anchor="t"/>
-          <a:lstStyle/>
-          <a:p>
-            <a:pPr algn="l">
-              <a:spcBef>
-                <a:spcPts val="0"/>
-              </a:spcBef>
-              <a:spcAft>
-                <a:spcPts val="0"/>
-              </a:spcAft>
-            </a:pPr>
-            <a:r>
-              <a:rPr sz="1300" b="0" i="0">
-                <a:solidFill>
-                  <a:srgbClr val="5E6E7C"/>
-                </a:solidFill>
-                <a:latin typeface="Calibri"/>
-                <a:ea typeface="Calibri"/>
-                <a:cs typeface="Calibri"/>
-              </a:rPr>
-              <a:t>median of the scaled draws</a:t>
-            </a:r>
-          </a:p>
-        </p:txBody>
-      </p:sp>
-      <p:sp>
-        <p:nvSpPr>
-          <p:cNvPr id="19" name="TextBox 18"/>
-          <p:cNvSpPr txBox="1"/>
-          <p:nvPr/>
-        </p:nvSpPr>
-        <p:spPr>
-          <a:xfrm>
-            <a:off x="502920" y="5532120"/>
-            <a:ext cx="6675120" cy="502920"/>
-          </a:xfrm>
-          <a:prstGeom prst="rect">
-            <a:avLst/>
-          </a:prstGeom>
-          <a:noFill/>
-        </p:spPr>
-        <p:txBody>
-          <a:bodyPr wrap="square" lIns="0" rIns="0" tIns="0" bIns="0" anchor="t"/>
-          <a:lstStyle/>
-          <a:p>
-            <a:pPr algn="l">
-              <a:spcBef>
-                <a:spcPts val="0"/>
-              </a:spcBef>
-              <a:spcAft>
-                <a:spcPts val="0"/>
-              </a:spcAft>
-            </a:pPr>
-            <a:r>
-              <a:rPr sz="1300" b="0" i="0">
-                <a:solidFill>
-                  <a:srgbClr val="5E6E7C"/>
-                </a:solidFill>
-                <a:latin typeface="Calibri"/>
-                <a:ea typeface="Calibri"/>
-                <a:cs typeface="Calibri"/>
-              </a:rPr>
-              <a:t>CO₂ median 2,296 tonnes   ·   629 tonnes – 6,640 tonnes</a:t>
-            </a:r>
-          </a:p>
-        </p:txBody>
-      </p:sp>
-      <p:sp>
-        <p:nvSpPr>
-          <p:cNvPr id="20" name="Rounded Rectangle 19"/>
+              <a:t>Time-to-collision conflicts from the simulator. A model count, not a crash record.</a:t>
+            </a:r>
+          </a:p>
+        </p:txBody>
+      </p:sp>
+      <p:sp>
+        <p:nvSpPr>
+          <p:cNvPr id="13" name="Rounded Rectangle 12"/>
           <p:cNvSpPr/>
           <p:nvPr/>
         </p:nvSpPr>
         <p:spPr>
           <a:xfrm>
-            <a:off x="7406640" y="1572768"/>
-            <a:ext cx="4325112" cy="4526280"/>
+            <a:off x="4300728" y="1600200"/>
+            <a:ext cx="3633216" cy="3794760"/>
           </a:xfrm>
           <a:prstGeom prst="roundRect">
             <a:avLst>
@@ -9215,34 +9839,119 @@
       </p:sp>
       <p:sp>
         <p:nvSpPr>
-          <p:cNvPr id="21" name="TextBox 20"/>
-          <p:cNvSpPr txBox="1"/>
-          <p:nvPr/>
-        </p:nvSpPr>
-        <p:spPr>
-          <a:xfrm>
-            <a:off x="7626096" y="1737360"/>
-            <a:ext cx="3931920" cy="640080"/>
-          </a:xfrm>
-          <a:prstGeom prst="rect">
-            <a:avLst/>
-          </a:prstGeom>
-          <a:noFill/>
-        </p:spPr>
-        <p:txBody>
-          <a:bodyPr wrap="square" lIns="0" rIns="0" tIns="0" bIns="0" anchor="t"/>
-          <a:lstStyle/>
-          <a:p>
-            <a:pPr algn="l">
-              <a:spcBef>
-                <a:spcPts val="0"/>
-              </a:spcBef>
-              <a:spcAft>
-                <a:spcPts val="0"/>
-              </a:spcAft>
-            </a:pPr>
-            <a:r>
-              <a:rPr sz="1800" b="1" i="0">
+          <p:cNvPr id="14" name="Rectangle 13"/>
+          <p:cNvSpPr/>
+          <p:nvPr/>
+        </p:nvSpPr>
+        <p:spPr>
+          <a:xfrm>
+            <a:off x="4538472" y="1828800"/>
+            <a:ext cx="502920" cy="41148"/>
+          </a:xfrm>
+          <a:prstGeom prst="rect">
+            <a:avLst/>
+          </a:prstGeom>
+          <a:solidFill>
+            <a:srgbClr val="1B6B5A"/>
+          </a:solidFill>
+          <a:ln>
+            <a:noFill/>
+          </a:ln>
+        </p:spPr>
+        <p:style>
+          <a:lnRef idx="1">
+            <a:schemeClr val="accent1"/>
+          </a:lnRef>
+          <a:fillRef idx="3">
+            <a:schemeClr val="accent1"/>
+          </a:fillRef>
+          <a:effectRef idx="2">
+            <a:schemeClr val="accent1"/>
+          </a:effectRef>
+          <a:fontRef idx="minor">
+            <a:schemeClr val="lt1"/>
+          </a:fontRef>
+        </p:style>
+        <p:txBody>
+          <a:bodyPr rtlCol="0" anchor="ctr"/>
+          <a:lstStyle/>
+          <a:p>
+            <a:pPr algn="ctr"/>
+          </a:p>
+        </p:txBody>
+      </p:sp>
+      <p:sp>
+        <p:nvSpPr>
+          <p:cNvPr id="15" name="TextBox 14"/>
+          <p:cNvSpPr txBox="1"/>
+          <p:nvPr/>
+        </p:nvSpPr>
+        <p:spPr>
+          <a:xfrm>
+            <a:off x="4520184" y="2011680"/>
+            <a:ext cx="3221735" cy="274320"/>
+          </a:xfrm>
+          <a:prstGeom prst="rect">
+            <a:avLst/>
+          </a:prstGeom>
+          <a:noFill/>
+        </p:spPr>
+        <p:txBody>
+          <a:bodyPr wrap="square" lIns="0" rIns="0" tIns="0" bIns="0" anchor="t"/>
+          <a:lstStyle/>
+          <a:p>
+            <a:pPr algn="l">
+              <a:spcBef>
+                <a:spcPts val="0"/>
+              </a:spcBef>
+              <a:spcAft>
+                <a:spcPts val="0"/>
+              </a:spcAft>
+            </a:pPr>
+            <a:r>
+              <a:rPr sz="1200" b="1" i="0">
+                <a:solidFill>
+                  <a:srgbClr val="1B6B5A"/>
+                </a:solidFill>
+                <a:latin typeface="Calibri"/>
+                <a:ea typeface="Calibri"/>
+                <a:cs typeface="Calibri"/>
+              </a:rPr>
+              <a:t>EMISSIONS MODEL</a:t>
+            </a:r>
+          </a:p>
+        </p:txBody>
+      </p:sp>
+      <p:sp>
+        <p:nvSpPr>
+          <p:cNvPr id="16" name="TextBox 15"/>
+          <p:cNvSpPr txBox="1"/>
+          <p:nvPr/>
+        </p:nvSpPr>
+        <p:spPr>
+          <a:xfrm>
+            <a:off x="4520184" y="2331720"/>
+            <a:ext cx="3221735" cy="777240"/>
+          </a:xfrm>
+          <a:prstGeom prst="rect">
+            <a:avLst/>
+          </a:prstGeom>
+          <a:noFill/>
+        </p:spPr>
+        <p:txBody>
+          <a:bodyPr wrap="square" lIns="0" rIns="0" tIns="0" bIns="0" anchor="t"/>
+          <a:lstStyle/>
+          <a:p>
+            <a:pPr algn="l">
+              <a:spcBef>
+                <a:spcPts val="0"/>
+              </a:spcBef>
+              <a:spcAft>
+                <a:spcPts val="0"/>
+              </a:spcAft>
+            </a:pPr>
+            <a:r>
+              <a:rPr sz="2800" b="1" i="0">
                 <a:solidFill>
                   <a:srgbClr val="1A2834"/>
                 </a:solidFill>
@@ -9250,83 +9959,215 @@
                 <a:ea typeface="Georgia"/>
                 <a:cs typeface="Georgia"/>
               </a:rPr>
-              <a:t>Why the bar is wide</a:t>
-            </a:r>
-          </a:p>
-        </p:txBody>
-      </p:sp>
-      <p:sp>
-        <p:nvSpPr>
-          <p:cNvPr id="22" name="TextBox 21"/>
-          <p:cNvSpPr txBox="1"/>
-          <p:nvPr/>
-        </p:nvSpPr>
-        <p:spPr>
-          <a:xfrm>
-            <a:off x="7626096" y="2468880"/>
-            <a:ext cx="3840480" cy="219456"/>
-          </a:xfrm>
-          <a:prstGeom prst="rect">
-            <a:avLst/>
-          </a:prstGeom>
-          <a:noFill/>
-        </p:spPr>
-        <p:txBody>
-          <a:bodyPr wrap="square" lIns="0" rIns="0" tIns="0" bIns="0" anchor="t"/>
-          <a:lstStyle/>
-          <a:p>
-            <a:pPr algn="l">
-              <a:spcBef>
-                <a:spcPts val="0"/>
-              </a:spcBef>
-              <a:spcAft>
-                <a:spcPts val="0"/>
-              </a:spcAft>
-            </a:pPr>
-            <a:r>
-              <a:rPr sz="1200" b="0" i="0">
-                <a:solidFill>
-                  <a:srgbClr val="5E6E7C"/>
+              <a:t>Intervals overlap</a:t>
+            </a:r>
+          </a:p>
+        </p:txBody>
+      </p:sp>
+      <p:sp>
+        <p:nvSpPr>
+          <p:cNvPr id="17" name="TextBox 16"/>
+          <p:cNvSpPr txBox="1"/>
+          <p:nvPr/>
+        </p:nvSpPr>
+        <p:spPr>
+          <a:xfrm>
+            <a:off x="4520184" y="3246120"/>
+            <a:ext cx="3194304" cy="1874519"/>
+          </a:xfrm>
+          <a:prstGeom prst="rect">
+            <a:avLst/>
+          </a:prstGeom>
+          <a:noFill/>
+        </p:spPr>
+        <p:txBody>
+          <a:bodyPr wrap="square" lIns="0" rIns="0" tIns="0" bIns="0" anchor="t"/>
+          <a:lstStyle/>
+          <a:p>
+            <a:pPr algn="l">
+              <a:spcBef>
+                <a:spcPts val="0"/>
+              </a:spcBef>
+              <a:spcAft>
+                <a:spcPts val="0"/>
+              </a:spcAft>
+            </a:pPr>
+            <a:r>
+              <a:rPr sz="1500" b="0" i="0">
+                <a:solidFill>
+                  <a:srgbClr val="1A2834"/>
                 </a:solidFill>
                 <a:latin typeface="Calibri"/>
                 <a:ea typeface="Calibri"/>
                 <a:cs typeface="Calibri"/>
               </a:rPr>
-              <a:t>Junctions</a:t>
-            </a:r>
-          </a:p>
-        </p:txBody>
-      </p:sp>
-      <p:sp>
-        <p:nvSpPr>
-          <p:cNvPr id="23" name="TextBox 22"/>
-          <p:cNvSpPr txBox="1"/>
-          <p:nvPr/>
-        </p:nvSpPr>
-        <p:spPr>
-          <a:xfrm>
-            <a:off x="7626096" y="2670048"/>
-            <a:ext cx="3840480" cy="292608"/>
-          </a:xfrm>
-          <a:prstGeom prst="rect">
-            <a:avLst/>
-          </a:prstGeom>
-          <a:noFill/>
-        </p:spPr>
-        <p:txBody>
-          <a:bodyPr wrap="square" lIns="0" rIns="0" tIns="0" bIns="0" anchor="t"/>
-          <a:lstStyle/>
-          <a:p>
-            <a:pPr algn="l">
-              <a:spcBef>
-                <a:spcPts val="0"/>
-              </a:spcBef>
-              <a:spcAft>
-                <a:spcPts val="0"/>
-              </a:spcAft>
-            </a:pPr>
-            <a:r>
-              <a:rPr sz="1600" b="1" i="0">
+              <a:t>Primary model 13.9%. Alternate model 13.7%. The reduction shrinks. It does not flip.</a:t>
+            </a:r>
+          </a:p>
+        </p:txBody>
+      </p:sp>
+      <p:sp>
+        <p:nvSpPr>
+          <p:cNvPr id="18" name="Rounded Rectangle 17"/>
+          <p:cNvSpPr/>
+          <p:nvPr/>
+        </p:nvSpPr>
+        <p:spPr>
+          <a:xfrm>
+            <a:off x="8098536" y="1600200"/>
+            <a:ext cx="3633216" cy="3794760"/>
+          </a:xfrm>
+          <a:prstGeom prst="roundRect">
+            <a:avLst>
+              <a:gd name="adj" fmla="val 8000"/>
+            </a:avLst>
+          </a:prstGeom>
+          <a:solidFill>
+            <a:srgbClr val="FFFFFF"/>
+          </a:solidFill>
+          <a:ln w="12700">
+            <a:solidFill>
+              <a:srgbClr val="E3DBD0"/>
+            </a:solidFill>
+          </a:ln>
+        </p:spPr>
+        <p:style>
+          <a:lnRef idx="1">
+            <a:schemeClr val="accent1"/>
+          </a:lnRef>
+          <a:fillRef idx="3">
+            <a:schemeClr val="accent1"/>
+          </a:fillRef>
+          <a:effectRef idx="2">
+            <a:schemeClr val="accent1"/>
+          </a:effectRef>
+          <a:fontRef idx="minor">
+            <a:schemeClr val="lt1"/>
+          </a:fontRef>
+        </p:style>
+        <p:txBody>
+          <a:bodyPr rtlCol="0" anchor="ctr"/>
+          <a:lstStyle/>
+          <a:p>
+            <a:pPr algn="ctr"/>
+          </a:p>
+        </p:txBody>
+      </p:sp>
+      <p:sp>
+        <p:nvSpPr>
+          <p:cNvPr id="19" name="Rectangle 18"/>
+          <p:cNvSpPr/>
+          <p:nvPr/>
+        </p:nvSpPr>
+        <p:spPr>
+          <a:xfrm>
+            <a:off x="8336280" y="1828800"/>
+            <a:ext cx="502920" cy="41148"/>
+          </a:xfrm>
+          <a:prstGeom prst="rect">
+            <a:avLst/>
+          </a:prstGeom>
+          <a:solidFill>
+            <a:srgbClr val="C4841D"/>
+          </a:solidFill>
+          <a:ln>
+            <a:noFill/>
+          </a:ln>
+        </p:spPr>
+        <p:style>
+          <a:lnRef idx="1">
+            <a:schemeClr val="accent1"/>
+          </a:lnRef>
+          <a:fillRef idx="3">
+            <a:schemeClr val="accent1"/>
+          </a:fillRef>
+          <a:effectRef idx="2">
+            <a:schemeClr val="accent1"/>
+          </a:effectRef>
+          <a:fontRef idx="minor">
+            <a:schemeClr val="lt1"/>
+          </a:fontRef>
+        </p:style>
+        <p:txBody>
+          <a:bodyPr rtlCol="0" anchor="ctr"/>
+          <a:lstStyle/>
+          <a:p>
+            <a:pPr algn="ctr"/>
+          </a:p>
+        </p:txBody>
+      </p:sp>
+      <p:sp>
+        <p:nvSpPr>
+          <p:cNvPr id="20" name="TextBox 19"/>
+          <p:cNvSpPr txBox="1"/>
+          <p:nvPr/>
+        </p:nvSpPr>
+        <p:spPr>
+          <a:xfrm>
+            <a:off x="8317992" y="2011680"/>
+            <a:ext cx="3221735" cy="274320"/>
+          </a:xfrm>
+          <a:prstGeom prst="rect">
+            <a:avLst/>
+          </a:prstGeom>
+          <a:noFill/>
+        </p:spPr>
+        <p:txBody>
+          <a:bodyPr wrap="square" lIns="0" rIns="0" tIns="0" bIns="0" anchor="t"/>
+          <a:lstStyle/>
+          <a:p>
+            <a:pPr algn="l">
+              <a:spcBef>
+                <a:spcPts val="0"/>
+              </a:spcBef>
+              <a:spcAft>
+                <a:spcPts val="0"/>
+              </a:spcAft>
+            </a:pPr>
+            <a:r>
+              <a:rPr sz="1200" b="1" i="0">
+                <a:solidFill>
+                  <a:srgbClr val="C4841D"/>
+                </a:solidFill>
+                <a:latin typeface="Calibri"/>
+                <a:ea typeface="Calibri"/>
+                <a:cs typeface="Calibri"/>
+              </a:rPr>
+              <a:t>PERCEPTION</a:t>
+            </a:r>
+          </a:p>
+        </p:txBody>
+      </p:sp>
+      <p:sp>
+        <p:nvSpPr>
+          <p:cNvPr id="21" name="TextBox 20"/>
+          <p:cNvSpPr txBox="1"/>
+          <p:nvPr/>
+        </p:nvSpPr>
+        <p:spPr>
+          <a:xfrm>
+            <a:off x="8317992" y="2331720"/>
+            <a:ext cx="3221735" cy="777240"/>
+          </a:xfrm>
+          <a:prstGeom prst="rect">
+            <a:avLst/>
+          </a:prstGeom>
+          <a:noFill/>
+        </p:spPr>
+        <p:txBody>
+          <a:bodyPr wrap="square" lIns="0" rIns="0" tIns="0" bIns="0" anchor="t"/>
+          <a:lstStyle/>
+          <a:p>
+            <a:pPr algn="l">
+              <a:spcBef>
+                <a:spcPts val="0"/>
+              </a:spcBef>
+              <a:spcAft>
+                <a:spcPts val="0"/>
+              </a:spcAft>
+            </a:pPr>
+            <a:r>
+              <a:rPr sz="2800" b="1" i="0">
                 <a:solidFill>
                   <a:srgbClr val="1A2834"/>
                 </a:solidFill>
@@ -9334,301 +10175,49 @@
                 <a:ea typeface="Georgia"/>
                 <a:cs typeface="Georgia"/>
               </a:rPr>
-              <a:t>50  –  1,000</a:t>
-            </a:r>
-          </a:p>
-        </p:txBody>
-      </p:sp>
-      <p:sp>
-        <p:nvSpPr>
-          <p:cNvPr id="24" name="TextBox 23"/>
-          <p:cNvSpPr txBox="1"/>
-          <p:nvPr/>
-        </p:nvSpPr>
-        <p:spPr>
-          <a:xfrm>
-            <a:off x="7626096" y="3127248"/>
-            <a:ext cx="3840480" cy="219456"/>
-          </a:xfrm>
-          <a:prstGeom prst="rect">
-            <a:avLst/>
-          </a:prstGeom>
-          <a:noFill/>
-        </p:spPr>
-        <p:txBody>
-          <a:bodyPr wrap="square" lIns="0" rIns="0" tIns="0" bIns="0" anchor="t"/>
-          <a:lstStyle/>
-          <a:p>
-            <a:pPr algn="l">
-              <a:spcBef>
-                <a:spcPts val="0"/>
-              </a:spcBef>
-              <a:spcAft>
-                <a:spcPts val="0"/>
-              </a:spcAft>
-            </a:pPr>
-            <a:r>
-              <a:rPr sz="1200" b="0" i="0">
-                <a:solidFill>
-                  <a:srgbClr val="5E6E7C"/>
+              <a:t>YOLO demo ready</a:t>
+            </a:r>
+          </a:p>
+        </p:txBody>
+      </p:sp>
+      <p:sp>
+        <p:nvSpPr>
+          <p:cNvPr id="22" name="TextBox 21"/>
+          <p:cNvSpPr txBox="1"/>
+          <p:nvPr/>
+        </p:nvSpPr>
+        <p:spPr>
+          <a:xfrm>
+            <a:off x="8317992" y="3246120"/>
+            <a:ext cx="3194304" cy="1874519"/>
+          </a:xfrm>
+          <a:prstGeom prst="rect">
+            <a:avLst/>
+          </a:prstGeom>
+          <a:noFill/>
+        </p:spPr>
+        <p:txBody>
+          <a:bodyPr wrap="square" lIns="0" rIns="0" tIns="0" bIns="0" anchor="t"/>
+          <a:lstStyle/>
+          <a:p>
+            <a:pPr algn="l">
+              <a:spcBef>
+                <a:spcPts val="0"/>
+              </a:spcBef>
+              <a:spcAft>
+                <a:spcPts val="0"/>
+              </a:spcAft>
+            </a:pPr>
+            <a:r>
+              <a:rPr sz="1500" b="0" i="0">
+                <a:solidFill>
+                  <a:srgbClr val="1A2834"/>
                 </a:solidFill>
                 <a:latin typeface="Calibri"/>
                 <a:ea typeface="Calibri"/>
                 <a:cs typeface="Calibri"/>
               </a:rPr>
-              <a:t>Vehicles / peak hour</a:t>
-            </a:r>
-          </a:p>
-        </p:txBody>
-      </p:sp>
-      <p:sp>
-        <p:nvSpPr>
-          <p:cNvPr id="25" name="TextBox 24"/>
-          <p:cNvSpPr txBox="1"/>
-          <p:nvPr/>
-        </p:nvSpPr>
-        <p:spPr>
-          <a:xfrm>
-            <a:off x="7626096" y="3328416"/>
-            <a:ext cx="3840480" cy="292608"/>
-          </a:xfrm>
-          <a:prstGeom prst="rect">
-            <a:avLst/>
-          </a:prstGeom>
-          <a:noFill/>
-        </p:spPr>
-        <p:txBody>
-          <a:bodyPr wrap="square" lIns="0" rIns="0" tIns="0" bIns="0" anchor="t"/>
-          <a:lstStyle/>
-          <a:p>
-            <a:pPr algn="l">
-              <a:spcBef>
-                <a:spcPts val="0"/>
-              </a:spcBef>
-              <a:spcAft>
-                <a:spcPts val="0"/>
-              </a:spcAft>
-            </a:pPr>
-            <a:r>
-              <a:rPr sz="1600" b="1" i="0">
-                <a:solidFill>
-                  <a:srgbClr val="1A2834"/>
-                </a:solidFill>
-                <a:latin typeface="Georgia"/>
-                <a:ea typeface="Georgia"/>
-                <a:cs typeface="Georgia"/>
-              </a:rPr>
-              <a:t>800  –  2,200</a:t>
-            </a:r>
-          </a:p>
-        </p:txBody>
-      </p:sp>
-      <p:sp>
-        <p:nvSpPr>
-          <p:cNvPr id="26" name="TextBox 25"/>
-          <p:cNvSpPr txBox="1"/>
-          <p:nvPr/>
-        </p:nvSpPr>
-        <p:spPr>
-          <a:xfrm>
-            <a:off x="7626096" y="3785615"/>
-            <a:ext cx="3840480" cy="219456"/>
-          </a:xfrm>
-          <a:prstGeom prst="rect">
-            <a:avLst/>
-          </a:prstGeom>
-          <a:noFill/>
-        </p:spPr>
-        <p:txBody>
-          <a:bodyPr wrap="square" lIns="0" rIns="0" tIns="0" bIns="0" anchor="t"/>
-          <a:lstStyle/>
-          <a:p>
-            <a:pPr algn="l">
-              <a:spcBef>
-                <a:spcPts val="0"/>
-              </a:spcBef>
-              <a:spcAft>
-                <a:spcPts val="0"/>
-              </a:spcAft>
-            </a:pPr>
-            <a:r>
-              <a:rPr sz="1200" b="0" i="0">
-                <a:solidFill>
-                  <a:srgbClr val="5E6E7C"/>
-                </a:solidFill>
-                <a:latin typeface="Calibri"/>
-                <a:ea typeface="Calibri"/>
-                <a:cs typeface="Calibri"/>
-              </a:rPr>
-              <a:t>Peak hours / day</a:t>
-            </a:r>
-          </a:p>
-        </p:txBody>
-      </p:sp>
-      <p:sp>
-        <p:nvSpPr>
-          <p:cNvPr id="27" name="TextBox 26"/>
-          <p:cNvSpPr txBox="1"/>
-          <p:nvPr/>
-        </p:nvSpPr>
-        <p:spPr>
-          <a:xfrm>
-            <a:off x="7626096" y="3986783"/>
-            <a:ext cx="3840480" cy="292608"/>
-          </a:xfrm>
-          <a:prstGeom prst="rect">
-            <a:avLst/>
-          </a:prstGeom>
-          <a:noFill/>
-        </p:spPr>
-        <p:txBody>
-          <a:bodyPr wrap="square" lIns="0" rIns="0" tIns="0" bIns="0" anchor="t"/>
-          <a:lstStyle/>
-          <a:p>
-            <a:pPr algn="l">
-              <a:spcBef>
-                <a:spcPts val="0"/>
-              </a:spcBef>
-              <a:spcAft>
-                <a:spcPts val="0"/>
-              </a:spcAft>
-            </a:pPr>
-            <a:r>
-              <a:rPr sz="1600" b="1" i="0">
-                <a:solidFill>
-                  <a:srgbClr val="1A2834"/>
-                </a:solidFill>
-                <a:latin typeface="Georgia"/>
-                <a:ea typeface="Georgia"/>
-                <a:cs typeface="Georgia"/>
-              </a:rPr>
-              <a:t>3  –  7</a:t>
-            </a:r>
-          </a:p>
-        </p:txBody>
-      </p:sp>
-      <p:sp>
-        <p:nvSpPr>
-          <p:cNvPr id="28" name="TextBox 27"/>
-          <p:cNvSpPr txBox="1"/>
-          <p:nvPr/>
-        </p:nvSpPr>
-        <p:spPr>
-          <a:xfrm>
-            <a:off x="7626096" y="4443983"/>
-            <a:ext cx="3840480" cy="219456"/>
-          </a:xfrm>
-          <a:prstGeom prst="rect">
-            <a:avLst/>
-          </a:prstGeom>
-          <a:noFill/>
-        </p:spPr>
-        <p:txBody>
-          <a:bodyPr wrap="square" lIns="0" rIns="0" tIns="0" bIns="0" anchor="t"/>
-          <a:lstStyle/>
-          <a:p>
-            <a:pPr algn="l">
-              <a:spcBef>
-                <a:spcPts val="0"/>
-              </a:spcBef>
-              <a:spcAft>
-                <a:spcPts val="0"/>
-              </a:spcAft>
-            </a:pPr>
-            <a:r>
-              <a:rPr sz="1200" b="0" i="0">
-                <a:solidFill>
-                  <a:srgbClr val="5E6E7C"/>
-                </a:solidFill>
-                <a:latin typeface="Calibri"/>
-                <a:ea typeface="Calibri"/>
-                <a:cs typeface="Calibri"/>
-              </a:rPr>
-              <a:t>Days / year</a:t>
-            </a:r>
-          </a:p>
-        </p:txBody>
-      </p:sp>
-      <p:sp>
-        <p:nvSpPr>
-          <p:cNvPr id="29" name="TextBox 28"/>
-          <p:cNvSpPr txBox="1"/>
-          <p:nvPr/>
-        </p:nvSpPr>
-        <p:spPr>
-          <a:xfrm>
-            <a:off x="7626096" y="4645151"/>
-            <a:ext cx="3840480" cy="292608"/>
-          </a:xfrm>
-          <a:prstGeom prst="rect">
-            <a:avLst/>
-          </a:prstGeom>
-          <a:noFill/>
-        </p:spPr>
-        <p:txBody>
-          <a:bodyPr wrap="square" lIns="0" rIns="0" tIns="0" bIns="0" anchor="t"/>
-          <a:lstStyle/>
-          <a:p>
-            <a:pPr algn="l">
-              <a:spcBef>
-                <a:spcPts val="0"/>
-              </a:spcBef>
-              <a:spcAft>
-                <a:spcPts val="0"/>
-              </a:spcAft>
-            </a:pPr>
-            <a:r>
-              <a:rPr sz="1600" b="1" i="0">
-                <a:solidFill>
-                  <a:srgbClr val="1A2834"/>
-                </a:solidFill>
-                <a:latin typeface="Georgia"/>
-                <a:ea typeface="Georgia"/>
-                <a:cs typeface="Georgia"/>
-              </a:rPr>
-              <a:t>250  –  330</a:t>
-            </a:r>
-          </a:p>
-        </p:txBody>
-      </p:sp>
-      <p:sp>
-        <p:nvSpPr>
-          <p:cNvPr id="30" name="TextBox 29"/>
-          <p:cNvSpPr txBox="1"/>
-          <p:nvPr/>
-        </p:nvSpPr>
-        <p:spPr>
-          <a:xfrm>
-            <a:off x="7626096" y="5349240"/>
-            <a:ext cx="3886200" cy="548640"/>
-          </a:xfrm>
-          <a:prstGeom prst="rect">
-            <a:avLst/>
-          </a:prstGeom>
-          <a:noFill/>
-        </p:spPr>
-        <p:txBody>
-          <a:bodyPr wrap="square" lIns="0" rIns="0" tIns="0" bIns="0" anchor="t"/>
-          <a:lstStyle/>
-          <a:p>
-            <a:pPr algn="l">
-              <a:spcBef>
-                <a:spcPts val="0"/>
-              </a:spcBef>
-              <a:spcAft>
-                <a:spcPts val="0"/>
-              </a:spcAft>
-            </a:pPr>
-            <a:r>
-              <a:rPr sz="1300" b="0" i="0">
-                <a:solidFill>
-                  <a:srgbClr val="5E6E7C"/>
-                </a:solidFill>
-                <a:latin typeface="Calibri"/>
-                <a:ea typeface="Calibri"/>
-                <a:cs typeface="Calibri"/>
-              </a:rPr>
-              <a:t>Rupee value uses a placeholder price, so it is not shown.</a:t>
+              <a:t>Camera overlays exist under results/demo/yolo/. They are input feasibility only. Locked TEST fuel still uses the oracle detector. Robustness miss rates remain assumed until labeled video replaces the noise model.</a:t>
             </a:r>
           </a:p>
         </p:txBody>
@@ -9642,6 +10231,1274 @@
 </file>
 
 <file path=ppt/slides/slide15.xml><?xml version="1.0" encoding="utf-8"?>
+<p:sld xmlns:a="http://schemas.openxmlformats.org/drawingml/2006/main" xmlns:p="http://schemas.openxmlformats.org/presentationml/2006/main" xmlns:r="http://schemas.openxmlformats.org/officeDocument/2006/relationships">
+  <p:cSld>
+    <p:bg>
+      <p:bgPr>
+        <a:solidFill>
+          <a:srgbClr val="F6F3EE"/>
+        </a:solidFill>
+        <a:effectLst/>
+      </p:bgPr>
+    </p:bg>
+    <p:spTree>
+      <p:nvGrpSpPr>
+        <p:cNvPr id="1" name=""/>
+        <p:cNvGrpSpPr/>
+        <p:nvPr/>
+      </p:nvGrpSpPr>
+      <p:grpSpPr/>
+      <p:sp>
+        <p:nvSpPr>
+          <p:cNvPr id="2" name="Rectangle 1"/>
+          <p:cNvSpPr/>
+          <p:nvPr/>
+        </p:nvSpPr>
+        <p:spPr>
+          <a:xfrm>
+            <a:off x="0" y="0"/>
+            <a:ext cx="73152" cy="6858000"/>
+          </a:xfrm>
+          <a:prstGeom prst="rect">
+            <a:avLst/>
+          </a:prstGeom>
+          <a:solidFill>
+            <a:srgbClr val="C4841D"/>
+          </a:solidFill>
+          <a:ln>
+            <a:noFill/>
+          </a:ln>
+        </p:spPr>
+        <p:style>
+          <a:lnRef idx="1">
+            <a:schemeClr val="accent1"/>
+          </a:lnRef>
+          <a:fillRef idx="3">
+            <a:schemeClr val="accent1"/>
+          </a:fillRef>
+          <a:effectRef idx="2">
+            <a:schemeClr val="accent1"/>
+          </a:effectRef>
+          <a:fontRef idx="minor">
+            <a:schemeClr val="lt1"/>
+          </a:fontRef>
+        </p:style>
+        <p:txBody>
+          <a:bodyPr rtlCol="0" anchor="ctr"/>
+          <a:lstStyle/>
+          <a:p>
+            <a:pPr algn="ctr"/>
+          </a:p>
+        </p:txBody>
+      </p:sp>
+      <p:sp>
+        <p:nvSpPr>
+          <p:cNvPr id="3" name="TextBox 2"/>
+          <p:cNvSpPr txBox="1"/>
+          <p:nvPr/>
+        </p:nvSpPr>
+        <p:spPr>
+          <a:xfrm>
+            <a:off x="502920" y="256032"/>
+            <a:ext cx="9144000" cy="237744"/>
+          </a:xfrm>
+          <a:prstGeom prst="rect">
+            <a:avLst/>
+          </a:prstGeom>
+          <a:noFill/>
+        </p:spPr>
+        <p:txBody>
+          <a:bodyPr wrap="square" lIns="0" rIns="0" tIns="0" bIns="0" anchor="t"/>
+          <a:lstStyle/>
+          <a:p>
+            <a:pPr algn="l">
+              <a:spcBef>
+                <a:spcPts val="0"/>
+              </a:spcBef>
+              <a:spcAft>
+                <a:spcPts val="0"/>
+              </a:spcAft>
+            </a:pPr>
+            <a:r>
+              <a:rPr sz="1200" b="1" i="0">
+                <a:solidFill>
+                  <a:srgbClr val="C4841D"/>
+                </a:solidFill>
+                <a:latin typeface="Calibri"/>
+                <a:ea typeface="Calibri"/>
+                <a:cs typeface="Calibri"/>
+              </a:rPr>
+              <a:t>SCALING</a:t>
+            </a:r>
+          </a:p>
+        </p:txBody>
+      </p:sp>
+      <p:sp>
+        <p:nvSpPr>
+          <p:cNvPr id="4" name="TextBox 3"/>
+          <p:cNvSpPr txBox="1"/>
+          <p:nvPr/>
+        </p:nvSpPr>
+        <p:spPr>
+          <a:xfrm>
+            <a:off x="502920" y="475488"/>
+            <a:ext cx="11228832" cy="475488"/>
+          </a:xfrm>
+          <a:prstGeom prst="rect">
+            <a:avLst/>
+          </a:prstGeom>
+          <a:noFill/>
+        </p:spPr>
+        <p:txBody>
+          <a:bodyPr wrap="square" lIns="0" rIns="0" tIns="0" bIns="0" anchor="t"/>
+          <a:lstStyle/>
+          <a:p>
+            <a:pPr algn="l">
+              <a:spcBef>
+                <a:spcPts val="0"/>
+              </a:spcBef>
+              <a:spcAft>
+                <a:spcPts val="0"/>
+              </a:spcAft>
+            </a:pPr>
+            <a:r>
+              <a:rPr sz="2800" b="1" i="0">
+                <a:solidFill>
+                  <a:srgbClr val="1A2834"/>
+                </a:solidFill>
+                <a:latin typeface="Georgia"/>
+                <a:ea typeface="Georgia"/>
+                <a:cs typeface="Georgia"/>
+              </a:rPr>
+              <a:t>Per vehicle is measured. Per year is a range.</a:t>
+            </a:r>
+          </a:p>
+        </p:txBody>
+      </p:sp>
+      <p:sp>
+        <p:nvSpPr>
+          <p:cNvPr id="5" name="TextBox 4"/>
+          <p:cNvSpPr txBox="1"/>
+          <p:nvPr/>
+        </p:nvSpPr>
+        <p:spPr>
+          <a:xfrm>
+            <a:off x="502920" y="987552"/>
+            <a:ext cx="11228832" cy="420624"/>
+          </a:xfrm>
+          <a:prstGeom prst="rect">
+            <a:avLst/>
+          </a:prstGeom>
+          <a:noFill/>
+        </p:spPr>
+        <p:txBody>
+          <a:bodyPr wrap="square" lIns="0" rIns="0" tIns="0" bIns="0" anchor="t"/>
+          <a:lstStyle/>
+          <a:p>
+            <a:pPr algn="l">
+              <a:spcBef>
+                <a:spcPts val="0"/>
+              </a:spcBef>
+              <a:spcAft>
+                <a:spcPts val="0"/>
+              </a:spcAft>
+            </a:pPr>
+            <a:r>
+              <a:rPr sz="1500" b="0" i="0">
+                <a:solidFill>
+                  <a:srgbClr val="5E6E7C"/>
+                </a:solidFill>
+                <a:latin typeface="Calibri"/>
+                <a:ea typeface="Calibri"/>
+                <a:cs typeface="Calibri"/>
+              </a:rPr>
+              <a:t>The wide bar is the assumed city size, not uncertainty in the junction test.</a:t>
+            </a:r>
+          </a:p>
+        </p:txBody>
+      </p:sp>
+      <p:sp>
+        <p:nvSpPr>
+          <p:cNvPr id="6" name="TextBox 5"/>
+          <p:cNvSpPr txBox="1"/>
+          <p:nvPr/>
+        </p:nvSpPr>
+        <p:spPr>
+          <a:xfrm>
+            <a:off x="502920" y="6510528"/>
+            <a:ext cx="8412480" cy="237744"/>
+          </a:xfrm>
+          <a:prstGeom prst="rect">
+            <a:avLst/>
+          </a:prstGeom>
+          <a:noFill/>
+        </p:spPr>
+        <p:txBody>
+          <a:bodyPr wrap="square" lIns="0" rIns="0" tIns="0" bIns="0" anchor="t"/>
+          <a:lstStyle/>
+          <a:p>
+            <a:pPr algn="l">
+              <a:spcBef>
+                <a:spcPts val="0"/>
+              </a:spcBef>
+              <a:spcAft>
+                <a:spcPts val="0"/>
+              </a:spcAft>
+            </a:pPr>
+            <a:r>
+              <a:rPr sz="1200" b="0" i="0">
+                <a:solidFill>
+                  <a:srgbClr val="5E6E7C"/>
+                </a:solidFill>
+                <a:latin typeface="Calibri"/>
+                <a:ea typeface="Calibri"/>
+                <a:cs typeface="Calibri"/>
+              </a:rPr>
+              <a:t>XtraFlow    ·    Simulation-based estimate</a:t>
+            </a:r>
+          </a:p>
+        </p:txBody>
+      </p:sp>
+      <p:sp>
+        <p:nvSpPr>
+          <p:cNvPr id="7" name="TextBox 6"/>
+          <p:cNvSpPr txBox="1"/>
+          <p:nvPr/>
+        </p:nvSpPr>
+        <p:spPr>
+          <a:xfrm>
+            <a:off x="9692640" y="6510528"/>
+            <a:ext cx="2011680" cy="237744"/>
+          </a:xfrm>
+          <a:prstGeom prst="rect">
+            <a:avLst/>
+          </a:prstGeom>
+          <a:noFill/>
+        </p:spPr>
+        <p:txBody>
+          <a:bodyPr wrap="square" lIns="0" rIns="0" tIns="0" bIns="0" anchor="t"/>
+          <a:lstStyle/>
+          <a:p>
+            <a:pPr algn="r">
+              <a:spcBef>
+                <a:spcPts val="0"/>
+              </a:spcBef>
+              <a:spcAft>
+                <a:spcPts val="0"/>
+              </a:spcAft>
+            </a:pPr>
+            <a:r>
+              <a:rPr sz="1200" b="0" i="0">
+                <a:solidFill>
+                  <a:srgbClr val="5E6E7C"/>
+                </a:solidFill>
+                <a:latin typeface="Georgia"/>
+                <a:ea typeface="Georgia"/>
+                <a:cs typeface="Georgia"/>
+              </a:rPr>
+              <a:t>15</a:t>
+            </a:r>
+          </a:p>
+        </p:txBody>
+      </p:sp>
+      <p:sp>
+        <p:nvSpPr>
+          <p:cNvPr id="8" name="Rounded Rectangle 7"/>
+          <p:cNvSpPr/>
+          <p:nvPr/>
+        </p:nvSpPr>
+        <p:spPr>
+          <a:xfrm>
+            <a:off x="502920" y="1572768"/>
+            <a:ext cx="6720840" cy="1965960"/>
+          </a:xfrm>
+          <a:prstGeom prst="roundRect">
+            <a:avLst>
+              <a:gd name="adj" fmla="val 8000"/>
+            </a:avLst>
+          </a:prstGeom>
+          <a:solidFill>
+            <a:srgbClr val="FFFFFF"/>
+          </a:solidFill>
+          <a:ln w="12700">
+            <a:solidFill>
+              <a:srgbClr val="E3DBD0"/>
+            </a:solidFill>
+          </a:ln>
+        </p:spPr>
+        <p:style>
+          <a:lnRef idx="1">
+            <a:schemeClr val="accent1"/>
+          </a:lnRef>
+          <a:fillRef idx="3">
+            <a:schemeClr val="accent1"/>
+          </a:fillRef>
+          <a:effectRef idx="2">
+            <a:schemeClr val="accent1"/>
+          </a:effectRef>
+          <a:fontRef idx="minor">
+            <a:schemeClr val="lt1"/>
+          </a:fontRef>
+        </p:style>
+        <p:txBody>
+          <a:bodyPr rtlCol="0" anchor="ctr"/>
+          <a:lstStyle/>
+          <a:p>
+            <a:pPr algn="ctr"/>
+          </a:p>
+        </p:txBody>
+      </p:sp>
+      <p:sp>
+        <p:nvSpPr>
+          <p:cNvPr id="9" name="TextBox 8"/>
+          <p:cNvSpPr txBox="1"/>
+          <p:nvPr/>
+        </p:nvSpPr>
+        <p:spPr>
+          <a:xfrm>
+            <a:off x="758952" y="1719072"/>
+            <a:ext cx="6217920" cy="256032"/>
+          </a:xfrm>
+          <a:prstGeom prst="rect">
+            <a:avLst/>
+          </a:prstGeom>
+          <a:noFill/>
+        </p:spPr>
+        <p:txBody>
+          <a:bodyPr wrap="square" lIns="0" rIns="0" tIns="0" bIns="0" anchor="t"/>
+          <a:lstStyle/>
+          <a:p>
+            <a:pPr algn="l">
+              <a:spcBef>
+                <a:spcPts val="0"/>
+              </a:spcBef>
+              <a:spcAft>
+                <a:spcPts val="0"/>
+              </a:spcAft>
+            </a:pPr>
+            <a:r>
+              <a:rPr sz="1200" b="1" i="0">
+                <a:solidFill>
+                  <a:srgbClr val="C4841D"/>
+                </a:solidFill>
+                <a:latin typeface="Calibri"/>
+                <a:ea typeface="Calibri"/>
+                <a:cs typeface="Calibri"/>
+              </a:rPr>
+              <a:t>MEASURED VS BEST BASELINE (SCENARIO-WEIGHTED)</a:t>
+            </a:r>
+          </a:p>
+        </p:txBody>
+      </p:sp>
+      <p:sp>
+        <p:nvSpPr>
+          <p:cNvPr id="10" name="TextBox 9"/>
+          <p:cNvSpPr txBox="1"/>
+          <p:nvPr/>
+        </p:nvSpPr>
+        <p:spPr>
+          <a:xfrm>
+            <a:off x="758952" y="2029968"/>
+            <a:ext cx="6217920" cy="594360"/>
+          </a:xfrm>
+          <a:prstGeom prst="rect">
+            <a:avLst/>
+          </a:prstGeom>
+          <a:noFill/>
+        </p:spPr>
+        <p:txBody>
+          <a:bodyPr wrap="square" lIns="0" rIns="0" tIns="0" bIns="0" anchor="t"/>
+          <a:lstStyle/>
+          <a:p>
+            <a:pPr algn="l">
+              <a:spcBef>
+                <a:spcPts val="0"/>
+              </a:spcBef>
+              <a:spcAft>
+                <a:spcPts val="0"/>
+              </a:spcAft>
+            </a:pPr>
+            <a:r>
+              <a:rPr sz="3200" b="1" i="0">
+                <a:solidFill>
+                  <a:srgbClr val="1B6B5A"/>
+                </a:solidFill>
+                <a:latin typeface="Georgia"/>
+                <a:ea typeface="Georgia"/>
+                <a:cs typeface="Georgia"/>
+              </a:rPr>
+              <a:t>0.001</a:t>
+            </a:r>
+            <a:r>
+              <a:rPr sz="1600" b="0" i="0">
+                <a:solidFill>
+                  <a:srgbClr val="1A2834"/>
+                </a:solidFill>
+                <a:latin typeface="Calibri"/>
+                <a:ea typeface="Calibri"/>
+                <a:cs typeface="Calibri"/>
+              </a:rPr>
+              <a:t>  L saved / vehicle</a:t>
+            </a:r>
+          </a:p>
+        </p:txBody>
+      </p:sp>
+      <p:sp>
+        <p:nvSpPr>
+          <p:cNvPr id="11" name="TextBox 10"/>
+          <p:cNvSpPr txBox="1"/>
+          <p:nvPr/>
+        </p:nvSpPr>
+        <p:spPr>
+          <a:xfrm>
+            <a:off x="758952" y="2788920"/>
+            <a:ext cx="6217920" cy="457200"/>
+          </a:xfrm>
+          <a:prstGeom prst="rect">
+            <a:avLst/>
+          </a:prstGeom>
+          <a:noFill/>
+        </p:spPr>
+        <p:txBody>
+          <a:bodyPr wrap="square" lIns="0" rIns="0" tIns="0" bIns="0" anchor="t"/>
+          <a:lstStyle/>
+          <a:p>
+            <a:pPr algn="l">
+              <a:spcBef>
+                <a:spcPts val="0"/>
+              </a:spcBef>
+              <a:spcAft>
+                <a:spcPts val="0"/>
+              </a:spcAft>
+            </a:pPr>
+            <a:r>
+              <a:rPr sz="1400" b="0" i="0">
+                <a:solidFill>
+                  <a:srgbClr val="5E6E7C"/>
+                </a:solidFill>
+                <a:latin typeface="Calibri"/>
+                <a:ea typeface="Calibri"/>
+                <a:cs typeface="Calibri"/>
+              </a:rPr>
+              <a:t>5th – 95th percentile of that mean: 0.001 – 0.002 L</a:t>
+            </a:r>
+          </a:p>
+        </p:txBody>
+      </p:sp>
+      <p:sp>
+        <p:nvSpPr>
+          <p:cNvPr id="12" name="TextBox 11"/>
+          <p:cNvSpPr txBox="1"/>
+          <p:nvPr/>
+        </p:nvSpPr>
+        <p:spPr>
+          <a:xfrm>
+            <a:off x="502920" y="3703320"/>
+            <a:ext cx="6675120" cy="256032"/>
+          </a:xfrm>
+          <a:prstGeom prst="rect">
+            <a:avLst/>
+          </a:prstGeom>
+          <a:noFill/>
+        </p:spPr>
+        <p:txBody>
+          <a:bodyPr wrap="square" lIns="0" rIns="0" tIns="0" bIns="0" anchor="t"/>
+          <a:lstStyle/>
+          <a:p>
+            <a:pPr algn="l">
+              <a:spcBef>
+                <a:spcPts val="0"/>
+              </a:spcBef>
+              <a:spcAft>
+                <a:spcPts val="0"/>
+              </a:spcAft>
+            </a:pPr>
+            <a:r>
+              <a:rPr sz="1200" b="1" i="0">
+                <a:solidFill>
+                  <a:srgbClr val="C4841D"/>
+                </a:solidFill>
+                <a:latin typeface="Calibri"/>
+                <a:ea typeface="Calibri"/>
+                <a:cs typeface="Calibri"/>
+              </a:rPr>
+              <a:t>IF THAT SAVING IS MULTIPLIED OUT</a:t>
+            </a:r>
+          </a:p>
+        </p:txBody>
+      </p:sp>
+      <p:sp>
+        <p:nvSpPr>
+          <p:cNvPr id="13" name="Rectangle 12"/>
+          <p:cNvSpPr/>
+          <p:nvPr/>
+        </p:nvSpPr>
+        <p:spPr>
+          <a:xfrm>
+            <a:off x="502920" y="4041648"/>
+            <a:ext cx="6720840" cy="128016"/>
+          </a:xfrm>
+          <a:prstGeom prst="rect">
+            <a:avLst/>
+          </a:prstGeom>
+          <a:solidFill>
+            <a:srgbClr val="C5DDD4"/>
+          </a:solidFill>
+          <a:ln>
+            <a:noFill/>
+          </a:ln>
+        </p:spPr>
+        <p:style>
+          <a:lnRef idx="1">
+            <a:schemeClr val="accent1"/>
+          </a:lnRef>
+          <a:fillRef idx="3">
+            <a:schemeClr val="accent1"/>
+          </a:fillRef>
+          <a:effectRef idx="2">
+            <a:schemeClr val="accent1"/>
+          </a:effectRef>
+          <a:fontRef idx="minor">
+            <a:schemeClr val="lt1"/>
+          </a:fontRef>
+        </p:style>
+        <p:txBody>
+          <a:bodyPr rtlCol="0" anchor="ctr"/>
+          <a:lstStyle/>
+          <a:p>
+            <a:pPr algn="ctr"/>
+          </a:p>
+        </p:txBody>
+      </p:sp>
+      <p:sp>
+        <p:nvSpPr>
+          <p:cNvPr id="14" name="Rectangle 13"/>
+          <p:cNvSpPr/>
+          <p:nvPr/>
+        </p:nvSpPr>
+        <p:spPr>
+          <a:xfrm>
+            <a:off x="2339803" y="3913632"/>
+            <a:ext cx="54864" cy="384048"/>
+          </a:xfrm>
+          <a:prstGeom prst="rect">
+            <a:avLst/>
+          </a:prstGeom>
+          <a:solidFill>
+            <a:srgbClr val="1B6B5A"/>
+          </a:solidFill>
+          <a:ln>
+            <a:noFill/>
+          </a:ln>
+        </p:spPr>
+        <p:style>
+          <a:lnRef idx="1">
+            <a:schemeClr val="accent1"/>
+          </a:lnRef>
+          <a:fillRef idx="3">
+            <a:schemeClr val="accent1"/>
+          </a:fillRef>
+          <a:effectRef idx="2">
+            <a:schemeClr val="accent1"/>
+          </a:effectRef>
+          <a:fontRef idx="minor">
+            <a:schemeClr val="lt1"/>
+          </a:fontRef>
+        </p:style>
+        <p:txBody>
+          <a:bodyPr rtlCol="0" anchor="ctr"/>
+          <a:lstStyle/>
+          <a:p>
+            <a:pPr algn="ctr"/>
+          </a:p>
+        </p:txBody>
+      </p:sp>
+      <p:sp>
+        <p:nvSpPr>
+          <p:cNvPr id="15" name="TextBox 14"/>
+          <p:cNvSpPr txBox="1"/>
+          <p:nvPr/>
+        </p:nvSpPr>
+        <p:spPr>
+          <a:xfrm>
+            <a:off x="502920" y="4370832"/>
+            <a:ext cx="2926080" cy="256032"/>
+          </a:xfrm>
+          <a:prstGeom prst="rect">
+            <a:avLst/>
+          </a:prstGeom>
+          <a:noFill/>
+        </p:spPr>
+        <p:txBody>
+          <a:bodyPr wrap="square" lIns="0" rIns="0" tIns="0" bIns="0" anchor="t"/>
+          <a:lstStyle/>
+          <a:p>
+            <a:pPr algn="l">
+              <a:spcBef>
+                <a:spcPts val="0"/>
+              </a:spcBef>
+              <a:spcAft>
+                <a:spcPts val="0"/>
+              </a:spcAft>
+            </a:pPr>
+            <a:r>
+              <a:rPr sz="1200" b="0" i="0">
+                <a:solidFill>
+                  <a:srgbClr val="5E6E7C"/>
+                </a:solidFill>
+                <a:latin typeface="Calibri"/>
+                <a:ea typeface="Calibri"/>
+                <a:cs typeface="Calibri"/>
+              </a:rPr>
+              <a:t>0.3 million litres</a:t>
+            </a:r>
+          </a:p>
+        </p:txBody>
+      </p:sp>
+      <p:sp>
+        <p:nvSpPr>
+          <p:cNvPr id="16" name="TextBox 15"/>
+          <p:cNvSpPr txBox="1"/>
+          <p:nvPr/>
+        </p:nvSpPr>
+        <p:spPr>
+          <a:xfrm>
+            <a:off x="4297680" y="4370832"/>
+            <a:ext cx="2926080" cy="256032"/>
+          </a:xfrm>
+          <a:prstGeom prst="rect">
+            <a:avLst/>
+          </a:prstGeom>
+          <a:noFill/>
+        </p:spPr>
+        <p:txBody>
+          <a:bodyPr wrap="square" lIns="0" rIns="0" tIns="0" bIns="0" anchor="t"/>
+          <a:lstStyle/>
+          <a:p>
+            <a:pPr algn="r">
+              <a:spcBef>
+                <a:spcPts val="0"/>
+              </a:spcBef>
+              <a:spcAft>
+                <a:spcPts val="0"/>
+              </a:spcAft>
+            </a:pPr>
+            <a:r>
+              <a:rPr sz="1200" b="0" i="0">
+                <a:solidFill>
+                  <a:srgbClr val="5E6E7C"/>
+                </a:solidFill>
+                <a:latin typeface="Calibri"/>
+                <a:ea typeface="Calibri"/>
+                <a:cs typeface="Calibri"/>
+              </a:rPr>
+              <a:t>2.7 million litres</a:t>
+            </a:r>
+          </a:p>
+        </p:txBody>
+      </p:sp>
+      <p:sp>
+        <p:nvSpPr>
+          <p:cNvPr id="17" name="TextBox 16"/>
+          <p:cNvSpPr txBox="1"/>
+          <p:nvPr/>
+        </p:nvSpPr>
+        <p:spPr>
+          <a:xfrm>
+            <a:off x="502920" y="4754880"/>
+            <a:ext cx="6675120" cy="438912"/>
+          </a:xfrm>
+          <a:prstGeom prst="rect">
+            <a:avLst/>
+          </a:prstGeom>
+          <a:noFill/>
+        </p:spPr>
+        <p:txBody>
+          <a:bodyPr wrap="square" lIns="0" rIns="0" tIns="0" bIns="0" anchor="t"/>
+          <a:lstStyle/>
+          <a:p>
+            <a:pPr algn="l">
+              <a:spcBef>
+                <a:spcPts val="0"/>
+              </a:spcBef>
+              <a:spcAft>
+                <a:spcPts val="0"/>
+              </a:spcAft>
+            </a:pPr>
+            <a:r>
+              <a:rPr sz="2200" b="1" i="0">
+                <a:solidFill>
+                  <a:srgbClr val="1A2834"/>
+                </a:solidFill>
+                <a:latin typeface="Georgia"/>
+                <a:ea typeface="Georgia"/>
+                <a:cs typeface="Georgia"/>
+              </a:rPr>
+              <a:t>0.9 million litres</a:t>
+            </a:r>
+          </a:p>
+        </p:txBody>
+      </p:sp>
+      <p:sp>
+        <p:nvSpPr>
+          <p:cNvPr id="18" name="TextBox 17"/>
+          <p:cNvSpPr txBox="1"/>
+          <p:nvPr/>
+        </p:nvSpPr>
+        <p:spPr>
+          <a:xfrm>
+            <a:off x="502920" y="5193792"/>
+            <a:ext cx="6675120" cy="256032"/>
+          </a:xfrm>
+          <a:prstGeom prst="rect">
+            <a:avLst/>
+          </a:prstGeom>
+          <a:noFill/>
+        </p:spPr>
+        <p:txBody>
+          <a:bodyPr wrap="square" lIns="0" rIns="0" tIns="0" bIns="0" anchor="t"/>
+          <a:lstStyle/>
+          <a:p>
+            <a:pPr algn="l">
+              <a:spcBef>
+                <a:spcPts val="0"/>
+              </a:spcBef>
+              <a:spcAft>
+                <a:spcPts val="0"/>
+              </a:spcAft>
+            </a:pPr>
+            <a:r>
+              <a:rPr sz="1300" b="0" i="0">
+                <a:solidFill>
+                  <a:srgbClr val="5E6E7C"/>
+                </a:solidFill>
+                <a:latin typeface="Calibri"/>
+                <a:ea typeface="Calibri"/>
+                <a:cs typeface="Calibri"/>
+              </a:rPr>
+              <a:t>median of the scaled draws</a:t>
+            </a:r>
+          </a:p>
+        </p:txBody>
+      </p:sp>
+      <p:sp>
+        <p:nvSpPr>
+          <p:cNvPr id="19" name="TextBox 18"/>
+          <p:cNvSpPr txBox="1"/>
+          <p:nvPr/>
+        </p:nvSpPr>
+        <p:spPr>
+          <a:xfrm>
+            <a:off x="502920" y="5532120"/>
+            <a:ext cx="6675120" cy="502920"/>
+          </a:xfrm>
+          <a:prstGeom prst="rect">
+            <a:avLst/>
+          </a:prstGeom>
+          <a:noFill/>
+        </p:spPr>
+        <p:txBody>
+          <a:bodyPr wrap="square" lIns="0" rIns="0" tIns="0" bIns="0" anchor="t"/>
+          <a:lstStyle/>
+          <a:p>
+            <a:pPr algn="l">
+              <a:spcBef>
+                <a:spcPts val="0"/>
+              </a:spcBef>
+              <a:spcAft>
+                <a:spcPts val="0"/>
+              </a:spcAft>
+            </a:pPr>
+            <a:r>
+              <a:rPr sz="1300" b="0" i="0">
+                <a:solidFill>
+                  <a:srgbClr val="5E6E7C"/>
+                </a:solidFill>
+                <a:latin typeface="Calibri"/>
+                <a:ea typeface="Calibri"/>
+                <a:cs typeface="Calibri"/>
+              </a:rPr>
+              <a:t>CO₂ median 2,296 tonnes   ·   629 tonnes – 6,640 tonnes</a:t>
+            </a:r>
+          </a:p>
+        </p:txBody>
+      </p:sp>
+      <p:sp>
+        <p:nvSpPr>
+          <p:cNvPr id="20" name="Rounded Rectangle 19"/>
+          <p:cNvSpPr/>
+          <p:nvPr/>
+        </p:nvSpPr>
+        <p:spPr>
+          <a:xfrm>
+            <a:off x="7406640" y="1572768"/>
+            <a:ext cx="4325112" cy="4526280"/>
+          </a:xfrm>
+          <a:prstGeom prst="roundRect">
+            <a:avLst>
+              <a:gd name="adj" fmla="val 8000"/>
+            </a:avLst>
+          </a:prstGeom>
+          <a:solidFill>
+            <a:srgbClr val="FFFFFF"/>
+          </a:solidFill>
+          <a:ln w="12700">
+            <a:solidFill>
+              <a:srgbClr val="E3DBD0"/>
+            </a:solidFill>
+          </a:ln>
+        </p:spPr>
+        <p:style>
+          <a:lnRef idx="1">
+            <a:schemeClr val="accent1"/>
+          </a:lnRef>
+          <a:fillRef idx="3">
+            <a:schemeClr val="accent1"/>
+          </a:fillRef>
+          <a:effectRef idx="2">
+            <a:schemeClr val="accent1"/>
+          </a:effectRef>
+          <a:fontRef idx="minor">
+            <a:schemeClr val="lt1"/>
+          </a:fontRef>
+        </p:style>
+        <p:txBody>
+          <a:bodyPr rtlCol="0" anchor="ctr"/>
+          <a:lstStyle/>
+          <a:p>
+            <a:pPr algn="ctr"/>
+          </a:p>
+        </p:txBody>
+      </p:sp>
+      <p:sp>
+        <p:nvSpPr>
+          <p:cNvPr id="21" name="TextBox 20"/>
+          <p:cNvSpPr txBox="1"/>
+          <p:nvPr/>
+        </p:nvSpPr>
+        <p:spPr>
+          <a:xfrm>
+            <a:off x="7626096" y="1737360"/>
+            <a:ext cx="3931920" cy="640080"/>
+          </a:xfrm>
+          <a:prstGeom prst="rect">
+            <a:avLst/>
+          </a:prstGeom>
+          <a:noFill/>
+        </p:spPr>
+        <p:txBody>
+          <a:bodyPr wrap="square" lIns="0" rIns="0" tIns="0" bIns="0" anchor="t"/>
+          <a:lstStyle/>
+          <a:p>
+            <a:pPr algn="l">
+              <a:spcBef>
+                <a:spcPts val="0"/>
+              </a:spcBef>
+              <a:spcAft>
+                <a:spcPts val="0"/>
+              </a:spcAft>
+            </a:pPr>
+            <a:r>
+              <a:rPr sz="1800" b="1" i="0">
+                <a:solidFill>
+                  <a:srgbClr val="1A2834"/>
+                </a:solidFill>
+                <a:latin typeface="Georgia"/>
+                <a:ea typeface="Georgia"/>
+                <a:cs typeface="Georgia"/>
+              </a:rPr>
+              <a:t>Why the bar is wide</a:t>
+            </a:r>
+          </a:p>
+        </p:txBody>
+      </p:sp>
+      <p:sp>
+        <p:nvSpPr>
+          <p:cNvPr id="22" name="TextBox 21"/>
+          <p:cNvSpPr txBox="1"/>
+          <p:nvPr/>
+        </p:nvSpPr>
+        <p:spPr>
+          <a:xfrm>
+            <a:off x="7626096" y="2468880"/>
+            <a:ext cx="3840480" cy="219456"/>
+          </a:xfrm>
+          <a:prstGeom prst="rect">
+            <a:avLst/>
+          </a:prstGeom>
+          <a:noFill/>
+        </p:spPr>
+        <p:txBody>
+          <a:bodyPr wrap="square" lIns="0" rIns="0" tIns="0" bIns="0" anchor="t"/>
+          <a:lstStyle/>
+          <a:p>
+            <a:pPr algn="l">
+              <a:spcBef>
+                <a:spcPts val="0"/>
+              </a:spcBef>
+              <a:spcAft>
+                <a:spcPts val="0"/>
+              </a:spcAft>
+            </a:pPr>
+            <a:r>
+              <a:rPr sz="1200" b="0" i="0">
+                <a:solidFill>
+                  <a:srgbClr val="5E6E7C"/>
+                </a:solidFill>
+                <a:latin typeface="Calibri"/>
+                <a:ea typeface="Calibri"/>
+                <a:cs typeface="Calibri"/>
+              </a:rPr>
+              <a:t>Junctions</a:t>
+            </a:r>
+          </a:p>
+        </p:txBody>
+      </p:sp>
+      <p:sp>
+        <p:nvSpPr>
+          <p:cNvPr id="23" name="TextBox 22"/>
+          <p:cNvSpPr txBox="1"/>
+          <p:nvPr/>
+        </p:nvSpPr>
+        <p:spPr>
+          <a:xfrm>
+            <a:off x="7626096" y="2670048"/>
+            <a:ext cx="3840480" cy="292608"/>
+          </a:xfrm>
+          <a:prstGeom prst="rect">
+            <a:avLst/>
+          </a:prstGeom>
+          <a:noFill/>
+        </p:spPr>
+        <p:txBody>
+          <a:bodyPr wrap="square" lIns="0" rIns="0" tIns="0" bIns="0" anchor="t"/>
+          <a:lstStyle/>
+          <a:p>
+            <a:pPr algn="l">
+              <a:spcBef>
+                <a:spcPts val="0"/>
+              </a:spcBef>
+              <a:spcAft>
+                <a:spcPts val="0"/>
+              </a:spcAft>
+            </a:pPr>
+            <a:r>
+              <a:rPr sz="1600" b="1" i="0">
+                <a:solidFill>
+                  <a:srgbClr val="1A2834"/>
+                </a:solidFill>
+                <a:latin typeface="Georgia"/>
+                <a:ea typeface="Georgia"/>
+                <a:cs typeface="Georgia"/>
+              </a:rPr>
+              <a:t>50  –  1,000</a:t>
+            </a:r>
+          </a:p>
+        </p:txBody>
+      </p:sp>
+      <p:sp>
+        <p:nvSpPr>
+          <p:cNvPr id="24" name="TextBox 23"/>
+          <p:cNvSpPr txBox="1"/>
+          <p:nvPr/>
+        </p:nvSpPr>
+        <p:spPr>
+          <a:xfrm>
+            <a:off x="7626096" y="3127248"/>
+            <a:ext cx="3840480" cy="219456"/>
+          </a:xfrm>
+          <a:prstGeom prst="rect">
+            <a:avLst/>
+          </a:prstGeom>
+          <a:noFill/>
+        </p:spPr>
+        <p:txBody>
+          <a:bodyPr wrap="square" lIns="0" rIns="0" tIns="0" bIns="0" anchor="t"/>
+          <a:lstStyle/>
+          <a:p>
+            <a:pPr algn="l">
+              <a:spcBef>
+                <a:spcPts val="0"/>
+              </a:spcBef>
+              <a:spcAft>
+                <a:spcPts val="0"/>
+              </a:spcAft>
+            </a:pPr>
+            <a:r>
+              <a:rPr sz="1200" b="0" i="0">
+                <a:solidFill>
+                  <a:srgbClr val="5E6E7C"/>
+                </a:solidFill>
+                <a:latin typeface="Calibri"/>
+                <a:ea typeface="Calibri"/>
+                <a:cs typeface="Calibri"/>
+              </a:rPr>
+              <a:t>Vehicles / peak hour</a:t>
+            </a:r>
+          </a:p>
+        </p:txBody>
+      </p:sp>
+      <p:sp>
+        <p:nvSpPr>
+          <p:cNvPr id="25" name="TextBox 24"/>
+          <p:cNvSpPr txBox="1"/>
+          <p:nvPr/>
+        </p:nvSpPr>
+        <p:spPr>
+          <a:xfrm>
+            <a:off x="7626096" y="3328416"/>
+            <a:ext cx="3840480" cy="292608"/>
+          </a:xfrm>
+          <a:prstGeom prst="rect">
+            <a:avLst/>
+          </a:prstGeom>
+          <a:noFill/>
+        </p:spPr>
+        <p:txBody>
+          <a:bodyPr wrap="square" lIns="0" rIns="0" tIns="0" bIns="0" anchor="t"/>
+          <a:lstStyle/>
+          <a:p>
+            <a:pPr algn="l">
+              <a:spcBef>
+                <a:spcPts val="0"/>
+              </a:spcBef>
+              <a:spcAft>
+                <a:spcPts val="0"/>
+              </a:spcAft>
+            </a:pPr>
+            <a:r>
+              <a:rPr sz="1600" b="1" i="0">
+                <a:solidFill>
+                  <a:srgbClr val="1A2834"/>
+                </a:solidFill>
+                <a:latin typeface="Georgia"/>
+                <a:ea typeface="Georgia"/>
+                <a:cs typeface="Georgia"/>
+              </a:rPr>
+              <a:t>800  –  2,200</a:t>
+            </a:r>
+          </a:p>
+        </p:txBody>
+      </p:sp>
+      <p:sp>
+        <p:nvSpPr>
+          <p:cNvPr id="26" name="TextBox 25"/>
+          <p:cNvSpPr txBox="1"/>
+          <p:nvPr/>
+        </p:nvSpPr>
+        <p:spPr>
+          <a:xfrm>
+            <a:off x="7626096" y="3785615"/>
+            <a:ext cx="3840480" cy="219456"/>
+          </a:xfrm>
+          <a:prstGeom prst="rect">
+            <a:avLst/>
+          </a:prstGeom>
+          <a:noFill/>
+        </p:spPr>
+        <p:txBody>
+          <a:bodyPr wrap="square" lIns="0" rIns="0" tIns="0" bIns="0" anchor="t"/>
+          <a:lstStyle/>
+          <a:p>
+            <a:pPr algn="l">
+              <a:spcBef>
+                <a:spcPts val="0"/>
+              </a:spcBef>
+              <a:spcAft>
+                <a:spcPts val="0"/>
+              </a:spcAft>
+            </a:pPr>
+            <a:r>
+              <a:rPr sz="1200" b="0" i="0">
+                <a:solidFill>
+                  <a:srgbClr val="5E6E7C"/>
+                </a:solidFill>
+                <a:latin typeface="Calibri"/>
+                <a:ea typeface="Calibri"/>
+                <a:cs typeface="Calibri"/>
+              </a:rPr>
+              <a:t>Peak hours / day</a:t>
+            </a:r>
+          </a:p>
+        </p:txBody>
+      </p:sp>
+      <p:sp>
+        <p:nvSpPr>
+          <p:cNvPr id="27" name="TextBox 26"/>
+          <p:cNvSpPr txBox="1"/>
+          <p:nvPr/>
+        </p:nvSpPr>
+        <p:spPr>
+          <a:xfrm>
+            <a:off x="7626096" y="3986783"/>
+            <a:ext cx="3840480" cy="292608"/>
+          </a:xfrm>
+          <a:prstGeom prst="rect">
+            <a:avLst/>
+          </a:prstGeom>
+          <a:noFill/>
+        </p:spPr>
+        <p:txBody>
+          <a:bodyPr wrap="square" lIns="0" rIns="0" tIns="0" bIns="0" anchor="t"/>
+          <a:lstStyle/>
+          <a:p>
+            <a:pPr algn="l">
+              <a:spcBef>
+                <a:spcPts val="0"/>
+              </a:spcBef>
+              <a:spcAft>
+                <a:spcPts val="0"/>
+              </a:spcAft>
+            </a:pPr>
+            <a:r>
+              <a:rPr sz="1600" b="1" i="0">
+                <a:solidFill>
+                  <a:srgbClr val="1A2834"/>
+                </a:solidFill>
+                <a:latin typeface="Georgia"/>
+                <a:ea typeface="Georgia"/>
+                <a:cs typeface="Georgia"/>
+              </a:rPr>
+              <a:t>3  –  7</a:t>
+            </a:r>
+          </a:p>
+        </p:txBody>
+      </p:sp>
+      <p:sp>
+        <p:nvSpPr>
+          <p:cNvPr id="28" name="TextBox 27"/>
+          <p:cNvSpPr txBox="1"/>
+          <p:nvPr/>
+        </p:nvSpPr>
+        <p:spPr>
+          <a:xfrm>
+            <a:off x="7626096" y="4443983"/>
+            <a:ext cx="3840480" cy="219456"/>
+          </a:xfrm>
+          <a:prstGeom prst="rect">
+            <a:avLst/>
+          </a:prstGeom>
+          <a:noFill/>
+        </p:spPr>
+        <p:txBody>
+          <a:bodyPr wrap="square" lIns="0" rIns="0" tIns="0" bIns="0" anchor="t"/>
+          <a:lstStyle/>
+          <a:p>
+            <a:pPr algn="l">
+              <a:spcBef>
+                <a:spcPts val="0"/>
+              </a:spcBef>
+              <a:spcAft>
+                <a:spcPts val="0"/>
+              </a:spcAft>
+            </a:pPr>
+            <a:r>
+              <a:rPr sz="1200" b="0" i="0">
+                <a:solidFill>
+                  <a:srgbClr val="5E6E7C"/>
+                </a:solidFill>
+                <a:latin typeface="Calibri"/>
+                <a:ea typeface="Calibri"/>
+                <a:cs typeface="Calibri"/>
+              </a:rPr>
+              <a:t>Days / year</a:t>
+            </a:r>
+          </a:p>
+        </p:txBody>
+      </p:sp>
+      <p:sp>
+        <p:nvSpPr>
+          <p:cNvPr id="29" name="TextBox 28"/>
+          <p:cNvSpPr txBox="1"/>
+          <p:nvPr/>
+        </p:nvSpPr>
+        <p:spPr>
+          <a:xfrm>
+            <a:off x="7626096" y="4645151"/>
+            <a:ext cx="3840480" cy="292608"/>
+          </a:xfrm>
+          <a:prstGeom prst="rect">
+            <a:avLst/>
+          </a:prstGeom>
+          <a:noFill/>
+        </p:spPr>
+        <p:txBody>
+          <a:bodyPr wrap="square" lIns="0" rIns="0" tIns="0" bIns="0" anchor="t"/>
+          <a:lstStyle/>
+          <a:p>
+            <a:pPr algn="l">
+              <a:spcBef>
+                <a:spcPts val="0"/>
+              </a:spcBef>
+              <a:spcAft>
+                <a:spcPts val="0"/>
+              </a:spcAft>
+            </a:pPr>
+            <a:r>
+              <a:rPr sz="1600" b="1" i="0">
+                <a:solidFill>
+                  <a:srgbClr val="1A2834"/>
+                </a:solidFill>
+                <a:latin typeface="Georgia"/>
+                <a:ea typeface="Georgia"/>
+                <a:cs typeface="Georgia"/>
+              </a:rPr>
+              <a:t>250  –  330</a:t>
+            </a:r>
+          </a:p>
+        </p:txBody>
+      </p:sp>
+      <p:sp>
+        <p:nvSpPr>
+          <p:cNvPr id="30" name="TextBox 29"/>
+          <p:cNvSpPr txBox="1"/>
+          <p:nvPr/>
+        </p:nvSpPr>
+        <p:spPr>
+          <a:xfrm>
+            <a:off x="7626096" y="5349240"/>
+            <a:ext cx="3886200" cy="548640"/>
+          </a:xfrm>
+          <a:prstGeom prst="rect">
+            <a:avLst/>
+          </a:prstGeom>
+          <a:noFill/>
+        </p:spPr>
+        <p:txBody>
+          <a:bodyPr wrap="square" lIns="0" rIns="0" tIns="0" bIns="0" anchor="t"/>
+          <a:lstStyle/>
+          <a:p>
+            <a:pPr algn="l">
+              <a:spcBef>
+                <a:spcPts val="0"/>
+              </a:spcBef>
+              <a:spcAft>
+                <a:spcPts val="0"/>
+              </a:spcAft>
+            </a:pPr>
+            <a:r>
+              <a:rPr sz="1300" b="0" i="0">
+                <a:solidFill>
+                  <a:srgbClr val="5E6E7C"/>
+                </a:solidFill>
+                <a:latin typeface="Calibri"/>
+                <a:ea typeface="Calibri"/>
+                <a:cs typeface="Calibri"/>
+              </a:rPr>
+              <a:t>Rupee value uses a placeholder price, so it is not shown.</a:t>
+            </a:r>
+          </a:p>
+        </p:txBody>
+      </p:sp>
+    </p:spTree>
+  </p:cSld>
+  <p:clrMapOvr>
+    <a:masterClrMapping/>
+  </p:clrMapOvr>
+</p:sld>
+</file>
+
+<file path=ppt/slides/slide16.xml><?xml version="1.0" encoding="utf-8"?>
 <p:sld xmlns:a="http://schemas.openxmlformats.org/drawingml/2006/main" xmlns:p="http://schemas.openxmlformats.org/presentationml/2006/main" xmlns:r="http://schemas.openxmlformats.org/officeDocument/2006/relationships">
   <p:cSld>
     <p:bg>
@@ -10165,7 +12022,7 @@
                 <a:ea typeface="Calibri"/>
                 <a:cs typeface="Calibri"/>
               </a:rPr>
-              <a:t>A real video replaces the assumed detector-error model.</a:t>
+              <a:t>YOLO overlays are a feasibility demo. Replace assumed detector-error with labeled site video.</a:t>
             </a:r>
           </a:p>
         </p:txBody>
@@ -10378,7 +12235,7 @@
                 <a:ea typeface="Calibri"/>
                 <a:cs typeface="Calibri"/>
               </a:rPr>
-              <a:t>This deck: 8 controllers · 5 test seeds (1–5) · oracle detector unless camera mode is on.</a:t>
+              <a:t>This deck: 8 controllers · 5 test seeds (1–5) · oracle detector unless camera mode is on. · YOLO demo included</a:t>
             </a:r>
           </a:p>
         </p:txBody>
@@ -10546,7 +12403,7 @@
                 <a:ea typeface="Georgia"/>
                 <a:cs typeface="Georgia"/>
               </a:rPr>
-              <a:t>15</a:t>
+              <a:t>16</a:t>
             </a:r>
           </a:p>
         </p:txBody>
@@ -13668,7 +15525,7 @@
                 <a:ea typeface="Calibri"/>
                 <a:cs typeface="Calibri"/>
               </a:rPr>
-              <a:t>Detectors on each approach, or a camera. YOLO with a region of interest can read the same queue. This run had no field video, so detector error is assumed (15% miss in the smoke check).</a:t>
+              <a:t>Detectors on each approach, or a camera. A YOLO overlay demo is on a later slide — input feasibility, not a fuel-saving result. Locked TEST scores still use the oracle detector; detector-miss noise for robustness stays assumed (15% in the smoke check).</a:t>
             </a:r>
           </a:p>
         </p:txBody>

--- a/results/deck.pptx
+++ b/results/deck.pptx
@@ -7430,7 +7430,7 @@
                 <a:ea typeface="Calibri"/>
                 <a:cs typeface="Calibri"/>
               </a:rPr>
-              <a:t>Fuel gain versus demand multiplier proxy</a:t>
+              <a:t>Fuel gain vs demand multiplier proxy (sensitivity data; re-run pending)</a:t>
             </a:r>
           </a:p>
         </p:txBody>
@@ -15394,7 +15394,7 @@
                 <a:ea typeface="Georgia"/>
                 <a:cs typeface="Georgia"/>
               </a:rPr>
-              <a:t>Safety: Fewer conflicts. Emissions: Intervals overlap.</a:t>
+              <a:t>Safety: mixed. Emissions: Intervals overlap.</a:t>
             </a:r>
           </a:p>
         </p:txBody>
@@ -15587,7 +15587,7 @@
             <a:avLst/>
           </a:prstGeom>
           <a:solidFill>
-            <a:srgbClr val="1B6B5A"/>
+            <a:srgbClr val="C4841D"/>
           </a:solidFill>
           <a:ln>
             <a:noFill/>
@@ -15646,7 +15646,7 @@
             <a:r>
               <a:rPr sz="1200" b="1" i="0">
                 <a:solidFill>
-                  <a:srgbClr val="1B6B5A"/>
+                  <a:srgbClr val="C4841D"/>
                 </a:solidFill>
                 <a:latin typeface="Calibri"/>
                 <a:ea typeface="Calibri"/>
@@ -15694,7 +15694,7 @@
                 <a:ea typeface="Georgia"/>
                 <a:cs typeface="Georgia"/>
               </a:rPr>
-              <a:t>Fewer conflicts</a:t>
+              <a:t>Mixed</a:t>
             </a:r>
           </a:p>
         </p:txBody>
@@ -15736,7 +15736,7 @@
                 <a:ea typeface="Calibri"/>
                 <a:cs typeface="Calibri"/>
               </a:rPr>
-              <a:t>Time-to-collision conflicts from the simulator. A model count, not a crash record.</a:t>
+              <a:t>Time-to-collision conflicts from the simulator. Verdict vs fixed only; vs max-pressure/queue-pressure the CI includes 0; vs count-only (ours_count) XtraFlow shows MORE conflicts. A model count, not a crash record.</a:t>
             </a:r>
           </a:p>
         </p:txBody>
@@ -16363,7 +16363,7 @@
                 <a:ea typeface="Calibri"/>
                 <a:cs typeface="Calibri"/>
               </a:rPr>
-              <a:t>The wide bar is the assumed city size, not uncertainty in the junction test.</a:t>
+              <a:t>Illustrative only: built from a 0.3–1.9% gap whose CIs include 0 on 2 of 4 scenarios (n=5). Not a forecast.</a:t>
             </a:r>
           </a:p>
         </p:txBody>
